--- a/reviews/source-completion/K5PL06T03B02_v0_4_THREE_FAMILY_PROOF.pptx
+++ b/reviews/source-completion/K5PL06T03B02_v0_4_THREE_FAMILY_PROOF.pptx
@@ -7287,33 +7287,33 @@
                   </a:schemeClr>
                 </a:solidFill>
               </a:rPr>
-              <a:t>K5 PL06 T03 B02 — PAPAN CERITA v0.4 (BUKTI TIGA KELUARGA)</a:t>
-            </a:r>
-          </a:p>
-          <a:p>
-            <a:r>
-              <a:rPr lang="en-MY" sz="900" dirty="0">
-                <a:solidFill>
-                  <a:schemeClr val="tx1">
-                    <a:lumMod val="85000"/>
-                    <a:lumOff val="15000"/>
-                  </a:schemeClr>
-                </a:solidFill>
-              </a:rPr>
-              <a:t>PROOF_BUILD · V0_4_MODEL_DRIVEN</a:t>
-            </a:r>
-          </a:p>
-          <a:p>
-            <a:r>
-              <a:rPr lang="en-MY" sz="900" dirty="0">
-                <a:solidFill>
-                  <a:schemeClr val="tx1">
-                    <a:lumMod val="85000"/>
-                    <a:lumOff val="15000"/>
-                  </a:schemeClr>
-                </a:solidFill>
-              </a:rPr>
-              <a:t>NOT_FOR_MMD_BUILD · MULTIMEDIA_NOT_PRODUCED · PRODUCTION_APPROVAL_NOT_CLAIMED</a:t>
+              <a:t>K5 PL06 T03 B02 — PAPAN CERITA v0.4</a:t>
+            </a:r>
+          </a:p>
+          <a:p>
+            <a:r>
+              <a:rPr lang="en-MY" sz="900" dirty="0">
+                <a:solidFill>
+                  <a:schemeClr val="tx1">
+                    <a:lumMod val="85000"/>
+                    <a:lumOff val="15000"/>
+                  </a:schemeClr>
+                </a:solidFill>
+              </a:rPr>
+              <a:t>REVIEW_READY · BARIAH_FEEDBACK_IMPLEMENTED</a:t>
+            </a:r>
+          </a:p>
+          <a:p>
+            <a:r>
+              <a:rPr lang="en-MY" sz="900" dirty="0">
+                <a:solidFill>
+                  <a:schemeClr val="tx1">
+                    <a:lumMod val="85000"/>
+                    <a:lumOff val="15000"/>
+                  </a:schemeClr>
+                </a:solidFill>
+              </a:rPr>
+              <a:t>PENDING_TARGETED_CONFIRMATION · NOT_FOR_MMD_BUILD · MULTIMEDIA_NOT_PRODUCED</a:t>
             </a:r>
           </a:p>
           <a:p>
@@ -7880,8 +7880,8 @@
         </p:nvSpPr>
         <p:spPr>
           <a:xfrm>
-            <a:off x="723930" y="1965960"/>
-            <a:ext cx="3291840" cy="1481328"/>
+            <a:off x="723885" y="1965960"/>
+            <a:ext cx="3325368" cy="1481328"/>
           </a:xfrm>
           <a:prstGeom prst="rect">
             <a:avLst/>
@@ -7924,8 +7924,8 @@
         </p:nvSpPr>
         <p:spPr>
           <a:xfrm>
-            <a:off x="3595146" y="2057400"/>
-            <a:ext cx="310896" cy="310896"/>
+            <a:off x="3646917" y="2048256"/>
+            <a:ext cx="292608" cy="292608"/>
           </a:xfrm>
           <a:custGeom>
             <a:avLst/>
@@ -7983,8 +7983,8 @@
         </p:nvSpPr>
         <p:spPr>
           <a:xfrm>
-            <a:off x="4450110" y="1965960"/>
-            <a:ext cx="3291840" cy="1481328"/>
+            <a:off x="4433301" y="1965960"/>
+            <a:ext cx="3325368" cy="1481328"/>
           </a:xfrm>
           <a:prstGeom prst="rect">
             <a:avLst/>
@@ -8027,8 +8027,8 @@
         </p:nvSpPr>
         <p:spPr>
           <a:xfrm>
-            <a:off x="7321326" y="2057400"/>
-            <a:ext cx="310896" cy="310896"/>
+            <a:off x="7356333" y="2048256"/>
+            <a:ext cx="292608" cy="292608"/>
           </a:xfrm>
           <a:custGeom>
             <a:avLst/>
@@ -8086,8 +8086,8 @@
         </p:nvSpPr>
         <p:spPr>
           <a:xfrm>
-            <a:off x="8176290" y="1965960"/>
-            <a:ext cx="3291840" cy="1481328"/>
+            <a:off x="8142717" y="1965960"/>
+            <a:ext cx="3325368" cy="1481328"/>
           </a:xfrm>
           <a:prstGeom prst="rect">
             <a:avLst/>
@@ -8130,8 +8130,8 @@
         </p:nvSpPr>
         <p:spPr>
           <a:xfrm>
-            <a:off x="11047506" y="2057400"/>
-            <a:ext cx="310896" cy="310896"/>
+            <a:off x="11065749" y="2048256"/>
+            <a:ext cx="292608" cy="292608"/>
           </a:xfrm>
           <a:custGeom>
             <a:avLst/>
@@ -8189,8 +8189,8 @@
         </p:nvSpPr>
         <p:spPr>
           <a:xfrm>
-            <a:off x="2586975" y="3758184"/>
-            <a:ext cx="3291840" cy="1481328"/>
+            <a:off x="2578593" y="3721608"/>
+            <a:ext cx="3325368" cy="1481328"/>
           </a:xfrm>
           <a:prstGeom prst="rect">
             <a:avLst/>
@@ -8233,8 +8233,8 @@
         </p:nvSpPr>
         <p:spPr>
           <a:xfrm>
-            <a:off x="5458191" y="3849624"/>
-            <a:ext cx="310896" cy="310896"/>
+            <a:off x="5501625" y="3803904"/>
+            <a:ext cx="292608" cy="292608"/>
           </a:xfrm>
           <a:custGeom>
             <a:avLst/>
@@ -8292,8 +8292,8 @@
         </p:nvSpPr>
         <p:spPr>
           <a:xfrm>
-            <a:off x="6313155" y="3758184"/>
-            <a:ext cx="3291840" cy="1481328"/>
+            <a:off x="6288009" y="3721608"/>
+            <a:ext cx="3325368" cy="1481328"/>
           </a:xfrm>
           <a:prstGeom prst="rect">
             <a:avLst/>
@@ -8759,33 +8759,33 @@
                   </a:schemeClr>
                 </a:solidFill>
               </a:rPr>
-              <a:t>K5 PL06 T03 B02 — PAPAN CERITA v0.4 (BUKTI TIGA KELUARGA)</a:t>
-            </a:r>
-          </a:p>
-          <a:p>
-            <a:r>
-              <a:rPr lang="en-MY" sz="900" dirty="0">
-                <a:solidFill>
-                  <a:schemeClr val="tx1">
-                    <a:lumMod val="85000"/>
-                    <a:lumOff val="15000"/>
-                  </a:schemeClr>
-                </a:solidFill>
-              </a:rPr>
-              <a:t>PROOF_BUILD · V0_4_MODEL_DRIVEN</a:t>
-            </a:r>
-          </a:p>
-          <a:p>
-            <a:r>
-              <a:rPr lang="en-MY" sz="900" dirty="0">
-                <a:solidFill>
-                  <a:schemeClr val="tx1">
-                    <a:lumMod val="85000"/>
-                    <a:lumOff val="15000"/>
-                  </a:schemeClr>
-                </a:solidFill>
-              </a:rPr>
-              <a:t>NOT_FOR_MMD_BUILD · MULTIMEDIA_NOT_PRODUCED · PRODUCTION_APPROVAL_NOT_CLAIMED</a:t>
+              <a:t>K5 PL06 T03 B02 — PAPAN CERITA v0.4</a:t>
+            </a:r>
+          </a:p>
+          <a:p>
+            <a:r>
+              <a:rPr lang="en-MY" sz="900" dirty="0">
+                <a:solidFill>
+                  <a:schemeClr val="tx1">
+                    <a:lumMod val="85000"/>
+                    <a:lumOff val="15000"/>
+                  </a:schemeClr>
+                </a:solidFill>
+              </a:rPr>
+              <a:t>REVIEW_READY · BARIAH_FEEDBACK_IMPLEMENTED</a:t>
+            </a:r>
+          </a:p>
+          <a:p>
+            <a:r>
+              <a:rPr lang="en-MY" sz="900" dirty="0">
+                <a:solidFill>
+                  <a:schemeClr val="tx1">
+                    <a:lumMod val="85000"/>
+                    <a:lumOff val="15000"/>
+                  </a:schemeClr>
+                </a:solidFill>
+              </a:rPr>
+              <a:t>PENDING_TARGETED_CONFIRMATION · NOT_FOR_MMD_BUILD · MULTIMEDIA_NOT_PRODUCED</a:t>
             </a:r>
           </a:p>
           <a:p>
@@ -9339,8 +9339,8 @@
         </p:nvSpPr>
         <p:spPr>
           <a:xfrm>
-            <a:off x="723930" y="1965960"/>
-            <a:ext cx="3291840" cy="1481328"/>
+            <a:off x="723885" y="1965960"/>
+            <a:ext cx="3325368" cy="1481328"/>
           </a:xfrm>
           <a:prstGeom prst="rect">
             <a:avLst/>
@@ -9383,8 +9383,8 @@
         </p:nvSpPr>
         <p:spPr>
           <a:xfrm>
-            <a:off x="3595146" y="2057400"/>
-            <a:ext cx="310896" cy="310896"/>
+            <a:off x="3646917" y="2048256"/>
+            <a:ext cx="292608" cy="292608"/>
           </a:xfrm>
           <a:custGeom>
             <a:avLst/>
@@ -9442,8 +9442,8 @@
         </p:nvSpPr>
         <p:spPr>
           <a:xfrm>
-            <a:off x="4450110" y="1965960"/>
-            <a:ext cx="3291840" cy="1481328"/>
+            <a:off x="4433301" y="1965960"/>
+            <a:ext cx="3325368" cy="1481328"/>
           </a:xfrm>
           <a:prstGeom prst="rect">
             <a:avLst/>
@@ -9486,8 +9486,8 @@
         </p:nvSpPr>
         <p:spPr>
           <a:xfrm>
-            <a:off x="7321326" y="2057400"/>
-            <a:ext cx="310896" cy="310896"/>
+            <a:off x="7356333" y="2048256"/>
+            <a:ext cx="292608" cy="292608"/>
           </a:xfrm>
           <a:custGeom>
             <a:avLst/>
@@ -9545,8 +9545,8 @@
         </p:nvSpPr>
         <p:spPr>
           <a:xfrm>
-            <a:off x="8176290" y="1965960"/>
-            <a:ext cx="3291840" cy="1481328"/>
+            <a:off x="8142717" y="1965960"/>
+            <a:ext cx="3325368" cy="1481328"/>
           </a:xfrm>
           <a:prstGeom prst="rect">
             <a:avLst/>
@@ -9589,8 +9589,8 @@
         </p:nvSpPr>
         <p:spPr>
           <a:xfrm>
-            <a:off x="11047506" y="2057400"/>
-            <a:ext cx="310896" cy="310896"/>
+            <a:off x="11065749" y="2048256"/>
+            <a:ext cx="292608" cy="292608"/>
           </a:xfrm>
           <a:custGeom>
             <a:avLst/>
@@ -9648,8 +9648,8 @@
         </p:nvSpPr>
         <p:spPr>
           <a:xfrm>
-            <a:off x="2586975" y="3758184"/>
-            <a:ext cx="3291840" cy="1481328"/>
+            <a:off x="2578593" y="3721608"/>
+            <a:ext cx="3325368" cy="1481328"/>
           </a:xfrm>
           <a:prstGeom prst="rect">
             <a:avLst/>
@@ -9692,8 +9692,8 @@
         </p:nvSpPr>
         <p:spPr>
           <a:xfrm>
-            <a:off x="5458191" y="3849624"/>
-            <a:ext cx="310896" cy="310896"/>
+            <a:off x="5501625" y="3803904"/>
+            <a:ext cx="292608" cy="292608"/>
           </a:xfrm>
           <a:custGeom>
             <a:avLst/>
@@ -9751,8 +9751,8 @@
         </p:nvSpPr>
         <p:spPr>
           <a:xfrm>
-            <a:off x="6313155" y="3758184"/>
-            <a:ext cx="3291840" cy="1481328"/>
+            <a:off x="6288009" y="3721608"/>
+            <a:ext cx="3325368" cy="1481328"/>
           </a:xfrm>
           <a:prstGeom prst="rect">
             <a:avLst/>
@@ -9795,8 +9795,8 @@
         </p:nvSpPr>
         <p:spPr>
           <a:xfrm>
-            <a:off x="9184371" y="3849624"/>
-            <a:ext cx="310896" cy="310896"/>
+            <a:off x="9211041" y="3803904"/>
+            <a:ext cx="292608" cy="292608"/>
           </a:xfrm>
           <a:custGeom>
             <a:avLst/>
@@ -10277,33 +10277,33 @@
                   </a:schemeClr>
                 </a:solidFill>
               </a:rPr>
-              <a:t>K5 PL06 T03 B02 — PAPAN CERITA v0.4 (BUKTI TIGA KELUARGA)</a:t>
-            </a:r>
-          </a:p>
-          <a:p>
-            <a:r>
-              <a:rPr lang="en-MY" sz="900" dirty="0">
-                <a:solidFill>
-                  <a:schemeClr val="tx1">
-                    <a:lumMod val="85000"/>
-                    <a:lumOff val="15000"/>
-                  </a:schemeClr>
-                </a:solidFill>
-              </a:rPr>
-              <a:t>PROOF_BUILD · V0_4_MODEL_DRIVEN</a:t>
-            </a:r>
-          </a:p>
-          <a:p>
-            <a:r>
-              <a:rPr lang="en-MY" sz="900" dirty="0">
-                <a:solidFill>
-                  <a:schemeClr val="tx1">
-                    <a:lumMod val="85000"/>
-                    <a:lumOff val="15000"/>
-                  </a:schemeClr>
-                </a:solidFill>
-              </a:rPr>
-              <a:t>NOT_FOR_MMD_BUILD · MULTIMEDIA_NOT_PRODUCED · PRODUCTION_APPROVAL_NOT_CLAIMED</a:t>
+              <a:t>K5 PL06 T03 B02 — PAPAN CERITA v0.4</a:t>
+            </a:r>
+          </a:p>
+          <a:p>
+            <a:r>
+              <a:rPr lang="en-MY" sz="900" dirty="0">
+                <a:solidFill>
+                  <a:schemeClr val="tx1">
+                    <a:lumMod val="85000"/>
+                    <a:lumOff val="15000"/>
+                  </a:schemeClr>
+                </a:solidFill>
+              </a:rPr>
+              <a:t>REVIEW_READY · BARIAH_FEEDBACK_IMPLEMENTED</a:t>
+            </a:r>
+          </a:p>
+          <a:p>
+            <a:r>
+              <a:rPr lang="en-MY" sz="900" dirty="0">
+                <a:solidFill>
+                  <a:schemeClr val="tx1">
+                    <a:lumMod val="85000"/>
+                    <a:lumOff val="15000"/>
+                  </a:schemeClr>
+                </a:solidFill>
+              </a:rPr>
+              <a:t>PENDING_TARGETED_CONFIRMATION · NOT_FOR_MMD_BUILD · MULTIMEDIA_NOT_PRODUCED</a:t>
             </a:r>
           </a:p>
           <a:p>
@@ -10831,8 +10831,8 @@
         </p:nvSpPr>
         <p:spPr>
           <a:xfrm>
-            <a:off x="723930" y="1965960"/>
-            <a:ext cx="3291840" cy="1481328"/>
+            <a:off x="723885" y="1965960"/>
+            <a:ext cx="3325368" cy="1481328"/>
           </a:xfrm>
           <a:prstGeom prst="rect">
             <a:avLst/>
@@ -10875,8 +10875,8 @@
         </p:nvSpPr>
         <p:spPr>
           <a:xfrm>
-            <a:off x="3595146" y="2057400"/>
-            <a:ext cx="310896" cy="310896"/>
+            <a:off x="3646917" y="2048256"/>
+            <a:ext cx="292608" cy="292608"/>
           </a:xfrm>
           <a:custGeom>
             <a:avLst/>
@@ -10934,8 +10934,8 @@
         </p:nvSpPr>
         <p:spPr>
           <a:xfrm>
-            <a:off x="4450110" y="1965960"/>
-            <a:ext cx="3291840" cy="1481328"/>
+            <a:off x="4433301" y="1965960"/>
+            <a:ext cx="3325368" cy="1481328"/>
           </a:xfrm>
           <a:prstGeom prst="rect">
             <a:avLst/>
@@ -10978,8 +10978,8 @@
         </p:nvSpPr>
         <p:spPr>
           <a:xfrm>
-            <a:off x="7321326" y="2057400"/>
-            <a:ext cx="310896" cy="310896"/>
+            <a:off x="7356333" y="2048256"/>
+            <a:ext cx="292608" cy="292608"/>
           </a:xfrm>
           <a:custGeom>
             <a:avLst/>
@@ -11037,8 +11037,8 @@
         </p:nvSpPr>
         <p:spPr>
           <a:xfrm>
-            <a:off x="8176290" y="1965960"/>
-            <a:ext cx="3291840" cy="1481328"/>
+            <a:off x="8142717" y="1965960"/>
+            <a:ext cx="3325368" cy="1481328"/>
           </a:xfrm>
           <a:prstGeom prst="rect">
             <a:avLst/>
@@ -11081,8 +11081,8 @@
         </p:nvSpPr>
         <p:spPr>
           <a:xfrm>
-            <a:off x="11047506" y="2057400"/>
-            <a:ext cx="310896" cy="310896"/>
+            <a:off x="11065749" y="2048256"/>
+            <a:ext cx="292608" cy="292608"/>
           </a:xfrm>
           <a:custGeom>
             <a:avLst/>
@@ -11140,8 +11140,8 @@
         </p:nvSpPr>
         <p:spPr>
           <a:xfrm>
-            <a:off x="2586975" y="3758184"/>
-            <a:ext cx="3291840" cy="1481328"/>
+            <a:off x="2578593" y="3721608"/>
+            <a:ext cx="3325368" cy="1481328"/>
           </a:xfrm>
           <a:prstGeom prst="rect">
             <a:avLst/>
@@ -11184,8 +11184,8 @@
         </p:nvSpPr>
         <p:spPr>
           <a:xfrm>
-            <a:off x="5458191" y="3849624"/>
-            <a:ext cx="310896" cy="310896"/>
+            <a:off x="5501625" y="3803904"/>
+            <a:ext cx="292608" cy="292608"/>
           </a:xfrm>
           <a:custGeom>
             <a:avLst/>
@@ -11243,8 +11243,8 @@
         </p:nvSpPr>
         <p:spPr>
           <a:xfrm>
-            <a:off x="6313155" y="3758184"/>
-            <a:ext cx="3291840" cy="1481328"/>
+            <a:off x="6288009" y="3721608"/>
+            <a:ext cx="3325368" cy="1481328"/>
           </a:xfrm>
           <a:prstGeom prst="rect">
             <a:avLst/>
@@ -11287,8 +11287,8 @@
         </p:nvSpPr>
         <p:spPr>
           <a:xfrm>
-            <a:off x="9184371" y="3849624"/>
-            <a:ext cx="310896" cy="310896"/>
+            <a:off x="9211041" y="3803904"/>
+            <a:ext cx="292608" cy="292608"/>
           </a:xfrm>
           <a:custGeom>
             <a:avLst/>
@@ -11413,33 +11413,33 @@
                   </a:schemeClr>
                 </a:solidFill>
               </a:rPr>
-              <a:t>K5 PL06 T03 B02 — PAPAN CERITA v0.4 (BUKTI TIGA KELUARGA)</a:t>
-            </a:r>
-          </a:p>
-          <a:p>
-            <a:r>
-              <a:rPr lang="en-MY" sz="900" dirty="0">
-                <a:solidFill>
-                  <a:schemeClr val="tx1">
-                    <a:lumMod val="85000"/>
-                    <a:lumOff val="15000"/>
-                  </a:schemeClr>
-                </a:solidFill>
-              </a:rPr>
-              <a:t>PROOF_BUILD · V0_4_MODEL_DRIVEN</a:t>
-            </a:r>
-          </a:p>
-          <a:p>
-            <a:r>
-              <a:rPr lang="en-MY" sz="900" dirty="0">
-                <a:solidFill>
-                  <a:schemeClr val="tx1">
-                    <a:lumMod val="85000"/>
-                    <a:lumOff val="15000"/>
-                  </a:schemeClr>
-                </a:solidFill>
-              </a:rPr>
-              <a:t>NOT_FOR_MMD_BUILD · MULTIMEDIA_NOT_PRODUCED · PRODUCTION_APPROVAL_NOT_CLAIMED</a:t>
+              <a:t>K5 PL06 T03 B02 — PAPAN CERITA v0.4</a:t>
+            </a:r>
+          </a:p>
+          <a:p>
+            <a:r>
+              <a:rPr lang="en-MY" sz="900" dirty="0">
+                <a:solidFill>
+                  <a:schemeClr val="tx1">
+                    <a:lumMod val="85000"/>
+                    <a:lumOff val="15000"/>
+                  </a:schemeClr>
+                </a:solidFill>
+              </a:rPr>
+              <a:t>REVIEW_READY · BARIAH_FEEDBACK_IMPLEMENTED</a:t>
+            </a:r>
+          </a:p>
+          <a:p>
+            <a:r>
+              <a:rPr lang="en-MY" sz="900" dirty="0">
+                <a:solidFill>
+                  <a:schemeClr val="tx1">
+                    <a:lumMod val="85000"/>
+                    <a:lumOff val="15000"/>
+                  </a:schemeClr>
+                </a:solidFill>
+              </a:rPr>
+              <a:t>PENDING_TARGETED_CONFIRMATION · NOT_FOR_MMD_BUILD · MULTIMEDIA_NOT_PRODUCED</a:t>
             </a:r>
           </a:p>
           <a:p>
@@ -12384,33 +12384,33 @@
                   </a:schemeClr>
                 </a:solidFill>
               </a:rPr>
-              <a:t>K5 PL06 T03 B02 — PAPAN CERITA v0.4 (BUKTI TIGA KELUARGA)</a:t>
-            </a:r>
-          </a:p>
-          <a:p>
-            <a:r>
-              <a:rPr lang="en-MY" sz="900" dirty="0">
-                <a:solidFill>
-                  <a:schemeClr val="tx1">
-                    <a:lumMod val="85000"/>
-                    <a:lumOff val="15000"/>
-                  </a:schemeClr>
-                </a:solidFill>
-              </a:rPr>
-              <a:t>PROOF_BUILD · V0_4_MODEL_DRIVEN</a:t>
-            </a:r>
-          </a:p>
-          <a:p>
-            <a:r>
-              <a:rPr lang="en-MY" sz="900" dirty="0">
-                <a:solidFill>
-                  <a:schemeClr val="tx1">
-                    <a:lumMod val="85000"/>
-                    <a:lumOff val="15000"/>
-                  </a:schemeClr>
-                </a:solidFill>
-              </a:rPr>
-              <a:t>NOT_FOR_MMD_BUILD · MULTIMEDIA_NOT_PRODUCED · PRODUCTION_APPROVAL_NOT_CLAIMED</a:t>
+              <a:t>K5 PL06 T03 B02 — PAPAN CERITA v0.4</a:t>
+            </a:r>
+          </a:p>
+          <a:p>
+            <a:r>
+              <a:rPr lang="en-MY" sz="900" dirty="0">
+                <a:solidFill>
+                  <a:schemeClr val="tx1">
+                    <a:lumMod val="85000"/>
+                    <a:lumOff val="15000"/>
+                  </a:schemeClr>
+                </a:solidFill>
+              </a:rPr>
+              <a:t>REVIEW_READY · BARIAH_FEEDBACK_IMPLEMENTED</a:t>
+            </a:r>
+          </a:p>
+          <a:p>
+            <a:r>
+              <a:rPr lang="en-MY" sz="900" dirty="0">
+                <a:solidFill>
+                  <a:schemeClr val="tx1">
+                    <a:lumMod val="85000"/>
+                    <a:lumOff val="15000"/>
+                  </a:schemeClr>
+                </a:solidFill>
+              </a:rPr>
+              <a:t>PENDING_TARGETED_CONFIRMATION · NOT_FOR_MMD_BUILD · MULTIMEDIA_NOT_PRODUCED</a:t>
             </a:r>
           </a:p>
           <a:p>
@@ -13390,33 +13390,33 @@
                   </a:schemeClr>
                 </a:solidFill>
               </a:rPr>
-              <a:t>K5 PL06 T03 B02 — PAPAN CERITA v0.4 (BUKTI TIGA KELUARGA)</a:t>
-            </a:r>
-          </a:p>
-          <a:p>
-            <a:r>
-              <a:rPr lang="en-MY" sz="900" dirty="0">
-                <a:solidFill>
-                  <a:schemeClr val="tx1">
-                    <a:lumMod val="85000"/>
-                    <a:lumOff val="15000"/>
-                  </a:schemeClr>
-                </a:solidFill>
-              </a:rPr>
-              <a:t>PROOF_BUILD · V0_4_MODEL_DRIVEN</a:t>
-            </a:r>
-          </a:p>
-          <a:p>
-            <a:r>
-              <a:rPr lang="en-MY" sz="900" dirty="0">
-                <a:solidFill>
-                  <a:schemeClr val="tx1">
-                    <a:lumMod val="85000"/>
-                    <a:lumOff val="15000"/>
-                  </a:schemeClr>
-                </a:solidFill>
-              </a:rPr>
-              <a:t>NOT_FOR_MMD_BUILD · MULTIMEDIA_NOT_PRODUCED · PRODUCTION_APPROVAL_NOT_CLAIMED</a:t>
+              <a:t>K5 PL06 T03 B02 — PAPAN CERITA v0.4</a:t>
+            </a:r>
+          </a:p>
+          <a:p>
+            <a:r>
+              <a:rPr lang="en-MY" sz="900" dirty="0">
+                <a:solidFill>
+                  <a:schemeClr val="tx1">
+                    <a:lumMod val="85000"/>
+                    <a:lumOff val="15000"/>
+                  </a:schemeClr>
+                </a:solidFill>
+              </a:rPr>
+              <a:t>REVIEW_READY · BARIAH_FEEDBACK_IMPLEMENTED</a:t>
+            </a:r>
+          </a:p>
+          <a:p>
+            <a:r>
+              <a:rPr lang="en-MY" sz="900" dirty="0">
+                <a:solidFill>
+                  <a:schemeClr val="tx1">
+                    <a:lumMod val="85000"/>
+                    <a:lumOff val="15000"/>
+                  </a:schemeClr>
+                </a:solidFill>
+              </a:rPr>
+              <a:t>PENDING_TARGETED_CONFIRMATION · NOT_FOR_MMD_BUILD · MULTIMEDIA_NOT_PRODUCED</a:t>
             </a:r>
           </a:p>
           <a:p>
@@ -13968,8 +13968,8 @@
         </p:nvSpPr>
         <p:spPr>
           <a:xfrm>
-            <a:off x="723930" y="2157984"/>
-            <a:ext cx="3307080" cy="1481328"/>
+            <a:off x="723885" y="2157984"/>
+            <a:ext cx="3325368" cy="1481328"/>
           </a:xfrm>
           <a:prstGeom prst="rect">
             <a:avLst/>
@@ -14012,8 +14012,8 @@
         </p:nvSpPr>
         <p:spPr>
           <a:xfrm>
-            <a:off x="4442490" y="2157984"/>
-            <a:ext cx="3307080" cy="1481328"/>
+            <a:off x="4433301" y="2157984"/>
+            <a:ext cx="3325368" cy="1481328"/>
           </a:xfrm>
           <a:prstGeom prst="rect">
             <a:avLst/>
@@ -14056,8 +14056,8 @@
         </p:nvSpPr>
         <p:spPr>
           <a:xfrm>
-            <a:off x="8161050" y="2157984"/>
-            <a:ext cx="3307080" cy="1481328"/>
+            <a:off x="8142717" y="2157984"/>
+            <a:ext cx="3325368" cy="1481328"/>
           </a:xfrm>
           <a:prstGeom prst="rect">
             <a:avLst/>
@@ -14160,33 +14160,33 @@
                   </a:schemeClr>
                 </a:solidFill>
               </a:rPr>
-              <a:t>K5 PL06 T03 B02 — PAPAN CERITA v0.4 (BUKTI TIGA KELUARGA)</a:t>
-            </a:r>
-          </a:p>
-          <a:p>
-            <a:r>
-              <a:rPr lang="en-MY" sz="900" dirty="0">
-                <a:solidFill>
-                  <a:schemeClr val="tx1">
-                    <a:lumMod val="85000"/>
-                    <a:lumOff val="15000"/>
-                  </a:schemeClr>
-                </a:solidFill>
-              </a:rPr>
-              <a:t>PROOF_BUILD · V0_4_MODEL_DRIVEN</a:t>
-            </a:r>
-          </a:p>
-          <a:p>
-            <a:r>
-              <a:rPr lang="en-MY" sz="900" dirty="0">
-                <a:solidFill>
-                  <a:schemeClr val="tx1">
-                    <a:lumMod val="85000"/>
-                    <a:lumOff val="15000"/>
-                  </a:schemeClr>
-                </a:solidFill>
-              </a:rPr>
-              <a:t>NOT_FOR_MMD_BUILD · MULTIMEDIA_NOT_PRODUCED · PRODUCTION_APPROVAL_NOT_CLAIMED</a:t>
+              <a:t>K5 PL06 T03 B02 — PAPAN CERITA v0.4</a:t>
+            </a:r>
+          </a:p>
+          <a:p>
+            <a:r>
+              <a:rPr lang="en-MY" sz="900" dirty="0">
+                <a:solidFill>
+                  <a:schemeClr val="tx1">
+                    <a:lumMod val="85000"/>
+                    <a:lumOff val="15000"/>
+                  </a:schemeClr>
+                </a:solidFill>
+              </a:rPr>
+              <a:t>REVIEW_READY · BARIAH_FEEDBACK_IMPLEMENTED</a:t>
+            </a:r>
+          </a:p>
+          <a:p>
+            <a:r>
+              <a:rPr lang="en-MY" sz="900" dirty="0">
+                <a:solidFill>
+                  <a:schemeClr val="tx1">
+                    <a:lumMod val="85000"/>
+                    <a:lumOff val="15000"/>
+                  </a:schemeClr>
+                </a:solidFill>
+              </a:rPr>
+              <a:t>PENDING_TARGETED_CONFIRMATION · NOT_FOR_MMD_BUILD · MULTIMEDIA_NOT_PRODUCED</a:t>
             </a:r>
           </a:p>
           <a:p>
@@ -14816,8 +14816,8 @@
         </p:nvSpPr>
         <p:spPr>
           <a:xfrm>
-            <a:off x="723930" y="2139696"/>
-            <a:ext cx="2411730" cy="1481328"/>
+            <a:off x="723885" y="2103120"/>
+            <a:ext cx="2398014" cy="969264"/>
           </a:xfrm>
           <a:prstGeom prst="rect">
             <a:avLst/>
@@ -14839,7 +14839,7 @@
           <a:p>
             <a:pPr algn="ctr"/>
             <a:r>
-              <a:rPr lang="en-MY" sz="1500" b="1" dirty="0">
+              <a:rPr lang="en-MY" sz="1350" b="1" dirty="0">
                 <a:solidFill>
                   <a:schemeClr val="tx1">
                     <a:lumMod val="85000"/>
@@ -14860,8 +14860,8 @@
         </p:nvSpPr>
         <p:spPr>
           <a:xfrm>
-            <a:off x="3501420" y="2139696"/>
-            <a:ext cx="2411730" cy="1481328"/>
+            <a:off x="3505947" y="2103120"/>
+            <a:ext cx="2398014" cy="969264"/>
           </a:xfrm>
           <a:prstGeom prst="rect">
             <a:avLst/>
@@ -14883,7 +14883,7 @@
           <a:p>
             <a:pPr algn="ctr"/>
             <a:r>
-              <a:rPr lang="en-MY" sz="1500" b="1" dirty="0">
+              <a:rPr lang="en-MY" sz="1350" b="1" dirty="0">
                 <a:solidFill>
                   <a:schemeClr val="tx1">
                     <a:lumMod val="85000"/>
@@ -14904,8 +14904,8 @@
         </p:nvSpPr>
         <p:spPr>
           <a:xfrm>
-            <a:off x="6278910" y="2139696"/>
-            <a:ext cx="2411730" cy="1481328"/>
+            <a:off x="6288009" y="2103120"/>
+            <a:ext cx="2398014" cy="969264"/>
           </a:xfrm>
           <a:prstGeom prst="rect">
             <a:avLst/>
@@ -14927,7 +14927,7 @@
           <a:p>
             <a:pPr algn="ctr"/>
             <a:r>
-              <a:rPr lang="en-MY" sz="1500" b="1" dirty="0">
+              <a:rPr lang="en-MY" sz="1350" b="1" dirty="0">
                 <a:solidFill>
                   <a:schemeClr val="tx1">
                     <a:lumMod val="85000"/>
@@ -14948,8 +14948,8 @@
         </p:nvSpPr>
         <p:spPr>
           <a:xfrm>
-            <a:off x="9056400" y="2139696"/>
-            <a:ext cx="2411730" cy="1481328"/>
+            <a:off x="9070071" y="2103120"/>
+            <a:ext cx="2398014" cy="969264"/>
           </a:xfrm>
           <a:prstGeom prst="rect">
             <a:avLst/>
@@ -14971,7 +14971,7 @@
           <a:p>
             <a:pPr algn="ctr"/>
             <a:r>
-              <a:rPr lang="en-MY" sz="1500" b="1" dirty="0">
+              <a:rPr lang="en-MY" sz="1350" b="1" dirty="0">
                 <a:solidFill>
                   <a:schemeClr val="tx1">
                     <a:lumMod val="85000"/>
@@ -14992,7 +14992,7 @@
         </p:nvSpPr>
         <p:spPr>
           <a:xfrm>
-            <a:off x="723930" y="4791456"/>
+            <a:off x="723930" y="3383280"/>
             <a:ext cx="10744200" cy="365760"/>
           </a:xfrm>
           <a:prstGeom prst="rect">
@@ -15029,7 +15029,7 @@
         </p:nvSpPr>
         <p:spPr>
           <a:xfrm>
-            <a:off x="723930" y="5266944"/>
+            <a:off x="723930" y="3858768"/>
             <a:ext cx="10744200" cy="621792"/>
           </a:xfrm>
           <a:prstGeom prst="rect">
@@ -15141,33 +15141,33 @@
                   </a:schemeClr>
                 </a:solidFill>
               </a:rPr>
-              <a:t>K5 PL06 T03 B02 — PAPAN CERITA v0.4 (BUKTI TIGA KELUARGA)</a:t>
-            </a:r>
-          </a:p>
-          <a:p>
-            <a:r>
-              <a:rPr lang="en-MY" sz="900" dirty="0">
-                <a:solidFill>
-                  <a:schemeClr val="tx1">
-                    <a:lumMod val="85000"/>
-                    <a:lumOff val="15000"/>
-                  </a:schemeClr>
-                </a:solidFill>
-              </a:rPr>
-              <a:t>PROOF_BUILD · V0_4_MODEL_DRIVEN</a:t>
-            </a:r>
-          </a:p>
-          <a:p>
-            <a:r>
-              <a:rPr lang="en-MY" sz="900" dirty="0">
-                <a:solidFill>
-                  <a:schemeClr val="tx1">
-                    <a:lumMod val="85000"/>
-                    <a:lumOff val="15000"/>
-                  </a:schemeClr>
-                </a:solidFill>
-              </a:rPr>
-              <a:t>NOT_FOR_MMD_BUILD · MULTIMEDIA_NOT_PRODUCED · PRODUCTION_APPROVAL_NOT_CLAIMED</a:t>
+              <a:t>K5 PL06 T03 B02 — PAPAN CERITA v0.4</a:t>
+            </a:r>
+          </a:p>
+          <a:p>
+            <a:r>
+              <a:rPr lang="en-MY" sz="900" dirty="0">
+                <a:solidFill>
+                  <a:schemeClr val="tx1">
+                    <a:lumMod val="85000"/>
+                    <a:lumOff val="15000"/>
+                  </a:schemeClr>
+                </a:solidFill>
+              </a:rPr>
+              <a:t>REVIEW_READY · BARIAH_FEEDBACK_IMPLEMENTED</a:t>
+            </a:r>
+          </a:p>
+          <a:p>
+            <a:r>
+              <a:rPr lang="en-MY" sz="900" dirty="0">
+                <a:solidFill>
+                  <a:schemeClr val="tx1">
+                    <a:lumMod val="85000"/>
+                    <a:lumOff val="15000"/>
+                  </a:schemeClr>
+                </a:solidFill>
+              </a:rPr>
+              <a:t>PENDING_TARGETED_CONFIRMATION · NOT_FOR_MMD_BUILD · MULTIMEDIA_NOT_PRODUCED</a:t>
             </a:r>
           </a:p>
           <a:p>
@@ -15849,8 +15849,8 @@
         </p:nvSpPr>
         <p:spPr>
           <a:xfrm>
-            <a:off x="723930" y="2139696"/>
-            <a:ext cx="2411730" cy="1481328"/>
+            <a:off x="723885" y="2103120"/>
+            <a:ext cx="2398014" cy="969264"/>
           </a:xfrm>
           <a:prstGeom prst="rect">
             <a:avLst/>
@@ -15872,7 +15872,7 @@
           <a:p>
             <a:pPr algn="ctr"/>
             <a:r>
-              <a:rPr lang="en-MY" sz="1500" b="1" dirty="0">
+              <a:rPr lang="en-MY" sz="1350" b="1" dirty="0">
                 <a:solidFill>
                   <a:schemeClr val="tx1">
                     <a:lumMod val="85000"/>
@@ -15893,8 +15893,8 @@
         </p:nvSpPr>
         <p:spPr>
           <a:xfrm>
-            <a:off x="2715036" y="2231136"/>
-            <a:ext cx="310896" cy="310896"/>
+            <a:off x="2719563" y="2185416"/>
+            <a:ext cx="292608" cy="292608"/>
           </a:xfrm>
           <a:custGeom>
             <a:avLst/>
@@ -15952,8 +15952,8 @@
         </p:nvSpPr>
         <p:spPr>
           <a:xfrm>
-            <a:off x="3501420" y="2139696"/>
-            <a:ext cx="2411730" cy="1481328"/>
+            <a:off x="3505947" y="2103120"/>
+            <a:ext cx="2398014" cy="969264"/>
           </a:xfrm>
           <a:prstGeom prst="rect">
             <a:avLst/>
@@ -15975,7 +15975,7 @@
           <a:p>
             <a:pPr algn="ctr"/>
             <a:r>
-              <a:rPr lang="en-MY" sz="1500" b="1" dirty="0">
+              <a:rPr lang="en-MY" sz="1350" b="1" dirty="0">
                 <a:solidFill>
                   <a:schemeClr val="tx1">
                     <a:lumMod val="85000"/>
@@ -15996,8 +15996,8 @@
         </p:nvSpPr>
         <p:spPr>
           <a:xfrm>
-            <a:off x="6278910" y="2139696"/>
-            <a:ext cx="2411730" cy="1481328"/>
+            <a:off x="6288009" y="2103120"/>
+            <a:ext cx="2398014" cy="969264"/>
           </a:xfrm>
           <a:prstGeom prst="rect">
             <a:avLst/>
@@ -16019,7 +16019,7 @@
           <a:p>
             <a:pPr algn="ctr"/>
             <a:r>
-              <a:rPr lang="en-MY" sz="1500" b="1" dirty="0">
+              <a:rPr lang="en-MY" sz="1350" b="1" dirty="0">
                 <a:solidFill>
                   <a:schemeClr val="tx1">
                     <a:lumMod val="85000"/>
@@ -16040,8 +16040,8 @@
         </p:nvSpPr>
         <p:spPr>
           <a:xfrm>
-            <a:off x="9056400" y="2139696"/>
-            <a:ext cx="2411730" cy="1481328"/>
+            <a:off x="9070071" y="2103120"/>
+            <a:ext cx="2398014" cy="969264"/>
           </a:xfrm>
           <a:prstGeom prst="rect">
             <a:avLst/>
@@ -16063,7 +16063,7 @@
           <a:p>
             <a:pPr algn="ctr"/>
             <a:r>
-              <a:rPr lang="en-MY" sz="1500" b="1" dirty="0">
+              <a:rPr lang="en-MY" sz="1350" b="1" dirty="0">
                 <a:solidFill>
                   <a:schemeClr val="tx1">
                     <a:lumMod val="85000"/>
@@ -16084,7 +16084,7 @@
         </p:nvSpPr>
         <p:spPr>
           <a:xfrm>
-            <a:off x="723930" y="4791456"/>
+            <a:off x="723930" y="3383280"/>
             <a:ext cx="10744200" cy="365760"/>
           </a:xfrm>
           <a:prstGeom prst="rect">
@@ -16121,7 +16121,7 @@
         </p:nvSpPr>
         <p:spPr>
           <a:xfrm>
-            <a:off x="723930" y="5266944"/>
+            <a:off x="723930" y="3858768"/>
             <a:ext cx="10744200" cy="621792"/>
           </a:xfrm>
           <a:prstGeom prst="rect">
@@ -16447,33 +16447,33 @@
                   </a:schemeClr>
                 </a:solidFill>
               </a:rPr>
-              <a:t>K5 PL06 T03 B02 — PAPAN CERITA v0.4 (BUKTI TIGA KELUARGA)</a:t>
-            </a:r>
-          </a:p>
-          <a:p>
-            <a:r>
-              <a:rPr lang="en-MY" sz="900" dirty="0">
-                <a:solidFill>
-                  <a:schemeClr val="tx1">
-                    <a:lumMod val="85000"/>
-                    <a:lumOff val="15000"/>
-                  </a:schemeClr>
-                </a:solidFill>
-              </a:rPr>
-              <a:t>PROOF_BUILD · V0_4_MODEL_DRIVEN</a:t>
-            </a:r>
-          </a:p>
-          <a:p>
-            <a:r>
-              <a:rPr lang="en-MY" sz="900" dirty="0">
-                <a:solidFill>
-                  <a:schemeClr val="tx1">
-                    <a:lumMod val="85000"/>
-                    <a:lumOff val="15000"/>
-                  </a:schemeClr>
-                </a:solidFill>
-              </a:rPr>
-              <a:t>NOT_FOR_MMD_BUILD · MULTIMEDIA_NOT_PRODUCED · PRODUCTION_APPROVAL_NOT_CLAIMED</a:t>
+              <a:t>K5 PL06 T03 B02 — PAPAN CERITA v0.4</a:t>
+            </a:r>
+          </a:p>
+          <a:p>
+            <a:r>
+              <a:rPr lang="en-MY" sz="900" dirty="0">
+                <a:solidFill>
+                  <a:schemeClr val="tx1">
+                    <a:lumMod val="85000"/>
+                    <a:lumOff val="15000"/>
+                  </a:schemeClr>
+                </a:solidFill>
+              </a:rPr>
+              <a:t>REVIEW_READY · BARIAH_FEEDBACK_IMPLEMENTED</a:t>
+            </a:r>
+          </a:p>
+          <a:p>
+            <a:r>
+              <a:rPr lang="en-MY" sz="900" dirty="0">
+                <a:solidFill>
+                  <a:schemeClr val="tx1">
+                    <a:lumMod val="85000"/>
+                    <a:lumOff val="15000"/>
+                  </a:schemeClr>
+                </a:solidFill>
+              </a:rPr>
+              <a:t>PENDING_TARGETED_CONFIRMATION · NOT_FOR_MMD_BUILD · MULTIMEDIA_NOT_PRODUCED</a:t>
             </a:r>
           </a:p>
           <a:p>
@@ -17090,8 +17090,8 @@
         </p:nvSpPr>
         <p:spPr>
           <a:xfrm>
-            <a:off x="723930" y="2139696"/>
-            <a:ext cx="2411730" cy="1481328"/>
+            <a:off x="723885" y="2103120"/>
+            <a:ext cx="2398014" cy="969264"/>
           </a:xfrm>
           <a:prstGeom prst="rect">
             <a:avLst/>
@@ -17113,7 +17113,7 @@
           <a:p>
             <a:pPr algn="ctr"/>
             <a:r>
-              <a:rPr lang="en-MY" sz="1500" b="1" dirty="0">
+              <a:rPr lang="en-MY" sz="1350" b="1" dirty="0">
                 <a:solidFill>
                   <a:schemeClr val="tx1">
                     <a:lumMod val="85000"/>
@@ -17134,8 +17134,8 @@
         </p:nvSpPr>
         <p:spPr>
           <a:xfrm>
-            <a:off x="2715036" y="2231136"/>
-            <a:ext cx="310896" cy="310896"/>
+            <a:off x="2719563" y="2185416"/>
+            <a:ext cx="292608" cy="292608"/>
           </a:xfrm>
           <a:custGeom>
             <a:avLst/>
@@ -17193,8 +17193,8 @@
         </p:nvSpPr>
         <p:spPr>
           <a:xfrm>
-            <a:off x="3501420" y="2139696"/>
-            <a:ext cx="2411730" cy="1481328"/>
+            <a:off x="3505947" y="2103120"/>
+            <a:ext cx="2398014" cy="969264"/>
           </a:xfrm>
           <a:prstGeom prst="rect">
             <a:avLst/>
@@ -17216,7 +17216,7 @@
           <a:p>
             <a:pPr algn="ctr"/>
             <a:r>
-              <a:rPr lang="en-MY" sz="1500" b="1" dirty="0">
+              <a:rPr lang="en-MY" sz="1350" b="1" dirty="0">
                 <a:solidFill>
                   <a:schemeClr val="tx1">
                     <a:lumMod val="85000"/>
@@ -17237,8 +17237,8 @@
         </p:nvSpPr>
         <p:spPr>
           <a:xfrm>
-            <a:off x="5492526" y="2231136"/>
-            <a:ext cx="310896" cy="310896"/>
+            <a:off x="5501625" y="2185416"/>
+            <a:ext cx="292608" cy="292608"/>
           </a:xfrm>
           <a:custGeom>
             <a:avLst/>
@@ -17296,8 +17296,8 @@
         </p:nvSpPr>
         <p:spPr>
           <a:xfrm>
-            <a:off x="6278910" y="2139696"/>
-            <a:ext cx="2411730" cy="1481328"/>
+            <a:off x="6288009" y="2103120"/>
+            <a:ext cx="2398014" cy="969264"/>
           </a:xfrm>
           <a:prstGeom prst="rect">
             <a:avLst/>
@@ -17319,7 +17319,7 @@
           <a:p>
             <a:pPr algn="ctr"/>
             <a:r>
-              <a:rPr lang="en-MY" sz="1500" b="1" dirty="0">
+              <a:rPr lang="en-MY" sz="1350" b="1" dirty="0">
                 <a:solidFill>
                   <a:schemeClr val="tx1">
                     <a:lumMod val="85000"/>
@@ -17340,8 +17340,8 @@
         </p:nvSpPr>
         <p:spPr>
           <a:xfrm>
-            <a:off x="9056400" y="2139696"/>
-            <a:ext cx="2411730" cy="1481328"/>
+            <a:off x="9070071" y="2103120"/>
+            <a:ext cx="2398014" cy="969264"/>
           </a:xfrm>
           <a:prstGeom prst="rect">
             <a:avLst/>
@@ -17363,7 +17363,7 @@
           <a:p>
             <a:pPr algn="ctr"/>
             <a:r>
-              <a:rPr lang="en-MY" sz="1500" b="1" dirty="0">
+              <a:rPr lang="en-MY" sz="1350" b="1" dirty="0">
                 <a:solidFill>
                   <a:schemeClr val="tx1">
                     <a:lumMod val="85000"/>
@@ -17384,7 +17384,7 @@
         </p:nvSpPr>
         <p:spPr>
           <a:xfrm>
-            <a:off x="723930" y="4791456"/>
+            <a:off x="723930" y="3383280"/>
             <a:ext cx="10744200" cy="365760"/>
           </a:xfrm>
           <a:prstGeom prst="rect">
@@ -17421,7 +17421,7 @@
         </p:nvSpPr>
         <p:spPr>
           <a:xfrm>
-            <a:off x="723930" y="5266944"/>
+            <a:off x="723930" y="3858768"/>
             <a:ext cx="10744200" cy="621792"/>
           </a:xfrm>
           <a:prstGeom prst="rect">
@@ -17733,33 +17733,33 @@
                   </a:schemeClr>
                 </a:solidFill>
               </a:rPr>
-              <a:t>K5 PL06 T03 B02 — PAPAN CERITA v0.4 (BUKTI TIGA KELUARGA)</a:t>
-            </a:r>
-          </a:p>
-          <a:p>
-            <a:r>
-              <a:rPr lang="en-MY" sz="900" dirty="0">
-                <a:solidFill>
-                  <a:schemeClr val="tx1">
-                    <a:lumMod val="85000"/>
-                    <a:lumOff val="15000"/>
-                  </a:schemeClr>
-                </a:solidFill>
-              </a:rPr>
-              <a:t>PROOF_BUILD · V0_4_MODEL_DRIVEN</a:t>
-            </a:r>
-          </a:p>
-          <a:p>
-            <a:r>
-              <a:rPr lang="en-MY" sz="900" dirty="0">
-                <a:solidFill>
-                  <a:schemeClr val="tx1">
-                    <a:lumMod val="85000"/>
-                    <a:lumOff val="15000"/>
-                  </a:schemeClr>
-                </a:solidFill>
-              </a:rPr>
-              <a:t>NOT_FOR_MMD_BUILD · MULTIMEDIA_NOT_PRODUCED · PRODUCTION_APPROVAL_NOT_CLAIMED</a:t>
+              <a:t>K5 PL06 T03 B02 — PAPAN CERITA v0.4</a:t>
+            </a:r>
+          </a:p>
+          <a:p>
+            <a:r>
+              <a:rPr lang="en-MY" sz="900" dirty="0">
+                <a:solidFill>
+                  <a:schemeClr val="tx1">
+                    <a:lumMod val="85000"/>
+                    <a:lumOff val="15000"/>
+                  </a:schemeClr>
+                </a:solidFill>
+              </a:rPr>
+              <a:t>REVIEW_READY · BARIAH_FEEDBACK_IMPLEMENTED</a:t>
+            </a:r>
+          </a:p>
+          <a:p>
+            <a:r>
+              <a:rPr lang="en-MY" sz="900" dirty="0">
+                <a:solidFill>
+                  <a:schemeClr val="tx1">
+                    <a:lumMod val="85000"/>
+                    <a:lumOff val="15000"/>
+                  </a:schemeClr>
+                </a:solidFill>
+              </a:rPr>
+              <a:t>PENDING_TARGETED_CONFIRMATION · NOT_FOR_MMD_BUILD · MULTIMEDIA_NOT_PRODUCED</a:t>
             </a:r>
           </a:p>
           <a:p>
@@ -18376,8 +18376,8 @@
         </p:nvSpPr>
         <p:spPr>
           <a:xfrm>
-            <a:off x="723930" y="2139696"/>
-            <a:ext cx="2411730" cy="1481328"/>
+            <a:off x="723885" y="2103120"/>
+            <a:ext cx="2398014" cy="969264"/>
           </a:xfrm>
           <a:prstGeom prst="rect">
             <a:avLst/>
@@ -18399,7 +18399,7 @@
           <a:p>
             <a:pPr algn="ctr"/>
             <a:r>
-              <a:rPr lang="en-MY" sz="1500" b="1" dirty="0">
+              <a:rPr lang="en-MY" sz="1350" b="1" dirty="0">
                 <a:solidFill>
                   <a:schemeClr val="tx1">
                     <a:lumMod val="85000"/>
@@ -18420,8 +18420,8 @@
         </p:nvSpPr>
         <p:spPr>
           <a:xfrm>
-            <a:off x="2715036" y="2231136"/>
-            <a:ext cx="310896" cy="310896"/>
+            <a:off x="2719563" y="2185416"/>
+            <a:ext cx="292608" cy="292608"/>
           </a:xfrm>
           <a:custGeom>
             <a:avLst/>
@@ -18479,8 +18479,8 @@
         </p:nvSpPr>
         <p:spPr>
           <a:xfrm>
-            <a:off x="3501420" y="2139696"/>
-            <a:ext cx="2411730" cy="1481328"/>
+            <a:off x="3505947" y="2103120"/>
+            <a:ext cx="2398014" cy="969264"/>
           </a:xfrm>
           <a:prstGeom prst="rect">
             <a:avLst/>
@@ -18502,7 +18502,7 @@
           <a:p>
             <a:pPr algn="ctr"/>
             <a:r>
-              <a:rPr lang="en-MY" sz="1500" b="1" dirty="0">
+              <a:rPr lang="en-MY" sz="1350" b="1" dirty="0">
                 <a:solidFill>
                   <a:schemeClr val="tx1">
                     <a:lumMod val="85000"/>
@@ -18523,8 +18523,8 @@
         </p:nvSpPr>
         <p:spPr>
           <a:xfrm>
-            <a:off x="5492526" y="2231136"/>
-            <a:ext cx="310896" cy="310896"/>
+            <a:off x="5501625" y="2185416"/>
+            <a:ext cx="292608" cy="292608"/>
           </a:xfrm>
           <a:custGeom>
             <a:avLst/>
@@ -18582,8 +18582,8 @@
         </p:nvSpPr>
         <p:spPr>
           <a:xfrm>
-            <a:off x="6278910" y="2139696"/>
-            <a:ext cx="2411730" cy="1481328"/>
+            <a:off x="6288009" y="2103120"/>
+            <a:ext cx="2398014" cy="969264"/>
           </a:xfrm>
           <a:prstGeom prst="rect">
             <a:avLst/>
@@ -18605,7 +18605,7 @@
           <a:p>
             <a:pPr algn="ctr"/>
             <a:r>
-              <a:rPr lang="en-MY" sz="1500" b="1" dirty="0">
+              <a:rPr lang="en-MY" sz="1350" b="1" dirty="0">
                 <a:solidFill>
                   <a:schemeClr val="tx1">
                     <a:lumMod val="85000"/>
@@ -18626,8 +18626,8 @@
         </p:nvSpPr>
         <p:spPr>
           <a:xfrm>
-            <a:off x="8270016" y="2231136"/>
-            <a:ext cx="310896" cy="310896"/>
+            <a:off x="8283687" y="2185416"/>
+            <a:ext cx="292608" cy="292608"/>
           </a:xfrm>
           <a:custGeom>
             <a:avLst/>
@@ -18685,8 +18685,8 @@
         </p:nvSpPr>
         <p:spPr>
           <a:xfrm>
-            <a:off x="9056400" y="2139696"/>
-            <a:ext cx="2411730" cy="1481328"/>
+            <a:off x="9070071" y="2103120"/>
+            <a:ext cx="2398014" cy="969264"/>
           </a:xfrm>
           <a:prstGeom prst="rect">
             <a:avLst/>
@@ -18708,7 +18708,7 @@
           <a:p>
             <a:pPr algn="ctr"/>
             <a:r>
-              <a:rPr lang="en-MY" sz="1500" b="1" dirty="0">
+              <a:rPr lang="en-MY" sz="1350" b="1" dirty="0">
                 <a:solidFill>
                   <a:schemeClr val="tx1">
                     <a:lumMod val="85000"/>
@@ -18729,7 +18729,7 @@
         </p:nvSpPr>
         <p:spPr>
           <a:xfrm>
-            <a:off x="723930" y="4791456"/>
+            <a:off x="723930" y="3383280"/>
             <a:ext cx="10744200" cy="365760"/>
           </a:xfrm>
           <a:prstGeom prst="rect">
@@ -18766,7 +18766,7 @@
         </p:nvSpPr>
         <p:spPr>
           <a:xfrm>
-            <a:off x="723930" y="5266944"/>
+            <a:off x="723930" y="3858768"/>
             <a:ext cx="10744200" cy="621792"/>
           </a:xfrm>
           <a:prstGeom prst="rect">
@@ -19078,33 +19078,33 @@
                   </a:schemeClr>
                 </a:solidFill>
               </a:rPr>
-              <a:t>K5 PL06 T03 B02 — PAPAN CERITA v0.4 (BUKTI TIGA KELUARGA)</a:t>
-            </a:r>
-          </a:p>
-          <a:p>
-            <a:r>
-              <a:rPr lang="en-MY" sz="900" dirty="0">
-                <a:solidFill>
-                  <a:schemeClr val="tx1">
-                    <a:lumMod val="85000"/>
-                    <a:lumOff val="15000"/>
-                  </a:schemeClr>
-                </a:solidFill>
-              </a:rPr>
-              <a:t>PROOF_BUILD · V0_4_MODEL_DRIVEN</a:t>
-            </a:r>
-          </a:p>
-          <a:p>
-            <a:r>
-              <a:rPr lang="en-MY" sz="900" dirty="0">
-                <a:solidFill>
-                  <a:schemeClr val="tx1">
-                    <a:lumMod val="85000"/>
-                    <a:lumOff val="15000"/>
-                  </a:schemeClr>
-                </a:solidFill>
-              </a:rPr>
-              <a:t>NOT_FOR_MMD_BUILD · MULTIMEDIA_NOT_PRODUCED · PRODUCTION_APPROVAL_NOT_CLAIMED</a:t>
+              <a:t>K5 PL06 T03 B02 — PAPAN CERITA v0.4</a:t>
+            </a:r>
+          </a:p>
+          <a:p>
+            <a:r>
+              <a:rPr lang="en-MY" sz="900" dirty="0">
+                <a:solidFill>
+                  <a:schemeClr val="tx1">
+                    <a:lumMod val="85000"/>
+                    <a:lumOff val="15000"/>
+                  </a:schemeClr>
+                </a:solidFill>
+              </a:rPr>
+              <a:t>REVIEW_READY · BARIAH_FEEDBACK_IMPLEMENTED</a:t>
+            </a:r>
+          </a:p>
+          <a:p>
+            <a:r>
+              <a:rPr lang="en-MY" sz="900" dirty="0">
+                <a:solidFill>
+                  <a:schemeClr val="tx1">
+                    <a:lumMod val="85000"/>
+                    <a:lumOff val="15000"/>
+                  </a:schemeClr>
+                </a:solidFill>
+              </a:rPr>
+              <a:t>PENDING_TARGETED_CONFIRMATION · NOT_FOR_MMD_BUILD · MULTIMEDIA_NOT_PRODUCED</a:t>
             </a:r>
           </a:p>
           <a:p>
@@ -19905,33 +19905,33 @@
                   </a:schemeClr>
                 </a:solidFill>
               </a:rPr>
-              <a:t>K5 PL06 T03 B02 — PAPAN CERITA v0.4 (BUKTI TIGA KELUARGA)</a:t>
-            </a:r>
-          </a:p>
-          <a:p>
-            <a:r>
-              <a:rPr lang="en-MY" sz="900" dirty="0">
-                <a:solidFill>
-                  <a:schemeClr val="tx1">
-                    <a:lumMod val="85000"/>
-                    <a:lumOff val="15000"/>
-                  </a:schemeClr>
-                </a:solidFill>
-              </a:rPr>
-              <a:t>PROOF_BUILD · V0_4_MODEL_DRIVEN</a:t>
-            </a:r>
-          </a:p>
-          <a:p>
-            <a:r>
-              <a:rPr lang="en-MY" sz="900" dirty="0">
-                <a:solidFill>
-                  <a:schemeClr val="tx1">
-                    <a:lumMod val="85000"/>
-                    <a:lumOff val="15000"/>
-                  </a:schemeClr>
-                </a:solidFill>
-              </a:rPr>
-              <a:t>NOT_FOR_MMD_BUILD · MULTIMEDIA_NOT_PRODUCED · PRODUCTION_APPROVAL_NOT_CLAIMED</a:t>
+              <a:t>K5 PL06 T03 B02 — PAPAN CERITA v0.4</a:t>
+            </a:r>
+          </a:p>
+          <a:p>
+            <a:r>
+              <a:rPr lang="en-MY" sz="900" dirty="0">
+                <a:solidFill>
+                  <a:schemeClr val="tx1">
+                    <a:lumMod val="85000"/>
+                    <a:lumOff val="15000"/>
+                  </a:schemeClr>
+                </a:solidFill>
+              </a:rPr>
+              <a:t>REVIEW_READY · BARIAH_FEEDBACK_IMPLEMENTED</a:t>
+            </a:r>
+          </a:p>
+          <a:p>
+            <a:r>
+              <a:rPr lang="en-MY" sz="900" dirty="0">
+                <a:solidFill>
+                  <a:schemeClr val="tx1">
+                    <a:lumMod val="85000"/>
+                    <a:lumOff val="15000"/>
+                  </a:schemeClr>
+                </a:solidFill>
+              </a:rPr>
+              <a:t>PENDING_TARGETED_CONFIRMATION · NOT_FOR_MMD_BUILD · MULTIMEDIA_NOT_PRODUCED</a:t>
             </a:r>
           </a:p>
           <a:p>
@@ -20548,8 +20548,8 @@
         </p:nvSpPr>
         <p:spPr>
           <a:xfrm>
-            <a:off x="723930" y="2139696"/>
-            <a:ext cx="2411730" cy="1481328"/>
+            <a:off x="723885" y="2103120"/>
+            <a:ext cx="2398014" cy="969264"/>
           </a:xfrm>
           <a:prstGeom prst="rect">
             <a:avLst/>
@@ -20571,7 +20571,7 @@
           <a:p>
             <a:pPr algn="ctr"/>
             <a:r>
-              <a:rPr lang="en-MY" sz="1500" b="1" dirty="0">
+              <a:rPr lang="en-MY" sz="1350" b="1" dirty="0">
                 <a:solidFill>
                   <a:schemeClr val="tx1">
                     <a:lumMod val="85000"/>
@@ -20592,8 +20592,8 @@
         </p:nvSpPr>
         <p:spPr>
           <a:xfrm>
-            <a:off x="2715036" y="2231136"/>
-            <a:ext cx="310896" cy="310896"/>
+            <a:off x="2719563" y="2185416"/>
+            <a:ext cx="292608" cy="292608"/>
           </a:xfrm>
           <a:custGeom>
             <a:avLst/>
@@ -20651,8 +20651,8 @@
         </p:nvSpPr>
         <p:spPr>
           <a:xfrm>
-            <a:off x="3501420" y="2139696"/>
-            <a:ext cx="2411730" cy="1481328"/>
+            <a:off x="3505947" y="2103120"/>
+            <a:ext cx="2398014" cy="969264"/>
           </a:xfrm>
           <a:prstGeom prst="rect">
             <a:avLst/>
@@ -20674,7 +20674,7 @@
           <a:p>
             <a:pPr algn="ctr"/>
             <a:r>
-              <a:rPr lang="en-MY" sz="1500" b="1" dirty="0">
+              <a:rPr lang="en-MY" sz="1350" b="1" dirty="0">
                 <a:solidFill>
                   <a:schemeClr val="tx1">
                     <a:lumMod val="85000"/>
@@ -20695,8 +20695,8 @@
         </p:nvSpPr>
         <p:spPr>
           <a:xfrm>
-            <a:off x="5492526" y="2231136"/>
-            <a:ext cx="310896" cy="310896"/>
+            <a:off x="5501625" y="2185416"/>
+            <a:ext cx="292608" cy="292608"/>
           </a:xfrm>
           <a:custGeom>
             <a:avLst/>
@@ -20754,8 +20754,8 @@
         </p:nvSpPr>
         <p:spPr>
           <a:xfrm>
-            <a:off x="6278910" y="2139696"/>
-            <a:ext cx="2411730" cy="1481328"/>
+            <a:off x="6288009" y="2103120"/>
+            <a:ext cx="2398014" cy="969264"/>
           </a:xfrm>
           <a:prstGeom prst="rect">
             <a:avLst/>
@@ -20777,7 +20777,7 @@
           <a:p>
             <a:pPr algn="ctr"/>
             <a:r>
-              <a:rPr lang="en-MY" sz="1500" b="1" dirty="0">
+              <a:rPr lang="en-MY" sz="1350" b="1" dirty="0">
                 <a:solidFill>
                   <a:schemeClr val="tx1">
                     <a:lumMod val="85000"/>
@@ -20798,8 +20798,8 @@
         </p:nvSpPr>
         <p:spPr>
           <a:xfrm>
-            <a:off x="8270016" y="2231136"/>
-            <a:ext cx="310896" cy="310896"/>
+            <a:off x="8283687" y="2185416"/>
+            <a:ext cx="292608" cy="292608"/>
           </a:xfrm>
           <a:custGeom>
             <a:avLst/>
@@ -20857,8 +20857,8 @@
         </p:nvSpPr>
         <p:spPr>
           <a:xfrm>
-            <a:off x="9056400" y="2139696"/>
-            <a:ext cx="2411730" cy="1481328"/>
+            <a:off x="9070071" y="2103120"/>
+            <a:ext cx="2398014" cy="969264"/>
           </a:xfrm>
           <a:prstGeom prst="rect">
             <a:avLst/>
@@ -20880,7 +20880,7 @@
           <a:p>
             <a:pPr algn="ctr"/>
             <a:r>
-              <a:rPr lang="en-MY" sz="1500" b="1" dirty="0">
+              <a:rPr lang="en-MY" sz="1350" b="1" dirty="0">
                 <a:solidFill>
                   <a:schemeClr val="tx1">
                     <a:lumMod val="85000"/>
@@ -20901,8 +20901,8 @@
         </p:nvSpPr>
         <p:spPr>
           <a:xfrm>
-            <a:off x="11047506" y="2231136"/>
-            <a:ext cx="310896" cy="310896"/>
+            <a:off x="11065749" y="2185416"/>
+            <a:ext cx="292608" cy="292608"/>
           </a:xfrm>
           <a:custGeom>
             <a:avLst/>
@@ -20960,7 +20960,7 @@
         </p:nvSpPr>
         <p:spPr>
           <a:xfrm>
-            <a:off x="723930" y="4791456"/>
+            <a:off x="723930" y="3383280"/>
             <a:ext cx="10744200" cy="365760"/>
           </a:xfrm>
           <a:prstGeom prst="rect">
@@ -20997,7 +20997,7 @@
         </p:nvSpPr>
         <p:spPr>
           <a:xfrm>
-            <a:off x="723930" y="5266944"/>
+            <a:off x="723930" y="3858768"/>
             <a:ext cx="10744200" cy="621792"/>
           </a:xfrm>
           <a:prstGeom prst="rect">
@@ -21309,33 +21309,33 @@
                   </a:schemeClr>
                 </a:solidFill>
               </a:rPr>
-              <a:t>K5 PL06 T03 B02 — PAPAN CERITA v0.4 (BUKTI TIGA KELUARGA)</a:t>
-            </a:r>
-          </a:p>
-          <a:p>
-            <a:r>
-              <a:rPr lang="en-MY" sz="900" dirty="0">
-                <a:solidFill>
-                  <a:schemeClr val="tx1">
-                    <a:lumMod val="85000"/>
-                    <a:lumOff val="15000"/>
-                  </a:schemeClr>
-                </a:solidFill>
-              </a:rPr>
-              <a:t>PROOF_BUILD · V0_4_MODEL_DRIVEN</a:t>
-            </a:r>
-          </a:p>
-          <a:p>
-            <a:r>
-              <a:rPr lang="en-MY" sz="900" dirty="0">
-                <a:solidFill>
-                  <a:schemeClr val="tx1">
-                    <a:lumMod val="85000"/>
-                    <a:lumOff val="15000"/>
-                  </a:schemeClr>
-                </a:solidFill>
-              </a:rPr>
-              <a:t>NOT_FOR_MMD_BUILD · MULTIMEDIA_NOT_PRODUCED · PRODUCTION_APPROVAL_NOT_CLAIMED</a:t>
+              <a:t>K5 PL06 T03 B02 — PAPAN CERITA v0.4</a:t>
+            </a:r>
+          </a:p>
+          <a:p>
+            <a:r>
+              <a:rPr lang="en-MY" sz="900" dirty="0">
+                <a:solidFill>
+                  <a:schemeClr val="tx1">
+                    <a:lumMod val="85000"/>
+                    <a:lumOff val="15000"/>
+                  </a:schemeClr>
+                </a:solidFill>
+              </a:rPr>
+              <a:t>REVIEW_READY · BARIAH_FEEDBACK_IMPLEMENTED</a:t>
+            </a:r>
+          </a:p>
+          <a:p>
+            <a:r>
+              <a:rPr lang="en-MY" sz="900" dirty="0">
+                <a:solidFill>
+                  <a:schemeClr val="tx1">
+                    <a:lumMod val="85000"/>
+                    <a:lumOff val="15000"/>
+                  </a:schemeClr>
+                </a:solidFill>
+              </a:rPr>
+              <a:t>PENDING_TARGETED_CONFIRMATION · NOT_FOR_MMD_BUILD · MULTIMEDIA_NOT_PRODUCED</a:t>
             </a:r>
           </a:p>
           <a:p>
@@ -21952,8 +21952,8 @@
         </p:nvSpPr>
         <p:spPr>
           <a:xfrm>
-            <a:off x="723930" y="2139696"/>
-            <a:ext cx="2411730" cy="1481328"/>
+            <a:off x="723885" y="2103120"/>
+            <a:ext cx="2398014" cy="969264"/>
           </a:xfrm>
           <a:prstGeom prst="rect">
             <a:avLst/>
@@ -21975,7 +21975,7 @@
           <a:p>
             <a:pPr algn="ctr"/>
             <a:r>
-              <a:rPr lang="en-MY" sz="1500" b="1" dirty="0">
+              <a:rPr lang="en-MY" sz="1350" b="1" dirty="0">
                 <a:solidFill>
                   <a:schemeClr val="tx1">
                     <a:lumMod val="85000"/>
@@ -21996,8 +21996,8 @@
         </p:nvSpPr>
         <p:spPr>
           <a:xfrm>
-            <a:off x="2715036" y="2231136"/>
-            <a:ext cx="310896" cy="310896"/>
+            <a:off x="2719563" y="2185416"/>
+            <a:ext cx="292608" cy="292608"/>
           </a:xfrm>
           <a:custGeom>
             <a:avLst/>
@@ -22055,8 +22055,8 @@
         </p:nvSpPr>
         <p:spPr>
           <a:xfrm>
-            <a:off x="3501420" y="2139696"/>
-            <a:ext cx="2411730" cy="1481328"/>
+            <a:off x="3505947" y="2103120"/>
+            <a:ext cx="2398014" cy="969264"/>
           </a:xfrm>
           <a:prstGeom prst="rect">
             <a:avLst/>
@@ -22078,7 +22078,7 @@
           <a:p>
             <a:pPr algn="ctr"/>
             <a:r>
-              <a:rPr lang="en-MY" sz="1500" b="1" dirty="0">
+              <a:rPr lang="en-MY" sz="1350" b="1" dirty="0">
                 <a:solidFill>
                   <a:schemeClr val="tx1">
                     <a:lumMod val="85000"/>
@@ -22099,8 +22099,8 @@
         </p:nvSpPr>
         <p:spPr>
           <a:xfrm>
-            <a:off x="5492526" y="2231136"/>
-            <a:ext cx="310896" cy="310896"/>
+            <a:off x="5501625" y="2185416"/>
+            <a:ext cx="292608" cy="292608"/>
           </a:xfrm>
           <a:custGeom>
             <a:avLst/>
@@ -22158,8 +22158,8 @@
         </p:nvSpPr>
         <p:spPr>
           <a:xfrm>
-            <a:off x="6278910" y="2139696"/>
-            <a:ext cx="2411730" cy="1481328"/>
+            <a:off x="6288009" y="2103120"/>
+            <a:ext cx="2398014" cy="969264"/>
           </a:xfrm>
           <a:prstGeom prst="rect">
             <a:avLst/>
@@ -22181,7 +22181,7 @@
           <a:p>
             <a:pPr algn="ctr"/>
             <a:r>
-              <a:rPr lang="en-MY" sz="1500" b="1" dirty="0">
+              <a:rPr lang="en-MY" sz="1350" b="1" dirty="0">
                 <a:solidFill>
                   <a:schemeClr val="tx1">
                     <a:lumMod val="85000"/>
@@ -22202,8 +22202,8 @@
         </p:nvSpPr>
         <p:spPr>
           <a:xfrm>
-            <a:off x="8270016" y="2231136"/>
-            <a:ext cx="310896" cy="310896"/>
+            <a:off x="8283687" y="2185416"/>
+            <a:ext cx="292608" cy="292608"/>
           </a:xfrm>
           <a:custGeom>
             <a:avLst/>
@@ -22261,8 +22261,8 @@
         </p:nvSpPr>
         <p:spPr>
           <a:xfrm>
-            <a:off x="9056400" y="2139696"/>
-            <a:ext cx="2411730" cy="1481328"/>
+            <a:off x="9070071" y="2103120"/>
+            <a:ext cx="2398014" cy="969264"/>
           </a:xfrm>
           <a:prstGeom prst="rect">
             <a:avLst/>
@@ -22284,7 +22284,7 @@
           <a:p>
             <a:pPr algn="ctr"/>
             <a:r>
-              <a:rPr lang="en-MY" sz="1500" b="1" dirty="0">
+              <a:rPr lang="en-MY" sz="1350" b="1" dirty="0">
                 <a:solidFill>
                   <a:schemeClr val="tx1">
                     <a:lumMod val="85000"/>
@@ -22305,8 +22305,8 @@
         </p:nvSpPr>
         <p:spPr>
           <a:xfrm>
-            <a:off x="11047506" y="2231136"/>
-            <a:ext cx="310896" cy="310896"/>
+            <a:off x="11065749" y="2185416"/>
+            <a:ext cx="292608" cy="292608"/>
           </a:xfrm>
           <a:custGeom>
             <a:avLst/>
@@ -22364,7 +22364,7 @@
         </p:nvSpPr>
         <p:spPr>
           <a:xfrm>
-            <a:off x="723930" y="4791456"/>
+            <a:off x="723930" y="3383280"/>
             <a:ext cx="10744200" cy="365760"/>
           </a:xfrm>
           <a:prstGeom prst="rect">
@@ -22401,7 +22401,7 @@
         </p:nvSpPr>
         <p:spPr>
           <a:xfrm>
-            <a:off x="723930" y="5266944"/>
+            <a:off x="723930" y="3858768"/>
             <a:ext cx="10744200" cy="621792"/>
           </a:xfrm>
           <a:prstGeom prst="rect">
@@ -22513,33 +22513,33 @@
                   </a:schemeClr>
                 </a:solidFill>
               </a:rPr>
-              <a:t>K5 PL06 T03 B02 — PAPAN CERITA v0.4 (BUKTI TIGA KELUARGA)</a:t>
-            </a:r>
-          </a:p>
-          <a:p>
-            <a:r>
-              <a:rPr lang="en-MY" sz="900" dirty="0">
-                <a:solidFill>
-                  <a:schemeClr val="tx1">
-                    <a:lumMod val="85000"/>
-                    <a:lumOff val="15000"/>
-                  </a:schemeClr>
-                </a:solidFill>
-              </a:rPr>
-              <a:t>PROOF_BUILD · V0_4_MODEL_DRIVEN</a:t>
-            </a:r>
-          </a:p>
-          <a:p>
-            <a:r>
-              <a:rPr lang="en-MY" sz="900" dirty="0">
-                <a:solidFill>
-                  <a:schemeClr val="tx1">
-                    <a:lumMod val="85000"/>
-                    <a:lumOff val="15000"/>
-                  </a:schemeClr>
-                </a:solidFill>
-              </a:rPr>
-              <a:t>NOT_FOR_MMD_BUILD · MULTIMEDIA_NOT_PRODUCED · PRODUCTION_APPROVAL_NOT_CLAIMED</a:t>
+              <a:t>K5 PL06 T03 B02 — PAPAN CERITA v0.4</a:t>
+            </a:r>
+          </a:p>
+          <a:p>
+            <a:r>
+              <a:rPr lang="en-MY" sz="900" dirty="0">
+                <a:solidFill>
+                  <a:schemeClr val="tx1">
+                    <a:lumMod val="85000"/>
+                    <a:lumOff val="15000"/>
+                  </a:schemeClr>
+                </a:solidFill>
+              </a:rPr>
+              <a:t>REVIEW_READY · BARIAH_FEEDBACK_IMPLEMENTED</a:t>
+            </a:r>
+          </a:p>
+          <a:p>
+            <a:r>
+              <a:rPr lang="en-MY" sz="900" dirty="0">
+                <a:solidFill>
+                  <a:schemeClr val="tx1">
+                    <a:lumMod val="85000"/>
+                    <a:lumOff val="15000"/>
+                  </a:schemeClr>
+                </a:solidFill>
+              </a:rPr>
+              <a:t>PENDING_TARGETED_CONFIRMATION · NOT_FOR_MMD_BUILD · MULTIMEDIA_NOT_PRODUCED</a:t>
             </a:r>
           </a:p>
           <a:p>
@@ -23195,8 +23195,8 @@
         </p:nvSpPr>
         <p:spPr>
           <a:xfrm>
-            <a:off x="723930" y="2157984"/>
-            <a:ext cx="3307080" cy="1481328"/>
+            <a:off x="723885" y="2157984"/>
+            <a:ext cx="3325368" cy="1481328"/>
           </a:xfrm>
           <a:prstGeom prst="rect">
             <a:avLst/>
@@ -23239,8 +23239,8 @@
         </p:nvSpPr>
         <p:spPr>
           <a:xfrm>
-            <a:off x="3610386" y="2249424"/>
-            <a:ext cx="310896" cy="310896"/>
+            <a:off x="3646917" y="2240280"/>
+            <a:ext cx="292608" cy="292608"/>
           </a:xfrm>
           <a:custGeom>
             <a:avLst/>
@@ -23298,8 +23298,8 @@
         </p:nvSpPr>
         <p:spPr>
           <a:xfrm>
-            <a:off x="4442490" y="2157984"/>
-            <a:ext cx="3307080" cy="1481328"/>
+            <a:off x="4433301" y="2157984"/>
+            <a:ext cx="3325368" cy="1481328"/>
           </a:xfrm>
           <a:prstGeom prst="rect">
             <a:avLst/>
@@ -23342,8 +23342,8 @@
         </p:nvSpPr>
         <p:spPr>
           <a:xfrm>
-            <a:off x="8161050" y="2157984"/>
-            <a:ext cx="3307080" cy="1481328"/>
+            <a:off x="8142717" y="2157984"/>
+            <a:ext cx="3325368" cy="1481328"/>
           </a:xfrm>
           <a:prstGeom prst="rect">
             <a:avLst/>
@@ -23446,33 +23446,33 @@
                   </a:schemeClr>
                 </a:solidFill>
               </a:rPr>
-              <a:t>K5 PL06 T03 B02 — PAPAN CERITA v0.4 (BUKTI TIGA KELUARGA)</a:t>
-            </a:r>
-          </a:p>
-          <a:p>
-            <a:r>
-              <a:rPr lang="en-MY" sz="900" dirty="0">
-                <a:solidFill>
-                  <a:schemeClr val="tx1">
-                    <a:lumMod val="85000"/>
-                    <a:lumOff val="15000"/>
-                  </a:schemeClr>
-                </a:solidFill>
-              </a:rPr>
-              <a:t>PROOF_BUILD · V0_4_MODEL_DRIVEN</a:t>
-            </a:r>
-          </a:p>
-          <a:p>
-            <a:r>
-              <a:rPr lang="en-MY" sz="900" dirty="0">
-                <a:solidFill>
-                  <a:schemeClr val="tx1">
-                    <a:lumMod val="85000"/>
-                    <a:lumOff val="15000"/>
-                  </a:schemeClr>
-                </a:solidFill>
-              </a:rPr>
-              <a:t>NOT_FOR_MMD_BUILD · MULTIMEDIA_NOT_PRODUCED · PRODUCTION_APPROVAL_NOT_CLAIMED</a:t>
+              <a:t>K5 PL06 T03 B02 — PAPAN CERITA v0.4</a:t>
+            </a:r>
+          </a:p>
+          <a:p>
+            <a:r>
+              <a:rPr lang="en-MY" sz="900" dirty="0">
+                <a:solidFill>
+                  <a:schemeClr val="tx1">
+                    <a:lumMod val="85000"/>
+                    <a:lumOff val="15000"/>
+                  </a:schemeClr>
+                </a:solidFill>
+              </a:rPr>
+              <a:t>REVIEW_READY · BARIAH_FEEDBACK_IMPLEMENTED</a:t>
+            </a:r>
+          </a:p>
+          <a:p>
+            <a:r>
+              <a:rPr lang="en-MY" sz="900" dirty="0">
+                <a:solidFill>
+                  <a:schemeClr val="tx1">
+                    <a:lumMod val="85000"/>
+                    <a:lumOff val="15000"/>
+                  </a:schemeClr>
+                </a:solidFill>
+              </a:rPr>
+              <a:t>PENDING_TARGETED_CONFIRMATION · NOT_FOR_MMD_BUILD · MULTIMEDIA_NOT_PRODUCED</a:t>
             </a:r>
           </a:p>
           <a:p>
@@ -24136,8 +24136,8 @@
         </p:nvSpPr>
         <p:spPr>
           <a:xfrm>
-            <a:off x="723930" y="2450592"/>
-            <a:ext cx="2411730" cy="1481328"/>
+            <a:off x="723885" y="2450592"/>
+            <a:ext cx="2398014" cy="1481328"/>
           </a:xfrm>
           <a:prstGeom prst="rect">
             <a:avLst/>
@@ -24180,8 +24180,8 @@
         </p:nvSpPr>
         <p:spPr>
           <a:xfrm>
-            <a:off x="3501420" y="2450592"/>
-            <a:ext cx="2411730" cy="1481328"/>
+            <a:off x="3505947" y="2450592"/>
+            <a:ext cx="2398014" cy="1481328"/>
           </a:xfrm>
           <a:prstGeom prst="rect">
             <a:avLst/>
@@ -24224,8 +24224,8 @@
         </p:nvSpPr>
         <p:spPr>
           <a:xfrm>
-            <a:off x="6278910" y="2450592"/>
-            <a:ext cx="2411730" cy="1481328"/>
+            <a:off x="6288009" y="2450592"/>
+            <a:ext cx="2398014" cy="1481328"/>
           </a:xfrm>
           <a:prstGeom prst="rect">
             <a:avLst/>
@@ -24268,8 +24268,8 @@
         </p:nvSpPr>
         <p:spPr>
           <a:xfrm>
-            <a:off x="9056400" y="2450592"/>
-            <a:ext cx="2411730" cy="1481328"/>
+            <a:off x="9070071" y="2450592"/>
+            <a:ext cx="2398014" cy="1481328"/>
           </a:xfrm>
           <a:prstGeom prst="rect">
             <a:avLst/>
@@ -24394,33 +24394,33 @@
                   </a:schemeClr>
                 </a:solidFill>
               </a:rPr>
-              <a:t>K5 PL06 T03 B02 — PAPAN CERITA v0.4 (BUKTI TIGA KELUARGA)</a:t>
-            </a:r>
-          </a:p>
-          <a:p>
-            <a:r>
-              <a:rPr lang="en-MY" sz="900" dirty="0">
-                <a:solidFill>
-                  <a:schemeClr val="tx1">
-                    <a:lumMod val="85000"/>
-                    <a:lumOff val="15000"/>
-                  </a:schemeClr>
-                </a:solidFill>
-              </a:rPr>
-              <a:t>PROOF_BUILD · V0_4_MODEL_DRIVEN</a:t>
-            </a:r>
-          </a:p>
-          <a:p>
-            <a:r>
-              <a:rPr lang="en-MY" sz="900" dirty="0">
-                <a:solidFill>
-                  <a:schemeClr val="tx1">
-                    <a:lumMod val="85000"/>
-                    <a:lumOff val="15000"/>
-                  </a:schemeClr>
-                </a:solidFill>
-              </a:rPr>
-              <a:t>NOT_FOR_MMD_BUILD · MULTIMEDIA_NOT_PRODUCED · PRODUCTION_APPROVAL_NOT_CLAIMED</a:t>
+              <a:t>K5 PL06 T03 B02 — PAPAN CERITA v0.4</a:t>
+            </a:r>
+          </a:p>
+          <a:p>
+            <a:r>
+              <a:rPr lang="en-MY" sz="900" dirty="0">
+                <a:solidFill>
+                  <a:schemeClr val="tx1">
+                    <a:lumMod val="85000"/>
+                    <a:lumOff val="15000"/>
+                  </a:schemeClr>
+                </a:solidFill>
+              </a:rPr>
+              <a:t>REVIEW_READY · BARIAH_FEEDBACK_IMPLEMENTED</a:t>
+            </a:r>
+          </a:p>
+          <a:p>
+            <a:r>
+              <a:rPr lang="en-MY" sz="900" dirty="0">
+                <a:solidFill>
+                  <a:schemeClr val="tx1">
+                    <a:lumMod val="85000"/>
+                    <a:lumOff val="15000"/>
+                  </a:schemeClr>
+                </a:solidFill>
+              </a:rPr>
+              <a:t>PENDING_TARGETED_CONFIRMATION · NOT_FOR_MMD_BUILD · MULTIMEDIA_NOT_PRODUCED</a:t>
             </a:r>
           </a:p>
           <a:p>
@@ -25136,8 +25136,8 @@
         </p:nvSpPr>
         <p:spPr>
           <a:xfrm>
-            <a:off x="723930" y="2450592"/>
-            <a:ext cx="2411730" cy="1481328"/>
+            <a:off x="723885" y="2450592"/>
+            <a:ext cx="2398014" cy="1481328"/>
           </a:xfrm>
           <a:prstGeom prst="rect">
             <a:avLst/>
@@ -25180,8 +25180,8 @@
         </p:nvSpPr>
         <p:spPr>
           <a:xfrm>
-            <a:off x="2715036" y="2542032"/>
-            <a:ext cx="310896" cy="310896"/>
+            <a:off x="2719563" y="2532888"/>
+            <a:ext cx="292608" cy="292608"/>
           </a:xfrm>
           <a:custGeom>
             <a:avLst/>
@@ -25239,8 +25239,8 @@
         </p:nvSpPr>
         <p:spPr>
           <a:xfrm>
-            <a:off x="3501420" y="2450592"/>
-            <a:ext cx="2411730" cy="1481328"/>
+            <a:off x="3505947" y="2450592"/>
+            <a:ext cx="2398014" cy="1481328"/>
           </a:xfrm>
           <a:prstGeom prst="rect">
             <a:avLst/>
@@ -25283,8 +25283,8 @@
         </p:nvSpPr>
         <p:spPr>
           <a:xfrm>
-            <a:off x="6278910" y="2450592"/>
-            <a:ext cx="2411730" cy="1481328"/>
+            <a:off x="6288009" y="2450592"/>
+            <a:ext cx="2398014" cy="1481328"/>
           </a:xfrm>
           <a:prstGeom prst="rect">
             <a:avLst/>
@@ -25327,8 +25327,8 @@
         </p:nvSpPr>
         <p:spPr>
           <a:xfrm>
-            <a:off x="9056400" y="2450592"/>
-            <a:ext cx="2411730" cy="1481328"/>
+            <a:off x="9070071" y="2450592"/>
+            <a:ext cx="2398014" cy="1481328"/>
           </a:xfrm>
           <a:prstGeom prst="rect">
             <a:avLst/>
@@ -25708,33 +25708,33 @@
                   </a:schemeClr>
                 </a:solidFill>
               </a:rPr>
-              <a:t>K5 PL06 T03 B02 — PAPAN CERITA v0.4 (BUKTI TIGA KELUARGA)</a:t>
-            </a:r>
-          </a:p>
-          <a:p>
-            <a:r>
-              <a:rPr lang="en-MY" sz="900" dirty="0">
-                <a:solidFill>
-                  <a:schemeClr val="tx1">
-                    <a:lumMod val="85000"/>
-                    <a:lumOff val="15000"/>
-                  </a:schemeClr>
-                </a:solidFill>
-              </a:rPr>
-              <a:t>PROOF_BUILD · V0_4_MODEL_DRIVEN</a:t>
-            </a:r>
-          </a:p>
-          <a:p>
-            <a:r>
-              <a:rPr lang="en-MY" sz="900" dirty="0">
-                <a:solidFill>
-                  <a:schemeClr val="tx1">
-                    <a:lumMod val="85000"/>
-                    <a:lumOff val="15000"/>
-                  </a:schemeClr>
-                </a:solidFill>
-              </a:rPr>
-              <a:t>NOT_FOR_MMD_BUILD · MULTIMEDIA_NOT_PRODUCED · PRODUCTION_APPROVAL_NOT_CLAIMED</a:t>
+              <a:t>K5 PL06 T03 B02 — PAPAN CERITA v0.4</a:t>
+            </a:r>
+          </a:p>
+          <a:p>
+            <a:r>
+              <a:rPr lang="en-MY" sz="900" dirty="0">
+                <a:solidFill>
+                  <a:schemeClr val="tx1">
+                    <a:lumMod val="85000"/>
+                    <a:lumOff val="15000"/>
+                  </a:schemeClr>
+                </a:solidFill>
+              </a:rPr>
+              <a:t>REVIEW_READY · BARIAH_FEEDBACK_IMPLEMENTED</a:t>
+            </a:r>
+          </a:p>
+          <a:p>
+            <a:r>
+              <a:rPr lang="en-MY" sz="900" dirty="0">
+                <a:solidFill>
+                  <a:schemeClr val="tx1">
+                    <a:lumMod val="85000"/>
+                    <a:lumOff val="15000"/>
+                  </a:schemeClr>
+                </a:solidFill>
+              </a:rPr>
+              <a:t>PENDING_TARGETED_CONFIRMATION · NOT_FOR_MMD_BUILD · MULTIMEDIA_NOT_PRODUCED</a:t>
             </a:r>
           </a:p>
           <a:p>
@@ -26372,8 +26372,8 @@
         </p:nvSpPr>
         <p:spPr>
           <a:xfrm>
-            <a:off x="723930" y="2450592"/>
-            <a:ext cx="2411730" cy="1481328"/>
+            <a:off x="723885" y="2450592"/>
+            <a:ext cx="2398014" cy="1481328"/>
           </a:xfrm>
           <a:prstGeom prst="rect">
             <a:avLst/>
@@ -26416,8 +26416,8 @@
         </p:nvSpPr>
         <p:spPr>
           <a:xfrm>
-            <a:off x="2715036" y="2542032"/>
-            <a:ext cx="310896" cy="310896"/>
+            <a:off x="2719563" y="2532888"/>
+            <a:ext cx="292608" cy="292608"/>
           </a:xfrm>
           <a:custGeom>
             <a:avLst/>
@@ -26475,8 +26475,8 @@
         </p:nvSpPr>
         <p:spPr>
           <a:xfrm>
-            <a:off x="3501420" y="2450592"/>
-            <a:ext cx="2411730" cy="1481328"/>
+            <a:off x="3505947" y="2450592"/>
+            <a:ext cx="2398014" cy="1481328"/>
           </a:xfrm>
           <a:prstGeom prst="rect">
             <a:avLst/>
@@ -26519,8 +26519,8 @@
         </p:nvSpPr>
         <p:spPr>
           <a:xfrm>
-            <a:off x="5492526" y="2542032"/>
-            <a:ext cx="310896" cy="310896"/>
+            <a:off x="5501625" y="2532888"/>
+            <a:ext cx="292608" cy="292608"/>
           </a:xfrm>
           <a:custGeom>
             <a:avLst/>
@@ -26578,8 +26578,8 @@
         </p:nvSpPr>
         <p:spPr>
           <a:xfrm>
-            <a:off x="6278910" y="2450592"/>
-            <a:ext cx="2411730" cy="1481328"/>
+            <a:off x="6288009" y="2450592"/>
+            <a:ext cx="2398014" cy="1481328"/>
           </a:xfrm>
           <a:prstGeom prst="rect">
             <a:avLst/>
@@ -26622,8 +26622,8 @@
         </p:nvSpPr>
         <p:spPr>
           <a:xfrm>
-            <a:off x="9056400" y="2450592"/>
-            <a:ext cx="2411730" cy="1481328"/>
+            <a:off x="9070071" y="2450592"/>
+            <a:ext cx="2398014" cy="1481328"/>
           </a:xfrm>
           <a:prstGeom prst="rect">
             <a:avLst/>
@@ -27003,33 +27003,33 @@
                   </a:schemeClr>
                 </a:solidFill>
               </a:rPr>
-              <a:t>K5 PL06 T03 B02 — PAPAN CERITA v0.4 (BUKTI TIGA KELUARGA)</a:t>
-            </a:r>
-          </a:p>
-          <a:p>
-            <a:r>
-              <a:rPr lang="en-MY" sz="900" dirty="0">
-                <a:solidFill>
-                  <a:schemeClr val="tx1">
-                    <a:lumMod val="85000"/>
-                    <a:lumOff val="15000"/>
-                  </a:schemeClr>
-                </a:solidFill>
-              </a:rPr>
-              <a:t>PROOF_BUILD · V0_4_MODEL_DRIVEN</a:t>
-            </a:r>
-          </a:p>
-          <a:p>
-            <a:r>
-              <a:rPr lang="en-MY" sz="900" dirty="0">
-                <a:solidFill>
-                  <a:schemeClr val="tx1">
-                    <a:lumMod val="85000"/>
-                    <a:lumOff val="15000"/>
-                  </a:schemeClr>
-                </a:solidFill>
-              </a:rPr>
-              <a:t>NOT_FOR_MMD_BUILD · MULTIMEDIA_NOT_PRODUCED · PRODUCTION_APPROVAL_NOT_CLAIMED</a:t>
+              <a:t>K5 PL06 T03 B02 — PAPAN CERITA v0.4</a:t>
+            </a:r>
+          </a:p>
+          <a:p>
+            <a:r>
+              <a:rPr lang="en-MY" sz="900" dirty="0">
+                <a:solidFill>
+                  <a:schemeClr val="tx1">
+                    <a:lumMod val="85000"/>
+                    <a:lumOff val="15000"/>
+                  </a:schemeClr>
+                </a:solidFill>
+              </a:rPr>
+              <a:t>REVIEW_READY · BARIAH_FEEDBACK_IMPLEMENTED</a:t>
+            </a:r>
+          </a:p>
+          <a:p>
+            <a:r>
+              <a:rPr lang="en-MY" sz="900" dirty="0">
+                <a:solidFill>
+                  <a:schemeClr val="tx1">
+                    <a:lumMod val="85000"/>
+                    <a:lumOff val="15000"/>
+                  </a:schemeClr>
+                </a:solidFill>
+              </a:rPr>
+              <a:t>PENDING_TARGETED_CONFIRMATION · NOT_FOR_MMD_BUILD · MULTIMEDIA_NOT_PRODUCED</a:t>
             </a:r>
           </a:p>
           <a:p>
@@ -27667,8 +27667,8 @@
         </p:nvSpPr>
         <p:spPr>
           <a:xfrm>
-            <a:off x="723930" y="2450592"/>
-            <a:ext cx="2411730" cy="1481328"/>
+            <a:off x="723885" y="2450592"/>
+            <a:ext cx="2398014" cy="1481328"/>
           </a:xfrm>
           <a:prstGeom prst="rect">
             <a:avLst/>
@@ -27711,8 +27711,8 @@
         </p:nvSpPr>
         <p:spPr>
           <a:xfrm>
-            <a:off x="2715036" y="2542032"/>
-            <a:ext cx="310896" cy="310896"/>
+            <a:off x="2719563" y="2532888"/>
+            <a:ext cx="292608" cy="292608"/>
           </a:xfrm>
           <a:custGeom>
             <a:avLst/>
@@ -27770,8 +27770,8 @@
         </p:nvSpPr>
         <p:spPr>
           <a:xfrm>
-            <a:off x="3501420" y="2450592"/>
-            <a:ext cx="2411730" cy="1481328"/>
+            <a:off x="3505947" y="2450592"/>
+            <a:ext cx="2398014" cy="1481328"/>
           </a:xfrm>
           <a:prstGeom prst="rect">
             <a:avLst/>
@@ -27814,8 +27814,8 @@
         </p:nvSpPr>
         <p:spPr>
           <a:xfrm>
-            <a:off x="5492526" y="2542032"/>
-            <a:ext cx="310896" cy="310896"/>
+            <a:off x="5501625" y="2532888"/>
+            <a:ext cx="292608" cy="292608"/>
           </a:xfrm>
           <a:custGeom>
             <a:avLst/>
@@ -27873,8 +27873,8 @@
         </p:nvSpPr>
         <p:spPr>
           <a:xfrm>
-            <a:off x="6278910" y="2450592"/>
-            <a:ext cx="2411730" cy="1481328"/>
+            <a:off x="6288009" y="2450592"/>
+            <a:ext cx="2398014" cy="1481328"/>
           </a:xfrm>
           <a:prstGeom prst="rect">
             <a:avLst/>
@@ -27917,8 +27917,8 @@
         </p:nvSpPr>
         <p:spPr>
           <a:xfrm>
-            <a:off x="8270016" y="2542032"/>
-            <a:ext cx="310896" cy="310896"/>
+            <a:off x="8283687" y="2532888"/>
+            <a:ext cx="292608" cy="292608"/>
           </a:xfrm>
           <a:custGeom>
             <a:avLst/>
@@ -27976,8 +27976,8 @@
         </p:nvSpPr>
         <p:spPr>
           <a:xfrm>
-            <a:off x="9056400" y="2450592"/>
-            <a:ext cx="2411730" cy="1481328"/>
+            <a:off x="9070071" y="2450592"/>
+            <a:ext cx="2398014" cy="1481328"/>
           </a:xfrm>
           <a:prstGeom prst="rect">
             <a:avLst/>
@@ -28343,33 +28343,33 @@
                   </a:schemeClr>
                 </a:solidFill>
               </a:rPr>
-              <a:t>K5 PL06 T03 B02 — PAPAN CERITA v0.4 (BUKTI TIGA KELUARGA)</a:t>
-            </a:r>
-          </a:p>
-          <a:p>
-            <a:r>
-              <a:rPr lang="en-MY" sz="900" dirty="0">
-                <a:solidFill>
-                  <a:schemeClr val="tx1">
-                    <a:lumMod val="85000"/>
-                    <a:lumOff val="15000"/>
-                  </a:schemeClr>
-                </a:solidFill>
-              </a:rPr>
-              <a:t>PROOF_BUILD · V0_4_MODEL_DRIVEN</a:t>
-            </a:r>
-          </a:p>
-          <a:p>
-            <a:r>
-              <a:rPr lang="en-MY" sz="900" dirty="0">
-                <a:solidFill>
-                  <a:schemeClr val="tx1">
-                    <a:lumMod val="85000"/>
-                    <a:lumOff val="15000"/>
-                  </a:schemeClr>
-                </a:solidFill>
-              </a:rPr>
-              <a:t>NOT_FOR_MMD_BUILD · MULTIMEDIA_NOT_PRODUCED · PRODUCTION_APPROVAL_NOT_CLAIMED</a:t>
+              <a:t>K5 PL06 T03 B02 — PAPAN CERITA v0.4</a:t>
+            </a:r>
+          </a:p>
+          <a:p>
+            <a:r>
+              <a:rPr lang="en-MY" sz="900" dirty="0">
+                <a:solidFill>
+                  <a:schemeClr val="tx1">
+                    <a:lumMod val="85000"/>
+                    <a:lumOff val="15000"/>
+                  </a:schemeClr>
+                </a:solidFill>
+              </a:rPr>
+              <a:t>REVIEW_READY · BARIAH_FEEDBACK_IMPLEMENTED</a:t>
+            </a:r>
+          </a:p>
+          <a:p>
+            <a:r>
+              <a:rPr lang="en-MY" sz="900" dirty="0">
+                <a:solidFill>
+                  <a:schemeClr val="tx1">
+                    <a:lumMod val="85000"/>
+                    <a:lumOff val="15000"/>
+                  </a:schemeClr>
+                </a:solidFill>
+              </a:rPr>
+              <a:t>PENDING_TARGETED_CONFIRMATION · NOT_FOR_MMD_BUILD · MULTIMEDIA_NOT_PRODUCED</a:t>
             </a:r>
           </a:p>
           <a:p>
@@ -29007,8 +29007,8 @@
         </p:nvSpPr>
         <p:spPr>
           <a:xfrm>
-            <a:off x="723930" y="2450592"/>
-            <a:ext cx="2411730" cy="1481328"/>
+            <a:off x="723885" y="2450592"/>
+            <a:ext cx="2398014" cy="1481328"/>
           </a:xfrm>
           <a:prstGeom prst="rect">
             <a:avLst/>
@@ -29051,8 +29051,8 @@
         </p:nvSpPr>
         <p:spPr>
           <a:xfrm>
-            <a:off x="2715036" y="2542032"/>
-            <a:ext cx="310896" cy="310896"/>
+            <a:off x="2719563" y="2532888"/>
+            <a:ext cx="292608" cy="292608"/>
           </a:xfrm>
           <a:custGeom>
             <a:avLst/>
@@ -29110,8 +29110,8 @@
         </p:nvSpPr>
         <p:spPr>
           <a:xfrm>
-            <a:off x="3501420" y="2450592"/>
-            <a:ext cx="2411730" cy="1481328"/>
+            <a:off x="3505947" y="2450592"/>
+            <a:ext cx="2398014" cy="1481328"/>
           </a:xfrm>
           <a:prstGeom prst="rect">
             <a:avLst/>
@@ -29154,8 +29154,8 @@
         </p:nvSpPr>
         <p:spPr>
           <a:xfrm>
-            <a:off x="5492526" y="2542032"/>
-            <a:ext cx="310896" cy="310896"/>
+            <a:off x="5501625" y="2532888"/>
+            <a:ext cx="292608" cy="292608"/>
           </a:xfrm>
           <a:custGeom>
             <a:avLst/>
@@ -29213,8 +29213,8 @@
         </p:nvSpPr>
         <p:spPr>
           <a:xfrm>
-            <a:off x="6278910" y="2450592"/>
-            <a:ext cx="2411730" cy="1481328"/>
+            <a:off x="6288009" y="2450592"/>
+            <a:ext cx="2398014" cy="1481328"/>
           </a:xfrm>
           <a:prstGeom prst="rect">
             <a:avLst/>
@@ -29257,8 +29257,8 @@
         </p:nvSpPr>
         <p:spPr>
           <a:xfrm>
-            <a:off x="8270016" y="2542032"/>
-            <a:ext cx="310896" cy="310896"/>
+            <a:off x="8283687" y="2532888"/>
+            <a:ext cx="292608" cy="292608"/>
           </a:xfrm>
           <a:custGeom>
             <a:avLst/>
@@ -29316,8 +29316,8 @@
         </p:nvSpPr>
         <p:spPr>
           <a:xfrm>
-            <a:off x="9056400" y="2450592"/>
-            <a:ext cx="2411730" cy="1481328"/>
+            <a:off x="9070071" y="2450592"/>
+            <a:ext cx="2398014" cy="1481328"/>
           </a:xfrm>
           <a:prstGeom prst="rect">
             <a:avLst/>
@@ -29360,8 +29360,8 @@
         </p:nvSpPr>
         <p:spPr>
           <a:xfrm>
-            <a:off x="11047506" y="2542032"/>
-            <a:ext cx="310896" cy="310896"/>
+            <a:off x="11065749" y="2532888"/>
+            <a:ext cx="292608" cy="292608"/>
           </a:xfrm>
           <a:custGeom>
             <a:avLst/>
@@ -29742,33 +29742,33 @@
                   </a:schemeClr>
                 </a:solidFill>
               </a:rPr>
-              <a:t>K5 PL06 T03 B02 — PAPAN CERITA v0.4 (BUKTI TIGA KELUARGA)</a:t>
-            </a:r>
-          </a:p>
-          <a:p>
-            <a:r>
-              <a:rPr lang="en-MY" sz="900" dirty="0">
-                <a:solidFill>
-                  <a:schemeClr val="tx1">
-                    <a:lumMod val="85000"/>
-                    <a:lumOff val="15000"/>
-                  </a:schemeClr>
-                </a:solidFill>
-              </a:rPr>
-              <a:t>PROOF_BUILD · V0_4_MODEL_DRIVEN</a:t>
-            </a:r>
-          </a:p>
-          <a:p>
-            <a:r>
-              <a:rPr lang="en-MY" sz="900" dirty="0">
-                <a:solidFill>
-                  <a:schemeClr val="tx1">
-                    <a:lumMod val="85000"/>
-                    <a:lumOff val="15000"/>
-                  </a:schemeClr>
-                </a:solidFill>
-              </a:rPr>
-              <a:t>NOT_FOR_MMD_BUILD · MULTIMEDIA_NOT_PRODUCED · PRODUCTION_APPROVAL_NOT_CLAIMED</a:t>
+              <a:t>K5 PL06 T03 B02 — PAPAN CERITA v0.4</a:t>
+            </a:r>
+          </a:p>
+          <a:p>
+            <a:r>
+              <a:rPr lang="en-MY" sz="900" dirty="0">
+                <a:solidFill>
+                  <a:schemeClr val="tx1">
+                    <a:lumMod val="85000"/>
+                    <a:lumOff val="15000"/>
+                  </a:schemeClr>
+                </a:solidFill>
+              </a:rPr>
+              <a:t>REVIEW_READY · BARIAH_FEEDBACK_IMPLEMENTED</a:t>
+            </a:r>
+          </a:p>
+          <a:p>
+            <a:r>
+              <a:rPr lang="en-MY" sz="900" dirty="0">
+                <a:solidFill>
+                  <a:schemeClr val="tx1">
+                    <a:lumMod val="85000"/>
+                    <a:lumOff val="15000"/>
+                  </a:schemeClr>
+                </a:solidFill>
+              </a:rPr>
+              <a:t>PENDING_TARGETED_CONFIRMATION · NOT_FOR_MMD_BUILD · MULTIMEDIA_NOT_PRODUCED</a:t>
             </a:r>
           </a:p>
           <a:p>
@@ -30406,8 +30406,8 @@
         </p:nvSpPr>
         <p:spPr>
           <a:xfrm>
-            <a:off x="723930" y="2450592"/>
-            <a:ext cx="2411730" cy="1481328"/>
+            <a:off x="723885" y="2450592"/>
+            <a:ext cx="2398014" cy="1481328"/>
           </a:xfrm>
           <a:prstGeom prst="rect">
             <a:avLst/>
@@ -30450,8 +30450,8 @@
         </p:nvSpPr>
         <p:spPr>
           <a:xfrm>
-            <a:off x="2715036" y="2542032"/>
-            <a:ext cx="310896" cy="310896"/>
+            <a:off x="2719563" y="2532888"/>
+            <a:ext cx="292608" cy="292608"/>
           </a:xfrm>
           <a:custGeom>
             <a:avLst/>
@@ -30509,8 +30509,8 @@
         </p:nvSpPr>
         <p:spPr>
           <a:xfrm>
-            <a:off x="3501420" y="2450592"/>
-            <a:ext cx="2411730" cy="1481328"/>
+            <a:off x="3505947" y="2450592"/>
+            <a:ext cx="2398014" cy="1481328"/>
           </a:xfrm>
           <a:prstGeom prst="rect">
             <a:avLst/>
@@ -30553,8 +30553,8 @@
         </p:nvSpPr>
         <p:spPr>
           <a:xfrm>
-            <a:off x="5492526" y="2542032"/>
-            <a:ext cx="310896" cy="310896"/>
+            <a:off x="5501625" y="2532888"/>
+            <a:ext cx="292608" cy="292608"/>
           </a:xfrm>
           <a:custGeom>
             <a:avLst/>
@@ -30612,8 +30612,8 @@
         </p:nvSpPr>
         <p:spPr>
           <a:xfrm>
-            <a:off x="6278910" y="2450592"/>
-            <a:ext cx="2411730" cy="1481328"/>
+            <a:off x="6288009" y="2450592"/>
+            <a:ext cx="2398014" cy="1481328"/>
           </a:xfrm>
           <a:prstGeom prst="rect">
             <a:avLst/>
@@ -30656,8 +30656,8 @@
         </p:nvSpPr>
         <p:spPr>
           <a:xfrm>
-            <a:off x="8270016" y="2542032"/>
-            <a:ext cx="310896" cy="310896"/>
+            <a:off x="8283687" y="2532888"/>
+            <a:ext cx="292608" cy="292608"/>
           </a:xfrm>
           <a:custGeom>
             <a:avLst/>
@@ -30715,8 +30715,8 @@
         </p:nvSpPr>
         <p:spPr>
           <a:xfrm>
-            <a:off x="9056400" y="2450592"/>
-            <a:ext cx="2411730" cy="1481328"/>
+            <a:off x="9070071" y="2450592"/>
+            <a:ext cx="2398014" cy="1481328"/>
           </a:xfrm>
           <a:prstGeom prst="rect">
             <a:avLst/>
@@ -30759,8 +30759,8 @@
         </p:nvSpPr>
         <p:spPr>
           <a:xfrm>
-            <a:off x="11047506" y="2542032"/>
-            <a:ext cx="310896" cy="310896"/>
+            <a:off x="11065749" y="2532888"/>
+            <a:ext cx="292608" cy="292608"/>
           </a:xfrm>
           <a:custGeom>
             <a:avLst/>
@@ -30900,33 +30900,33 @@
                   </a:schemeClr>
                 </a:solidFill>
               </a:rPr>
-              <a:t>K5 PL06 T03 B02 — PAPAN CERITA v0.4 (BUKTI TIGA KELUARGA)</a:t>
-            </a:r>
-          </a:p>
-          <a:p>
-            <a:r>
-              <a:rPr lang="en-MY" sz="900" dirty="0">
-                <a:solidFill>
-                  <a:schemeClr val="tx1">
-                    <a:lumMod val="85000"/>
-                    <a:lumOff val="15000"/>
-                  </a:schemeClr>
-                </a:solidFill>
-              </a:rPr>
-              <a:t>PROOF_BUILD · V0_4_MODEL_DRIVEN</a:t>
-            </a:r>
-          </a:p>
-          <a:p>
-            <a:r>
-              <a:rPr lang="en-MY" sz="900" dirty="0">
-                <a:solidFill>
-                  <a:schemeClr val="tx1">
-                    <a:lumMod val="85000"/>
-                    <a:lumOff val="15000"/>
-                  </a:schemeClr>
-                </a:solidFill>
-              </a:rPr>
-              <a:t>NOT_FOR_MMD_BUILD · MULTIMEDIA_NOT_PRODUCED · PRODUCTION_APPROVAL_NOT_CLAIMED</a:t>
+              <a:t>K5 PL06 T03 B02 — PAPAN CERITA v0.4</a:t>
+            </a:r>
+          </a:p>
+          <a:p>
+            <a:r>
+              <a:rPr lang="en-MY" sz="900" dirty="0">
+                <a:solidFill>
+                  <a:schemeClr val="tx1">
+                    <a:lumMod val="85000"/>
+                    <a:lumOff val="15000"/>
+                  </a:schemeClr>
+                </a:solidFill>
+              </a:rPr>
+              <a:t>REVIEW_READY · BARIAH_FEEDBACK_IMPLEMENTED</a:t>
+            </a:r>
+          </a:p>
+          <a:p>
+            <a:r>
+              <a:rPr lang="en-MY" sz="900" dirty="0">
+                <a:solidFill>
+                  <a:schemeClr val="tx1">
+                    <a:lumMod val="85000"/>
+                    <a:lumOff val="15000"/>
+                  </a:schemeClr>
+                </a:solidFill>
+              </a:rPr>
+              <a:t>PENDING_TARGETED_CONFIRMATION · NOT_FOR_MMD_BUILD · MULTIMEDIA_NOT_PRODUCED</a:t>
             </a:r>
           </a:p>
           <a:p>
@@ -31797,33 +31797,33 @@
                   </a:schemeClr>
                 </a:solidFill>
               </a:rPr>
-              <a:t>K5 PL06 T03 B02 — PAPAN CERITA v0.4 (BUKTI TIGA KELUARGA)</a:t>
-            </a:r>
-          </a:p>
-          <a:p>
-            <a:r>
-              <a:rPr lang="en-MY" sz="900" dirty="0">
-                <a:solidFill>
-                  <a:schemeClr val="tx1">
-                    <a:lumMod val="85000"/>
-                    <a:lumOff val="15000"/>
-                  </a:schemeClr>
-                </a:solidFill>
-              </a:rPr>
-              <a:t>PROOF_BUILD · V0_4_MODEL_DRIVEN</a:t>
-            </a:r>
-          </a:p>
-          <a:p>
-            <a:r>
-              <a:rPr lang="en-MY" sz="900" dirty="0">
-                <a:solidFill>
-                  <a:schemeClr val="tx1">
-                    <a:lumMod val="85000"/>
-                    <a:lumOff val="15000"/>
-                  </a:schemeClr>
-                </a:solidFill>
-              </a:rPr>
-              <a:t>NOT_FOR_MMD_BUILD · MULTIMEDIA_NOT_PRODUCED · PRODUCTION_APPROVAL_NOT_CLAIMED</a:t>
+              <a:t>K5 PL06 T03 B02 — PAPAN CERITA v0.4</a:t>
+            </a:r>
+          </a:p>
+          <a:p>
+            <a:r>
+              <a:rPr lang="en-MY" sz="900" dirty="0">
+                <a:solidFill>
+                  <a:schemeClr val="tx1">
+                    <a:lumMod val="85000"/>
+                    <a:lumOff val="15000"/>
+                  </a:schemeClr>
+                </a:solidFill>
+              </a:rPr>
+              <a:t>REVIEW_READY · BARIAH_FEEDBACK_IMPLEMENTED</a:t>
+            </a:r>
+          </a:p>
+          <a:p>
+            <a:r>
+              <a:rPr lang="en-MY" sz="900" dirty="0">
+                <a:solidFill>
+                  <a:schemeClr val="tx1">
+                    <a:lumMod val="85000"/>
+                    <a:lumOff val="15000"/>
+                  </a:schemeClr>
+                </a:solidFill>
+              </a:rPr>
+              <a:t>PENDING_TARGETED_CONFIRMATION · NOT_FOR_MMD_BUILD · MULTIMEDIA_NOT_PRODUCED</a:t>
             </a:r>
           </a:p>
           <a:p>
@@ -32695,33 +32695,33 @@
                   </a:schemeClr>
                 </a:solidFill>
               </a:rPr>
-              <a:t>K5 PL06 T03 B02 — PAPAN CERITA v0.4 (BUKTI TIGA KELUARGA)</a:t>
-            </a:r>
-          </a:p>
-          <a:p>
-            <a:r>
-              <a:rPr lang="en-MY" sz="900" dirty="0">
-                <a:solidFill>
-                  <a:schemeClr val="tx1">
-                    <a:lumMod val="85000"/>
-                    <a:lumOff val="15000"/>
-                  </a:schemeClr>
-                </a:solidFill>
-              </a:rPr>
-              <a:t>PROOF_BUILD · V0_4_MODEL_DRIVEN</a:t>
-            </a:r>
-          </a:p>
-          <a:p>
-            <a:r>
-              <a:rPr lang="en-MY" sz="900" dirty="0">
-                <a:solidFill>
-                  <a:schemeClr val="tx1">
-                    <a:lumMod val="85000"/>
-                    <a:lumOff val="15000"/>
-                  </a:schemeClr>
-                </a:solidFill>
-              </a:rPr>
-              <a:t>NOT_FOR_MMD_BUILD · MULTIMEDIA_NOT_PRODUCED · PRODUCTION_APPROVAL_NOT_CLAIMED</a:t>
+              <a:t>K5 PL06 T03 B02 — PAPAN CERITA v0.4</a:t>
+            </a:r>
+          </a:p>
+          <a:p>
+            <a:r>
+              <a:rPr lang="en-MY" sz="900" dirty="0">
+                <a:solidFill>
+                  <a:schemeClr val="tx1">
+                    <a:lumMod val="85000"/>
+                    <a:lumOff val="15000"/>
+                  </a:schemeClr>
+                </a:solidFill>
+              </a:rPr>
+              <a:t>REVIEW_READY · BARIAH_FEEDBACK_IMPLEMENTED</a:t>
+            </a:r>
+          </a:p>
+          <a:p>
+            <a:r>
+              <a:rPr lang="en-MY" sz="900" dirty="0">
+                <a:solidFill>
+                  <a:schemeClr val="tx1">
+                    <a:lumMod val="85000"/>
+                    <a:lumOff val="15000"/>
+                  </a:schemeClr>
+                </a:solidFill>
+              </a:rPr>
+              <a:t>PENDING_TARGETED_CONFIRMATION · NOT_FOR_MMD_BUILD · MULTIMEDIA_NOT_PRODUCED</a:t>
             </a:r>
           </a:p>
           <a:p>
@@ -33530,33 +33530,33 @@
                   </a:schemeClr>
                 </a:solidFill>
               </a:rPr>
-              <a:t>K5 PL06 T03 B02 — PAPAN CERITA v0.4 (BUKTI TIGA KELUARGA)</a:t>
-            </a:r>
-          </a:p>
-          <a:p>
-            <a:r>
-              <a:rPr lang="en-MY" sz="900" dirty="0">
-                <a:solidFill>
-                  <a:schemeClr val="tx1">
-                    <a:lumMod val="85000"/>
-                    <a:lumOff val="15000"/>
-                  </a:schemeClr>
-                </a:solidFill>
-              </a:rPr>
-              <a:t>PROOF_BUILD · V0_4_MODEL_DRIVEN</a:t>
-            </a:r>
-          </a:p>
-          <a:p>
-            <a:r>
-              <a:rPr lang="en-MY" sz="900" dirty="0">
-                <a:solidFill>
-                  <a:schemeClr val="tx1">
-                    <a:lumMod val="85000"/>
-                    <a:lumOff val="15000"/>
-                  </a:schemeClr>
-                </a:solidFill>
-              </a:rPr>
-              <a:t>NOT_FOR_MMD_BUILD · MULTIMEDIA_NOT_PRODUCED · PRODUCTION_APPROVAL_NOT_CLAIMED</a:t>
+              <a:t>K5 PL06 T03 B02 — PAPAN CERITA v0.4</a:t>
+            </a:r>
+          </a:p>
+          <a:p>
+            <a:r>
+              <a:rPr lang="en-MY" sz="900" dirty="0">
+                <a:solidFill>
+                  <a:schemeClr val="tx1">
+                    <a:lumMod val="85000"/>
+                    <a:lumOff val="15000"/>
+                  </a:schemeClr>
+                </a:solidFill>
+              </a:rPr>
+              <a:t>REVIEW_READY · BARIAH_FEEDBACK_IMPLEMENTED</a:t>
+            </a:r>
+          </a:p>
+          <a:p>
+            <a:r>
+              <a:rPr lang="en-MY" sz="900" dirty="0">
+                <a:solidFill>
+                  <a:schemeClr val="tx1">
+                    <a:lumMod val="85000"/>
+                    <a:lumOff val="15000"/>
+                  </a:schemeClr>
+                </a:solidFill>
+              </a:rPr>
+              <a:t>PENDING_TARGETED_CONFIRMATION · NOT_FOR_MMD_BUILD · MULTIMEDIA_NOT_PRODUCED</a:t>
             </a:r>
           </a:p>
           <a:p>
@@ -34309,33 +34309,33 @@
                   </a:schemeClr>
                 </a:solidFill>
               </a:rPr>
-              <a:t>K5 PL06 T03 B02 — PAPAN CERITA v0.4 (BUKTI TIGA KELUARGA)</a:t>
-            </a:r>
-          </a:p>
-          <a:p>
-            <a:r>
-              <a:rPr lang="en-MY" sz="900" dirty="0">
-                <a:solidFill>
-                  <a:schemeClr val="tx1">
-                    <a:lumMod val="85000"/>
-                    <a:lumOff val="15000"/>
-                  </a:schemeClr>
-                </a:solidFill>
-              </a:rPr>
-              <a:t>PROOF_BUILD · V0_4_MODEL_DRIVEN</a:t>
-            </a:r>
-          </a:p>
-          <a:p>
-            <a:r>
-              <a:rPr lang="en-MY" sz="900" dirty="0">
-                <a:solidFill>
-                  <a:schemeClr val="tx1">
-                    <a:lumMod val="85000"/>
-                    <a:lumOff val="15000"/>
-                  </a:schemeClr>
-                </a:solidFill>
-              </a:rPr>
-              <a:t>NOT_FOR_MMD_BUILD · MULTIMEDIA_NOT_PRODUCED · PRODUCTION_APPROVAL_NOT_CLAIMED</a:t>
+              <a:t>K5 PL06 T03 B02 — PAPAN CERITA v0.4</a:t>
+            </a:r>
+          </a:p>
+          <a:p>
+            <a:r>
+              <a:rPr lang="en-MY" sz="900" dirty="0">
+                <a:solidFill>
+                  <a:schemeClr val="tx1">
+                    <a:lumMod val="85000"/>
+                    <a:lumOff val="15000"/>
+                  </a:schemeClr>
+                </a:solidFill>
+              </a:rPr>
+              <a:t>REVIEW_READY · BARIAH_FEEDBACK_IMPLEMENTED</a:t>
+            </a:r>
+          </a:p>
+          <a:p>
+            <a:r>
+              <a:rPr lang="en-MY" sz="900" dirty="0">
+                <a:solidFill>
+                  <a:schemeClr val="tx1">
+                    <a:lumMod val="85000"/>
+                    <a:lumOff val="15000"/>
+                  </a:schemeClr>
+                </a:solidFill>
+              </a:rPr>
+              <a:t>PENDING_TARGETED_CONFIRMATION · NOT_FOR_MMD_BUILD · MULTIMEDIA_NOT_PRODUCED</a:t>
             </a:r>
           </a:p>
           <a:p>
@@ -35237,33 +35237,33 @@
                   </a:schemeClr>
                 </a:solidFill>
               </a:rPr>
-              <a:t>K5 PL06 T03 B02 — PAPAN CERITA v0.4 (BUKTI TIGA KELUARGA)</a:t>
-            </a:r>
-          </a:p>
-          <a:p>
-            <a:r>
-              <a:rPr lang="en-MY" sz="900" dirty="0">
-                <a:solidFill>
-                  <a:schemeClr val="tx1">
-                    <a:lumMod val="85000"/>
-                    <a:lumOff val="15000"/>
-                  </a:schemeClr>
-                </a:solidFill>
-              </a:rPr>
-              <a:t>PROOF_BUILD · V0_4_MODEL_DRIVEN</a:t>
-            </a:r>
-          </a:p>
-          <a:p>
-            <a:r>
-              <a:rPr lang="en-MY" sz="900" dirty="0">
-                <a:solidFill>
-                  <a:schemeClr val="tx1">
-                    <a:lumMod val="85000"/>
-                    <a:lumOff val="15000"/>
-                  </a:schemeClr>
-                </a:solidFill>
-              </a:rPr>
-              <a:t>NOT_FOR_MMD_BUILD · MULTIMEDIA_NOT_PRODUCED · PRODUCTION_APPROVAL_NOT_CLAIMED</a:t>
+              <a:t>K5 PL06 T03 B02 — PAPAN CERITA v0.4</a:t>
+            </a:r>
+          </a:p>
+          <a:p>
+            <a:r>
+              <a:rPr lang="en-MY" sz="900" dirty="0">
+                <a:solidFill>
+                  <a:schemeClr val="tx1">
+                    <a:lumMod val="85000"/>
+                    <a:lumOff val="15000"/>
+                  </a:schemeClr>
+                </a:solidFill>
+              </a:rPr>
+              <a:t>REVIEW_READY · BARIAH_FEEDBACK_IMPLEMENTED</a:t>
+            </a:r>
+          </a:p>
+          <a:p>
+            <a:r>
+              <a:rPr lang="en-MY" sz="900" dirty="0">
+                <a:solidFill>
+                  <a:schemeClr val="tx1">
+                    <a:lumMod val="85000"/>
+                    <a:lumOff val="15000"/>
+                  </a:schemeClr>
+                </a:solidFill>
+              </a:rPr>
+              <a:t>PENDING_TARGETED_CONFIRMATION · NOT_FOR_MMD_BUILD · MULTIMEDIA_NOT_PRODUCED</a:t>
             </a:r>
           </a:p>
           <a:p>
@@ -35993,33 +35993,33 @@
                   </a:schemeClr>
                 </a:solidFill>
               </a:rPr>
-              <a:t>K5 PL06 T03 B02 — PAPAN CERITA v0.4 (BUKTI TIGA KELUARGA)</a:t>
-            </a:r>
-          </a:p>
-          <a:p>
-            <a:r>
-              <a:rPr lang="en-MY" sz="900" dirty="0">
-                <a:solidFill>
-                  <a:schemeClr val="tx1">
-                    <a:lumMod val="85000"/>
-                    <a:lumOff val="15000"/>
-                  </a:schemeClr>
-                </a:solidFill>
-              </a:rPr>
-              <a:t>PROOF_BUILD · V0_4_MODEL_DRIVEN</a:t>
-            </a:r>
-          </a:p>
-          <a:p>
-            <a:r>
-              <a:rPr lang="en-MY" sz="900" dirty="0">
-                <a:solidFill>
-                  <a:schemeClr val="tx1">
-                    <a:lumMod val="85000"/>
-                    <a:lumOff val="15000"/>
-                  </a:schemeClr>
-                </a:solidFill>
-              </a:rPr>
-              <a:t>NOT_FOR_MMD_BUILD · MULTIMEDIA_NOT_PRODUCED · PRODUCTION_APPROVAL_NOT_CLAIMED</a:t>
+              <a:t>K5 PL06 T03 B02 — PAPAN CERITA v0.4</a:t>
+            </a:r>
+          </a:p>
+          <a:p>
+            <a:r>
+              <a:rPr lang="en-MY" sz="900" dirty="0">
+                <a:solidFill>
+                  <a:schemeClr val="tx1">
+                    <a:lumMod val="85000"/>
+                    <a:lumOff val="15000"/>
+                  </a:schemeClr>
+                </a:solidFill>
+              </a:rPr>
+              <a:t>REVIEW_READY · BARIAH_FEEDBACK_IMPLEMENTED</a:t>
+            </a:r>
+          </a:p>
+          <a:p>
+            <a:r>
+              <a:rPr lang="en-MY" sz="900" dirty="0">
+                <a:solidFill>
+                  <a:schemeClr val="tx1">
+                    <a:lumMod val="85000"/>
+                    <a:lumOff val="15000"/>
+                  </a:schemeClr>
+                </a:solidFill>
+              </a:rPr>
+              <a:t>PENDING_TARGETED_CONFIRMATION · NOT_FOR_MMD_BUILD · MULTIMEDIA_NOT_PRODUCED</a:t>
             </a:r>
           </a:p>
           <a:p>
@@ -36679,33 +36679,33 @@
                   </a:schemeClr>
                 </a:solidFill>
               </a:rPr>
-              <a:t>K5 PL06 T03 B02 — PAPAN CERITA v0.4 (BUKTI TIGA KELUARGA)</a:t>
-            </a:r>
-          </a:p>
-          <a:p>
-            <a:r>
-              <a:rPr lang="en-MY" sz="900" dirty="0">
-                <a:solidFill>
-                  <a:schemeClr val="tx1">
-                    <a:lumMod val="85000"/>
-                    <a:lumOff val="15000"/>
-                  </a:schemeClr>
-                </a:solidFill>
-              </a:rPr>
-              <a:t>PROOF_BUILD · V0_4_MODEL_DRIVEN</a:t>
-            </a:r>
-          </a:p>
-          <a:p>
-            <a:r>
-              <a:rPr lang="en-MY" sz="900" dirty="0">
-                <a:solidFill>
-                  <a:schemeClr val="tx1">
-                    <a:lumMod val="85000"/>
-                    <a:lumOff val="15000"/>
-                  </a:schemeClr>
-                </a:solidFill>
-              </a:rPr>
-              <a:t>NOT_FOR_MMD_BUILD · MULTIMEDIA_NOT_PRODUCED · PRODUCTION_APPROVAL_NOT_CLAIMED</a:t>
+              <a:t>K5 PL06 T03 B02 — PAPAN CERITA v0.4</a:t>
+            </a:r>
+          </a:p>
+          <a:p>
+            <a:r>
+              <a:rPr lang="en-MY" sz="900" dirty="0">
+                <a:solidFill>
+                  <a:schemeClr val="tx1">
+                    <a:lumMod val="85000"/>
+                    <a:lumOff val="15000"/>
+                  </a:schemeClr>
+                </a:solidFill>
+              </a:rPr>
+              <a:t>REVIEW_READY · BARIAH_FEEDBACK_IMPLEMENTED</a:t>
+            </a:r>
+          </a:p>
+          <a:p>
+            <a:r>
+              <a:rPr lang="en-MY" sz="900" dirty="0">
+                <a:solidFill>
+                  <a:schemeClr val="tx1">
+                    <a:lumMod val="85000"/>
+                    <a:lumOff val="15000"/>
+                  </a:schemeClr>
+                </a:solidFill>
+              </a:rPr>
+              <a:t>PENDING_TARGETED_CONFIRMATION · NOT_FOR_MMD_BUILD · MULTIMEDIA_NOT_PRODUCED</a:t>
             </a:r>
           </a:p>
           <a:p>
@@ -37383,33 +37383,33 @@
                   </a:schemeClr>
                 </a:solidFill>
               </a:rPr>
-              <a:t>K5 PL06 T03 B02 — PAPAN CERITA v0.4 (BUKTI TIGA KELUARGA)</a:t>
-            </a:r>
-          </a:p>
-          <a:p>
-            <a:r>
-              <a:rPr lang="en-MY" sz="900" dirty="0">
-                <a:solidFill>
-                  <a:schemeClr val="tx1">
-                    <a:lumMod val="85000"/>
-                    <a:lumOff val="15000"/>
-                  </a:schemeClr>
-                </a:solidFill>
-              </a:rPr>
-              <a:t>PROOF_BUILD · V0_4_MODEL_DRIVEN</a:t>
-            </a:r>
-          </a:p>
-          <a:p>
-            <a:r>
-              <a:rPr lang="en-MY" sz="900" dirty="0">
-                <a:solidFill>
-                  <a:schemeClr val="tx1">
-                    <a:lumMod val="85000"/>
-                    <a:lumOff val="15000"/>
-                  </a:schemeClr>
-                </a:solidFill>
-              </a:rPr>
-              <a:t>NOT_FOR_MMD_BUILD · MULTIMEDIA_NOT_PRODUCED · PRODUCTION_APPROVAL_NOT_CLAIMED</a:t>
+              <a:t>K5 PL06 T03 B02 — PAPAN CERITA v0.4</a:t>
+            </a:r>
+          </a:p>
+          <a:p>
+            <a:r>
+              <a:rPr lang="en-MY" sz="900" dirty="0">
+                <a:solidFill>
+                  <a:schemeClr val="tx1">
+                    <a:lumMod val="85000"/>
+                    <a:lumOff val="15000"/>
+                  </a:schemeClr>
+                </a:solidFill>
+              </a:rPr>
+              <a:t>REVIEW_READY · BARIAH_FEEDBACK_IMPLEMENTED</a:t>
+            </a:r>
+          </a:p>
+          <a:p>
+            <a:r>
+              <a:rPr lang="en-MY" sz="900" dirty="0">
+                <a:solidFill>
+                  <a:schemeClr val="tx1">
+                    <a:lumMod val="85000"/>
+                    <a:lumOff val="15000"/>
+                  </a:schemeClr>
+                </a:solidFill>
+              </a:rPr>
+              <a:t>PENDING_TARGETED_CONFIRMATION · NOT_FOR_MMD_BUILD · MULTIMEDIA_NOT_PRODUCED</a:t>
             </a:r>
           </a:p>
           <a:p>
@@ -38061,33 +38061,33 @@
                   </a:schemeClr>
                 </a:solidFill>
               </a:rPr>
-              <a:t>K5 PL06 T03 B02 — PAPAN CERITA v0.4 (BUKTI TIGA KELUARGA)</a:t>
-            </a:r>
-          </a:p>
-          <a:p>
-            <a:r>
-              <a:rPr lang="en-MY" sz="900" dirty="0">
-                <a:solidFill>
-                  <a:schemeClr val="tx1">
-                    <a:lumMod val="85000"/>
-                    <a:lumOff val="15000"/>
-                  </a:schemeClr>
-                </a:solidFill>
-              </a:rPr>
-              <a:t>PROOF_BUILD · V0_4_MODEL_DRIVEN</a:t>
-            </a:r>
-          </a:p>
-          <a:p>
-            <a:r>
-              <a:rPr lang="en-MY" sz="900" dirty="0">
-                <a:solidFill>
-                  <a:schemeClr val="tx1">
-                    <a:lumMod val="85000"/>
-                    <a:lumOff val="15000"/>
-                  </a:schemeClr>
-                </a:solidFill>
-              </a:rPr>
-              <a:t>NOT_FOR_MMD_BUILD · MULTIMEDIA_NOT_PRODUCED · PRODUCTION_APPROVAL_NOT_CLAIMED</a:t>
+              <a:t>K5 PL06 T03 B02 — PAPAN CERITA v0.4</a:t>
+            </a:r>
+          </a:p>
+          <a:p>
+            <a:r>
+              <a:rPr lang="en-MY" sz="900" dirty="0">
+                <a:solidFill>
+                  <a:schemeClr val="tx1">
+                    <a:lumMod val="85000"/>
+                    <a:lumOff val="15000"/>
+                  </a:schemeClr>
+                </a:solidFill>
+              </a:rPr>
+              <a:t>REVIEW_READY · BARIAH_FEEDBACK_IMPLEMENTED</a:t>
+            </a:r>
+          </a:p>
+          <a:p>
+            <a:r>
+              <a:rPr lang="en-MY" sz="900" dirty="0">
+                <a:solidFill>
+                  <a:schemeClr val="tx1">
+                    <a:lumMod val="85000"/>
+                    <a:lumOff val="15000"/>
+                  </a:schemeClr>
+                </a:solidFill>
+              </a:rPr>
+              <a:t>PENDING_TARGETED_CONFIRMATION · NOT_FOR_MMD_BUILD · MULTIMEDIA_NOT_PRODUCED</a:t>
             </a:r>
           </a:p>
           <a:p>
@@ -38511,8 +38511,8 @@
         </p:nvSpPr>
         <p:spPr>
           <a:xfrm>
-            <a:off x="723930" y="1965960"/>
-            <a:ext cx="3291840" cy="1481328"/>
+            <a:off x="723885" y="1965960"/>
+            <a:ext cx="3325368" cy="1481328"/>
           </a:xfrm>
           <a:prstGeom prst="rect">
             <a:avLst/>
@@ -38555,8 +38555,8 @@
         </p:nvSpPr>
         <p:spPr>
           <a:xfrm>
-            <a:off x="4450110" y="1965960"/>
-            <a:ext cx="3291840" cy="1481328"/>
+            <a:off x="4433301" y="1965960"/>
+            <a:ext cx="3325368" cy="1481328"/>
           </a:xfrm>
           <a:prstGeom prst="rect">
             <a:avLst/>
@@ -38599,8 +38599,8 @@
         </p:nvSpPr>
         <p:spPr>
           <a:xfrm>
-            <a:off x="8176290" y="1965960"/>
-            <a:ext cx="3291840" cy="1481328"/>
+            <a:off x="8142717" y="1965960"/>
+            <a:ext cx="3325368" cy="1481328"/>
           </a:xfrm>
           <a:prstGeom prst="rect">
             <a:avLst/>
@@ -38643,8 +38643,8 @@
         </p:nvSpPr>
         <p:spPr>
           <a:xfrm>
-            <a:off x="2586975" y="3758184"/>
-            <a:ext cx="3291840" cy="1481328"/>
+            <a:off x="2578593" y="3721608"/>
+            <a:ext cx="3325368" cy="1481328"/>
           </a:xfrm>
           <a:prstGeom prst="rect">
             <a:avLst/>
@@ -38687,8 +38687,8 @@
         </p:nvSpPr>
         <p:spPr>
           <a:xfrm>
-            <a:off x="6313155" y="3758184"/>
-            <a:ext cx="3291840" cy="1481328"/>
+            <a:off x="6288009" y="3721608"/>
+            <a:ext cx="3325368" cy="1481328"/>
           </a:xfrm>
           <a:prstGeom prst="rect">
             <a:avLst/>
@@ -38798,33 +38798,33 @@
                   </a:schemeClr>
                 </a:solidFill>
               </a:rPr>
-              <a:t>K5 PL06 T03 B02 — PAPAN CERITA v0.4 (BUKTI TIGA KELUARGA)</a:t>
-            </a:r>
-          </a:p>
-          <a:p>
-            <a:r>
-              <a:rPr lang="en-MY" sz="900" dirty="0">
-                <a:solidFill>
-                  <a:schemeClr val="tx1">
-                    <a:lumMod val="85000"/>
-                    <a:lumOff val="15000"/>
-                  </a:schemeClr>
-                </a:solidFill>
-              </a:rPr>
-              <a:t>PROOF_BUILD · V0_4_MODEL_DRIVEN</a:t>
-            </a:r>
-          </a:p>
-          <a:p>
-            <a:r>
-              <a:rPr lang="en-MY" sz="900" dirty="0">
-                <a:solidFill>
-                  <a:schemeClr val="tx1">
-                    <a:lumMod val="85000"/>
-                    <a:lumOff val="15000"/>
-                  </a:schemeClr>
-                </a:solidFill>
-              </a:rPr>
-              <a:t>NOT_FOR_MMD_BUILD · MULTIMEDIA_NOT_PRODUCED · PRODUCTION_APPROVAL_NOT_CLAIMED</a:t>
+              <a:t>K5 PL06 T03 B02 — PAPAN CERITA v0.4</a:t>
+            </a:r>
+          </a:p>
+          <a:p>
+            <a:r>
+              <a:rPr lang="en-MY" sz="900" dirty="0">
+                <a:solidFill>
+                  <a:schemeClr val="tx1">
+                    <a:lumMod val="85000"/>
+                    <a:lumOff val="15000"/>
+                  </a:schemeClr>
+                </a:solidFill>
+              </a:rPr>
+              <a:t>REVIEW_READY · BARIAH_FEEDBACK_IMPLEMENTED</a:t>
+            </a:r>
+          </a:p>
+          <a:p>
+            <a:r>
+              <a:rPr lang="en-MY" sz="900" dirty="0">
+                <a:solidFill>
+                  <a:schemeClr val="tx1">
+                    <a:lumMod val="85000"/>
+                    <a:lumOff val="15000"/>
+                  </a:schemeClr>
+                </a:solidFill>
+              </a:rPr>
+              <a:t>PENDING_TARGETED_CONFIRMATION · NOT_FOR_MMD_BUILD · MULTIMEDIA_NOT_PRODUCED</a:t>
             </a:r>
           </a:p>
           <a:p>
@@ -39508,8 +39508,8 @@
         </p:nvSpPr>
         <p:spPr>
           <a:xfrm>
-            <a:off x="723930" y="1965960"/>
-            <a:ext cx="3291840" cy="1481328"/>
+            <a:off x="723885" y="1965960"/>
+            <a:ext cx="3325368" cy="1481328"/>
           </a:xfrm>
           <a:prstGeom prst="rect">
             <a:avLst/>
@@ -39552,8 +39552,8 @@
         </p:nvSpPr>
         <p:spPr>
           <a:xfrm>
-            <a:off x="3595146" y="2057400"/>
-            <a:ext cx="310896" cy="310896"/>
+            <a:off x="3646917" y="2048256"/>
+            <a:ext cx="292608" cy="292608"/>
           </a:xfrm>
           <a:custGeom>
             <a:avLst/>
@@ -39611,8 +39611,8 @@
         </p:nvSpPr>
         <p:spPr>
           <a:xfrm>
-            <a:off x="4450110" y="1965960"/>
-            <a:ext cx="3291840" cy="1481328"/>
+            <a:off x="4433301" y="1965960"/>
+            <a:ext cx="3325368" cy="1481328"/>
           </a:xfrm>
           <a:prstGeom prst="rect">
             <a:avLst/>
@@ -39655,8 +39655,8 @@
         </p:nvSpPr>
         <p:spPr>
           <a:xfrm>
-            <a:off x="8176290" y="1965960"/>
-            <a:ext cx="3291840" cy="1481328"/>
+            <a:off x="8142717" y="1965960"/>
+            <a:ext cx="3325368" cy="1481328"/>
           </a:xfrm>
           <a:prstGeom prst="rect">
             <a:avLst/>
@@ -39699,8 +39699,8 @@
         </p:nvSpPr>
         <p:spPr>
           <a:xfrm>
-            <a:off x="2586975" y="3758184"/>
-            <a:ext cx="3291840" cy="1481328"/>
+            <a:off x="2578593" y="3721608"/>
+            <a:ext cx="3325368" cy="1481328"/>
           </a:xfrm>
           <a:prstGeom prst="rect">
             <a:avLst/>
@@ -39743,8 +39743,8 @@
         </p:nvSpPr>
         <p:spPr>
           <a:xfrm>
-            <a:off x="6313155" y="3758184"/>
-            <a:ext cx="3291840" cy="1481328"/>
+            <a:off x="6288009" y="3721608"/>
+            <a:ext cx="3325368" cy="1481328"/>
           </a:xfrm>
           <a:prstGeom prst="rect">
             <a:avLst/>
@@ -40210,33 +40210,33 @@
                   </a:schemeClr>
                 </a:solidFill>
               </a:rPr>
-              <a:t>K5 PL06 T03 B02 — PAPAN CERITA v0.4 (BUKTI TIGA KELUARGA)</a:t>
-            </a:r>
-          </a:p>
-          <a:p>
-            <a:r>
-              <a:rPr lang="en-MY" sz="900" dirty="0">
-                <a:solidFill>
-                  <a:schemeClr val="tx1">
-                    <a:lumMod val="85000"/>
-                    <a:lumOff val="15000"/>
-                  </a:schemeClr>
-                </a:solidFill>
-              </a:rPr>
-              <a:t>PROOF_BUILD · V0_4_MODEL_DRIVEN</a:t>
-            </a:r>
-          </a:p>
-          <a:p>
-            <a:r>
-              <a:rPr lang="en-MY" sz="900" dirty="0">
-                <a:solidFill>
-                  <a:schemeClr val="tx1">
-                    <a:lumMod val="85000"/>
-                    <a:lumOff val="15000"/>
-                  </a:schemeClr>
-                </a:solidFill>
-              </a:rPr>
-              <a:t>NOT_FOR_MMD_BUILD · MULTIMEDIA_NOT_PRODUCED · PRODUCTION_APPROVAL_NOT_CLAIMED</a:t>
+              <a:t>K5 PL06 T03 B02 — PAPAN CERITA v0.4</a:t>
+            </a:r>
+          </a:p>
+          <a:p>
+            <a:r>
+              <a:rPr lang="en-MY" sz="900" dirty="0">
+                <a:solidFill>
+                  <a:schemeClr val="tx1">
+                    <a:lumMod val="85000"/>
+                    <a:lumOff val="15000"/>
+                  </a:schemeClr>
+                </a:solidFill>
+              </a:rPr>
+              <a:t>REVIEW_READY · BARIAH_FEEDBACK_IMPLEMENTED</a:t>
+            </a:r>
+          </a:p>
+          <a:p>
+            <a:r>
+              <a:rPr lang="en-MY" sz="900" dirty="0">
+                <a:solidFill>
+                  <a:schemeClr val="tx1">
+                    <a:lumMod val="85000"/>
+                    <a:lumOff val="15000"/>
+                  </a:schemeClr>
+                </a:solidFill>
+              </a:rPr>
+              <a:t>PENDING_TARGETED_CONFIRMATION · NOT_FOR_MMD_BUILD · MULTIMEDIA_NOT_PRODUCED</a:t>
             </a:r>
           </a:p>
           <a:p>
@@ -40764,8 +40764,8 @@
         </p:nvSpPr>
         <p:spPr>
           <a:xfrm>
-            <a:off x="723930" y="1965960"/>
-            <a:ext cx="3291840" cy="1481328"/>
+            <a:off x="723885" y="1965960"/>
+            <a:ext cx="3325368" cy="1481328"/>
           </a:xfrm>
           <a:prstGeom prst="rect">
             <a:avLst/>
@@ -40808,8 +40808,8 @@
         </p:nvSpPr>
         <p:spPr>
           <a:xfrm>
-            <a:off x="3595146" y="2057400"/>
-            <a:ext cx="310896" cy="310896"/>
+            <a:off x="3646917" y="2048256"/>
+            <a:ext cx="292608" cy="292608"/>
           </a:xfrm>
           <a:custGeom>
             <a:avLst/>
@@ -40867,8 +40867,8 @@
         </p:nvSpPr>
         <p:spPr>
           <a:xfrm>
-            <a:off x="4450110" y="1965960"/>
-            <a:ext cx="3291840" cy="1481328"/>
+            <a:off x="4433301" y="1965960"/>
+            <a:ext cx="3325368" cy="1481328"/>
           </a:xfrm>
           <a:prstGeom prst="rect">
             <a:avLst/>
@@ -40911,8 +40911,8 @@
         </p:nvSpPr>
         <p:spPr>
           <a:xfrm>
-            <a:off x="7321326" y="2057400"/>
-            <a:ext cx="310896" cy="310896"/>
+            <a:off x="7356333" y="2048256"/>
+            <a:ext cx="292608" cy="292608"/>
           </a:xfrm>
           <a:custGeom>
             <a:avLst/>
@@ -40970,8 +40970,8 @@
         </p:nvSpPr>
         <p:spPr>
           <a:xfrm>
-            <a:off x="8176290" y="1965960"/>
-            <a:ext cx="3291840" cy="1481328"/>
+            <a:off x="8142717" y="1965960"/>
+            <a:ext cx="3325368" cy="1481328"/>
           </a:xfrm>
           <a:prstGeom prst="rect">
             <a:avLst/>
@@ -41014,8 +41014,8 @@
         </p:nvSpPr>
         <p:spPr>
           <a:xfrm>
-            <a:off x="2586975" y="3758184"/>
-            <a:ext cx="3291840" cy="1481328"/>
+            <a:off x="2578593" y="3721608"/>
+            <a:ext cx="3325368" cy="1481328"/>
           </a:xfrm>
           <a:prstGeom prst="rect">
             <a:avLst/>
@@ -41058,8 +41058,8 @@
         </p:nvSpPr>
         <p:spPr>
           <a:xfrm>
-            <a:off x="6313155" y="3758184"/>
-            <a:ext cx="3291840" cy="1481328"/>
+            <a:off x="6288009" y="3721608"/>
+            <a:ext cx="3325368" cy="1481328"/>
           </a:xfrm>
           <a:prstGeom prst="rect">
             <a:avLst/>
@@ -41511,33 +41511,33 @@
                   </a:schemeClr>
                 </a:solidFill>
               </a:rPr>
-              <a:t>K5 PL06 T03 B02 — PAPAN CERITA v0.4 (BUKTI TIGA KELUARGA)</a:t>
-            </a:r>
-          </a:p>
-          <a:p>
-            <a:r>
-              <a:rPr lang="en-MY" sz="900" dirty="0">
-                <a:solidFill>
-                  <a:schemeClr val="tx1">
-                    <a:lumMod val="85000"/>
-                    <a:lumOff val="15000"/>
-                  </a:schemeClr>
-                </a:solidFill>
-              </a:rPr>
-              <a:t>PROOF_BUILD · V0_4_MODEL_DRIVEN</a:t>
-            </a:r>
-          </a:p>
-          <a:p>
-            <a:r>
-              <a:rPr lang="en-MY" sz="900" dirty="0">
-                <a:solidFill>
-                  <a:schemeClr val="tx1">
-                    <a:lumMod val="85000"/>
-                    <a:lumOff val="15000"/>
-                  </a:schemeClr>
-                </a:solidFill>
-              </a:rPr>
-              <a:t>NOT_FOR_MMD_BUILD · MULTIMEDIA_NOT_PRODUCED · PRODUCTION_APPROVAL_NOT_CLAIMED</a:t>
+              <a:t>K5 PL06 T03 B02 — PAPAN CERITA v0.4</a:t>
+            </a:r>
+          </a:p>
+          <a:p>
+            <a:r>
+              <a:rPr lang="en-MY" sz="900" dirty="0">
+                <a:solidFill>
+                  <a:schemeClr val="tx1">
+                    <a:lumMod val="85000"/>
+                    <a:lumOff val="15000"/>
+                  </a:schemeClr>
+                </a:solidFill>
+              </a:rPr>
+              <a:t>REVIEW_READY · BARIAH_FEEDBACK_IMPLEMENTED</a:t>
+            </a:r>
+          </a:p>
+          <a:p>
+            <a:r>
+              <a:rPr lang="en-MY" sz="900" dirty="0">
+                <a:solidFill>
+                  <a:schemeClr val="tx1">
+                    <a:lumMod val="85000"/>
+                    <a:lumOff val="15000"/>
+                  </a:schemeClr>
+                </a:solidFill>
+              </a:rPr>
+              <a:t>PENDING_TARGETED_CONFIRMATION · NOT_FOR_MMD_BUILD · MULTIMEDIA_NOT_PRODUCED</a:t>
             </a:r>
           </a:p>
           <a:p>
@@ -42065,8 +42065,8 @@
         </p:nvSpPr>
         <p:spPr>
           <a:xfrm>
-            <a:off x="723930" y="1965960"/>
-            <a:ext cx="3291840" cy="1481328"/>
+            <a:off x="723885" y="1965960"/>
+            <a:ext cx="3325368" cy="1481328"/>
           </a:xfrm>
           <a:prstGeom prst="rect">
             <a:avLst/>
@@ -42109,8 +42109,8 @@
         </p:nvSpPr>
         <p:spPr>
           <a:xfrm>
-            <a:off x="3595146" y="2057400"/>
-            <a:ext cx="310896" cy="310896"/>
+            <a:off x="3646917" y="2048256"/>
+            <a:ext cx="292608" cy="292608"/>
           </a:xfrm>
           <a:custGeom>
             <a:avLst/>
@@ -42168,8 +42168,8 @@
         </p:nvSpPr>
         <p:spPr>
           <a:xfrm>
-            <a:off x="4450110" y="1965960"/>
-            <a:ext cx="3291840" cy="1481328"/>
+            <a:off x="4433301" y="1965960"/>
+            <a:ext cx="3325368" cy="1481328"/>
           </a:xfrm>
           <a:prstGeom prst="rect">
             <a:avLst/>
@@ -42212,8 +42212,8 @@
         </p:nvSpPr>
         <p:spPr>
           <a:xfrm>
-            <a:off x="7321326" y="2057400"/>
-            <a:ext cx="310896" cy="310896"/>
+            <a:off x="7356333" y="2048256"/>
+            <a:ext cx="292608" cy="292608"/>
           </a:xfrm>
           <a:custGeom>
             <a:avLst/>
@@ -42271,8 +42271,8 @@
         </p:nvSpPr>
         <p:spPr>
           <a:xfrm>
-            <a:off x="8176290" y="1965960"/>
-            <a:ext cx="3291840" cy="1481328"/>
+            <a:off x="8142717" y="1965960"/>
+            <a:ext cx="3325368" cy="1481328"/>
           </a:xfrm>
           <a:prstGeom prst="rect">
             <a:avLst/>
@@ -42315,8 +42315,8 @@
         </p:nvSpPr>
         <p:spPr>
           <a:xfrm>
-            <a:off x="11047506" y="2057400"/>
-            <a:ext cx="310896" cy="310896"/>
+            <a:off x="11065749" y="2048256"/>
+            <a:ext cx="292608" cy="292608"/>
           </a:xfrm>
           <a:custGeom>
             <a:avLst/>
@@ -42374,8 +42374,8 @@
         </p:nvSpPr>
         <p:spPr>
           <a:xfrm>
-            <a:off x="2586975" y="3758184"/>
-            <a:ext cx="3291840" cy="1481328"/>
+            <a:off x="2578593" y="3721608"/>
+            <a:ext cx="3325368" cy="1481328"/>
           </a:xfrm>
           <a:prstGeom prst="rect">
             <a:avLst/>
@@ -42418,8 +42418,8 @@
         </p:nvSpPr>
         <p:spPr>
           <a:xfrm>
-            <a:off x="6313155" y="3758184"/>
-            <a:ext cx="3291840" cy="1481328"/>
+            <a:off x="6288009" y="3721608"/>
+            <a:ext cx="3325368" cy="1481328"/>
           </a:xfrm>
           <a:prstGeom prst="rect">
             <a:avLst/>
@@ -42885,33 +42885,33 @@
                   </a:schemeClr>
                 </a:solidFill>
               </a:rPr>
-              <a:t>K5 PL06 T03 B02 — PAPAN CERITA v0.4 (BUKTI TIGA KELUARGA)</a:t>
-            </a:r>
-          </a:p>
-          <a:p>
-            <a:r>
-              <a:rPr lang="en-MY" sz="900" dirty="0">
-                <a:solidFill>
-                  <a:schemeClr val="tx1">
-                    <a:lumMod val="85000"/>
-                    <a:lumOff val="15000"/>
-                  </a:schemeClr>
-                </a:solidFill>
-              </a:rPr>
-              <a:t>PROOF_BUILD · V0_4_MODEL_DRIVEN</a:t>
-            </a:r>
-          </a:p>
-          <a:p>
-            <a:r>
-              <a:rPr lang="en-MY" sz="900" dirty="0">
-                <a:solidFill>
-                  <a:schemeClr val="tx1">
-                    <a:lumMod val="85000"/>
-                    <a:lumOff val="15000"/>
-                  </a:schemeClr>
-                </a:solidFill>
-              </a:rPr>
-              <a:t>NOT_FOR_MMD_BUILD · MULTIMEDIA_NOT_PRODUCED · PRODUCTION_APPROVAL_NOT_CLAIMED</a:t>
+              <a:t>K5 PL06 T03 B02 — PAPAN CERITA v0.4</a:t>
+            </a:r>
+          </a:p>
+          <a:p>
+            <a:r>
+              <a:rPr lang="en-MY" sz="900" dirty="0">
+                <a:solidFill>
+                  <a:schemeClr val="tx1">
+                    <a:lumMod val="85000"/>
+                    <a:lumOff val="15000"/>
+                  </a:schemeClr>
+                </a:solidFill>
+              </a:rPr>
+              <a:t>REVIEW_READY · BARIAH_FEEDBACK_IMPLEMENTED</a:t>
+            </a:r>
+          </a:p>
+          <a:p>
+            <a:r>
+              <a:rPr lang="en-MY" sz="900" dirty="0">
+                <a:solidFill>
+                  <a:schemeClr val="tx1">
+                    <a:lumMod val="85000"/>
+                    <a:lumOff val="15000"/>
+                  </a:schemeClr>
+                </a:solidFill>
+              </a:rPr>
+              <a:t>PENDING_TARGETED_CONFIRMATION · NOT_FOR_MMD_BUILD · MULTIMEDIA_NOT_PRODUCED</a:t>
             </a:r>
           </a:p>
           <a:p>

--- a/reviews/source-completion/K5PL06T03B02_v0_4_THREE_FAMILY_PROOF.pptx
+++ b/reviews/source-completion/K5PL06T03B02_v0_4_THREE_FAMILY_PROOF.pptx
@@ -674,7 +674,11 @@
           <a:p>
             <a:r>
               <a:rPr lang="en-MY" dirty="0"/>
-              <a:t>Contoh: Boardwalk</a:t>
+              <a:t>Contoh: </a:t>
+            </a:r>
+            <a:r>
+              <a:rPr lang="en-MY" i="1" dirty="0"/>
+              <a:t>Boardwalk</a:t>
             </a:r>
           </a:p>
           <a:p>
@@ -691,8 +695,20 @@
           </a:p>
           <a:p>
             <a:r>
+              <a:rPr lang="en-MY" i="1" dirty="0"/>
+              <a:t>Boardwalk</a:t>
+            </a:r>
+            <a:r>
               <a:rPr lang="en-MY" dirty="0"/>
-              <a:t>Boardwalk ialah laluan kayu di atas tanah berpaya atau basah. Ia mesra alam dan mengekalkan visual semula jadi. Contohnya Boardwalk Paya Indah Wetlands.</a:t>
+              <a:t> ialah laluan kayu di atas tanah berpaya atau basah. Ia mesra alam dan mengekalkan visual semula jadi. Contohnya </a:t>
+            </a:r>
+            <a:r>
+              <a:rPr lang="en-MY" i="1" dirty="0"/>
+              <a:t>Boardwalk</a:t>
+            </a:r>
+            <a:r>
+              <a:rPr lang="en-MY" dirty="0"/>
+              <a:t> Paya Indah Wetlands.</a:t>
             </a:r>
           </a:p>
         </p:txBody>
@@ -790,7 +806,11 @@
           <a:p>
             <a:r>
               <a:rPr lang="en-MY" dirty="0"/>
-              <a:t>Contoh: Footbridge</a:t>
+              <a:t>Contoh: </a:t>
+            </a:r>
+            <a:r>
+              <a:rPr lang="en-MY" i="1" dirty="0"/>
+              <a:t>Footbridge</a:t>
             </a:r>
           </a:p>
           <a:p>
@@ -807,8 +827,20 @@
           </a:p>
           <a:p>
             <a:r>
+              <a:rPr lang="en-MY" i="1" dirty="0"/>
+              <a:t>Footbridge</a:t>
+            </a:r>
+            <a:r>
               <a:rPr lang="en-MY" dirty="0"/>
-              <a:t>Footbridge ialah jambatan kecil untuk laluan pejalan kaki melintasi aliran air atau longkang besar. Contohnya Footbridge Taman Botani Perdana.</a:t>
+              <a:t> ialah jambatan kecil untuk laluan pejalan kaki melintasi aliran air atau longkang besar. Contohnya </a:t>
+            </a:r>
+            <a:r>
+              <a:rPr lang="en-MY" i="1" dirty="0"/>
+              <a:t>Footbridge</a:t>
+            </a:r>
+            <a:r>
+              <a:rPr lang="en-MY" dirty="0"/>
+              <a:t> Taman Botani Perdana.</a:t>
             </a:r>
           </a:p>
         </p:txBody>
@@ -986,7 +1018,21 @@
           <a:p>
             <a:r>
               <a:rPr lang="en-MY" dirty="0"/>
-              <a:t>Struktur taman membina fungsi dan estetika landskap merangkumi pelbagai jenis binaan yang mengintegrasikan reka bentuk seni bina dengan landskap semula jadi. Setiap struktur mempunyai tujuan tersendiri, sama ada untuk akses, rekreasi, perlindungan, atau sebagai elemen visual utama. Terdapat empat jenis struktur taman: Struktur Persisir Air, Struktur Teduhan, Kemudahan Awam, dan Water Feature.</a:t>
+              <a:t>Struktur taman membina fungsi dan estetika landskap merangkumi pelbagai jenis binaan yang mengintegrasikan reka bentuk seni bina dengan landskap semula jadi. Setiap struktur mempunyai tujuan tersendiri, sama ada untuk akses, rekreasi, perlindungan, atau sebagai elemen visual utama. Terdapat empat jenis struktur taman: Struktur Persisir Air, Struktur Teduhan, Kemudahan Awam, dan </a:t>
+            </a:r>
+            <a:r>
+              <a:rPr lang="en-MY" i="1" dirty="0"/>
+              <a:t>Water Feature</a:t>
+            </a:r>
+            <a:r>
+              <a:rPr lang="en-MY" dirty="0"/>
+              <a:t>.</a:t>
+            </a:r>
+          </a:p>
+          <a:p>
+            <a:r>
+              <a:rPr lang="en-MY" dirty="0"/>
+              <a:t>Klik pada setiap struktur untuk penjelasan lanjut.</a:t>
             </a:r>
           </a:p>
         </p:txBody>
@@ -1096,7 +1142,23 @@
           <a:p>
             <a:r>
               <a:rPr lang="en-MY" dirty="0"/>
-              <a:t>Perabot taman merujuk kepada elemen-elemen boleh alih atau kekal yang ditempatkan di ruang landskap untuk meningkatkan fungsi, keselesaan, dan estetika. Ini melibatkan pemahaman tentang bahan, ketahanan, ergonomik, dan kesesuaian reka bentuk dengan tema keseluruhan landskap. Terdapat lima jenis perabot taman: Kerusi Taman, Papan Tanda, Tong Sampah, Drinking Fountain, dan BBQ Pit.</a:t>
+              <a:t>Perabot taman merujuk kepada elemen-elemen boleh alih atau kekal yang ditempatkan di ruang landskap untuk meningkatkan fungsi, keselesaan, dan estetika. Ini melibatkan pemahaman tentang bahan, ketahanan, ergonomik, dan kesesuaian reka bentuk dengan tema keseluruhan landskap. Terdapat lima jenis perabot taman: Kerusi Taman, Papan Tanda, Tong Sampah, </a:t>
+            </a:r>
+            <a:r>
+              <a:rPr lang="en-MY" i="1" dirty="0"/>
+              <a:t>Drinking Fountain</a:t>
+            </a:r>
+            <a:r>
+              <a:rPr lang="en-MY" dirty="0"/>
+              <a:t>, dan </a:t>
+            </a:r>
+            <a:r>
+              <a:rPr lang="en-MY" i="1" dirty="0"/>
+              <a:t>BBQ Pit</a:t>
+            </a:r>
+            <a:r>
+              <a:rPr lang="en-MY" dirty="0"/>
+              <a:t>.</a:t>
             </a:r>
           </a:p>
           <a:p>
@@ -1215,6 +1277,12 @@
               <a:t>Kerusi taman menyediakan tempat duduk untuk pengguna berehat dan menikmati persekitaran. Ia merupakan elemen asas untuk keselesaan di mana-mana ruang awam atau peribadi. Pemilihan kerusi yang betul mengambil kira faktor seperti keselesaan, ketahanan terhadap cuaca, dan estetika yang sepadan dengan gaya landskap. Pemasangan mungkin melibatkan penetapan ke tanah untuk mengelakkan kecurian atau pergerakan.</a:t>
             </a:r>
           </a:p>
+          <a:p>
+            <a:r>
+              <a:rPr lang="en-MY" dirty="0"/>
+              <a:t>Klik pada setiap contoh untuk melihat perincian.</a:t>
+            </a:r>
+          </a:p>
         </p:txBody>
       </p:sp>
       <p:sp>
@@ -1322,6 +1390,15 @@
               <a:t>SPOKEN TRANSCRIPT</a:t>
             </a:r>
           </a:p>
+          <a:p>
+            <a:endParaRPr lang="en-MY" dirty="0"/>
+          </a:p>
+          <a:p>
+            <a:r>
+              <a:rPr lang="en-MY" dirty="0"/>
+              <a:t>Klik pada setiap spesifikasi untuk penjelasan lanjut.</a:t>
+            </a:r>
+          </a:p>
         </p:txBody>
       </p:sp>
       <p:sp>
@@ -2122,6 +2199,12 @@
               <a:t>Kerusi taman menyediakan tempat duduk untuk pengguna berehat dan menikmati persekitaran. Ia merupakan elemen asas untuk keselesaan di mana-mana ruang awam atau peribadi. Pemilihan kerusi yang betul mengambil kira faktor seperti keselesaan, ketahanan terhadap cuaca, dan estetika yang sepadan dengan gaya landskap. Pemasangan mungkin melibatkan penetapan ke tanah untuk mengelakkan kecurian atau pergerakan.</a:t>
             </a:r>
           </a:p>
+          <a:p>
+            <a:r>
+              <a:rPr lang="en-MY" dirty="0"/>
+              <a:t>Klik pada setiap contoh untuk melihat perincian.</a:t>
+            </a:r>
+          </a:p>
         </p:txBody>
       </p:sp>
       <p:sp>
@@ -2223,6 +2306,15 @@
               <a:t>SPOKEN TRANSCRIPT</a:t>
             </a:r>
           </a:p>
+          <a:p>
+            <a:endParaRPr lang="en-MY" dirty="0"/>
+          </a:p>
+          <a:p>
+            <a:r>
+              <a:rPr lang="en-MY" dirty="0"/>
+              <a:t>Klik pada setiap kategori untuk penjelasan lanjut.</a:t>
+            </a:r>
+          </a:p>
         </p:txBody>
       </p:sp>
       <p:sp>
@@ -2862,7 +2954,31 @@
           <a:p>
             <a:r>
               <a:rPr lang="en-MY" dirty="0"/>
-              <a:t>Mengenal pasti struktur dan elemen landskap membolehkan kerja pembinaan, penyeliaan dan penyelenggaraan dirancang dengan tepat. Struktur taman merangkumi Struktur Persisir Air, Struktur Teduhan, Kemudahan Awam dan Water Feature, manakala perabot taman merangkumi Kerusi Taman, Papan Tanda, Tong Sampah, Drinking Fountain dan BBQ Pit. Dengan memahami komponen-komponen ini, kontraktor dapat merancang, melaksana dan menyelenggara setiap komponen landskap mengikut fungsinya di tapak.</a:t>
+              <a:t>Mengenal pasti struktur dan elemen landskap membolehkan kerja pembinaan, penyeliaan dan penyelenggaraan dirancang dengan tepat. Struktur taman merangkumi Struktur Persisir Air, Struktur Teduhan, Kemudahan Awam dan </a:t>
+            </a:r>
+            <a:r>
+              <a:rPr lang="en-MY" i="1" dirty="0"/>
+              <a:t>Water Feature</a:t>
+            </a:r>
+            <a:r>
+              <a:rPr lang="en-MY" dirty="0"/>
+              <a:t>, manakala perabot taman merangkumi Kerusi Taman, Papan Tanda, Tong Sampah, </a:t>
+            </a:r>
+            <a:r>
+              <a:rPr lang="en-MY" i="1" dirty="0"/>
+              <a:t>Drinking Fountain</a:t>
+            </a:r>
+            <a:r>
+              <a:rPr lang="en-MY" dirty="0"/>
+              <a:t> dan </a:t>
+            </a:r>
+            <a:r>
+              <a:rPr lang="en-MY" i="1" dirty="0"/>
+              <a:t>BBQ Pit</a:t>
+            </a:r>
+            <a:r>
+              <a:rPr lang="en-MY" dirty="0"/>
+              <a:t>. Dengan memahami komponen-komponen ini, kontraktor dapat merancang, melaksana dan menyelenggara setiap komponen landskap mengikut fungsinya di tapak.</a:t>
             </a:r>
           </a:p>
         </p:txBody>
@@ -3088,7 +3204,13 @@
           <a:p>
             <a:r>
               <a:rPr lang="en-MY" dirty="0"/>
-              <a:t>Jawab semua soalan dengan pilihan jawapan yang betul. Klik butang “MULA KUIZ” untuk mula.</a:t>
+              <a:t>Jawab semua soalan dengan pilihan jawapan yang betul.</a:t>
+            </a:r>
+          </a:p>
+          <a:p>
+            <a:r>
+              <a:rPr lang="en-MY" dirty="0"/>
+              <a:t>Klik Mula Kuiz untuk memulakan kuiz.</a:t>
             </a:r>
           </a:p>
         </p:txBody>
@@ -3243,6 +3365,12 @@
               <a:t>Maklum balas salah: Pilihan jawapan tidak tepat.</a:t>
             </a:r>
           </a:p>
+          <a:p>
+            <a:r>
+              <a:rPr lang="en-MY" dirty="0"/>
+              <a:t>Pilih satu jawapan.</a:t>
+            </a:r>
+          </a:p>
         </p:txBody>
       </p:sp>
       <p:sp>
@@ -3373,7 +3501,7 @@
           </a:p>
           <a:p>
             <a:r>
-              <a:rPr lang="en-MY" dirty="0"/>
+              <a:rPr lang="en-MY" i="1" dirty="0"/>
               <a:t>Boardwalk</a:t>
             </a:r>
           </a:p>
@@ -3385,13 +3513,13 @@
           </a:p>
           <a:p>
             <a:r>
-              <a:rPr lang="en-MY" dirty="0"/>
+              <a:rPr lang="en-MY" i="1" dirty="0"/>
               <a:t>Drinking Fountain</a:t>
             </a:r>
           </a:p>
           <a:p>
             <a:r>
-              <a:rPr lang="en-MY" dirty="0"/>
+              <a:rPr lang="en-MY" i="1" dirty="0"/>
               <a:t>BBQ Pit</a:t>
             </a:r>
           </a:p>
@@ -3411,6 +3539,12 @@
             <a:r>
               <a:rPr lang="en-MY" dirty="0"/>
               <a:t>Maklum balas salah: Pilihan jawapan tidak tepat.</a:t>
+            </a:r>
+          </a:p>
+          <a:p>
+            <a:r>
+              <a:rPr lang="en-MY" dirty="0"/>
+              <a:t>Pilih semua jawapan yang tepat.</a:t>
             </a:r>
           </a:p>
         </p:txBody>
@@ -3529,6 +3663,12 @@
               <a:t>Anda telah melengkapkan kuiz semakan pengetahuan. Anda boleh menyemak jawapan atau mengulang kuiz ini.</a:t>
             </a:r>
           </a:p>
+          <a:p>
+            <a:r>
+              <a:rPr lang="en-MY" dirty="0"/>
+              <a:t>Klik Semak Jawapan untuk menyemak, atau Ulang Kuiz untuk mencuba semula.</a:t>
+            </a:r>
+          </a:p>
         </p:txBody>
       </p:sp>
       <p:sp>
@@ -3636,7 +3776,13 @@
           <a:p>
             <a:r>
               <a:rPr lang="en-MY" dirty="0"/>
-              <a:t>Tamat Topik 3 Bahagian 2: Komponen Landskap. Bahagian ini telah selesai. Tutup tetingkap pelajaran untuk keluar.</a:t>
+              <a:t>Tamat Topik 3 Bahagian 2: Komponen Landskap.</a:t>
+            </a:r>
+          </a:p>
+          <a:p>
+            <a:r>
+              <a:rPr lang="en-MY" dirty="0"/>
+              <a:t>Teruskan pembelajaran ke bahagian seterusnya.</a:t>
             </a:r>
           </a:p>
         </p:txBody>
@@ -3746,7 +3892,21 @@
           <a:p>
             <a:r>
               <a:rPr lang="en-MY" dirty="0"/>
-              <a:t>Struktur taman membina fungsi dan estetika landskap merangkumi pelbagai jenis binaan yang mengintegrasikan reka bentuk seni bina dengan landskap semula jadi. Setiap struktur mempunyai tujuan tersendiri, sama ada untuk akses, rekreasi, perlindungan, atau sebagai elemen visual utama. Terdapat empat jenis struktur taman: Struktur Persisir Air, Struktur Teduhan, Kemudahan Awam, dan Water Feature.</a:t>
+              <a:t>Struktur taman membina fungsi dan estetika landskap merangkumi pelbagai jenis binaan yang mengintegrasikan reka bentuk seni bina dengan landskap semula jadi. Setiap struktur mempunyai tujuan tersendiri, sama ada untuk akses, rekreasi, perlindungan, atau sebagai elemen visual utama. Terdapat empat jenis struktur taman: Struktur Persisir Air, Struktur Teduhan, Kemudahan Awam, dan </a:t>
+            </a:r>
+            <a:r>
+              <a:rPr lang="en-MY" i="1" dirty="0"/>
+              <a:t>Water Feature</a:t>
+            </a:r>
+            <a:r>
+              <a:rPr lang="en-MY" dirty="0"/>
+              <a:t>.</a:t>
+            </a:r>
+          </a:p>
+          <a:p>
+            <a:r>
+              <a:rPr lang="en-MY" dirty="0"/>
+              <a:t>Klik pada setiap struktur untuk penjelasan lanjut.</a:t>
             </a:r>
           </a:p>
         </p:txBody>
@@ -3966,6 +4126,15 @@
               <a:t>SPOKEN TRANSCRIPT</a:t>
             </a:r>
           </a:p>
+          <a:p>
+            <a:endParaRPr lang="en-MY" dirty="0"/>
+          </a:p>
+          <a:p>
+            <a:r>
+              <a:rPr lang="en-MY" dirty="0"/>
+              <a:t>Klik pada setiap contoh untuk penjelasan lanjut.</a:t>
+            </a:r>
+          </a:p>
         </p:txBody>
       </p:sp>
       <p:sp>
@@ -4061,7 +4230,11 @@
           <a:p>
             <a:r>
               <a:rPr lang="en-MY" dirty="0"/>
-              <a:t>Contoh: Promenade</a:t>
+              <a:t>Contoh: </a:t>
+            </a:r>
+            <a:r>
+              <a:rPr lang="en-MY" i="1" dirty="0"/>
+              <a:t>Promenade</a:t>
             </a:r>
           </a:p>
           <a:p>
@@ -4078,8 +4251,20 @@
           </a:p>
           <a:p>
             <a:r>
+              <a:rPr lang="en-MY" i="1" dirty="0"/>
+              <a:t>Promenade</a:t>
+            </a:r>
+            <a:r>
               <a:rPr lang="en-MY" dirty="0"/>
-              <a:t>Promenade ialah laluan lebar di sepanjang pinggir air, selesa untuk berjalan dan bersantai. Contohnya Promenade Tasik Titiwangsa di Kuala Lumpur.</a:t>
+              <a:t> ialah laluan lebar di sepanjang pinggir air, selesa untuk berjalan dan bersantai. Contohnya </a:t>
+            </a:r>
+            <a:r>
+              <a:rPr lang="en-MY" i="1" dirty="0"/>
+              <a:t>Promenade</a:t>
+            </a:r>
+            <a:r>
+              <a:rPr lang="en-MY" dirty="0"/>
+              <a:t> Tasik Titiwangsa di Kuala Lumpur.</a:t>
             </a:r>
           </a:p>
         </p:txBody>
@@ -6998,7 +7183,7 @@
           <a:p>
             <a:r>
               <a:rPr lang="en-MY" sz="2400" b="1" dirty="0"/>
-              <a:t>Komponen Landskap</a:t>
+              <a:t>Topik 3 Bahagian 2: Komponen Landskap</a:t>
             </a:r>
           </a:p>
         </p:txBody>
@@ -7012,7 +7197,7 @@
         <p:spPr>
           <a:xfrm>
             <a:off x="617952" y="384048"/>
-            <a:ext cx="10979658" cy="592440"/>
+            <a:ext cx="11338560" cy="592440"/>
           </a:xfrm>
           <a:prstGeom prst="rect">
             <a:avLst/>
@@ -7032,7 +7217,7 @@
             </a:pPr>
             <a:r>
               <a:rPr lang="en-MY" sz="3600" b="1" dirty="0"/>
-              <a:t>Komponen Landskap</a:t>
+              <a:t>Topik 3 Bahagian 2: Komponen Landskap</a:t>
             </a:r>
           </a:p>
         </p:txBody>
@@ -7045,8 +7230,8 @@
         </p:nvSpPr>
         <p:spPr>
           <a:xfrm>
-            <a:off x="723930" y="1225296"/>
-            <a:ext cx="10744200" cy="365760"/>
+            <a:off x="723930" y="1316736"/>
+            <a:ext cx="10744200" cy="402336"/>
           </a:xfrm>
           <a:prstGeom prst="rect">
             <a:avLst/>
@@ -7061,7 +7246,7 @@
           <a:p>
             <a:pPr/>
             <a:r>
-              <a:rPr lang="en-MY" sz="1500" b="1" dirty="0">
+              <a:rPr lang="en-MY" sz="1600" b="1" dirty="0">
                 <a:solidFill>
                   <a:srgbClr val="7F6000"/>
                 </a:solidFill>
@@ -7079,7 +7264,7 @@
         </p:nvSpPr>
         <p:spPr>
           <a:xfrm>
-            <a:off x="723930" y="1700784"/>
+            <a:off x="723930" y="1828800"/>
             <a:ext cx="10744200" cy="420624"/>
           </a:xfrm>
           <a:prstGeom prst="rect">
@@ -7110,14 +7295,14 @@
       </p:sp>
       <p:sp>
         <p:nvSpPr>
-          <p:cNvPr id="22" name="Topic"/>
+          <p:cNvPr id="30" name="VisualDir"/>
           <p:cNvSpPr txBox="1"/>
           <p:nvPr/>
         </p:nvSpPr>
         <p:spPr>
           <a:xfrm>
-            <a:off x="723930" y="2176272"/>
-            <a:ext cx="10744200" cy="420624"/>
+            <a:off x="723930" y="2834640"/>
+            <a:ext cx="10744200" cy="621792"/>
           </a:xfrm>
           <a:prstGeom prst="rect">
             <a:avLst/>
@@ -7132,40 +7317,14 @@
           <a:p>
             <a:pPr/>
             <a:r>
-              <a:rPr lang="en-MY" sz="1900" b="1" dirty="0">
-                <a:solidFill>
-                  <a:schemeClr val="tx1">
-                    <a:lumMod val="85000"/>
-                    <a:lumOff val="15000"/>
-                  </a:schemeClr>
-                </a:solidFill>
-              </a:rPr>
-              <a:t>Topik 3 Bahagian 2: Komponen Landskap</a:t>
-            </a:r>
-          </a:p>
-        </p:txBody>
-      </p:sp>
-      <p:sp>
-        <p:nvSpPr>
-          <p:cNvPr id="30" name="VisualDir"/>
-          <p:cNvSpPr txBox="1"/>
-          <p:nvPr/>
-        </p:nvSpPr>
-        <p:spPr>
-          <a:xfrm>
-            <a:off x="723930" y="3017520"/>
-            <a:ext cx="10744200" cy="1133856"/>
-          </a:xfrm>
-          <a:prstGeom prst="rect">
-            <a:avLst/>
-          </a:prstGeom>
-          <a:noFill/>
-        </p:spPr>
-        <p:txBody>
-          <a:bodyPr wrap="square">
-            <a:noAutofit/>
-          </a:bodyPr>
-          <a:lstStyle/>
+              <a:rPr lang="en-MY" sz="1100" dirty="0">
+                <a:solidFill>
+                  <a:srgbClr val="808080"/>
+                </a:solidFill>
+              </a:rPr>
+              <a:t>[Visual: Imej pembuka bahagian — foto tapak landskap siap yang memaparkan struktur taman dan</a:t>
+            </a:r>
+          </a:p>
           <a:p>
             <a:pPr/>
             <a:r>
@@ -7174,40 +7333,7 @@
                   <a:srgbClr val="808080"/>
                 </a:solidFill>
               </a:rPr>
-              <a:t>ARAHAN VISUAL — SPESIFIKASI SAHAJA</a:t>
-            </a:r>
-          </a:p>
-          <a:p>
-            <a:pPr/>
-            <a:r>
-              <a:rPr lang="en-MY" sz="1100" dirty="0">
-                <a:solidFill>
-                  <a:srgbClr val="808080"/>
-                </a:solidFill>
-              </a:rPr>
-              <a:t>[Visual: Imej pembuka bahagian — foto tapak landskap siap yang</a:t>
-            </a:r>
-          </a:p>
-          <a:p>
-            <a:pPr/>
-            <a:r>
-              <a:rPr lang="en-MY" sz="1100" dirty="0">
-                <a:solidFill>
-                  <a:srgbClr val="808080"/>
-                </a:solidFill>
-              </a:rPr>
-              <a:t>memaparkan struktur taman dan perabot taman dalam satu bingkai.</a:t>
-            </a:r>
-          </a:p>
-          <a:p>
-            <a:pPr/>
-            <a:r>
-              <a:rPr lang="en-MY" sz="1100" dirty="0">
-                <a:solidFill>
-                  <a:srgbClr val="808080"/>
-                </a:solidFill>
-              </a:rPr>
-              <a:t>Tidak dibenamkan.]</a:t>
+              <a:t>perabot taman dalam satu bingkai. Tidak dibenamkan.]</a:t>
             </a:r>
           </a:p>
         </p:txBody>
@@ -7717,6 +7843,84 @@
                 </a:solidFill>
               </a:rPr>
               <a:t>  VO PL satu, bukan PL kosong satu, dan seterusnya</a:t>
+            </a:r>
+          </a:p>
+          <a:p>
+            <a:r>
+              <a:rPr lang="en-MY" sz="900" b="1" dirty="0">
+                <a:solidFill>
+                  <a:schemeClr val="tx1">
+                    <a:lumMod val="85000"/>
+                    <a:lumOff val="15000"/>
+                  </a:schemeClr>
+                </a:solidFill>
+              </a:rPr>
+              <a:t>VISUAL:</a:t>
+            </a:r>
+          </a:p>
+          <a:p>
+            <a:r>
+              <a:rPr lang="en-MY" sz="900" dirty="0">
+                <a:solidFill>
+                  <a:schemeClr val="tx1">
+                    <a:lumMod val="85000"/>
+                    <a:lumOff val="15000"/>
+                  </a:schemeClr>
+                </a:solidFill>
+              </a:rPr>
+              <a:t>  subjenis skrin: TOPIC_ENTRY_SCREEN</a:t>
+            </a:r>
+          </a:p>
+          <a:p>
+            <a:r>
+              <a:rPr lang="en-MY" sz="900" dirty="0">
+                <a:solidFill>
+                  <a:schemeClr val="tx1">
+                    <a:lumMod val="85000"/>
+                    <a:lumOff val="15000"/>
+                  </a:schemeClr>
+                </a:solidFill>
+              </a:rPr>
+              <a:t>  subjenis popup: —</a:t>
+            </a:r>
+          </a:p>
+          <a:p>
+            <a:r>
+              <a:rPr lang="en-MY" sz="900" dirty="0">
+                <a:solidFill>
+                  <a:schemeClr val="tx1">
+                    <a:lumMod val="85000"/>
+                    <a:lumOff val="15000"/>
+                  </a:schemeClr>
+                </a:solidFill>
+              </a:rPr>
+              <a:t>  keperluan visual: REQUIRED</a:t>
+            </a:r>
+          </a:p>
+          <a:p>
+            <a:r>
+              <a:rPr lang="en-MY" sz="900" dirty="0">
+                <a:solidFill>
+                  <a:schemeClr val="tx1">
+                    <a:lumMod val="85000"/>
+                    <a:lumOff val="15000"/>
+                  </a:schemeClr>
+                </a:solidFill>
+              </a:rPr>
+              <a:t>  status: RESOLVED</a:t>
+            </a:r>
+          </a:p>
+          <a:p>
+            <a:r>
+              <a:rPr lang="en-MY" sz="900" dirty="0">
+                <a:solidFill>
+                  <a:schemeClr val="tx1">
+                    <a:lumMod val="85000"/>
+                    <a:lumOff val="15000"/>
+                  </a:schemeClr>
+                </a:solidFill>
+              </a:rPr>
+              <a:t>  kuasa: BARIAH_REVIEWED_EXEMPLAR</a:t>
             </a:r>
           </a:p>
           <a:p>
@@ -7903,7 +8107,7 @@
           <a:p>
             <a:pPr algn="ctr"/>
             <a:r>
-              <a:rPr lang="en-MY" sz="1500" b="1" dirty="0">
+              <a:rPr lang="en-MY" sz="1500" b="1" i="1" dirty="0">
                 <a:solidFill>
                   <a:schemeClr val="tx1">
                     <a:lumMod val="85000"/>
@@ -8212,7 +8416,7 @@
           <a:p>
             <a:pPr algn="ctr"/>
             <a:r>
-              <a:rPr lang="en-MY" sz="1500" b="1" dirty="0">
+              <a:rPr lang="en-MY" sz="1500" b="1" i="1" dirty="0">
                 <a:solidFill>
                   <a:schemeClr val="tx1">
                     <a:lumMod val="85000"/>
@@ -8315,7 +8519,7 @@
           <a:p>
             <a:pPr algn="ctr"/>
             <a:r>
-              <a:rPr lang="en-MY" sz="1500" b="1" dirty="0">
+              <a:rPr lang="en-MY" sz="1500" b="1" i="1" dirty="0">
                 <a:solidFill>
                   <a:schemeClr val="tx1">
                     <a:lumMod val="85000"/>
@@ -8324,6 +8528,51 @@
                 </a:solidFill>
               </a:rPr>
               <a:t>Footbridge</a:t>
+            </a:r>
+          </a:p>
+        </p:txBody>
+      </p:sp>
+      <p:sp>
+        <p:nvSpPr>
+          <p:cNvPr id="30" name="VisualDir"/>
+          <p:cNvSpPr txBox="1"/>
+          <p:nvPr/>
+        </p:nvSpPr>
+        <p:spPr>
+          <a:xfrm>
+            <a:off x="723930" y="5358384"/>
+            <a:ext cx="10744200" cy="621792"/>
+          </a:xfrm>
+          <a:prstGeom prst="rect">
+            <a:avLst/>
+          </a:prstGeom>
+          <a:noFill/>
+        </p:spPr>
+        <p:txBody>
+          <a:bodyPr wrap="square">
+            <a:noAutofit/>
+          </a:bodyPr>
+          <a:lstStyle/>
+          <a:p>
+            <a:pPr/>
+            <a:r>
+              <a:rPr lang="en-MY" sz="1100" dirty="0">
+                <a:solidFill>
+                  <a:srgbClr val="808080"/>
+                </a:solidFill>
+              </a:rPr>
+              <a:t>[Visual: Rajah 23 — Contoh Boardwalk dalam Taman Paya Bakau, modul ms 239. Aset K5PL06T03-B02-IMG-p239-x20.</a:t>
+            </a:r>
+          </a:p>
+          <a:p>
+            <a:pPr/>
+            <a:r>
+              <a:rPr lang="en-MY" sz="1100" dirty="0">
+                <a:solidFill>
+                  <a:srgbClr val="808080"/>
+                </a:solidFill>
+              </a:rPr>
+              <a:t>Tidak dibenamkan.]</a:t>
             </a:r>
           </a:p>
         </p:txBody>
@@ -8336,8 +8585,8 @@
         </p:nvSpPr>
         <p:spPr>
           <a:xfrm>
-            <a:off x="1234440" y="1737360"/>
-            <a:ext cx="9723090" cy="3017520"/>
+            <a:off x="1234440" y="1481328"/>
+            <a:ext cx="9723090" cy="2788920"/>
           </a:xfrm>
           <a:prstGeom prst="rect">
             <a:avLst/>
@@ -8366,8 +8615,8 @@
         </p:nvSpPr>
         <p:spPr>
           <a:xfrm>
-            <a:off x="1490472" y="1883664"/>
-            <a:ext cx="8534370" cy="365760"/>
+            <a:off x="1490472" y="1627632"/>
+            <a:ext cx="5532120" cy="365760"/>
           </a:xfrm>
           <a:prstGeom prst="rect">
             <a:avLst/>
@@ -8382,7 +8631,7 @@
           <a:p>
             <a:pPr/>
             <a:r>
-              <a:rPr lang="en-MY" sz="2000" b="1" dirty="0">
+              <a:rPr lang="en-MY" sz="2000" b="1" i="1" dirty="0">
                 <a:solidFill>
                   <a:schemeClr val="tx1">
                     <a:lumMod val="85000"/>
@@ -8403,7 +8652,7 @@
         </p:nvSpPr>
         <p:spPr>
           <a:xfrm>
-            <a:off x="10317450" y="1901952"/>
+            <a:off x="10317450" y="1645920"/>
             <a:ext cx="384048" cy="384048"/>
           </a:xfrm>
           <a:prstGeom prst="ellipse">
@@ -8432,7 +8681,7 @@
         </p:nvSpPr>
         <p:spPr>
           <a:xfrm>
-            <a:off x="10421142" y="2005645"/>
+            <a:off x="10421142" y="1749613"/>
             <a:ext cx="176662" cy="176662"/>
           </a:xfrm>
           <a:custGeom>
@@ -8506,8 +8755,8 @@
         </p:nvSpPr>
         <p:spPr>
           <a:xfrm>
-            <a:off x="1490472" y="2468880"/>
-            <a:ext cx="9211026" cy="219456"/>
+            <a:off x="1490472" y="2212848"/>
+            <a:ext cx="5532120" cy="219456"/>
           </a:xfrm>
           <a:prstGeom prst="rect">
             <a:avLst/>
@@ -8540,8 +8789,8 @@
         </p:nvSpPr>
         <p:spPr>
           <a:xfrm>
-            <a:off x="1490472" y="2706624"/>
-            <a:ext cx="9211026" cy="219456"/>
+            <a:off x="1490472" y="2450592"/>
+            <a:ext cx="5532120" cy="429768"/>
           </a:xfrm>
           <a:prstGeom prst="rect">
             <a:avLst/>
@@ -8564,7 +8813,21 @@
                   </a:schemeClr>
                 </a:solidFill>
               </a:rPr>
-              <a:t>Laluan kayu di atas tanah berpaya/basah, mesra alam dan visual semula jadi.</a:t>
+              <a:t>Laluan kayu di atas tanah berpaya/basah, mesra alam dan</a:t>
+            </a:r>
+          </a:p>
+          <a:p>
+            <a:pPr/>
+            <a:r>
+              <a:rPr lang="en-MY" sz="1250" dirty="0">
+                <a:solidFill>
+                  <a:schemeClr val="tx1">
+                    <a:lumMod val="85000"/>
+                    <a:lumOff val="15000"/>
+                  </a:schemeClr>
+                </a:solidFill>
+              </a:rPr>
+              <a:t>visual semula jadi.</a:t>
             </a:r>
           </a:p>
         </p:txBody>
@@ -8577,8 +8840,8 @@
         </p:nvSpPr>
         <p:spPr>
           <a:xfrm>
-            <a:off x="1490472" y="3086100"/>
-            <a:ext cx="9211026" cy="219456"/>
+            <a:off x="1490472" y="3044952"/>
+            <a:ext cx="5532120" cy="219456"/>
           </a:xfrm>
           <a:prstGeom prst="rect">
             <a:avLst/>
@@ -8611,8 +8874,8 @@
         </p:nvSpPr>
         <p:spPr>
           <a:xfrm>
-            <a:off x="1490472" y="3323844"/>
-            <a:ext cx="9211026" cy="219456"/>
+            <a:off x="1490472" y="3282696"/>
+            <a:ext cx="5532120" cy="219456"/>
           </a:xfrm>
           <a:prstGeom prst="rect">
             <a:avLst/>
@@ -8627,6 +8890,17 @@
           <a:p>
             <a:pPr/>
             <a:r>
+              <a:rPr lang="en-MY" sz="1250" i="1" dirty="0">
+                <a:solidFill>
+                  <a:schemeClr val="tx1">
+                    <a:lumMod val="85000"/>
+                    <a:lumOff val="15000"/>
+                  </a:schemeClr>
+                </a:solidFill>
+              </a:rPr>
+              <a:t>Boardwalk</a:t>
+            </a:r>
+            <a:r>
               <a:rPr lang="en-MY" sz="1250" dirty="0">
                 <a:solidFill>
                   <a:schemeClr val="tx1">
@@ -8635,55 +8909,51 @@
                   </a:schemeClr>
                 </a:solidFill>
               </a:rPr>
-              <a:t>Boardwalk Paya Indah Wetlands</a:t>
-            </a:r>
-          </a:p>
-        </p:txBody>
-      </p:sp>
-      <p:sp>
-        <p:nvSpPr>
-          <p:cNvPr id="214" name="FHead"/>
+              <a:t> Paya Indah Wetlands</a:t>
+            </a:r>
+          </a:p>
+        </p:txBody>
+      </p:sp>
+      <p:sp>
+        <p:nvSpPr>
+          <p:cNvPr id="230" name="VisualPanel"/>
           <p:cNvSpPr txBox="1"/>
           <p:nvPr/>
         </p:nvSpPr>
         <p:spPr>
           <a:xfrm>
-            <a:off x="1490472" y="3703320"/>
-            <a:ext cx="9211026" cy="219456"/>
+            <a:off x="7287768" y="2157984"/>
+            <a:ext cx="3401568" cy="1874520"/>
           </a:xfrm>
           <a:prstGeom prst="rect">
             <a:avLst/>
           </a:prstGeom>
-          <a:noFill/>
+          <a:solidFill>
+            <a:srgbClr val="F7F7F7"/>
+          </a:solidFill>
+          <a:ln w="12700">
+            <a:solidFill>
+              <a:srgbClr val="BFBFBF"/>
+            </a:solidFill>
+          </a:ln>
         </p:spPr>
         <p:txBody>
           <a:bodyPr wrap="square">
             <a:noAutofit/>
           </a:bodyPr>
           <a:lstStyle/>
-          <a:p>
-            <a:pPr/>
-            <a:r>
-              <a:rPr lang="en-MY" sz="950" b="1" dirty="0">
-                <a:solidFill>
-                  <a:srgbClr val="7F6000"/>
-                </a:solidFill>
-              </a:rPr>
-              <a:t>ARAHAN VISUAL — TIDAK DIBENAMKAN</a:t>
-            </a:r>
-          </a:p>
-        </p:txBody>
-      </p:sp>
-      <p:sp>
-        <p:nvSpPr>
-          <p:cNvPr id="215" name="FBody"/>
+        </p:txBody>
+      </p:sp>
+      <p:sp>
+        <p:nvSpPr>
+          <p:cNvPr id="231" name="VisualPanelHead"/>
           <p:cNvSpPr txBox="1"/>
           <p:nvPr/>
         </p:nvSpPr>
         <p:spPr>
           <a:xfrm>
-            <a:off x="1490472" y="3941064"/>
-            <a:ext cx="9211026" cy="429768"/>
+            <a:off x="7452360" y="2286000"/>
+            <a:ext cx="3072384" cy="219456"/>
           </a:xfrm>
           <a:prstGeom prst="rect">
             <a:avLst/>
@@ -8698,21 +8968,91 @@
           <a:p>
             <a:pPr/>
             <a:r>
-              <a:rPr lang="en-MY" sz="1250" dirty="0">
-                <a:solidFill>
-                  <a:schemeClr val="tx1">
-                    <a:lumMod val="85000"/>
-                    <a:lumOff val="15000"/>
-                  </a:schemeClr>
-                </a:solidFill>
-              </a:rPr>
-              <a:t>[Visual: Rajah 23 — Contoh Boardwalk dalam Taman Paya Bakau, modul ms 239. Aset</a:t>
-            </a:r>
-          </a:p>
+              <a:rPr lang="en-MY" sz="900" b="1" dirty="0">
+                <a:solidFill>
+                  <a:srgbClr val="7F6000"/>
+                </a:solidFill>
+              </a:rPr>
+              <a:t>ARAHAN VISUAL — TIDAK DIBENAMKAN</a:t>
+            </a:r>
+          </a:p>
+        </p:txBody>
+      </p:sp>
+      <p:sp>
+        <p:nvSpPr>
+          <p:cNvPr id="232" name="VisualPanelBody"/>
+          <p:cNvSpPr txBox="1"/>
+          <p:nvPr/>
+        </p:nvSpPr>
+        <p:spPr>
+          <a:xfrm>
+            <a:off x="7452360" y="2542032"/>
+            <a:ext cx="3072384" cy="676656"/>
+          </a:xfrm>
+          <a:prstGeom prst="rect">
+            <a:avLst/>
+          </a:prstGeom>
+          <a:noFill/>
+        </p:spPr>
+        <p:txBody>
+          <a:bodyPr wrap="square">
+            <a:noAutofit/>
+          </a:bodyPr>
+          <a:lstStyle/>
           <a:p>
             <a:pPr/>
             <a:r>
-              <a:rPr lang="en-MY" sz="1250" dirty="0">
+              <a:rPr lang="en-MY" sz="1050" dirty="0">
+                <a:solidFill>
+                  <a:schemeClr val="tx1">
+                    <a:lumMod val="85000"/>
+                    <a:lumOff val="15000"/>
+                  </a:schemeClr>
+                </a:solidFill>
+              </a:rPr>
+              <a:t>[Visual: Rajah 23 — Contoh </a:t>
+            </a:r>
+            <a:r>
+              <a:rPr lang="en-MY" sz="1050" i="1" dirty="0">
+                <a:solidFill>
+                  <a:schemeClr val="tx1">
+                    <a:lumMod val="85000"/>
+                    <a:lumOff val="15000"/>
+                  </a:schemeClr>
+                </a:solidFill>
+              </a:rPr>
+              <a:t>Boardwalk</a:t>
+            </a:r>
+            <a:r>
+              <a:rPr lang="en-MY" sz="1050" dirty="0">
+                <a:solidFill>
+                  <a:schemeClr val="tx1">
+                    <a:lumMod val="85000"/>
+                    <a:lumOff val="15000"/>
+                  </a:schemeClr>
+                </a:solidFill>
+              </a:rPr>
+              <a:t> dalam</a:t>
+            </a:r>
+          </a:p>
+          <a:p>
+            <a:pPr/>
+            <a:r>
+              <a:rPr lang="en-MY" sz="1050" dirty="0">
+                <a:solidFill>
+                  <a:schemeClr val="tx1">
+                    <a:lumMod val="85000"/>
+                    <a:lumOff val="15000"/>
+                  </a:schemeClr>
+                </a:solidFill>
+              </a:rPr>
+              <a:t>Taman Paya Bakau, modul ms 239. Aset</a:t>
+            </a:r>
+          </a:p>
+          <a:p>
+            <a:pPr/>
+            <a:r>
+              <a:rPr lang="en-MY" sz="1050" dirty="0">
                 <a:solidFill>
                   <a:schemeClr val="tx1">
                     <a:lumMod val="85000"/>
@@ -8721,6 +9061,40 @@
                 </a:solidFill>
               </a:rPr>
               <a:t>K5PL06T03-B02-IMG-p239-x20. Tidak dibenamkan.]</a:t>
+            </a:r>
+          </a:p>
+        </p:txBody>
+      </p:sp>
+      <p:sp>
+        <p:nvSpPr>
+          <p:cNvPr id="233" name="VisualPanelArea"/>
+          <p:cNvSpPr txBox="1"/>
+          <p:nvPr/>
+        </p:nvSpPr>
+        <p:spPr>
+          <a:xfrm>
+            <a:off x="7452360" y="3758184"/>
+            <a:ext cx="3072384" cy="201168"/>
+          </a:xfrm>
+          <a:prstGeom prst="rect">
+            <a:avLst/>
+          </a:prstGeom>
+          <a:noFill/>
+        </p:spPr>
+        <p:txBody>
+          <a:bodyPr wrap="square">
+            <a:noAutofit/>
+          </a:bodyPr>
+          <a:lstStyle/>
+          <a:p>
+            <a:pPr/>
+            <a:r>
+              <a:rPr lang="en-MY" sz="800" dirty="0">
+                <a:solidFill>
+                  <a:srgbClr val="808080"/>
+                </a:solidFill>
+              </a:rPr>
+              <a:t>Ruang visual produksi — aset tidak dibenamkan.</a:t>
             </a:r>
           </a:p>
         </p:txBody>
@@ -9176,6 +9550,84 @@
                 </a:solidFill>
               </a:rPr>
               <a:t>  4/5 contoh dilihat.</a:t>
+            </a:r>
+          </a:p>
+          <a:p>
+            <a:r>
+              <a:rPr lang="en-MY" sz="900" b="1" dirty="0">
+                <a:solidFill>
+                  <a:schemeClr val="tx1">
+                    <a:lumMod val="85000"/>
+                    <a:lumOff val="15000"/>
+                  </a:schemeClr>
+                </a:solidFill>
+              </a:rPr>
+              <a:t>VISUAL:</a:t>
+            </a:r>
+          </a:p>
+          <a:p>
+            <a:r>
+              <a:rPr lang="en-MY" sz="900" dirty="0">
+                <a:solidFill>
+                  <a:schemeClr val="tx1">
+                    <a:lumMod val="85000"/>
+                    <a:lumOff val="15000"/>
+                  </a:schemeClr>
+                </a:solidFill>
+              </a:rPr>
+              <a:t>  subjenis skrin: EXAMPLE_POPUP</a:t>
+            </a:r>
+          </a:p>
+          <a:p>
+            <a:r>
+              <a:rPr lang="en-MY" sz="900" dirty="0">
+                <a:solidFill>
+                  <a:schemeClr val="tx1">
+                    <a:lumMod val="85000"/>
+                    <a:lumOff val="15000"/>
+                  </a:schemeClr>
+                </a:solidFill>
+              </a:rPr>
+              <a:t>  subjenis popup: EXAMPLE_POPUP</a:t>
+            </a:r>
+          </a:p>
+          <a:p>
+            <a:r>
+              <a:rPr lang="en-MY" sz="900" dirty="0">
+                <a:solidFill>
+                  <a:schemeClr val="tx1">
+                    <a:lumMod val="85000"/>
+                    <a:lumOff val="15000"/>
+                  </a:schemeClr>
+                </a:solidFill>
+              </a:rPr>
+              <a:t>  keperluan visual: REQUIRED</a:t>
+            </a:r>
+          </a:p>
+          <a:p>
+            <a:r>
+              <a:rPr lang="en-MY" sz="900" dirty="0">
+                <a:solidFill>
+                  <a:schemeClr val="tx1">
+                    <a:lumMod val="85000"/>
+                    <a:lumOff val="15000"/>
+                  </a:schemeClr>
+                </a:solidFill>
+              </a:rPr>
+              <a:t>  status: RESOLVED</a:t>
+            </a:r>
+          </a:p>
+          <a:p>
+            <a:r>
+              <a:rPr lang="en-MY" sz="900" dirty="0">
+                <a:solidFill>
+                  <a:schemeClr val="tx1">
+                    <a:lumMod val="85000"/>
+                    <a:lumOff val="15000"/>
+                  </a:schemeClr>
+                </a:solidFill>
+              </a:rPr>
+              <a:t>  kuasa: SOURCE_ASSET_FIGURE</a:t>
             </a:r>
           </a:p>
           <a:p>
@@ -9362,7 +9814,7 @@
           <a:p>
             <a:pPr algn="ctr"/>
             <a:r>
-              <a:rPr lang="en-MY" sz="1500" b="1" dirty="0">
+              <a:rPr lang="en-MY" sz="1500" b="1" i="1" dirty="0">
                 <a:solidFill>
                   <a:schemeClr val="tx1">
                     <a:lumMod val="85000"/>
@@ -9671,7 +10123,7 @@
           <a:p>
             <a:pPr algn="ctr"/>
             <a:r>
-              <a:rPr lang="en-MY" sz="1500" b="1" dirty="0">
+              <a:rPr lang="en-MY" sz="1500" b="1" i="1" dirty="0">
                 <a:solidFill>
                   <a:schemeClr val="tx1">
                     <a:lumMod val="85000"/>
@@ -9774,7 +10226,7 @@
           <a:p>
             <a:pPr algn="ctr"/>
             <a:r>
-              <a:rPr lang="en-MY" sz="1500" b="1" dirty="0">
+              <a:rPr lang="en-MY" sz="1500" b="1" i="1" dirty="0">
                 <a:solidFill>
                   <a:schemeClr val="tx1">
                     <a:lumMod val="85000"/>
@@ -9848,14 +10300,48 @@
       </p:sp>
       <p:sp>
         <p:nvSpPr>
+          <p:cNvPr id="30" name="VisualDir"/>
+          <p:cNvSpPr txBox="1"/>
+          <p:nvPr/>
+        </p:nvSpPr>
+        <p:spPr>
+          <a:xfrm>
+            <a:off x="723930" y="5358384"/>
+            <a:ext cx="10744200" cy="365760"/>
+          </a:xfrm>
+          <a:prstGeom prst="rect">
+            <a:avLst/>
+          </a:prstGeom>
+          <a:noFill/>
+        </p:spPr>
+        <p:txBody>
+          <a:bodyPr wrap="square">
+            <a:noAutofit/>
+          </a:bodyPr>
+          <a:lstStyle/>
+          <a:p>
+            <a:pPr/>
+            <a:r>
+              <a:rPr lang="en-MY" sz="1100" dirty="0">
+                <a:solidFill>
+                  <a:srgbClr val="808080"/>
+                </a:solidFill>
+              </a:rPr>
+              <a:t>[Visual: Footbridge Taman Botani Perdana]</a:t>
+            </a:r>
+          </a:p>
+        </p:txBody>
+      </p:sp>
+      <p:sp>
+        <p:nvSpPr>
           <p:cNvPr id="200" name="PopupPanel"/>
           <p:cNvSpPr txBox="1"/>
           <p:nvPr/>
         </p:nvSpPr>
         <p:spPr>
           <a:xfrm>
-            <a:off x="1234440" y="1737360"/>
-            <a:ext cx="9723090" cy="3017520"/>
+            <a:off x="1234440" y="1481328"/>
+            <a:ext cx="9723090" cy="2788920"/>
           </a:xfrm>
           <a:prstGeom prst="rect">
             <a:avLst/>
@@ -9884,8 +10370,8 @@
         </p:nvSpPr>
         <p:spPr>
           <a:xfrm>
-            <a:off x="1490472" y="1883664"/>
-            <a:ext cx="8534370" cy="365760"/>
+            <a:off x="1490472" y="1627632"/>
+            <a:ext cx="5532120" cy="365760"/>
           </a:xfrm>
           <a:prstGeom prst="rect">
             <a:avLst/>
@@ -9900,7 +10386,7 @@
           <a:p>
             <a:pPr/>
             <a:r>
-              <a:rPr lang="en-MY" sz="2000" b="1" dirty="0">
+              <a:rPr lang="en-MY" sz="2000" b="1" i="1" dirty="0">
                 <a:solidFill>
                   <a:schemeClr val="tx1">
                     <a:lumMod val="85000"/>
@@ -9921,7 +10407,7 @@
         </p:nvSpPr>
         <p:spPr>
           <a:xfrm>
-            <a:off x="10317450" y="1901952"/>
+            <a:off x="10317450" y="1645920"/>
             <a:ext cx="384048" cy="384048"/>
           </a:xfrm>
           <a:prstGeom prst="ellipse">
@@ -9950,7 +10436,7 @@
         </p:nvSpPr>
         <p:spPr>
           <a:xfrm>
-            <a:off x="10421142" y="2005645"/>
+            <a:off x="10421142" y="1749613"/>
             <a:ext cx="176662" cy="176662"/>
           </a:xfrm>
           <a:custGeom>
@@ -10024,8 +10510,8 @@
         </p:nvSpPr>
         <p:spPr>
           <a:xfrm>
-            <a:off x="1490472" y="2468880"/>
-            <a:ext cx="9211026" cy="219456"/>
+            <a:off x="1490472" y="2212848"/>
+            <a:ext cx="5532120" cy="219456"/>
           </a:xfrm>
           <a:prstGeom prst="rect">
             <a:avLst/>
@@ -10058,8 +10544,8 @@
         </p:nvSpPr>
         <p:spPr>
           <a:xfrm>
-            <a:off x="1490472" y="2706624"/>
-            <a:ext cx="9211026" cy="219456"/>
+            <a:off x="1490472" y="2450592"/>
+            <a:ext cx="5532120" cy="429768"/>
           </a:xfrm>
           <a:prstGeom prst="rect">
             <a:avLst/>
@@ -10082,7 +10568,21 @@
                   </a:schemeClr>
                 </a:solidFill>
               </a:rPr>
-              <a:t>Jambatan kecil untuk laluan pejalan kaki melintasi aliran air atau longkang besar.</a:t>
+              <a:t>Jambatan kecil untuk laluan pejalan kaki melintasi</a:t>
+            </a:r>
+          </a:p>
+          <a:p>
+            <a:pPr/>
+            <a:r>
+              <a:rPr lang="en-MY" sz="1250" dirty="0">
+                <a:solidFill>
+                  <a:schemeClr val="tx1">
+                    <a:lumMod val="85000"/>
+                    <a:lumOff val="15000"/>
+                  </a:schemeClr>
+                </a:solidFill>
+              </a:rPr>
+              <a:t>aliran air atau longkang besar.</a:t>
             </a:r>
           </a:p>
         </p:txBody>
@@ -10095,8 +10595,8 @@
         </p:nvSpPr>
         <p:spPr>
           <a:xfrm>
-            <a:off x="1490472" y="3086100"/>
-            <a:ext cx="9211026" cy="219456"/>
+            <a:off x="1490472" y="3044952"/>
+            <a:ext cx="5532120" cy="219456"/>
           </a:xfrm>
           <a:prstGeom prst="rect">
             <a:avLst/>
@@ -10129,8 +10629,8 @@
         </p:nvSpPr>
         <p:spPr>
           <a:xfrm>
-            <a:off x="1490472" y="3323844"/>
-            <a:ext cx="9211026" cy="219456"/>
+            <a:off x="1490472" y="3282696"/>
+            <a:ext cx="5532120" cy="219456"/>
           </a:xfrm>
           <a:prstGeom prst="rect">
             <a:avLst/>
@@ -10145,6 +10645,17 @@
           <a:p>
             <a:pPr/>
             <a:r>
+              <a:rPr lang="en-MY" sz="1250" i="1" dirty="0">
+                <a:solidFill>
+                  <a:schemeClr val="tx1">
+                    <a:lumMod val="85000"/>
+                    <a:lumOff val="15000"/>
+                  </a:schemeClr>
+                </a:solidFill>
+              </a:rPr>
+              <a:t>Footbridge</a:t>
+            </a:r>
+            <a:r>
               <a:rPr lang="en-MY" sz="1250" dirty="0">
                 <a:solidFill>
                   <a:schemeClr val="tx1">
@@ -10153,55 +10664,51 @@
                   </a:schemeClr>
                 </a:solidFill>
               </a:rPr>
-              <a:t>Footbridge Taman Botani Perdana</a:t>
-            </a:r>
-          </a:p>
-        </p:txBody>
-      </p:sp>
-      <p:sp>
-        <p:nvSpPr>
-          <p:cNvPr id="214" name="FHead"/>
+              <a:t> Taman Botani Perdana</a:t>
+            </a:r>
+          </a:p>
+        </p:txBody>
+      </p:sp>
+      <p:sp>
+        <p:nvSpPr>
+          <p:cNvPr id="230" name="VisualPanel"/>
           <p:cNvSpPr txBox="1"/>
           <p:nvPr/>
         </p:nvSpPr>
         <p:spPr>
           <a:xfrm>
-            <a:off x="1490472" y="3703320"/>
-            <a:ext cx="9211026" cy="219456"/>
+            <a:off x="7287768" y="2157984"/>
+            <a:ext cx="3401568" cy="1874520"/>
           </a:xfrm>
           <a:prstGeom prst="rect">
             <a:avLst/>
           </a:prstGeom>
-          <a:noFill/>
+          <a:solidFill>
+            <a:srgbClr val="F7F7F7"/>
+          </a:solidFill>
+          <a:ln w="12700">
+            <a:solidFill>
+              <a:srgbClr val="BFBFBF"/>
+            </a:solidFill>
+          </a:ln>
         </p:spPr>
         <p:txBody>
           <a:bodyPr wrap="square">
             <a:noAutofit/>
           </a:bodyPr>
           <a:lstStyle/>
-          <a:p>
-            <a:pPr/>
-            <a:r>
-              <a:rPr lang="en-MY" sz="950" b="1" dirty="0">
-                <a:solidFill>
-                  <a:srgbClr val="7F6000"/>
-                </a:solidFill>
-              </a:rPr>
-              <a:t>ARAHAN VISUAL — TIDAK DIBENAMKAN</a:t>
-            </a:r>
-          </a:p>
-        </p:txBody>
-      </p:sp>
-      <p:sp>
-        <p:nvSpPr>
-          <p:cNvPr id="215" name="FBody"/>
+        </p:txBody>
+      </p:sp>
+      <p:sp>
+        <p:nvSpPr>
+          <p:cNvPr id="231" name="VisualPanelHead"/>
           <p:cNvSpPr txBox="1"/>
           <p:nvPr/>
         </p:nvSpPr>
         <p:spPr>
           <a:xfrm>
-            <a:off x="1490472" y="3941064"/>
-            <a:ext cx="9211026" cy="429768"/>
+            <a:off x="7452360" y="2286000"/>
+            <a:ext cx="3072384" cy="219456"/>
           </a:xfrm>
           <a:prstGeom prst="rect">
             <a:avLst/>
@@ -10216,29 +10723,105 @@
           <a:p>
             <a:pPr/>
             <a:r>
-              <a:rPr lang="en-MY" sz="1250" dirty="0">
-                <a:solidFill>
-                  <a:schemeClr val="tx1">
-                    <a:lumMod val="85000"/>
-                    <a:lumOff val="15000"/>
-                  </a:schemeClr>
-                </a:solidFill>
-              </a:rPr>
-              <a:t>[Visual: Arahan visual untuk Footbridge — spesifikasi teks sahaja, modul ms 238. Tidak</a:t>
-            </a:r>
-          </a:p>
+              <a:rPr lang="en-MY" sz="900" b="1" dirty="0">
+                <a:solidFill>
+                  <a:srgbClr val="7F6000"/>
+                </a:solidFill>
+              </a:rPr>
+              <a:t>ARAHAN VISUAL — TIDAK DIBENAMKAN</a:t>
+            </a:r>
+          </a:p>
+        </p:txBody>
+      </p:sp>
+      <p:sp>
+        <p:nvSpPr>
+          <p:cNvPr id="232" name="VisualPanelBody"/>
+          <p:cNvSpPr txBox="1"/>
+          <p:nvPr/>
+        </p:nvSpPr>
+        <p:spPr>
+          <a:xfrm>
+            <a:off x="7452360" y="2542032"/>
+            <a:ext cx="3072384" cy="274320"/>
+          </a:xfrm>
+          <a:prstGeom prst="rect">
+            <a:avLst/>
+          </a:prstGeom>
+          <a:noFill/>
+        </p:spPr>
+        <p:txBody>
+          <a:bodyPr wrap="square">
+            <a:noAutofit/>
+          </a:bodyPr>
+          <a:lstStyle/>
           <a:p>
             <a:pPr/>
             <a:r>
-              <a:rPr lang="en-MY" sz="1250" dirty="0">
-                <a:solidFill>
-                  <a:schemeClr val="tx1">
-                    <a:lumMod val="85000"/>
-                    <a:lumOff val="15000"/>
-                  </a:schemeClr>
-                </a:solidFill>
-              </a:rPr>
-              <a:t>dibenamkan.]</a:t>
+              <a:rPr lang="en-MY" sz="1050" dirty="0">
+                <a:solidFill>
+                  <a:schemeClr val="tx1">
+                    <a:lumMod val="85000"/>
+                    <a:lumOff val="15000"/>
+                  </a:schemeClr>
+                </a:solidFill>
+              </a:rPr>
+              <a:t>[Visual: </a:t>
+            </a:r>
+            <a:r>
+              <a:rPr lang="en-MY" sz="1050" i="1" dirty="0">
+                <a:solidFill>
+                  <a:schemeClr val="tx1">
+                    <a:lumMod val="85000"/>
+                    <a:lumOff val="15000"/>
+                  </a:schemeClr>
+                </a:solidFill>
+              </a:rPr>
+              <a:t>Footbridge</a:t>
+            </a:r>
+            <a:r>
+              <a:rPr lang="en-MY" sz="1050" dirty="0">
+                <a:solidFill>
+                  <a:schemeClr val="tx1">
+                    <a:lumMod val="85000"/>
+                    <a:lumOff val="15000"/>
+                  </a:schemeClr>
+                </a:solidFill>
+              </a:rPr>
+              <a:t> Taman Botani Perdana]</a:t>
+            </a:r>
+          </a:p>
+        </p:txBody>
+      </p:sp>
+      <p:sp>
+        <p:nvSpPr>
+          <p:cNvPr id="233" name="VisualPanelArea"/>
+          <p:cNvSpPr txBox="1"/>
+          <p:nvPr/>
+        </p:nvSpPr>
+        <p:spPr>
+          <a:xfrm>
+            <a:off x="7452360" y="3758184"/>
+            <a:ext cx="3072384" cy="201168"/>
+          </a:xfrm>
+          <a:prstGeom prst="rect">
+            <a:avLst/>
+          </a:prstGeom>
+          <a:noFill/>
+        </p:spPr>
+        <p:txBody>
+          <a:bodyPr wrap="square">
+            <a:noAutofit/>
+          </a:bodyPr>
+          <a:lstStyle/>
+          <a:p>
+            <a:pPr/>
+            <a:r>
+              <a:rPr lang="en-MY" sz="800" dirty="0">
+                <a:solidFill>
+                  <a:srgbClr val="808080"/>
+                </a:solidFill>
+              </a:rPr>
+              <a:t>Ruang visual produksi — aset tidak dibenamkan.</a:t>
             </a:r>
           </a:p>
         </p:txBody>
@@ -10668,6 +11251,84 @@
                 </a:solidFill>
               </a:rPr>
               <a:t>  5/5 contoh dilihat.</a:t>
+            </a:r>
+          </a:p>
+          <a:p>
+            <a:r>
+              <a:rPr lang="en-MY" sz="900" b="1" dirty="0">
+                <a:solidFill>
+                  <a:schemeClr val="tx1">
+                    <a:lumMod val="85000"/>
+                    <a:lumOff val="15000"/>
+                  </a:schemeClr>
+                </a:solidFill>
+              </a:rPr>
+              <a:t>VISUAL:</a:t>
+            </a:r>
+          </a:p>
+          <a:p>
+            <a:r>
+              <a:rPr lang="en-MY" sz="900" dirty="0">
+                <a:solidFill>
+                  <a:schemeClr val="tx1">
+                    <a:lumMod val="85000"/>
+                    <a:lumOff val="15000"/>
+                  </a:schemeClr>
+                </a:solidFill>
+              </a:rPr>
+              <a:t>  subjenis skrin: EXAMPLE_POPUP</a:t>
+            </a:r>
+          </a:p>
+          <a:p>
+            <a:r>
+              <a:rPr lang="en-MY" sz="900" dirty="0">
+                <a:solidFill>
+                  <a:schemeClr val="tx1">
+                    <a:lumMod val="85000"/>
+                    <a:lumOff val="15000"/>
+                  </a:schemeClr>
+                </a:solidFill>
+              </a:rPr>
+              <a:t>  subjenis popup: EXAMPLE_POPUP</a:t>
+            </a:r>
+          </a:p>
+          <a:p>
+            <a:r>
+              <a:rPr lang="en-MY" sz="900" dirty="0">
+                <a:solidFill>
+                  <a:schemeClr val="tx1">
+                    <a:lumMod val="85000"/>
+                    <a:lumOff val="15000"/>
+                  </a:schemeClr>
+                </a:solidFill>
+              </a:rPr>
+              <a:t>  keperluan visual: REQUIRED</a:t>
+            </a:r>
+          </a:p>
+          <a:p>
+            <a:r>
+              <a:rPr lang="en-MY" sz="900" dirty="0">
+                <a:solidFill>
+                  <a:schemeClr val="tx1">
+                    <a:lumMod val="85000"/>
+                    <a:lumOff val="15000"/>
+                  </a:schemeClr>
+                </a:solidFill>
+              </a:rPr>
+              <a:t>  status: RESOLVED</a:t>
+            </a:r>
+          </a:p>
+          <a:p>
+            <a:r>
+              <a:rPr lang="en-MY" sz="900" dirty="0">
+                <a:solidFill>
+                  <a:schemeClr val="tx1">
+                    <a:lumMod val="85000"/>
+                    <a:lumOff val="15000"/>
+                  </a:schemeClr>
+                </a:solidFill>
+              </a:rPr>
+              <a:t>  kuasa: BARIAH_EXEMPLAR_CONTOH</a:t>
             </a:r>
           </a:p>
           <a:p>
@@ -10854,7 +11515,7 @@
           <a:p>
             <a:pPr algn="ctr"/>
             <a:r>
-              <a:rPr lang="en-MY" sz="1500" b="1" dirty="0">
+              <a:rPr lang="en-MY" sz="1500" b="1" i="1" dirty="0">
                 <a:solidFill>
                   <a:schemeClr val="tx1">
                     <a:lumMod val="85000"/>
@@ -11163,7 +11824,7 @@
           <a:p>
             <a:pPr algn="ctr"/>
             <a:r>
-              <a:rPr lang="en-MY" sz="1500" b="1" dirty="0">
+              <a:rPr lang="en-MY" sz="1500" b="1" i="1" dirty="0">
                 <a:solidFill>
                   <a:schemeClr val="tx1">
                     <a:lumMod val="85000"/>
@@ -11266,7 +11927,7 @@
           <a:p>
             <a:pPr algn="ctr"/>
             <a:r>
-              <a:rPr lang="en-MY" sz="1500" b="1" dirty="0">
+              <a:rPr lang="en-MY" sz="1500" b="1" i="1" dirty="0">
                 <a:solidFill>
                   <a:schemeClr val="tx1">
                     <a:lumMod val="85000"/>
@@ -11964,6 +12625,84 @@
           </a:p>
           <a:p>
             <a:r>
+              <a:rPr lang="en-MY" sz="900" b="1" dirty="0">
+                <a:solidFill>
+                  <a:schemeClr val="tx1">
+                    <a:lumMod val="85000"/>
+                    <a:lumOff val="15000"/>
+                  </a:schemeClr>
+                </a:solidFill>
+              </a:rPr>
+              <a:t>VISUAL:</a:t>
+            </a:r>
+          </a:p>
+          <a:p>
+            <a:r>
+              <a:rPr lang="en-MY" sz="900" dirty="0">
+                <a:solidFill>
+                  <a:schemeClr val="tx1">
+                    <a:lumMod val="85000"/>
+                    <a:lumOff val="15000"/>
+                  </a:schemeClr>
+                </a:solidFill>
+              </a:rPr>
+              <a:t>  subjenis skrin: COMPLETION_STATE</a:t>
+            </a:r>
+          </a:p>
+          <a:p>
+            <a:r>
+              <a:rPr lang="en-MY" sz="900" dirty="0">
+                <a:solidFill>
+                  <a:schemeClr val="tx1">
+                    <a:lumMod val="85000"/>
+                    <a:lumOff val="15000"/>
+                  </a:schemeClr>
+                </a:solidFill>
+              </a:rPr>
+              <a:t>  subjenis popup: —</a:t>
+            </a:r>
+          </a:p>
+          <a:p>
+            <a:r>
+              <a:rPr lang="en-MY" sz="900" dirty="0">
+                <a:solidFill>
+                  <a:schemeClr val="tx1">
+                    <a:lumMod val="85000"/>
+                    <a:lumOff val="15000"/>
+                  </a:schemeClr>
+                </a:solidFill>
+              </a:rPr>
+              <a:t>  keperluan visual: NOT_REQUIRED</a:t>
+            </a:r>
+          </a:p>
+          <a:p>
+            <a:r>
+              <a:rPr lang="en-MY" sz="900" dirty="0">
+                <a:solidFill>
+                  <a:schemeClr val="tx1">
+                    <a:lumMod val="85000"/>
+                    <a:lumOff val="15000"/>
+                  </a:schemeClr>
+                </a:solidFill>
+              </a:rPr>
+              <a:t>  status: NOT_REQUIRED</a:t>
+            </a:r>
+          </a:p>
+          <a:p>
+            <a:r>
+              <a:rPr lang="en-MY" sz="900" dirty="0">
+                <a:solidFill>
+                  <a:schemeClr val="tx1">
+                    <a:lumMod val="85000"/>
+                    <a:lumOff val="15000"/>
+                  </a:schemeClr>
+                </a:solidFill>
+              </a:rPr>
+              <a:t>  kuasa: —</a:t>
+            </a:r>
+          </a:p>
+          <a:p>
+            <a:r>
               <a:rPr lang="en-MY" sz="900" dirty="0">
                 <a:solidFill>
                   <a:schemeClr val="tx1">
@@ -12740,6 +13479,110 @@
           </a:p>
           <a:p>
             <a:r>
+              <a:rPr lang="en-MY" sz="900" b="1" dirty="0">
+                <a:solidFill>
+                  <a:schemeClr val="tx1">
+                    <a:lumMod val="85000"/>
+                    <a:lumOff val="15000"/>
+                  </a:schemeClr>
+                </a:solidFill>
+              </a:rPr>
+              <a:t>ARAHAN INTERAKSI (kanvas = VO):</a:t>
+            </a:r>
+          </a:p>
+          <a:p>
+            <a:r>
+              <a:rPr lang="en-MY" sz="900" dirty="0">
+                <a:solidFill>
+                  <a:schemeClr val="tx1">
+                    <a:lumMod val="85000"/>
+                    <a:lumOff val="15000"/>
+                  </a:schemeClr>
+                </a:solidFill>
+              </a:rPr>
+              <a:t>  Klik pada setiap struktur untuk penjelasan lanjut.</a:t>
+            </a:r>
+          </a:p>
+          <a:p>
+            <a:r>
+              <a:rPr lang="en-MY" sz="900" b="1" dirty="0">
+                <a:solidFill>
+                  <a:schemeClr val="tx1">
+                    <a:lumMod val="85000"/>
+                    <a:lumOff val="15000"/>
+                  </a:schemeClr>
+                </a:solidFill>
+              </a:rPr>
+              <a:t>VISUAL:</a:t>
+            </a:r>
+          </a:p>
+          <a:p>
+            <a:r>
+              <a:rPr lang="en-MY" sz="900" dirty="0">
+                <a:solidFill>
+                  <a:schemeClr val="tx1">
+                    <a:lumMod val="85000"/>
+                    <a:lumOff val="15000"/>
+                  </a:schemeClr>
+                </a:solidFill>
+              </a:rPr>
+              <a:t>  subjenis skrin: GROUP_MASTER</a:t>
+            </a:r>
+          </a:p>
+          <a:p>
+            <a:r>
+              <a:rPr lang="en-MY" sz="900" dirty="0">
+                <a:solidFill>
+                  <a:schemeClr val="tx1">
+                    <a:lumMod val="85000"/>
+                    <a:lumOff val="15000"/>
+                  </a:schemeClr>
+                </a:solidFill>
+              </a:rPr>
+              <a:t>  subjenis popup: —</a:t>
+            </a:r>
+          </a:p>
+          <a:p>
+            <a:r>
+              <a:rPr lang="en-MY" sz="900" dirty="0">
+                <a:solidFill>
+                  <a:schemeClr val="tx1">
+                    <a:lumMod val="85000"/>
+                    <a:lumOff val="15000"/>
+                  </a:schemeClr>
+                </a:solidFill>
+              </a:rPr>
+              <a:t>  keperluan visual: NOT_REQUIRED</a:t>
+            </a:r>
+          </a:p>
+          <a:p>
+            <a:r>
+              <a:rPr lang="en-MY" sz="900" dirty="0">
+                <a:solidFill>
+                  <a:schemeClr val="tx1">
+                    <a:lumMod val="85000"/>
+                    <a:lumOff val="15000"/>
+                  </a:schemeClr>
+                </a:solidFill>
+              </a:rPr>
+              <a:t>  status: NOT_REQUIRED</a:t>
+            </a:r>
+          </a:p>
+          <a:p>
+            <a:r>
+              <a:rPr lang="en-MY" sz="900" dirty="0">
+                <a:solidFill>
+                  <a:schemeClr val="tx1">
+                    <a:lumMod val="85000"/>
+                    <a:lumOff val="15000"/>
+                  </a:schemeClr>
+                </a:solidFill>
+              </a:rPr>
+              <a:t>  kuasa: —</a:t>
+            </a:r>
+          </a:p>
+          <a:p>
+            <a:r>
               <a:rPr lang="en-MY" sz="900" dirty="0">
                 <a:solidFill>
                   <a:schemeClr val="tx1">
@@ -12862,8 +13705,8 @@
         </p:nvSpPr>
         <p:spPr>
           <a:xfrm>
-            <a:off x="723930" y="1225296"/>
-            <a:ext cx="10744200" cy="1828800"/>
+            <a:off x="723930" y="1115568"/>
+            <a:ext cx="10744200" cy="786384"/>
           </a:xfrm>
           <a:prstGeom prst="rect">
             <a:avLst/>
@@ -12876,212 +13719,120 @@
           </a:bodyPr>
           <a:lstStyle/>
           <a:p>
-            <a:pPr marL="285750" indent="-285750">
-              <a:spcBef>
-                <a:spcPts val="300"/>
-              </a:spcBef>
-              <a:buFont typeface="Arial" panose="020B0604020202020204" pitchFamily="34" charset="0"/>
-              <a:buChar char="•"/>
-            </a:pPr>
-            <a:r>
-              <a:rPr lang="en-MY" sz="1300" dirty="0">
-                <a:solidFill>
-                  <a:schemeClr val="tx1">
-                    <a:lumMod val="85000"/>
-                    <a:lumOff val="15000"/>
-                  </a:schemeClr>
-                </a:solidFill>
-              </a:rPr>
-              <a:t>Perabot taman merujuk kepada elemen-elemen boleh alih atau kekal yang ditempatkan di ruang landskap untuk</a:t>
-            </a:r>
-          </a:p>
-          <a:p>
-            <a:pPr marL="285750" indent="-285750">
-              <a:spcBef>
-                <a:spcPts val="300"/>
-              </a:spcBef>
-              <a:buFont typeface="Arial" panose="020B0604020202020204" pitchFamily="34" charset="0"/>
-              <a:buChar char="•"/>
-            </a:pPr>
-            <a:r>
-              <a:rPr lang="en-MY" sz="1300" dirty="0">
-                <a:solidFill>
-                  <a:schemeClr val="tx1">
-                    <a:lumMod val="85000"/>
-                    <a:lumOff val="15000"/>
-                  </a:schemeClr>
-                </a:solidFill>
-              </a:rPr>
-              <a:t>meningkatkan fungsi, keselesaan, dan estetika. Ini melibatkan pemahaman tentang bahan, ketahanan, ergonomik,</a:t>
-            </a:r>
-          </a:p>
-          <a:p>
-            <a:pPr marL="285750" indent="-285750">
-              <a:spcBef>
-                <a:spcPts val="300"/>
-              </a:spcBef>
-              <a:buFont typeface="Arial" panose="020B0604020202020204" pitchFamily="34" charset="0"/>
-              <a:buChar char="•"/>
-            </a:pPr>
-            <a:r>
-              <a:rPr lang="en-MY" sz="1300" dirty="0">
-                <a:solidFill>
-                  <a:schemeClr val="tx1">
-                    <a:lumMod val="85000"/>
-                    <a:lumOff val="15000"/>
-                  </a:schemeClr>
-                </a:solidFill>
-              </a:rPr>
-              <a:t>dan kesesuaian reka bentuk dengan tema keseluruhan landskap. Terdapat lima jenis perabot taman: Kerusi Taman,</a:t>
-            </a:r>
-          </a:p>
-          <a:p>
-            <a:pPr marL="285750" indent="-285750">
-              <a:spcBef>
-                <a:spcPts val="300"/>
-              </a:spcBef>
-              <a:buFont typeface="Arial" panose="020B0604020202020204" pitchFamily="34" charset="0"/>
-              <a:buChar char="•"/>
-            </a:pPr>
-            <a:r>
-              <a:rPr lang="en-MY" sz="1300" dirty="0">
-                <a:solidFill>
-                  <a:schemeClr val="tx1">
-                    <a:lumMod val="85000"/>
-                    <a:lumOff val="15000"/>
-                  </a:schemeClr>
-                </a:solidFill>
-              </a:rPr>
-              <a:t>Papan Tanda, Tong Sampah, </a:t>
-            </a:r>
-            <a:r>
-              <a:rPr lang="en-MY" sz="1300" i="1" dirty="0">
-                <a:solidFill>
-                  <a:schemeClr val="tx1">
-                    <a:lumMod val="85000"/>
-                    <a:lumOff val="15000"/>
-                  </a:schemeClr>
-                </a:solidFill>
-              </a:rPr>
-              <a:t>Drinking Fountain</a:t>
-            </a:r>
-            <a:r>
-              <a:rPr lang="en-MY" sz="1300" dirty="0">
-                <a:solidFill>
-                  <a:schemeClr val="tx1">
-                    <a:lumMod val="85000"/>
-                    <a:lumOff val="15000"/>
-                  </a:schemeClr>
-                </a:solidFill>
-              </a:rPr>
-              <a:t>, dan </a:t>
-            </a:r>
-            <a:r>
-              <a:rPr lang="en-MY" sz="1300" i="1" dirty="0">
-                <a:solidFill>
-                  <a:schemeClr val="tx1">
-                    <a:lumMod val="85000"/>
-                    <a:lumOff val="15000"/>
-                  </a:schemeClr>
-                </a:solidFill>
-              </a:rPr>
-              <a:t>BBQ Pit</a:t>
-            </a:r>
-            <a:r>
-              <a:rPr lang="en-MY" sz="1300" dirty="0">
-                <a:solidFill>
-                  <a:schemeClr val="tx1">
-                    <a:lumMod val="85000"/>
-                    <a:lumOff val="15000"/>
-                  </a:schemeClr>
-                </a:solidFill>
-              </a:rPr>
-              <a:t>.</a:t>
-            </a:r>
-          </a:p>
-        </p:txBody>
-      </p:sp>
-      <p:sp>
-        <p:nvSpPr>
-          <p:cNvPr id="80" name="PerLbl"/>
+            <a:pPr/>
+            <a:r>
+              <a:rPr lang="en-MY" sz="1200" dirty="0">
+                <a:solidFill>
+                  <a:schemeClr val="tx1">
+                    <a:lumMod val="85000"/>
+                    <a:lumOff val="15000"/>
+                  </a:schemeClr>
+                </a:solidFill>
+              </a:rPr>
+              <a:t>Perabot taman merujuk kepada elemen-elemen boleh alih atau kekal yang ditempatkan di ruang landskap untuk meningkatkan</a:t>
+            </a:r>
+          </a:p>
+          <a:p>
+            <a:pPr/>
+            <a:r>
+              <a:rPr lang="en-MY" sz="1200" dirty="0">
+                <a:solidFill>
+                  <a:schemeClr val="tx1">
+                    <a:lumMod val="85000"/>
+                    <a:lumOff val="15000"/>
+                  </a:schemeClr>
+                </a:solidFill>
+              </a:rPr>
+              <a:t>fungsi, keselesaan, dan estetika. Ini melibatkan pemahaman tentang bahan, ketahanan, ergonomik, dan kesesuaian reka</a:t>
+            </a:r>
+          </a:p>
+          <a:p>
+            <a:pPr/>
+            <a:r>
+              <a:rPr lang="en-MY" sz="1200" dirty="0">
+                <a:solidFill>
+                  <a:schemeClr val="tx1">
+                    <a:lumMod val="85000"/>
+                    <a:lumOff val="15000"/>
+                  </a:schemeClr>
+                </a:solidFill>
+              </a:rPr>
+              <a:t>bentuk dengan tema keseluruhan landskap. Terdapat lima jenis perabot taman: Kerusi Taman, Papan Tanda, Tong Sampah,</a:t>
+            </a:r>
+          </a:p>
+        </p:txBody>
+      </p:sp>
+      <p:sp>
+        <p:nvSpPr>
+          <p:cNvPr id="80" name="ComponentCard"/>
           <p:cNvSpPr txBox="1"/>
           <p:nvPr/>
         </p:nvSpPr>
         <p:spPr>
           <a:xfrm>
-            <a:off x="723930" y="3383280"/>
-            <a:ext cx="5852160" cy="329184"/>
+            <a:off x="723885" y="1993392"/>
+            <a:ext cx="3325368" cy="1847088"/>
           </a:xfrm>
           <a:prstGeom prst="rect">
             <a:avLst/>
           </a:prstGeom>
-          <a:noFill/>
+          <a:solidFill>
+            <a:srgbClr val="F2F2F2"/>
+          </a:solidFill>
+          <a:ln w="12700">
+            <a:solidFill>
+              <a:srgbClr val="404040"/>
+            </a:solidFill>
+          </a:ln>
         </p:spPr>
         <p:txBody>
           <a:bodyPr wrap="square">
             <a:noAutofit/>
           </a:bodyPr>
           <a:lstStyle/>
-          <a:p>
-            <a:pPr/>
-            <a:r>
-              <a:rPr lang="en-MY" sz="1600" b="1" dirty="0">
-                <a:solidFill>
-                  <a:schemeClr val="tx1">
-                    <a:lumMod val="85000"/>
-                    <a:lumOff val="15000"/>
-                  </a:schemeClr>
-                </a:solidFill>
-              </a:rPr>
-              <a:t>Kerusi Taman</a:t>
-            </a:r>
-          </a:p>
-        </p:txBody>
-      </p:sp>
-      <p:sp>
-        <p:nvSpPr>
-          <p:cNvPr id="81" name="PerFam"/>
+        </p:txBody>
+      </p:sp>
+      <p:sp>
+        <p:nvSpPr>
+          <p:cNvPr id="81" name="ComponentVisual"/>
           <p:cNvSpPr txBox="1"/>
           <p:nvPr/>
         </p:nvSpPr>
         <p:spPr>
           <a:xfrm>
-            <a:off x="6758970" y="3410712"/>
-            <a:ext cx="4572000" cy="292608"/>
+            <a:off x="851901" y="2121408"/>
+            <a:ext cx="3069336" cy="969264"/>
           </a:xfrm>
           <a:prstGeom prst="rect">
             <a:avLst/>
           </a:prstGeom>
-          <a:noFill/>
+          <a:solidFill>
+            <a:srgbClr val="FFFFFF"/>
+          </a:solidFill>
+          <a:ln w="9525">
+            <a:solidFill>
+              <a:srgbClr val="BFBFBF"/>
+            </a:solidFill>
+            <a:prstDash val="dash"/>
+          </a:ln>
         </p:spPr>
         <p:txBody>
           <a:bodyPr wrap="square">
             <a:noAutofit/>
           </a:bodyPr>
           <a:lstStyle/>
-          <a:p>
-            <a:pPr/>
-            <a:r>
-              <a:rPr lang="en-MY" sz="1100" dirty="0">
-                <a:solidFill>
-                  <a:srgbClr val="808080"/>
-                </a:solidFill>
-              </a:rPr>
-              <a:t>FAMILY_P1</a:t>
-            </a:r>
-          </a:p>
-        </p:txBody>
-      </p:sp>
-      <p:sp>
-        <p:nvSpPr>
-          <p:cNvPr id="82" name="PerLbl"/>
+        </p:txBody>
+      </p:sp>
+      <p:sp>
+        <p:nvSpPr>
+          <p:cNvPr id="82" name="ComponentVisualDir"/>
           <p:cNvSpPr txBox="1"/>
           <p:nvPr/>
         </p:nvSpPr>
         <p:spPr>
           <a:xfrm>
-            <a:off x="723930" y="3858768"/>
-            <a:ext cx="5852160" cy="329184"/>
+            <a:off x="925053" y="2212848"/>
+            <a:ext cx="2923032" cy="804672"/>
           </a:xfrm>
           <a:prstGeom prst="rect">
             <a:avLst/>
@@ -13096,29 +13847,59 @@
           <a:p>
             <a:pPr/>
             <a:r>
-              <a:rPr lang="en-MY" sz="1600" b="1" dirty="0">
-                <a:solidFill>
-                  <a:schemeClr val="tx1">
-                    <a:lumMod val="85000"/>
-                    <a:lumOff val="15000"/>
-                  </a:schemeClr>
-                </a:solidFill>
-              </a:rPr>
-              <a:t>Papan Tanda</a:t>
-            </a:r>
-          </a:p>
-        </p:txBody>
-      </p:sp>
-      <p:sp>
-        <p:nvSpPr>
-          <p:cNvPr id="83" name="PerFam"/>
+              <a:rPr lang="en-MY" sz="750" dirty="0">
+                <a:solidFill>
+                  <a:srgbClr val="808080"/>
+                </a:solidFill>
+              </a:rPr>
+              <a:t>ARAHAN VISUAL</a:t>
+            </a:r>
+          </a:p>
+          <a:p>
+            <a:pPr/>
+            <a:r>
+              <a:rPr lang="en-MY" sz="750" dirty="0">
+                <a:solidFill>
+                  <a:srgbClr val="808080"/>
+                </a:solidFill>
+              </a:rPr>
+              <a:t>[Visual: Foto jadual</a:t>
+            </a:r>
+          </a:p>
+          <a:p>
+            <a:pPr/>
+            <a:r>
+              <a:rPr lang="en-MY" sz="750" dirty="0">
+                <a:solidFill>
+                  <a:srgbClr val="808080"/>
+                </a:solidFill>
+              </a:rPr>
+              <a:t>spesifikasi Kerusi Kayu Keras,</a:t>
+            </a:r>
+          </a:p>
+          <a:p>
+            <a:pPr/>
+            <a:r>
+              <a:rPr lang="en-MY" sz="750" dirty="0">
+                <a:solidFill>
+                  <a:srgbClr val="808080"/>
+                </a:solidFill>
+              </a:rPr>
+              <a:t>modul ms 242. Aset</a:t>
+            </a:r>
+          </a:p>
+        </p:txBody>
+      </p:sp>
+      <p:sp>
+        <p:nvSpPr>
+          <p:cNvPr id="83" name="ComponentName"/>
           <p:cNvSpPr txBox="1"/>
           <p:nvPr/>
         </p:nvSpPr>
         <p:spPr>
           <a:xfrm>
-            <a:off x="6758970" y="3886200"/>
-            <a:ext cx="4572000" cy="292608"/>
+            <a:off x="851901" y="3163824"/>
+            <a:ext cx="3069336" cy="365760"/>
           </a:xfrm>
           <a:prstGeom prst="rect">
             <a:avLst/>
@@ -13131,28 +13912,31 @@
           </a:bodyPr>
           <a:lstStyle/>
           <a:p>
-            <a:pPr/>
-            <a:r>
-              <a:rPr lang="en-MY" sz="1100" dirty="0">
-                <a:solidFill>
-                  <a:srgbClr val="808080"/>
-                </a:solidFill>
-              </a:rPr>
-              <a:t>FAMILY_P2</a:t>
-            </a:r>
-          </a:p>
-        </p:txBody>
-      </p:sp>
-      <p:sp>
-        <p:nvSpPr>
-          <p:cNvPr id="84" name="PerLbl"/>
+            <a:pPr algn="ctr"/>
+            <a:r>
+              <a:rPr lang="en-MY" sz="1400" b="1" dirty="0">
+                <a:solidFill>
+                  <a:schemeClr val="tx1">
+                    <a:lumMod val="85000"/>
+                    <a:lumOff val="15000"/>
+                  </a:schemeClr>
+                </a:solidFill>
+              </a:rPr>
+              <a:t>Kerusi Taman</a:t>
+            </a:r>
+          </a:p>
+        </p:txBody>
+      </p:sp>
+      <p:sp>
+        <p:nvSpPr>
+          <p:cNvPr id="84" name="ComponentCue"/>
           <p:cNvSpPr txBox="1"/>
           <p:nvPr/>
         </p:nvSpPr>
         <p:spPr>
           <a:xfrm>
-            <a:off x="723930" y="4334256"/>
-            <a:ext cx="5852160" cy="329184"/>
+            <a:off x="851901" y="3529584"/>
+            <a:ext cx="3069336" cy="256032"/>
           </a:xfrm>
           <a:prstGeom prst="rect">
             <a:avLst/>
@@ -13165,102 +13949,89 @@
           </a:bodyPr>
           <a:lstStyle/>
           <a:p>
-            <a:pPr/>
-            <a:r>
-              <a:rPr lang="en-MY" sz="1600" b="1" dirty="0">
-                <a:solidFill>
-                  <a:schemeClr val="tx1">
-                    <a:lumMod val="85000"/>
-                    <a:lumOff val="15000"/>
-                  </a:schemeClr>
-                </a:solidFill>
-              </a:rPr>
-              <a:t>Tong Sampah</a:t>
-            </a:r>
-          </a:p>
-        </p:txBody>
-      </p:sp>
-      <p:sp>
-        <p:nvSpPr>
-          <p:cNvPr id="85" name="PerFam"/>
+            <a:pPr algn="ctr"/>
+            <a:r>
+              <a:rPr lang="en-MY" sz="900" dirty="0">
+                <a:solidFill>
+                  <a:srgbClr val="808080"/>
+                </a:solidFill>
+              </a:rPr>
+              <a:t>Halaman seterusnya</a:t>
+            </a:r>
+          </a:p>
+        </p:txBody>
+      </p:sp>
+      <p:sp>
+        <p:nvSpPr>
+          <p:cNvPr id="85" name="ComponentCard"/>
           <p:cNvSpPr txBox="1"/>
           <p:nvPr/>
         </p:nvSpPr>
         <p:spPr>
           <a:xfrm>
-            <a:off x="6758970" y="4361688"/>
-            <a:ext cx="4572000" cy="292608"/>
+            <a:off x="4433301" y="1993392"/>
+            <a:ext cx="3325368" cy="1847088"/>
           </a:xfrm>
           <a:prstGeom prst="rect">
             <a:avLst/>
           </a:prstGeom>
-          <a:noFill/>
+          <a:solidFill>
+            <a:srgbClr val="F2F2F2"/>
+          </a:solidFill>
+          <a:ln w="12700">
+            <a:solidFill>
+              <a:srgbClr val="404040"/>
+            </a:solidFill>
+          </a:ln>
         </p:spPr>
         <p:txBody>
           <a:bodyPr wrap="square">
             <a:noAutofit/>
           </a:bodyPr>
           <a:lstStyle/>
-          <a:p>
-            <a:pPr/>
-            <a:r>
-              <a:rPr lang="en-MY" sz="1100" dirty="0">
-                <a:solidFill>
-                  <a:srgbClr val="808080"/>
-                </a:solidFill>
-              </a:rPr>
-              <a:t>FAMILY_P1</a:t>
-            </a:r>
-          </a:p>
-        </p:txBody>
-      </p:sp>
-      <p:sp>
-        <p:nvSpPr>
-          <p:cNvPr id="86" name="PerLbl"/>
+        </p:txBody>
+      </p:sp>
+      <p:sp>
+        <p:nvSpPr>
+          <p:cNvPr id="86" name="ComponentVisual"/>
           <p:cNvSpPr txBox="1"/>
           <p:nvPr/>
         </p:nvSpPr>
         <p:spPr>
           <a:xfrm>
-            <a:off x="723930" y="4809744"/>
-            <a:ext cx="5852160" cy="329184"/>
+            <a:off x="4561317" y="2121408"/>
+            <a:ext cx="3069336" cy="969264"/>
           </a:xfrm>
           <a:prstGeom prst="rect">
             <a:avLst/>
           </a:prstGeom>
-          <a:noFill/>
+          <a:solidFill>
+            <a:srgbClr val="FFFFFF"/>
+          </a:solidFill>
+          <a:ln w="9525">
+            <a:solidFill>
+              <a:srgbClr val="BFBFBF"/>
+            </a:solidFill>
+            <a:prstDash val="dash"/>
+          </a:ln>
         </p:spPr>
         <p:txBody>
           <a:bodyPr wrap="square">
             <a:noAutofit/>
           </a:bodyPr>
           <a:lstStyle/>
-          <a:p>
-            <a:pPr/>
-            <a:r>
-              <a:rPr lang="en-MY" sz="1600" b="1" i="1" dirty="0">
-                <a:solidFill>
-                  <a:schemeClr val="tx1">
-                    <a:lumMod val="85000"/>
-                    <a:lumOff val="15000"/>
-                  </a:schemeClr>
-                </a:solidFill>
-              </a:rPr>
-              <a:t>Drinking Fountain</a:t>
-            </a:r>
-          </a:p>
-        </p:txBody>
-      </p:sp>
-      <p:sp>
-        <p:nvSpPr>
-          <p:cNvPr id="87" name="PerFam"/>
+        </p:txBody>
+      </p:sp>
+      <p:sp>
+        <p:nvSpPr>
+          <p:cNvPr id="87" name="ComponentVisualDir"/>
           <p:cNvSpPr txBox="1"/>
           <p:nvPr/>
         </p:nvSpPr>
         <p:spPr>
           <a:xfrm>
-            <a:off x="6758970" y="4837176"/>
-            <a:ext cx="4572000" cy="292608"/>
+            <a:off x="4634469" y="2212848"/>
+            <a:ext cx="2923032" cy="804672"/>
           </a:xfrm>
           <a:prstGeom prst="rect">
             <a:avLst/>
@@ -13275,26 +14046,59 @@
           <a:p>
             <a:pPr/>
             <a:r>
-              <a:rPr lang="en-MY" sz="1100" dirty="0">
+              <a:rPr lang="en-MY" sz="750" dirty="0">
                 <a:solidFill>
                   <a:srgbClr val="808080"/>
                 </a:solidFill>
               </a:rPr>
-              <a:t>FAMILY_P1</a:t>
-            </a:r>
-          </a:p>
-        </p:txBody>
-      </p:sp>
-      <p:sp>
-        <p:nvSpPr>
-          <p:cNvPr id="88" name="PerLbl"/>
+              <a:t>ARAHAN VISUAL</a:t>
+            </a:r>
+          </a:p>
+          <a:p>
+            <a:pPr/>
+            <a:r>
+              <a:rPr lang="en-MY" sz="750" dirty="0">
+                <a:solidFill>
+                  <a:srgbClr val="808080"/>
+                </a:solidFill>
+              </a:rPr>
+              <a:t>[Visual: Rajah 25 — Lukisan</a:t>
+            </a:r>
+          </a:p>
+          <a:p>
+            <a:pPr/>
+            <a:r>
+              <a:rPr lang="en-MY" sz="750" dirty="0">
+                <a:solidFill>
+                  <a:srgbClr val="808080"/>
+                </a:solidFill>
+              </a:rPr>
+              <a:t>Spesifikasi Papan Tanda</a:t>
+            </a:r>
+          </a:p>
+          <a:p>
+            <a:pPr/>
+            <a:r>
+              <a:rPr lang="en-MY" sz="750" dirty="0">
+                <a:solidFill>
+                  <a:srgbClr val="808080"/>
+                </a:solidFill>
+              </a:rPr>
+              <a:t>Informasi, dan Rajah 26 —</a:t>
+            </a:r>
+          </a:p>
+        </p:txBody>
+      </p:sp>
+      <p:sp>
+        <p:nvSpPr>
+          <p:cNvPr id="88" name="ComponentName"/>
           <p:cNvSpPr txBox="1"/>
           <p:nvPr/>
         </p:nvSpPr>
         <p:spPr>
           <a:xfrm>
-            <a:off x="723930" y="5285232"/>
-            <a:ext cx="5852160" cy="329184"/>
+            <a:off x="4561317" y="3163824"/>
+            <a:ext cx="3069336" cy="365760"/>
           </a:xfrm>
           <a:prstGeom prst="rect">
             <a:avLst/>
@@ -13307,31 +14111,31 @@
           </a:bodyPr>
           <a:lstStyle/>
           <a:p>
-            <a:pPr/>
-            <a:r>
-              <a:rPr lang="en-MY" sz="1600" b="1" i="1" dirty="0">
-                <a:solidFill>
-                  <a:schemeClr val="tx1">
-                    <a:lumMod val="85000"/>
-                    <a:lumOff val="15000"/>
-                  </a:schemeClr>
-                </a:solidFill>
-              </a:rPr>
-              <a:t>BBQ Pit</a:t>
-            </a:r>
-          </a:p>
-        </p:txBody>
-      </p:sp>
-      <p:sp>
-        <p:nvSpPr>
-          <p:cNvPr id="89" name="PerFam"/>
+            <a:pPr algn="ctr"/>
+            <a:r>
+              <a:rPr lang="en-MY" sz="1400" b="1" dirty="0">
+                <a:solidFill>
+                  <a:schemeClr val="tx1">
+                    <a:lumMod val="85000"/>
+                    <a:lumOff val="15000"/>
+                  </a:schemeClr>
+                </a:solidFill>
+              </a:rPr>
+              <a:t>Papan Tanda</a:t>
+            </a:r>
+          </a:p>
+        </p:txBody>
+      </p:sp>
+      <p:sp>
+        <p:nvSpPr>
+          <p:cNvPr id="89" name="ComponentCue"/>
           <p:cNvSpPr txBox="1"/>
           <p:nvPr/>
         </p:nvSpPr>
         <p:spPr>
           <a:xfrm>
-            <a:off x="6758970" y="5312664"/>
-            <a:ext cx="4572000" cy="292608"/>
+            <a:off x="4561317" y="3529584"/>
+            <a:ext cx="3069336" cy="256032"/>
           </a:xfrm>
           <a:prstGeom prst="rect">
             <a:avLst/>
@@ -13344,14 +14148,627 @@
           </a:bodyPr>
           <a:lstStyle/>
           <a:p>
+            <a:pPr algn="ctr"/>
+            <a:r>
+              <a:rPr lang="en-MY" sz="900" dirty="0">
+                <a:solidFill>
+                  <a:srgbClr val="808080"/>
+                </a:solidFill>
+              </a:rPr>
+              <a:t>Halaman seterusnya</a:t>
+            </a:r>
+          </a:p>
+        </p:txBody>
+      </p:sp>
+      <p:sp>
+        <p:nvSpPr>
+          <p:cNvPr id="90" name="ComponentCard"/>
+          <p:cNvSpPr txBox="1"/>
+          <p:nvPr/>
+        </p:nvSpPr>
+        <p:spPr>
+          <a:xfrm>
+            <a:off x="8142717" y="1993392"/>
+            <a:ext cx="3325368" cy="1847088"/>
+          </a:xfrm>
+          <a:prstGeom prst="rect">
+            <a:avLst/>
+          </a:prstGeom>
+          <a:solidFill>
+            <a:srgbClr val="F2F2F2"/>
+          </a:solidFill>
+          <a:ln w="12700">
+            <a:solidFill>
+              <a:srgbClr val="404040"/>
+            </a:solidFill>
+          </a:ln>
+        </p:spPr>
+        <p:txBody>
+          <a:bodyPr wrap="square">
+            <a:noAutofit/>
+          </a:bodyPr>
+          <a:lstStyle/>
+        </p:txBody>
+      </p:sp>
+      <p:sp>
+        <p:nvSpPr>
+          <p:cNvPr id="91" name="ComponentVisual"/>
+          <p:cNvSpPr txBox="1"/>
+          <p:nvPr/>
+        </p:nvSpPr>
+        <p:spPr>
+          <a:xfrm>
+            <a:off x="8270733" y="2121408"/>
+            <a:ext cx="3069336" cy="969264"/>
+          </a:xfrm>
+          <a:prstGeom prst="rect">
+            <a:avLst/>
+          </a:prstGeom>
+          <a:solidFill>
+            <a:srgbClr val="FFFFFF"/>
+          </a:solidFill>
+          <a:ln w="9525">
+            <a:solidFill>
+              <a:srgbClr val="BFBFBF"/>
+            </a:solidFill>
+            <a:prstDash val="dash"/>
+          </a:ln>
+        </p:spPr>
+        <p:txBody>
+          <a:bodyPr wrap="square">
+            <a:noAutofit/>
+          </a:bodyPr>
+          <a:lstStyle/>
+        </p:txBody>
+      </p:sp>
+      <p:sp>
+        <p:nvSpPr>
+          <p:cNvPr id="92" name="ComponentVisualDir"/>
+          <p:cNvSpPr txBox="1"/>
+          <p:nvPr/>
+        </p:nvSpPr>
+        <p:spPr>
+          <a:xfrm>
+            <a:off x="8343885" y="2212848"/>
+            <a:ext cx="2923032" cy="804672"/>
+          </a:xfrm>
+          <a:prstGeom prst="rect">
+            <a:avLst/>
+          </a:prstGeom>
+          <a:noFill/>
+        </p:spPr>
+        <p:txBody>
+          <a:bodyPr wrap="square">
+            <a:noAutofit/>
+          </a:bodyPr>
+          <a:lstStyle/>
+          <a:p>
             <a:pPr/>
             <a:r>
-              <a:rPr lang="en-MY" sz="1100" dirty="0">
+              <a:rPr lang="en-MY" sz="750" dirty="0">
                 <a:solidFill>
                   <a:srgbClr val="808080"/>
                 </a:solidFill>
               </a:rPr>
-              <a:t>FAMILY_P2</a:t>
+              <a:t>ARAHAN VISUAL</a:t>
+            </a:r>
+          </a:p>
+          <a:p>
+            <a:pPr/>
+            <a:r>
+              <a:rPr lang="en-MY" sz="750" dirty="0">
+                <a:solidFill>
+                  <a:srgbClr val="808080"/>
+                </a:solidFill>
+              </a:rPr>
+              <a:t>[Visual: Foto jadual</a:t>
+            </a:r>
+          </a:p>
+          <a:p>
+            <a:pPr/>
+            <a:r>
+              <a:rPr lang="en-MY" sz="750" dirty="0">
+                <a:solidFill>
+                  <a:srgbClr val="808080"/>
+                </a:solidFill>
+              </a:rPr>
+              <a:t>spesifikasi Tong Sampah Logam,</a:t>
+            </a:r>
+          </a:p>
+          <a:p>
+            <a:pPr/>
+            <a:r>
+              <a:rPr lang="en-MY" sz="750" dirty="0">
+                <a:solidFill>
+                  <a:srgbClr val="808080"/>
+                </a:solidFill>
+              </a:rPr>
+              <a:t>modul ms 246. Aset</a:t>
+            </a:r>
+          </a:p>
+        </p:txBody>
+      </p:sp>
+      <p:sp>
+        <p:nvSpPr>
+          <p:cNvPr id="93" name="ComponentName"/>
+          <p:cNvSpPr txBox="1"/>
+          <p:nvPr/>
+        </p:nvSpPr>
+        <p:spPr>
+          <a:xfrm>
+            <a:off x="8270733" y="3163824"/>
+            <a:ext cx="3069336" cy="365760"/>
+          </a:xfrm>
+          <a:prstGeom prst="rect">
+            <a:avLst/>
+          </a:prstGeom>
+          <a:noFill/>
+        </p:spPr>
+        <p:txBody>
+          <a:bodyPr wrap="square">
+            <a:noAutofit/>
+          </a:bodyPr>
+          <a:lstStyle/>
+          <a:p>
+            <a:pPr algn="ctr"/>
+            <a:r>
+              <a:rPr lang="en-MY" sz="1400" b="1" dirty="0">
+                <a:solidFill>
+                  <a:schemeClr val="tx1">
+                    <a:lumMod val="85000"/>
+                    <a:lumOff val="15000"/>
+                  </a:schemeClr>
+                </a:solidFill>
+              </a:rPr>
+              <a:t>Tong Sampah</a:t>
+            </a:r>
+          </a:p>
+        </p:txBody>
+      </p:sp>
+      <p:sp>
+        <p:nvSpPr>
+          <p:cNvPr id="94" name="ComponentCue"/>
+          <p:cNvSpPr txBox="1"/>
+          <p:nvPr/>
+        </p:nvSpPr>
+        <p:spPr>
+          <a:xfrm>
+            <a:off x="8270733" y="3529584"/>
+            <a:ext cx="3069336" cy="256032"/>
+          </a:xfrm>
+          <a:prstGeom prst="rect">
+            <a:avLst/>
+          </a:prstGeom>
+          <a:noFill/>
+        </p:spPr>
+        <p:txBody>
+          <a:bodyPr wrap="square">
+            <a:noAutofit/>
+          </a:bodyPr>
+          <a:lstStyle/>
+          <a:p>
+            <a:pPr algn="ctr"/>
+            <a:r>
+              <a:rPr lang="en-MY" sz="900" dirty="0">
+                <a:solidFill>
+                  <a:srgbClr val="808080"/>
+                </a:solidFill>
+              </a:rPr>
+              <a:t>Halaman seterusnya</a:t>
+            </a:r>
+          </a:p>
+        </p:txBody>
+      </p:sp>
+      <p:sp>
+        <p:nvSpPr>
+          <p:cNvPr id="95" name="ComponentCard"/>
+          <p:cNvSpPr txBox="1"/>
+          <p:nvPr/>
+        </p:nvSpPr>
+        <p:spPr>
+          <a:xfrm>
+            <a:off x="2578593" y="4114800"/>
+            <a:ext cx="3325368" cy="1847088"/>
+          </a:xfrm>
+          <a:prstGeom prst="rect">
+            <a:avLst/>
+          </a:prstGeom>
+          <a:solidFill>
+            <a:srgbClr val="F2F2F2"/>
+          </a:solidFill>
+          <a:ln w="12700">
+            <a:solidFill>
+              <a:srgbClr val="404040"/>
+            </a:solidFill>
+          </a:ln>
+        </p:spPr>
+        <p:txBody>
+          <a:bodyPr wrap="square">
+            <a:noAutofit/>
+          </a:bodyPr>
+          <a:lstStyle/>
+        </p:txBody>
+      </p:sp>
+      <p:sp>
+        <p:nvSpPr>
+          <p:cNvPr id="96" name="ComponentVisual"/>
+          <p:cNvSpPr txBox="1"/>
+          <p:nvPr/>
+        </p:nvSpPr>
+        <p:spPr>
+          <a:xfrm>
+            <a:off x="2706609" y="4242816"/>
+            <a:ext cx="3069336" cy="969264"/>
+          </a:xfrm>
+          <a:prstGeom prst="rect">
+            <a:avLst/>
+          </a:prstGeom>
+          <a:solidFill>
+            <a:srgbClr val="FFFFFF"/>
+          </a:solidFill>
+          <a:ln w="9525">
+            <a:solidFill>
+              <a:srgbClr val="BFBFBF"/>
+            </a:solidFill>
+            <a:prstDash val="dash"/>
+          </a:ln>
+        </p:spPr>
+        <p:txBody>
+          <a:bodyPr wrap="square">
+            <a:noAutofit/>
+          </a:bodyPr>
+          <a:lstStyle/>
+        </p:txBody>
+      </p:sp>
+      <p:sp>
+        <p:nvSpPr>
+          <p:cNvPr id="97" name="ComponentVisualDir"/>
+          <p:cNvSpPr txBox="1"/>
+          <p:nvPr/>
+        </p:nvSpPr>
+        <p:spPr>
+          <a:xfrm>
+            <a:off x="2779761" y="4334256"/>
+            <a:ext cx="2923032" cy="804672"/>
+          </a:xfrm>
+          <a:prstGeom prst="rect">
+            <a:avLst/>
+          </a:prstGeom>
+          <a:noFill/>
+        </p:spPr>
+        <p:txBody>
+          <a:bodyPr wrap="square">
+            <a:noAutofit/>
+          </a:bodyPr>
+          <a:lstStyle/>
+          <a:p>
+            <a:pPr/>
+            <a:r>
+              <a:rPr lang="en-MY" sz="750" dirty="0">
+                <a:solidFill>
+                  <a:srgbClr val="808080"/>
+                </a:solidFill>
+              </a:rPr>
+              <a:t>ARAHAN VISUAL</a:t>
+            </a:r>
+          </a:p>
+          <a:p>
+            <a:pPr/>
+            <a:r>
+              <a:rPr lang="en-MY" sz="750" dirty="0">
+                <a:solidFill>
+                  <a:srgbClr val="808080"/>
+                </a:solidFill>
+              </a:rPr>
+              <a:t>[Visual: Foto jadual</a:t>
+            </a:r>
+          </a:p>
+          <a:p>
+            <a:pPr/>
+            <a:r>
+              <a:rPr lang="en-MY" sz="750" dirty="0">
+                <a:solidFill>
+                  <a:srgbClr val="808080"/>
+                </a:solidFill>
+              </a:rPr>
+              <a:t>spesifikasi Pancutan Air Minum</a:t>
+            </a:r>
+          </a:p>
+          <a:p>
+            <a:pPr/>
+            <a:r>
+              <a:rPr lang="en-MY" sz="750" dirty="0">
+                <a:solidFill>
+                  <a:srgbClr val="808080"/>
+                </a:solidFill>
+              </a:rPr>
+              <a:t>Keluli Tahan Karat, modul ms</a:t>
+            </a:r>
+          </a:p>
+        </p:txBody>
+      </p:sp>
+      <p:sp>
+        <p:nvSpPr>
+          <p:cNvPr id="98" name="ComponentName"/>
+          <p:cNvSpPr txBox="1"/>
+          <p:nvPr/>
+        </p:nvSpPr>
+        <p:spPr>
+          <a:xfrm>
+            <a:off x="2706609" y="5285232"/>
+            <a:ext cx="3069336" cy="365760"/>
+          </a:xfrm>
+          <a:prstGeom prst="rect">
+            <a:avLst/>
+          </a:prstGeom>
+          <a:noFill/>
+        </p:spPr>
+        <p:txBody>
+          <a:bodyPr wrap="square">
+            <a:noAutofit/>
+          </a:bodyPr>
+          <a:lstStyle/>
+          <a:p>
+            <a:pPr algn="ctr"/>
+            <a:r>
+              <a:rPr lang="en-MY" sz="1400" b="1" i="1" dirty="0">
+                <a:solidFill>
+                  <a:schemeClr val="tx1">
+                    <a:lumMod val="85000"/>
+                    <a:lumOff val="15000"/>
+                  </a:schemeClr>
+                </a:solidFill>
+              </a:rPr>
+              <a:t>Drinking Fountain</a:t>
+            </a:r>
+          </a:p>
+        </p:txBody>
+      </p:sp>
+      <p:sp>
+        <p:nvSpPr>
+          <p:cNvPr id="99" name="ComponentCue"/>
+          <p:cNvSpPr txBox="1"/>
+          <p:nvPr/>
+        </p:nvSpPr>
+        <p:spPr>
+          <a:xfrm>
+            <a:off x="2706609" y="5650992"/>
+            <a:ext cx="3069336" cy="256032"/>
+          </a:xfrm>
+          <a:prstGeom prst="rect">
+            <a:avLst/>
+          </a:prstGeom>
+          <a:noFill/>
+        </p:spPr>
+        <p:txBody>
+          <a:bodyPr wrap="square">
+            <a:noAutofit/>
+          </a:bodyPr>
+          <a:lstStyle/>
+          <a:p>
+            <a:pPr algn="ctr"/>
+            <a:r>
+              <a:rPr lang="en-MY" sz="900" dirty="0">
+                <a:solidFill>
+                  <a:srgbClr val="808080"/>
+                </a:solidFill>
+              </a:rPr>
+              <a:t>Halaman seterusnya</a:t>
+            </a:r>
+          </a:p>
+        </p:txBody>
+      </p:sp>
+      <p:sp>
+        <p:nvSpPr>
+          <p:cNvPr id="100" name="ComponentCard"/>
+          <p:cNvSpPr txBox="1"/>
+          <p:nvPr/>
+        </p:nvSpPr>
+        <p:spPr>
+          <a:xfrm>
+            <a:off x="6288009" y="4114800"/>
+            <a:ext cx="3325368" cy="1847088"/>
+          </a:xfrm>
+          <a:prstGeom prst="rect">
+            <a:avLst/>
+          </a:prstGeom>
+          <a:solidFill>
+            <a:srgbClr val="F2F2F2"/>
+          </a:solidFill>
+          <a:ln w="12700">
+            <a:solidFill>
+              <a:srgbClr val="404040"/>
+            </a:solidFill>
+          </a:ln>
+        </p:spPr>
+        <p:txBody>
+          <a:bodyPr wrap="square">
+            <a:noAutofit/>
+          </a:bodyPr>
+          <a:lstStyle/>
+        </p:txBody>
+      </p:sp>
+      <p:sp>
+        <p:nvSpPr>
+          <p:cNvPr id="101" name="ComponentVisual"/>
+          <p:cNvSpPr txBox="1"/>
+          <p:nvPr/>
+        </p:nvSpPr>
+        <p:spPr>
+          <a:xfrm>
+            <a:off x="6416025" y="4242816"/>
+            <a:ext cx="3069336" cy="969264"/>
+          </a:xfrm>
+          <a:prstGeom prst="rect">
+            <a:avLst/>
+          </a:prstGeom>
+          <a:solidFill>
+            <a:srgbClr val="FFFFFF"/>
+          </a:solidFill>
+          <a:ln w="9525">
+            <a:solidFill>
+              <a:srgbClr val="BFBFBF"/>
+            </a:solidFill>
+            <a:prstDash val="dash"/>
+          </a:ln>
+        </p:spPr>
+        <p:txBody>
+          <a:bodyPr wrap="square">
+            <a:noAutofit/>
+          </a:bodyPr>
+          <a:lstStyle/>
+        </p:txBody>
+      </p:sp>
+      <p:sp>
+        <p:nvSpPr>
+          <p:cNvPr id="102" name="ComponentVisualDir"/>
+          <p:cNvSpPr txBox="1"/>
+          <p:nvPr/>
+        </p:nvSpPr>
+        <p:spPr>
+          <a:xfrm>
+            <a:off x="6489177" y="4334256"/>
+            <a:ext cx="2923032" cy="804672"/>
+          </a:xfrm>
+          <a:prstGeom prst="rect">
+            <a:avLst/>
+          </a:prstGeom>
+          <a:noFill/>
+        </p:spPr>
+        <p:txBody>
+          <a:bodyPr wrap="square">
+            <a:noAutofit/>
+          </a:bodyPr>
+          <a:lstStyle/>
+          <a:p>
+            <a:pPr/>
+            <a:r>
+              <a:rPr lang="en-MY" sz="750" dirty="0">
+                <a:solidFill>
+                  <a:srgbClr val="808080"/>
+                </a:solidFill>
+              </a:rPr>
+              <a:t>ARAHAN VISUAL</a:t>
+            </a:r>
+          </a:p>
+          <a:p>
+            <a:pPr/>
+            <a:r>
+              <a:rPr lang="en-MY" sz="750" dirty="0">
+                <a:solidFill>
+                  <a:srgbClr val="808080"/>
+                </a:solidFill>
+              </a:rPr>
+              <a:t>[Visual: Foto jadual</a:t>
+            </a:r>
+          </a:p>
+          <a:p>
+            <a:pPr/>
+            <a:r>
+              <a:rPr lang="en-MY" sz="750" dirty="0">
+                <a:solidFill>
+                  <a:srgbClr val="808080"/>
+                </a:solidFill>
+              </a:rPr>
+              <a:t>spesifikasi </a:t>
+            </a:r>
+            <a:r>
+              <a:rPr lang="en-MY" sz="750" i="1" dirty="0">
+                <a:solidFill>
+                  <a:srgbClr val="808080"/>
+                </a:solidFill>
+              </a:rPr>
+              <a:t>BBQ Pit</a:t>
+            </a:r>
+            <a:r>
+              <a:rPr lang="en-MY" sz="750" dirty="0">
+                <a:solidFill>
+                  <a:srgbClr val="808080"/>
+                </a:solidFill>
+              </a:rPr>
+              <a:t> Struktur</a:t>
+            </a:r>
+          </a:p>
+          <a:p>
+            <a:pPr/>
+            <a:r>
+              <a:rPr lang="en-MY" sz="750" dirty="0">
+                <a:solidFill>
+                  <a:srgbClr val="808080"/>
+                </a:solidFill>
+              </a:rPr>
+              <a:t>Kekal, modul ms 249. Aset</a:t>
+            </a:r>
+          </a:p>
+        </p:txBody>
+      </p:sp>
+      <p:sp>
+        <p:nvSpPr>
+          <p:cNvPr id="103" name="ComponentName"/>
+          <p:cNvSpPr txBox="1"/>
+          <p:nvPr/>
+        </p:nvSpPr>
+        <p:spPr>
+          <a:xfrm>
+            <a:off x="6416025" y="5285232"/>
+            <a:ext cx="3069336" cy="365760"/>
+          </a:xfrm>
+          <a:prstGeom prst="rect">
+            <a:avLst/>
+          </a:prstGeom>
+          <a:noFill/>
+        </p:spPr>
+        <p:txBody>
+          <a:bodyPr wrap="square">
+            <a:noAutofit/>
+          </a:bodyPr>
+          <a:lstStyle/>
+          <a:p>
+            <a:pPr algn="ctr"/>
+            <a:r>
+              <a:rPr lang="en-MY" sz="1400" b="1" i="1" dirty="0">
+                <a:solidFill>
+                  <a:schemeClr val="tx1">
+                    <a:lumMod val="85000"/>
+                    <a:lumOff val="15000"/>
+                  </a:schemeClr>
+                </a:solidFill>
+              </a:rPr>
+              <a:t>BBQ Pit</a:t>
+            </a:r>
+          </a:p>
+        </p:txBody>
+      </p:sp>
+      <p:sp>
+        <p:nvSpPr>
+          <p:cNvPr id="104" name="ComponentCue"/>
+          <p:cNvSpPr txBox="1"/>
+          <p:nvPr/>
+        </p:nvSpPr>
+        <p:spPr>
+          <a:xfrm>
+            <a:off x="6416025" y="5650992"/>
+            <a:ext cx="3069336" cy="256032"/>
+          </a:xfrm>
+          <a:prstGeom prst="rect">
+            <a:avLst/>
+          </a:prstGeom>
+          <a:noFill/>
+        </p:spPr>
+        <p:txBody>
+          <a:bodyPr wrap="square">
+            <a:noAutofit/>
+          </a:bodyPr>
+          <a:lstStyle/>
+          <a:p>
+            <a:pPr algn="ctr"/>
+            <a:r>
+              <a:rPr lang="en-MY" sz="900" dirty="0">
+                <a:solidFill>
+                  <a:srgbClr val="808080"/>
+                </a:solidFill>
+              </a:rPr>
+              <a:t>Halaman seterusnya</a:t>
             </a:r>
           </a:p>
         </p:txBody>
@@ -13676,7 +15093,7 @@
                   </a:schemeClr>
                 </a:solidFill>
               </a:rPr>
-              <a:t>  TIADA klik dan TIADA aras interaksi. Ini gerbang penerangan sahaja.</a:t>
+              <a:t>  TIADA klik dan TIADA aras interaksi. Ini gerbang penerangan visual.</a:t>
             </a:r>
           </a:p>
           <a:p>
@@ -13702,7 +15119,7 @@
                   </a:schemeClr>
                 </a:solidFill>
               </a:rPr>
-              <a:t>AGIHAN KELUARGA:</a:t>
+              <a:t>AGIHAN KELUARGA (metadata dalaman — tidak dipaparkan pada kanvas):</a:t>
             </a:r>
           </a:p>
           <a:p>
@@ -13768,6 +15185,84 @@
                 </a:solidFill>
               </a:rPr>
               <a:t>  BBQ Pit -&gt; FAMILY_P2</a:t>
+            </a:r>
+          </a:p>
+          <a:p>
+            <a:r>
+              <a:rPr lang="en-MY" sz="900" b="1" dirty="0">
+                <a:solidFill>
+                  <a:schemeClr val="tx1">
+                    <a:lumMod val="85000"/>
+                    <a:lumOff val="15000"/>
+                  </a:schemeClr>
+                </a:solidFill>
+              </a:rPr>
+              <a:t>VISUAL:</a:t>
+            </a:r>
+          </a:p>
+          <a:p>
+            <a:r>
+              <a:rPr lang="en-MY" sz="900" dirty="0">
+                <a:solidFill>
+                  <a:schemeClr val="tx1">
+                    <a:lumMod val="85000"/>
+                    <a:lumOff val="15000"/>
+                  </a:schemeClr>
+                </a:solidFill>
+              </a:rPr>
+              <a:t>  subjenis skrin: GROUP_VISUAL_GATEWAY</a:t>
+            </a:r>
+          </a:p>
+          <a:p>
+            <a:r>
+              <a:rPr lang="en-MY" sz="900" dirty="0">
+                <a:solidFill>
+                  <a:schemeClr val="tx1">
+                    <a:lumMod val="85000"/>
+                    <a:lumOff val="15000"/>
+                  </a:schemeClr>
+                </a:solidFill>
+              </a:rPr>
+              <a:t>  subjenis popup: —</a:t>
+            </a:r>
+          </a:p>
+          <a:p>
+            <a:r>
+              <a:rPr lang="en-MY" sz="900" dirty="0">
+                <a:solidFill>
+                  <a:schemeClr val="tx1">
+                    <a:lumMod val="85000"/>
+                    <a:lumOff val="15000"/>
+                  </a:schemeClr>
+                </a:solidFill>
+              </a:rPr>
+              <a:t>  keperluan visual: CONDITIONAL</a:t>
+            </a:r>
+          </a:p>
+          <a:p>
+            <a:r>
+              <a:rPr lang="en-MY" sz="900" dirty="0">
+                <a:solidFill>
+                  <a:schemeClr val="tx1">
+                    <a:lumMod val="85000"/>
+                    <a:lumOff val="15000"/>
+                  </a:schemeClr>
+                </a:solidFill>
+              </a:rPr>
+              <a:t>  status: RESOLVED_PER_COMPONENT_CARD</a:t>
+            </a:r>
+          </a:p>
+          <a:p>
+            <a:r>
+              <a:rPr lang="en-MY" sz="900" dirty="0">
+                <a:solidFill>
+                  <a:schemeClr val="tx1">
+                    <a:lumMod val="85000"/>
+                    <a:lumOff val="15000"/>
+                  </a:schemeClr>
+                </a:solidFill>
+              </a:rPr>
+              <a:t>  kuasa: SOURCE_ASSET_FIGURE</a:t>
             </a:r>
           </a:p>
           <a:p>
@@ -13955,7 +15450,7 @@
                   </a:schemeClr>
                 </a:solidFill>
               </a:rPr>
-              <a:t>Klik pada setiap contoh untuk penjelasan lanjut.</a:t>
+              <a:t>Klik pada setiap contoh untuk melihat perincian.</a:t>
             </a:r>
           </a:p>
         </p:txBody>
@@ -14121,7 +15616,7 @@
                   <a:srgbClr val="808080"/>
                 </a:solidFill>
               </a:rPr>
-              <a:t>[Visual: Foto jadual spesifikasi kerusi taman, modul ms 242–243. Tidak dibenamkan.]</a:t>
+              <a:t>[Visual: Pelbagai Kerusi Taman. Tidak dibenamkan.]</a:t>
             </a:r>
           </a:p>
         </p:txBody>
@@ -14616,6 +16111,110 @@
                 </a:solidFill>
               </a:rPr>
               <a:t>  component_complete hanya benar apabila SEMUA contoh selesai.</a:t>
+            </a:r>
+          </a:p>
+          <a:p>
+            <a:r>
+              <a:rPr lang="en-MY" sz="900" b="1" dirty="0">
+                <a:solidFill>
+                  <a:schemeClr val="tx1">
+                    <a:lumMod val="85000"/>
+                    <a:lumOff val="15000"/>
+                  </a:schemeClr>
+                </a:solidFill>
+              </a:rPr>
+              <a:t>ARAHAN INTERAKSI (kanvas = VO):</a:t>
+            </a:r>
+          </a:p>
+          <a:p>
+            <a:r>
+              <a:rPr lang="en-MY" sz="900" dirty="0">
+                <a:solidFill>
+                  <a:schemeClr val="tx1">
+                    <a:lumMod val="85000"/>
+                    <a:lumOff val="15000"/>
+                  </a:schemeClr>
+                </a:solidFill>
+              </a:rPr>
+              <a:t>  Klik pada setiap contoh untuk melihat perincian.</a:t>
+            </a:r>
+          </a:p>
+          <a:p>
+            <a:r>
+              <a:rPr lang="en-MY" sz="900" b="1" dirty="0">
+                <a:solidFill>
+                  <a:schemeClr val="tx1">
+                    <a:lumMod val="85000"/>
+                    <a:lumOff val="15000"/>
+                  </a:schemeClr>
+                </a:solidFill>
+              </a:rPr>
+              <a:t>VISUAL:</a:t>
+            </a:r>
+          </a:p>
+          <a:p>
+            <a:r>
+              <a:rPr lang="en-MY" sz="900" dirty="0">
+                <a:solidFill>
+                  <a:schemeClr val="tx1">
+                    <a:lumMod val="85000"/>
+                    <a:lumOff val="15000"/>
+                  </a:schemeClr>
+                </a:solidFill>
+              </a:rPr>
+              <a:t>  subjenis skrin: COMPONENT_MAIN_SCREEN</a:t>
+            </a:r>
+          </a:p>
+          <a:p>
+            <a:r>
+              <a:rPr lang="en-MY" sz="900" dirty="0">
+                <a:solidFill>
+                  <a:schemeClr val="tx1">
+                    <a:lumMod val="85000"/>
+                    <a:lumOff val="15000"/>
+                  </a:schemeClr>
+                </a:solidFill>
+              </a:rPr>
+              <a:t>  subjenis popup: —</a:t>
+            </a:r>
+          </a:p>
+          <a:p>
+            <a:r>
+              <a:rPr lang="en-MY" sz="900" dirty="0">
+                <a:solidFill>
+                  <a:schemeClr val="tx1">
+                    <a:lumMod val="85000"/>
+                    <a:lumOff val="15000"/>
+                  </a:schemeClr>
+                </a:solidFill>
+              </a:rPr>
+              <a:t>  keperluan visual: CONDITIONAL</a:t>
+            </a:r>
+          </a:p>
+          <a:p>
+            <a:r>
+              <a:rPr lang="en-MY" sz="900" dirty="0">
+                <a:solidFill>
+                  <a:schemeClr val="tx1">
+                    <a:lumMod val="85000"/>
+                    <a:lumOff val="15000"/>
+                  </a:schemeClr>
+                </a:solidFill>
+              </a:rPr>
+              <a:t>  status: RESOLVED</a:t>
+            </a:r>
+          </a:p>
+          <a:p>
+            <a:r>
+              <a:rPr lang="en-MY" sz="900" dirty="0">
+                <a:solidFill>
+                  <a:schemeClr val="tx1">
+                    <a:lumMod val="85000"/>
+                    <a:lumOff val="15000"/>
+                  </a:schemeClr>
+                </a:solidFill>
+              </a:rPr>
+              <a:t>  kuasa: BARIAH_APPROVED_COMPONENT_MAIN</a:t>
             </a:r>
           </a:p>
           <a:p>
@@ -15649,6 +17248,110 @@
                 </a:solidFill>
               </a:rPr>
               <a:t>  Tiada baris sumber baharu dicipta.</a:t>
+            </a:r>
+          </a:p>
+          <a:p>
+            <a:r>
+              <a:rPr lang="en-MY" sz="900" b="1" dirty="0">
+                <a:solidFill>
+                  <a:schemeClr val="tx1">
+                    <a:lumMod val="85000"/>
+                    <a:lumOff val="15000"/>
+                  </a:schemeClr>
+                </a:solidFill>
+              </a:rPr>
+              <a:t>ARAHAN INTERAKSI (kanvas = VO):</a:t>
+            </a:r>
+          </a:p>
+          <a:p>
+            <a:r>
+              <a:rPr lang="en-MY" sz="900" dirty="0">
+                <a:solidFill>
+                  <a:schemeClr val="tx1">
+                    <a:lumMod val="85000"/>
+                    <a:lumOff val="15000"/>
+                  </a:schemeClr>
+                </a:solidFill>
+              </a:rPr>
+              <a:t>  Klik pada setiap spesifikasi untuk penjelasan lanjut.</a:t>
+            </a:r>
+          </a:p>
+          <a:p>
+            <a:r>
+              <a:rPr lang="en-MY" sz="900" b="1" dirty="0">
+                <a:solidFill>
+                  <a:schemeClr val="tx1">
+                    <a:lumMod val="85000"/>
+                    <a:lumOff val="15000"/>
+                  </a:schemeClr>
+                </a:solidFill>
+              </a:rPr>
+              <a:t>VISUAL:</a:t>
+            </a:r>
+          </a:p>
+          <a:p>
+            <a:r>
+              <a:rPr lang="en-MY" sz="900" dirty="0">
+                <a:solidFill>
+                  <a:schemeClr val="tx1">
+                    <a:lumMod val="85000"/>
+                    <a:lumOff val="15000"/>
+                  </a:schemeClr>
+                </a:solidFill>
+              </a:rPr>
+              <a:t>  subjenis skrin: EXAMPLE_SCREEN</a:t>
+            </a:r>
+          </a:p>
+          <a:p>
+            <a:r>
+              <a:rPr lang="en-MY" sz="900" dirty="0">
+                <a:solidFill>
+                  <a:schemeClr val="tx1">
+                    <a:lumMod val="85000"/>
+                    <a:lumOff val="15000"/>
+                  </a:schemeClr>
+                </a:solidFill>
+              </a:rPr>
+              <a:t>  subjenis popup: —</a:t>
+            </a:r>
+          </a:p>
+          <a:p>
+            <a:r>
+              <a:rPr lang="en-MY" sz="900" dirty="0">
+                <a:solidFill>
+                  <a:schemeClr val="tx1">
+                    <a:lumMod val="85000"/>
+                    <a:lumOff val="15000"/>
+                  </a:schemeClr>
+                </a:solidFill>
+              </a:rPr>
+              <a:t>  keperluan visual: REQUIRED</a:t>
+            </a:r>
+          </a:p>
+          <a:p>
+            <a:r>
+              <a:rPr lang="en-MY" sz="900" dirty="0">
+                <a:solidFill>
+                  <a:schemeClr val="tx1">
+                    <a:lumMod val="85000"/>
+                    <a:lumOff val="15000"/>
+                  </a:schemeClr>
+                </a:solidFill>
+              </a:rPr>
+              <a:t>  status: RESOLVED</a:t>
+            </a:r>
+          </a:p>
+          <a:p>
+            <a:r>
+              <a:rPr lang="en-MY" sz="900" dirty="0">
+                <a:solidFill>
+                  <a:schemeClr val="tx1">
+                    <a:lumMod val="85000"/>
+                    <a:lumOff val="15000"/>
+                  </a:schemeClr>
+                </a:solidFill>
+              </a:rPr>
+              <a:t>  kuasa: SOURCE_ASSET_FIGURE</a:t>
             </a:r>
           </a:p>
           <a:p>
@@ -16166,8 +17869,8 @@
         </p:nvSpPr>
         <p:spPr>
           <a:xfrm>
-            <a:off x="1234440" y="1737360"/>
-            <a:ext cx="9723090" cy="2002536"/>
+            <a:off x="1234440" y="1481328"/>
+            <a:ext cx="9723090" cy="2788920"/>
           </a:xfrm>
           <a:prstGeom prst="rect">
             <a:avLst/>
@@ -16196,8 +17899,8 @@
         </p:nvSpPr>
         <p:spPr>
           <a:xfrm>
-            <a:off x="1490472" y="1883664"/>
-            <a:ext cx="8534370" cy="201168"/>
+            <a:off x="1490472" y="1627632"/>
+            <a:ext cx="8019288" cy="201168"/>
           </a:xfrm>
           <a:prstGeom prst="rect">
             <a:avLst/>
@@ -16230,8 +17933,8 @@
         </p:nvSpPr>
         <p:spPr>
           <a:xfrm>
-            <a:off x="1490472" y="2103120"/>
-            <a:ext cx="8534370" cy="365760"/>
+            <a:off x="1490472" y="1847088"/>
+            <a:ext cx="8019288" cy="365760"/>
           </a:xfrm>
           <a:prstGeom prst="rect">
             <a:avLst/>
@@ -16267,7 +17970,7 @@
         </p:nvSpPr>
         <p:spPr>
           <a:xfrm>
-            <a:off x="10317450" y="1901952"/>
+            <a:off x="10317450" y="1645920"/>
             <a:ext cx="384048" cy="384048"/>
           </a:xfrm>
           <a:prstGeom prst="ellipse">
@@ -16296,7 +17999,7 @@
         </p:nvSpPr>
         <p:spPr>
           <a:xfrm>
-            <a:off x="10421142" y="2005645"/>
+            <a:off x="10421142" y="1749613"/>
             <a:ext cx="176662" cy="176662"/>
           </a:xfrm>
           <a:custGeom>
@@ -16370,8 +18073,8 @@
         </p:nvSpPr>
         <p:spPr>
           <a:xfrm>
-            <a:off x="1490472" y="2688336"/>
-            <a:ext cx="9211026" cy="429768"/>
+            <a:off x="1490472" y="2432304"/>
+            <a:ext cx="9208008" cy="429768"/>
           </a:xfrm>
           <a:prstGeom prst="rect">
             <a:avLst/>
@@ -16890,6 +18593,84 @@
                 </a:solidFill>
               </a:rPr>
               <a:t>  Tiada baris sumber baharu dicipta.</a:t>
+            </a:r>
+          </a:p>
+          <a:p>
+            <a:r>
+              <a:rPr lang="en-MY" sz="900" b="1" dirty="0">
+                <a:solidFill>
+                  <a:schemeClr val="tx1">
+                    <a:lumMod val="85000"/>
+                    <a:lumOff val="15000"/>
+                  </a:schemeClr>
+                </a:solidFill>
+              </a:rPr>
+              <a:t>VISUAL:</a:t>
+            </a:r>
+          </a:p>
+          <a:p>
+            <a:r>
+              <a:rPr lang="en-MY" sz="900" dirty="0">
+                <a:solidFill>
+                  <a:schemeClr val="tx1">
+                    <a:lumMod val="85000"/>
+                    <a:lumOff val="15000"/>
+                  </a:schemeClr>
+                </a:solidFill>
+              </a:rPr>
+              <a:t>  subjenis skrin: SPECIFICATION_POPUP</a:t>
+            </a:r>
+          </a:p>
+          <a:p>
+            <a:r>
+              <a:rPr lang="en-MY" sz="900" dirty="0">
+                <a:solidFill>
+                  <a:schemeClr val="tx1">
+                    <a:lumMod val="85000"/>
+                    <a:lumOff val="15000"/>
+                  </a:schemeClr>
+                </a:solidFill>
+              </a:rPr>
+              <a:t>  subjenis popup: SPECIFICATION_POPUP</a:t>
+            </a:r>
+          </a:p>
+          <a:p>
+            <a:r>
+              <a:rPr lang="en-MY" sz="900" dirty="0">
+                <a:solidFill>
+                  <a:schemeClr val="tx1">
+                    <a:lumMod val="85000"/>
+                    <a:lumOff val="15000"/>
+                  </a:schemeClr>
+                </a:solidFill>
+              </a:rPr>
+              <a:t>  keperluan visual: NOT_REQUIRED</a:t>
+            </a:r>
+          </a:p>
+          <a:p>
+            <a:r>
+              <a:rPr lang="en-MY" sz="900" dirty="0">
+                <a:solidFill>
+                  <a:schemeClr val="tx1">
+                    <a:lumMod val="85000"/>
+                    <a:lumOff val="15000"/>
+                  </a:schemeClr>
+                </a:solidFill>
+              </a:rPr>
+              <a:t>  status: NOT_REQUIRED_BY_BARIAH_RULING</a:t>
+            </a:r>
+          </a:p>
+          <a:p>
+            <a:r>
+              <a:rPr lang="en-MY" sz="900" dirty="0">
+                <a:solidFill>
+                  <a:schemeClr val="tx1">
+                    <a:lumMod val="85000"/>
+                    <a:lumOff val="15000"/>
+                  </a:schemeClr>
+                </a:solidFill>
+              </a:rPr>
+              <a:t>  kuasa: —</a:t>
             </a:r>
           </a:p>
           <a:p>
@@ -17466,8 +19247,8 @@
         </p:nvSpPr>
         <p:spPr>
           <a:xfrm>
-            <a:off x="1234440" y="1737360"/>
-            <a:ext cx="9723090" cy="1920240"/>
+            <a:off x="1234440" y="1481328"/>
+            <a:ext cx="9723090" cy="2788920"/>
           </a:xfrm>
           <a:prstGeom prst="rect">
             <a:avLst/>
@@ -17496,8 +19277,8 @@
         </p:nvSpPr>
         <p:spPr>
           <a:xfrm>
-            <a:off x="1490472" y="1883664"/>
-            <a:ext cx="8534370" cy="201168"/>
+            <a:off x="1490472" y="1627632"/>
+            <a:ext cx="8019288" cy="201168"/>
           </a:xfrm>
           <a:prstGeom prst="rect">
             <a:avLst/>
@@ -17530,8 +19311,8 @@
         </p:nvSpPr>
         <p:spPr>
           <a:xfrm>
-            <a:off x="1490472" y="2103120"/>
-            <a:ext cx="8534370" cy="365760"/>
+            <a:off x="1490472" y="1847088"/>
+            <a:ext cx="8019288" cy="365760"/>
           </a:xfrm>
           <a:prstGeom prst="rect">
             <a:avLst/>
@@ -17567,7 +19348,7 @@
         </p:nvSpPr>
         <p:spPr>
           <a:xfrm>
-            <a:off x="10317450" y="1901952"/>
+            <a:off x="10317450" y="1645920"/>
             <a:ext cx="384048" cy="384048"/>
           </a:xfrm>
           <a:prstGeom prst="ellipse">
@@ -17596,7 +19377,7 @@
         </p:nvSpPr>
         <p:spPr>
           <a:xfrm>
-            <a:off x="10421142" y="2005645"/>
+            <a:off x="10421142" y="1749613"/>
             <a:ext cx="176662" cy="176662"/>
           </a:xfrm>
           <a:custGeom>
@@ -17670,8 +19451,8 @@
         </p:nvSpPr>
         <p:spPr>
           <a:xfrm>
-            <a:off x="1490472" y="2688336"/>
-            <a:ext cx="9211026" cy="219456"/>
+            <a:off x="1490472" y="2432304"/>
+            <a:ext cx="9208008" cy="219456"/>
           </a:xfrm>
           <a:prstGeom prst="rect">
             <a:avLst/>
@@ -18176,6 +19957,84 @@
                 </a:solidFill>
               </a:rPr>
               <a:t>  Tiada baris sumber baharu dicipta.</a:t>
+            </a:r>
+          </a:p>
+          <a:p>
+            <a:r>
+              <a:rPr lang="en-MY" sz="900" b="1" dirty="0">
+                <a:solidFill>
+                  <a:schemeClr val="tx1">
+                    <a:lumMod val="85000"/>
+                    <a:lumOff val="15000"/>
+                  </a:schemeClr>
+                </a:solidFill>
+              </a:rPr>
+              <a:t>VISUAL:</a:t>
+            </a:r>
+          </a:p>
+          <a:p>
+            <a:r>
+              <a:rPr lang="en-MY" sz="900" dirty="0">
+                <a:solidFill>
+                  <a:schemeClr val="tx1">
+                    <a:lumMod val="85000"/>
+                    <a:lumOff val="15000"/>
+                  </a:schemeClr>
+                </a:solidFill>
+              </a:rPr>
+              <a:t>  subjenis skrin: SPECIFICATION_POPUP</a:t>
+            </a:r>
+          </a:p>
+          <a:p>
+            <a:r>
+              <a:rPr lang="en-MY" sz="900" dirty="0">
+                <a:solidFill>
+                  <a:schemeClr val="tx1">
+                    <a:lumMod val="85000"/>
+                    <a:lumOff val="15000"/>
+                  </a:schemeClr>
+                </a:solidFill>
+              </a:rPr>
+              <a:t>  subjenis popup: SPECIFICATION_POPUP</a:t>
+            </a:r>
+          </a:p>
+          <a:p>
+            <a:r>
+              <a:rPr lang="en-MY" sz="900" dirty="0">
+                <a:solidFill>
+                  <a:schemeClr val="tx1">
+                    <a:lumMod val="85000"/>
+                    <a:lumOff val="15000"/>
+                  </a:schemeClr>
+                </a:solidFill>
+              </a:rPr>
+              <a:t>  keperluan visual: NOT_REQUIRED</a:t>
+            </a:r>
+          </a:p>
+          <a:p>
+            <a:r>
+              <a:rPr lang="en-MY" sz="900" dirty="0">
+                <a:solidFill>
+                  <a:schemeClr val="tx1">
+                    <a:lumMod val="85000"/>
+                    <a:lumOff val="15000"/>
+                  </a:schemeClr>
+                </a:solidFill>
+              </a:rPr>
+              <a:t>  status: NOT_REQUIRED_BY_BARIAH_RULING</a:t>
+            </a:r>
+          </a:p>
+          <a:p>
+            <a:r>
+              <a:rPr lang="en-MY" sz="900" dirty="0">
+                <a:solidFill>
+                  <a:schemeClr val="tx1">
+                    <a:lumMod val="85000"/>
+                    <a:lumOff val="15000"/>
+                  </a:schemeClr>
+                </a:solidFill>
+              </a:rPr>
+              <a:t>  kuasa: —</a:t>
             </a:r>
           </a:p>
           <a:p>
@@ -18811,8 +20670,8 @@
         </p:nvSpPr>
         <p:spPr>
           <a:xfrm>
-            <a:off x="1234440" y="1737360"/>
-            <a:ext cx="9723090" cy="1920240"/>
+            <a:off x="1234440" y="1481328"/>
+            <a:ext cx="9723090" cy="2788920"/>
           </a:xfrm>
           <a:prstGeom prst="rect">
             <a:avLst/>
@@ -18841,8 +20700,8 @@
         </p:nvSpPr>
         <p:spPr>
           <a:xfrm>
-            <a:off x="1490472" y="1883664"/>
-            <a:ext cx="8534370" cy="201168"/>
+            <a:off x="1490472" y="1627632"/>
+            <a:ext cx="8019288" cy="201168"/>
           </a:xfrm>
           <a:prstGeom prst="rect">
             <a:avLst/>
@@ -18875,8 +20734,8 @@
         </p:nvSpPr>
         <p:spPr>
           <a:xfrm>
-            <a:off x="1490472" y="2103120"/>
-            <a:ext cx="8534370" cy="365760"/>
+            <a:off x="1490472" y="1847088"/>
+            <a:ext cx="8019288" cy="365760"/>
           </a:xfrm>
           <a:prstGeom prst="rect">
             <a:avLst/>
@@ -18912,7 +20771,7 @@
         </p:nvSpPr>
         <p:spPr>
           <a:xfrm>
-            <a:off x="10317450" y="1901952"/>
+            <a:off x="10317450" y="1645920"/>
             <a:ext cx="384048" cy="384048"/>
           </a:xfrm>
           <a:prstGeom prst="ellipse">
@@ -18941,7 +20800,7 @@
         </p:nvSpPr>
         <p:spPr>
           <a:xfrm>
-            <a:off x="10421142" y="2005645"/>
+            <a:off x="10421142" y="1749613"/>
             <a:ext cx="176662" cy="176662"/>
           </a:xfrm>
           <a:custGeom>
@@ -19015,8 +20874,8 @@
         </p:nvSpPr>
         <p:spPr>
           <a:xfrm>
-            <a:off x="1490472" y="2688336"/>
-            <a:ext cx="9211026" cy="219456"/>
+            <a:off x="1490472" y="2432304"/>
+            <a:ext cx="9208008" cy="219456"/>
           </a:xfrm>
           <a:prstGeom prst="rect">
             <a:avLst/>
@@ -19521,6 +21380,84 @@
                 </a:solidFill>
               </a:rPr>
               <a:t>  Tiada baris sumber baharu dicipta.</a:t>
+            </a:r>
+          </a:p>
+          <a:p>
+            <a:r>
+              <a:rPr lang="en-MY" sz="900" b="1" dirty="0">
+                <a:solidFill>
+                  <a:schemeClr val="tx1">
+                    <a:lumMod val="85000"/>
+                    <a:lumOff val="15000"/>
+                  </a:schemeClr>
+                </a:solidFill>
+              </a:rPr>
+              <a:t>VISUAL:</a:t>
+            </a:r>
+          </a:p>
+          <a:p>
+            <a:r>
+              <a:rPr lang="en-MY" sz="900" dirty="0">
+                <a:solidFill>
+                  <a:schemeClr val="tx1">
+                    <a:lumMod val="85000"/>
+                    <a:lumOff val="15000"/>
+                  </a:schemeClr>
+                </a:solidFill>
+              </a:rPr>
+              <a:t>  subjenis skrin: SPECIFICATION_POPUP</a:t>
+            </a:r>
+          </a:p>
+          <a:p>
+            <a:r>
+              <a:rPr lang="en-MY" sz="900" dirty="0">
+                <a:solidFill>
+                  <a:schemeClr val="tx1">
+                    <a:lumMod val="85000"/>
+                    <a:lumOff val="15000"/>
+                  </a:schemeClr>
+                </a:solidFill>
+              </a:rPr>
+              <a:t>  subjenis popup: SPECIFICATION_POPUP</a:t>
+            </a:r>
+          </a:p>
+          <a:p>
+            <a:r>
+              <a:rPr lang="en-MY" sz="900" dirty="0">
+                <a:solidFill>
+                  <a:schemeClr val="tx1">
+                    <a:lumMod val="85000"/>
+                    <a:lumOff val="15000"/>
+                  </a:schemeClr>
+                </a:solidFill>
+              </a:rPr>
+              <a:t>  keperluan visual: NOT_REQUIRED</a:t>
+            </a:r>
+          </a:p>
+          <a:p>
+            <a:r>
+              <a:rPr lang="en-MY" sz="900" dirty="0">
+                <a:solidFill>
+                  <a:schemeClr val="tx1">
+                    <a:lumMod val="85000"/>
+                    <a:lumOff val="15000"/>
+                  </a:schemeClr>
+                </a:solidFill>
+              </a:rPr>
+              <a:t>  status: NOT_REQUIRED_BY_BARIAH_RULING</a:t>
+            </a:r>
+          </a:p>
+          <a:p>
+            <a:r>
+              <a:rPr lang="en-MY" sz="900" dirty="0">
+                <a:solidFill>
+                  <a:schemeClr val="tx1">
+                    <a:lumMod val="85000"/>
+                    <a:lumOff val="15000"/>
+                  </a:schemeClr>
+                </a:solidFill>
+              </a:rPr>
+              <a:t>  kuasa: —</a:t>
             </a:r>
           </a:p>
           <a:p>
@@ -20348,6 +22285,84 @@
                 </a:solidFill>
               </a:rPr>
               <a:t>  Start of the B02 scenario, immediately after S01. The course and PL06 are NOT reintroduced — both montages and S01 have already established them.</a:t>
+            </a:r>
+          </a:p>
+          <a:p>
+            <a:r>
+              <a:rPr lang="en-MY" sz="900" b="1" dirty="0">
+                <a:solidFill>
+                  <a:schemeClr val="tx1">
+                    <a:lumMod val="85000"/>
+                    <a:lumOff val="15000"/>
+                  </a:schemeClr>
+                </a:solidFill>
+              </a:rPr>
+              <a:t>VISUAL:</a:t>
+            </a:r>
+          </a:p>
+          <a:p>
+            <a:r>
+              <a:rPr lang="en-MY" sz="900" dirty="0">
+                <a:solidFill>
+                  <a:schemeClr val="tx1">
+                    <a:lumMod val="85000"/>
+                    <a:lumOff val="15000"/>
+                  </a:schemeClr>
+                </a:solidFill>
+              </a:rPr>
+              <a:t>  subjenis skrin: FRAME_SCREEN</a:t>
+            </a:r>
+          </a:p>
+          <a:p>
+            <a:r>
+              <a:rPr lang="en-MY" sz="900" dirty="0">
+                <a:solidFill>
+                  <a:schemeClr val="tx1">
+                    <a:lumMod val="85000"/>
+                    <a:lumOff val="15000"/>
+                  </a:schemeClr>
+                </a:solidFill>
+              </a:rPr>
+              <a:t>  subjenis popup: —</a:t>
+            </a:r>
+          </a:p>
+          <a:p>
+            <a:r>
+              <a:rPr lang="en-MY" sz="900" dirty="0">
+                <a:solidFill>
+                  <a:schemeClr val="tx1">
+                    <a:lumMod val="85000"/>
+                    <a:lumOff val="15000"/>
+                  </a:schemeClr>
+                </a:solidFill>
+              </a:rPr>
+              <a:t>  keperluan visual: NOT_REQUIRED</a:t>
+            </a:r>
+          </a:p>
+          <a:p>
+            <a:r>
+              <a:rPr lang="en-MY" sz="900" dirty="0">
+                <a:solidFill>
+                  <a:schemeClr val="tx1">
+                    <a:lumMod val="85000"/>
+                    <a:lumOff val="15000"/>
+                  </a:schemeClr>
+                </a:solidFill>
+              </a:rPr>
+              <a:t>  status: NOT_REQUIRED</a:t>
+            </a:r>
+          </a:p>
+          <a:p>
+            <a:r>
+              <a:rPr lang="en-MY" sz="900" dirty="0">
+                <a:solidFill>
+                  <a:schemeClr val="tx1">
+                    <a:lumMod val="85000"/>
+                    <a:lumOff val="15000"/>
+                  </a:schemeClr>
+                </a:solidFill>
+              </a:rPr>
+              <a:t>  kuasa: —</a:t>
             </a:r>
           </a:p>
           <a:p>
@@ -21042,8 +23057,8 @@
         </p:nvSpPr>
         <p:spPr>
           <a:xfrm>
-            <a:off x="1234440" y="1737360"/>
-            <a:ext cx="9723090" cy="1920240"/>
+            <a:off x="1234440" y="1481328"/>
+            <a:ext cx="9723090" cy="2788920"/>
           </a:xfrm>
           <a:prstGeom prst="rect">
             <a:avLst/>
@@ -21072,8 +23087,8 @@
         </p:nvSpPr>
         <p:spPr>
           <a:xfrm>
-            <a:off x="1490472" y="1883664"/>
-            <a:ext cx="8534370" cy="201168"/>
+            <a:off x="1490472" y="1627632"/>
+            <a:ext cx="8019288" cy="201168"/>
           </a:xfrm>
           <a:prstGeom prst="rect">
             <a:avLst/>
@@ -21106,8 +23121,8 @@
         </p:nvSpPr>
         <p:spPr>
           <a:xfrm>
-            <a:off x="1490472" y="2103120"/>
-            <a:ext cx="8534370" cy="365760"/>
+            <a:off x="1490472" y="1847088"/>
+            <a:ext cx="8019288" cy="365760"/>
           </a:xfrm>
           <a:prstGeom prst="rect">
             <a:avLst/>
@@ -21143,7 +23158,7 @@
         </p:nvSpPr>
         <p:spPr>
           <a:xfrm>
-            <a:off x="10317450" y="1901952"/>
+            <a:off x="10317450" y="1645920"/>
             <a:ext cx="384048" cy="384048"/>
           </a:xfrm>
           <a:prstGeom prst="ellipse">
@@ -21172,7 +23187,7 @@
         </p:nvSpPr>
         <p:spPr>
           <a:xfrm>
-            <a:off x="10421142" y="2005645"/>
+            <a:off x="10421142" y="1749613"/>
             <a:ext cx="176662" cy="176662"/>
           </a:xfrm>
           <a:custGeom>
@@ -21246,8 +23261,8 @@
         </p:nvSpPr>
         <p:spPr>
           <a:xfrm>
-            <a:off x="1490472" y="2688336"/>
-            <a:ext cx="9211026" cy="219456"/>
+            <a:off x="1490472" y="2432304"/>
+            <a:ext cx="9208008" cy="219456"/>
           </a:xfrm>
           <a:prstGeom prst="rect">
             <a:avLst/>
@@ -21752,6 +23767,84 @@
                 </a:solidFill>
               </a:rPr>
               <a:t>  Tiada baris sumber baharu dicipta.</a:t>
+            </a:r>
+          </a:p>
+          <a:p>
+            <a:r>
+              <a:rPr lang="en-MY" sz="900" b="1" dirty="0">
+                <a:solidFill>
+                  <a:schemeClr val="tx1">
+                    <a:lumMod val="85000"/>
+                    <a:lumOff val="15000"/>
+                  </a:schemeClr>
+                </a:solidFill>
+              </a:rPr>
+              <a:t>VISUAL:</a:t>
+            </a:r>
+          </a:p>
+          <a:p>
+            <a:r>
+              <a:rPr lang="en-MY" sz="900" dirty="0">
+                <a:solidFill>
+                  <a:schemeClr val="tx1">
+                    <a:lumMod val="85000"/>
+                    <a:lumOff val="15000"/>
+                  </a:schemeClr>
+                </a:solidFill>
+              </a:rPr>
+              <a:t>  subjenis skrin: SPECIFICATION_POPUP</a:t>
+            </a:r>
+          </a:p>
+          <a:p>
+            <a:r>
+              <a:rPr lang="en-MY" sz="900" dirty="0">
+                <a:solidFill>
+                  <a:schemeClr val="tx1">
+                    <a:lumMod val="85000"/>
+                    <a:lumOff val="15000"/>
+                  </a:schemeClr>
+                </a:solidFill>
+              </a:rPr>
+              <a:t>  subjenis popup: SPECIFICATION_POPUP</a:t>
+            </a:r>
+          </a:p>
+          <a:p>
+            <a:r>
+              <a:rPr lang="en-MY" sz="900" dirty="0">
+                <a:solidFill>
+                  <a:schemeClr val="tx1">
+                    <a:lumMod val="85000"/>
+                    <a:lumOff val="15000"/>
+                  </a:schemeClr>
+                </a:solidFill>
+              </a:rPr>
+              <a:t>  keperluan visual: NOT_REQUIRED</a:t>
+            </a:r>
+          </a:p>
+          <a:p>
+            <a:r>
+              <a:rPr lang="en-MY" sz="900" dirty="0">
+                <a:solidFill>
+                  <a:schemeClr val="tx1">
+                    <a:lumMod val="85000"/>
+                    <a:lumOff val="15000"/>
+                  </a:schemeClr>
+                </a:solidFill>
+              </a:rPr>
+              <a:t>  status: NOT_REQUIRED_BY_BARIAH_RULING</a:t>
+            </a:r>
+          </a:p>
+          <a:p>
+            <a:r>
+              <a:rPr lang="en-MY" sz="900" dirty="0">
+                <a:solidFill>
+                  <a:schemeClr val="tx1">
+                    <a:lumMod val="85000"/>
+                    <a:lumOff val="15000"/>
+                  </a:schemeClr>
+                </a:solidFill>
+              </a:rPr>
+              <a:t>  kuasa: —</a:t>
             </a:r>
           </a:p>
           <a:p>
@@ -22999,6 +25092,84 @@
           </a:p>
           <a:p>
             <a:r>
+              <a:rPr lang="en-MY" sz="900" b="1" dirty="0">
+                <a:solidFill>
+                  <a:schemeClr val="tx1">
+                    <a:lumMod val="85000"/>
+                    <a:lumOff val="15000"/>
+                  </a:schemeClr>
+                </a:solidFill>
+              </a:rPr>
+              <a:t>VISUAL:</a:t>
+            </a:r>
+          </a:p>
+          <a:p>
+            <a:r>
+              <a:rPr lang="en-MY" sz="900" dirty="0">
+                <a:solidFill>
+                  <a:schemeClr val="tx1">
+                    <a:lumMod val="85000"/>
+                    <a:lumOff val="15000"/>
+                  </a:schemeClr>
+                </a:solidFill>
+              </a:rPr>
+              <a:t>  subjenis skrin: COMPLETION_STATE</a:t>
+            </a:r>
+          </a:p>
+          <a:p>
+            <a:r>
+              <a:rPr lang="en-MY" sz="900" dirty="0">
+                <a:solidFill>
+                  <a:schemeClr val="tx1">
+                    <a:lumMod val="85000"/>
+                    <a:lumOff val="15000"/>
+                  </a:schemeClr>
+                </a:solidFill>
+              </a:rPr>
+              <a:t>  subjenis popup: —</a:t>
+            </a:r>
+          </a:p>
+          <a:p>
+            <a:r>
+              <a:rPr lang="en-MY" sz="900" dirty="0">
+                <a:solidFill>
+                  <a:schemeClr val="tx1">
+                    <a:lumMod val="85000"/>
+                    <a:lumOff val="15000"/>
+                  </a:schemeClr>
+                </a:solidFill>
+              </a:rPr>
+              <a:t>  keperluan visual: NOT_REQUIRED</a:t>
+            </a:r>
+          </a:p>
+          <a:p>
+            <a:r>
+              <a:rPr lang="en-MY" sz="900" dirty="0">
+                <a:solidFill>
+                  <a:schemeClr val="tx1">
+                    <a:lumMod val="85000"/>
+                    <a:lumOff val="15000"/>
+                  </a:schemeClr>
+                </a:solidFill>
+              </a:rPr>
+              <a:t>  status: NOT_REQUIRED</a:t>
+            </a:r>
+          </a:p>
+          <a:p>
+            <a:r>
+              <a:rPr lang="en-MY" sz="900" dirty="0">
+                <a:solidFill>
+                  <a:schemeClr val="tx1">
+                    <a:lumMod val="85000"/>
+                    <a:lumOff val="15000"/>
+                  </a:schemeClr>
+                </a:solidFill>
+              </a:rPr>
+              <a:t>  kuasa: —</a:t>
+            </a:r>
+          </a:p>
+          <a:p>
+            <a:r>
               <a:rPr lang="en-MY" sz="900" dirty="0">
                 <a:solidFill>
                   <a:schemeClr val="tx1">
@@ -23182,7 +25353,7 @@
                   </a:schemeClr>
                 </a:solidFill>
               </a:rPr>
-              <a:t>Klik pada setiap contoh untuk penjelasan lanjut.</a:t>
+              <a:t>Klik pada setiap contoh untuk melihat perincian.</a:t>
             </a:r>
           </a:p>
         </p:txBody>
@@ -23407,7 +25578,7 @@
                   <a:srgbClr val="808080"/>
                 </a:solidFill>
               </a:rPr>
-              <a:t>[Visual: Foto jadual spesifikasi kerusi taman, modul ms 242–243. Tidak dibenamkan.]</a:t>
+              <a:t>[Visual: Pelbagai Kerusi Taman. Tidak dibenamkan.]</a:t>
             </a:r>
           </a:p>
         </p:txBody>
@@ -23902,6 +26073,110 @@
                 </a:solidFill>
               </a:rPr>
               <a:t>  component_complete hanya benar apabila SEMUA contoh selesai.</a:t>
+            </a:r>
+          </a:p>
+          <a:p>
+            <a:r>
+              <a:rPr lang="en-MY" sz="900" b="1" dirty="0">
+                <a:solidFill>
+                  <a:schemeClr val="tx1">
+                    <a:lumMod val="85000"/>
+                    <a:lumOff val="15000"/>
+                  </a:schemeClr>
+                </a:solidFill>
+              </a:rPr>
+              <a:t>ARAHAN INTERAKSI (kanvas = VO):</a:t>
+            </a:r>
+          </a:p>
+          <a:p>
+            <a:r>
+              <a:rPr lang="en-MY" sz="900" dirty="0">
+                <a:solidFill>
+                  <a:schemeClr val="tx1">
+                    <a:lumMod val="85000"/>
+                    <a:lumOff val="15000"/>
+                  </a:schemeClr>
+                </a:solidFill>
+              </a:rPr>
+              <a:t>  Klik pada setiap contoh untuk melihat perincian.</a:t>
+            </a:r>
+          </a:p>
+          <a:p>
+            <a:r>
+              <a:rPr lang="en-MY" sz="900" b="1" dirty="0">
+                <a:solidFill>
+                  <a:schemeClr val="tx1">
+                    <a:lumMod val="85000"/>
+                    <a:lumOff val="15000"/>
+                  </a:schemeClr>
+                </a:solidFill>
+              </a:rPr>
+              <a:t>VISUAL:</a:t>
+            </a:r>
+          </a:p>
+          <a:p>
+            <a:r>
+              <a:rPr lang="en-MY" sz="900" dirty="0">
+                <a:solidFill>
+                  <a:schemeClr val="tx1">
+                    <a:lumMod val="85000"/>
+                    <a:lumOff val="15000"/>
+                  </a:schemeClr>
+                </a:solidFill>
+              </a:rPr>
+              <a:t>  subjenis skrin: COMPONENT_MAIN_SCREEN</a:t>
+            </a:r>
+          </a:p>
+          <a:p>
+            <a:r>
+              <a:rPr lang="en-MY" sz="900" dirty="0">
+                <a:solidFill>
+                  <a:schemeClr val="tx1">
+                    <a:lumMod val="85000"/>
+                    <a:lumOff val="15000"/>
+                  </a:schemeClr>
+                </a:solidFill>
+              </a:rPr>
+              <a:t>  subjenis popup: —</a:t>
+            </a:r>
+          </a:p>
+          <a:p>
+            <a:r>
+              <a:rPr lang="en-MY" sz="900" dirty="0">
+                <a:solidFill>
+                  <a:schemeClr val="tx1">
+                    <a:lumMod val="85000"/>
+                    <a:lumOff val="15000"/>
+                  </a:schemeClr>
+                </a:solidFill>
+              </a:rPr>
+              <a:t>  keperluan visual: CONDITIONAL</a:t>
+            </a:r>
+          </a:p>
+          <a:p>
+            <a:r>
+              <a:rPr lang="en-MY" sz="900" dirty="0">
+                <a:solidFill>
+                  <a:schemeClr val="tx1">
+                    <a:lumMod val="85000"/>
+                    <a:lumOff val="15000"/>
+                  </a:schemeClr>
+                </a:solidFill>
+              </a:rPr>
+              <a:t>  status: RESOLVED</a:t>
+            </a:r>
+          </a:p>
+          <a:p>
+            <a:r>
+              <a:rPr lang="en-MY" sz="900" dirty="0">
+                <a:solidFill>
+                  <a:schemeClr val="tx1">
+                    <a:lumMod val="85000"/>
+                    <a:lumOff val="15000"/>
+                  </a:schemeClr>
+                </a:solidFill>
+              </a:rPr>
+              <a:t>  kuasa: BARIAH_APPROVED_COMPONENT_MAIN</a:t>
             </a:r>
           </a:p>
           <a:p>
@@ -24123,7 +26398,7 @@
                   </a:schemeClr>
                 </a:solidFill>
               </a:rPr>
-              <a:t>Klik pada setiap spesifikasi untuk penjelasan lanjut.</a:t>
+              <a:t>Klik pada setiap kategori untuk penjelasan lanjut.</a:t>
             </a:r>
           </a:p>
         </p:txBody>
@@ -24313,7 +26588,7 @@
         <p:spPr>
           <a:xfrm>
             <a:off x="723930" y="5394960"/>
-            <a:ext cx="10744200" cy="877824"/>
+            <a:ext cx="10744200" cy="365760"/>
           </a:xfrm>
           <a:prstGeom prst="rect">
             <a:avLst/>
@@ -24333,29 +26608,7 @@
                   <a:srgbClr val="808080"/>
                 </a:solidFill>
               </a:rPr>
-              <a:t>[Visual: Rajah 25 — Lukisan Spesifikasi Papan Tanda Informasi, dan Rajah 26 — Spesifikasi Papan Tanda</a:t>
-            </a:r>
-          </a:p>
-          <a:p>
-            <a:pPr/>
-            <a:r>
-              <a:rPr lang="en-MY" sz="1100" dirty="0">
-                <a:solidFill>
-                  <a:srgbClr val="808080"/>
-                </a:solidFill>
-              </a:rPr>
-              <a:t>Penunjuk Arah, kedua-duanya modul ms 245. Aset K5PL06T03-B02-IMG-p245-x37 dan K5PL06T03-B02-IMG-p245-x38.</a:t>
-            </a:r>
-          </a:p>
-          <a:p>
-            <a:pPr/>
-            <a:r>
-              <a:rPr lang="en-MY" sz="1100" dirty="0">
-                <a:solidFill>
-                  <a:srgbClr val="808080"/>
-                </a:solidFill>
-              </a:rPr>
-              <a:t>Tidak dibenamkan.]</a:t>
+              <a:t>[Visual: Pelbagai Papan Tanda. Tidak dibenamkan.]</a:t>
             </a:r>
           </a:p>
         </p:txBody>
@@ -24902,6 +27155,110 @@
                 </a:solidFill>
               </a:rPr>
               <a:t>  Tiada baris sumber baharu dicipta.</a:t>
+            </a:r>
+          </a:p>
+          <a:p>
+            <a:r>
+              <a:rPr lang="en-MY" sz="900" b="1" dirty="0">
+                <a:solidFill>
+                  <a:schemeClr val="tx1">
+                    <a:lumMod val="85000"/>
+                    <a:lumOff val="15000"/>
+                  </a:schemeClr>
+                </a:solidFill>
+              </a:rPr>
+              <a:t>ARAHAN INTERAKSI (kanvas = VO):</a:t>
+            </a:r>
+          </a:p>
+          <a:p>
+            <a:r>
+              <a:rPr lang="en-MY" sz="900" dirty="0">
+                <a:solidFill>
+                  <a:schemeClr val="tx1">
+                    <a:lumMod val="85000"/>
+                    <a:lumOff val="15000"/>
+                  </a:schemeClr>
+                </a:solidFill>
+              </a:rPr>
+              <a:t>  Klik pada setiap kategori untuk penjelasan lanjut.</a:t>
+            </a:r>
+          </a:p>
+          <a:p>
+            <a:r>
+              <a:rPr lang="en-MY" sz="900" b="1" dirty="0">
+                <a:solidFill>
+                  <a:schemeClr val="tx1">
+                    <a:lumMod val="85000"/>
+                    <a:lumOff val="15000"/>
+                  </a:schemeClr>
+                </a:solidFill>
+              </a:rPr>
+              <a:t>VISUAL:</a:t>
+            </a:r>
+          </a:p>
+          <a:p>
+            <a:r>
+              <a:rPr lang="en-MY" sz="900" dirty="0">
+                <a:solidFill>
+                  <a:schemeClr val="tx1">
+                    <a:lumMod val="85000"/>
+                    <a:lumOff val="15000"/>
+                  </a:schemeClr>
+                </a:solidFill>
+              </a:rPr>
+              <a:t>  subjenis skrin: COMPONENT_MAIN_SCREEN</a:t>
+            </a:r>
+          </a:p>
+          <a:p>
+            <a:r>
+              <a:rPr lang="en-MY" sz="900" dirty="0">
+                <a:solidFill>
+                  <a:schemeClr val="tx1">
+                    <a:lumMod val="85000"/>
+                    <a:lumOff val="15000"/>
+                  </a:schemeClr>
+                </a:solidFill>
+              </a:rPr>
+              <a:t>  subjenis popup: —</a:t>
+            </a:r>
+          </a:p>
+          <a:p>
+            <a:r>
+              <a:rPr lang="en-MY" sz="900" dirty="0">
+                <a:solidFill>
+                  <a:schemeClr val="tx1">
+                    <a:lumMod val="85000"/>
+                    <a:lumOff val="15000"/>
+                  </a:schemeClr>
+                </a:solidFill>
+              </a:rPr>
+              <a:t>  keperluan visual: CONDITIONAL</a:t>
+            </a:r>
+          </a:p>
+          <a:p>
+            <a:r>
+              <a:rPr lang="en-MY" sz="900" dirty="0">
+                <a:solidFill>
+                  <a:schemeClr val="tx1">
+                    <a:lumMod val="85000"/>
+                    <a:lumOff val="15000"/>
+                  </a:schemeClr>
+                </a:solidFill>
+              </a:rPr>
+              <a:t>  status: RESOLVED</a:t>
+            </a:r>
+          </a:p>
+          <a:p>
+            <a:r>
+              <a:rPr lang="en-MY" sz="900" dirty="0">
+                <a:solidFill>
+                  <a:schemeClr val="tx1">
+                    <a:lumMod val="85000"/>
+                    <a:lumOff val="15000"/>
+                  </a:schemeClr>
+                </a:solidFill>
+              </a:rPr>
+              <a:t>  kuasa: BARIAH_APPROVED_COMPONENT_MAIN</a:t>
             </a:r>
           </a:p>
           <a:p>
@@ -25123,7 +27480,7 @@
                   </a:schemeClr>
                 </a:solidFill>
               </a:rPr>
-              <a:t>Klik pada setiap spesifikasi untuk penjelasan lanjut.</a:t>
+              <a:t>Klik pada setiap kategori untuk penjelasan lanjut.</a:t>
             </a:r>
           </a:p>
         </p:txBody>
@@ -25427,8 +27784,8 @@
         </p:nvSpPr>
         <p:spPr>
           <a:xfrm>
-            <a:off x="1234440" y="1737360"/>
-            <a:ext cx="9723090" cy="2002536"/>
+            <a:off x="1234440" y="1481328"/>
+            <a:ext cx="9723090" cy="2788920"/>
           </a:xfrm>
           <a:prstGeom prst="rect">
             <a:avLst/>
@@ -25457,8 +27814,8 @@
         </p:nvSpPr>
         <p:spPr>
           <a:xfrm>
-            <a:off x="1490472" y="1883664"/>
-            <a:ext cx="8534370" cy="201168"/>
+            <a:off x="1490472" y="1627632"/>
+            <a:ext cx="8019288" cy="201168"/>
           </a:xfrm>
           <a:prstGeom prst="rect">
             <a:avLst/>
@@ -25491,8 +27848,8 @@
         </p:nvSpPr>
         <p:spPr>
           <a:xfrm>
-            <a:off x="1490472" y="2103120"/>
-            <a:ext cx="8534370" cy="365760"/>
+            <a:off x="1490472" y="1847088"/>
+            <a:ext cx="8019288" cy="365760"/>
           </a:xfrm>
           <a:prstGeom prst="rect">
             <a:avLst/>
@@ -25528,7 +27885,7 @@
         </p:nvSpPr>
         <p:spPr>
           <a:xfrm>
-            <a:off x="10317450" y="1901952"/>
+            <a:off x="10317450" y="1645920"/>
             <a:ext cx="384048" cy="384048"/>
           </a:xfrm>
           <a:prstGeom prst="ellipse">
@@ -25557,7 +27914,7 @@
         </p:nvSpPr>
         <p:spPr>
           <a:xfrm>
-            <a:off x="10421142" y="2005645"/>
+            <a:off x="10421142" y="1749613"/>
             <a:ext cx="176662" cy="176662"/>
           </a:xfrm>
           <a:custGeom>
@@ -25631,8 +27988,8 @@
         </p:nvSpPr>
         <p:spPr>
           <a:xfrm>
-            <a:off x="1490472" y="2688336"/>
-            <a:ext cx="9211026" cy="429768"/>
+            <a:off x="1490472" y="2432304"/>
+            <a:ext cx="9208008" cy="644652"/>
           </a:xfrm>
           <a:prstGeom prst="rect">
             <a:avLst/>
@@ -25655,7 +28012,21 @@
                   </a:schemeClr>
                 </a:solidFill>
               </a:rPr>
-              <a:t>Aluminium Komposit (ACP) 3–4mm; HPL gred luar 6–10mm; Akrilik terstabil UV 5–10mm; Kayu dirawat</a:t>
+              <a:t>Aluminium Komposit (ACP) 3–4mm; HPL gred luar 6–10mm; Akrilik terstabil UV 5–10mm; Kayu</a:t>
+            </a:r>
+          </a:p>
+          <a:p>
+            <a:pPr/>
+            <a:r>
+              <a:rPr lang="en-MY" sz="1250" dirty="0">
+                <a:solidFill>
+                  <a:schemeClr val="tx1">
+                    <a:lumMod val="85000"/>
+                    <a:lumOff val="15000"/>
+                  </a:schemeClr>
+                </a:solidFill>
+              </a:rPr>
+              <a:t>dirawat</a:t>
             </a:r>
           </a:p>
           <a:p>
@@ -26138,6 +28509,84 @@
                 </a:solidFill>
               </a:rPr>
               <a:t>  Tiada baris sumber baharu dicipta.</a:t>
+            </a:r>
+          </a:p>
+          <a:p>
+            <a:r>
+              <a:rPr lang="en-MY" sz="900" b="1" dirty="0">
+                <a:solidFill>
+                  <a:schemeClr val="tx1">
+                    <a:lumMod val="85000"/>
+                    <a:lumOff val="15000"/>
+                  </a:schemeClr>
+                </a:solidFill>
+              </a:rPr>
+              <a:t>VISUAL:</a:t>
+            </a:r>
+          </a:p>
+          <a:p>
+            <a:r>
+              <a:rPr lang="en-MY" sz="900" dirty="0">
+                <a:solidFill>
+                  <a:schemeClr val="tx1">
+                    <a:lumMod val="85000"/>
+                    <a:lumOff val="15000"/>
+                  </a:schemeClr>
+                </a:solidFill>
+              </a:rPr>
+              <a:t>  subjenis skrin: SPECIFICATION_POPUP</a:t>
+            </a:r>
+          </a:p>
+          <a:p>
+            <a:r>
+              <a:rPr lang="en-MY" sz="900" dirty="0">
+                <a:solidFill>
+                  <a:schemeClr val="tx1">
+                    <a:lumMod val="85000"/>
+                    <a:lumOff val="15000"/>
+                  </a:schemeClr>
+                </a:solidFill>
+              </a:rPr>
+              <a:t>  subjenis popup: SPECIFICATION_POPUP</a:t>
+            </a:r>
+          </a:p>
+          <a:p>
+            <a:r>
+              <a:rPr lang="en-MY" sz="900" dirty="0">
+                <a:solidFill>
+                  <a:schemeClr val="tx1">
+                    <a:lumMod val="85000"/>
+                    <a:lumOff val="15000"/>
+                  </a:schemeClr>
+                </a:solidFill>
+              </a:rPr>
+              <a:t>  keperluan visual: NOT_REQUIRED</a:t>
+            </a:r>
+          </a:p>
+          <a:p>
+            <a:r>
+              <a:rPr lang="en-MY" sz="900" dirty="0">
+                <a:solidFill>
+                  <a:schemeClr val="tx1">
+                    <a:lumMod val="85000"/>
+                    <a:lumOff val="15000"/>
+                  </a:schemeClr>
+                </a:solidFill>
+              </a:rPr>
+              <a:t>  status: NOT_REQUIRED_BY_BARIAH_RULING</a:t>
+            </a:r>
+          </a:p>
+          <a:p>
+            <a:r>
+              <a:rPr lang="en-MY" sz="900" dirty="0">
+                <a:solidFill>
+                  <a:schemeClr val="tx1">
+                    <a:lumMod val="85000"/>
+                    <a:lumOff val="15000"/>
+                  </a:schemeClr>
+                </a:solidFill>
+              </a:rPr>
+              <a:t>  kuasa: —</a:t>
             </a:r>
           </a:p>
           <a:p>
@@ -26359,7 +28808,7 @@
                   </a:schemeClr>
                 </a:solidFill>
               </a:rPr>
-              <a:t>Klik pada setiap spesifikasi untuk penjelasan lanjut.</a:t>
+              <a:t>Klik pada setiap kategori untuk penjelasan lanjut.</a:t>
             </a:r>
           </a:p>
         </p:txBody>
@@ -26722,8 +29171,8 @@
         </p:nvSpPr>
         <p:spPr>
           <a:xfrm>
-            <a:off x="1234440" y="1737360"/>
-            <a:ext cx="9723090" cy="2002536"/>
+            <a:off x="1234440" y="1481328"/>
+            <a:ext cx="9723090" cy="2788920"/>
           </a:xfrm>
           <a:prstGeom prst="rect">
             <a:avLst/>
@@ -26752,8 +29201,8 @@
         </p:nvSpPr>
         <p:spPr>
           <a:xfrm>
-            <a:off x="1490472" y="1883664"/>
-            <a:ext cx="8534370" cy="201168"/>
+            <a:off x="1490472" y="1627632"/>
+            <a:ext cx="8019288" cy="201168"/>
           </a:xfrm>
           <a:prstGeom prst="rect">
             <a:avLst/>
@@ -26786,8 +29235,8 @@
         </p:nvSpPr>
         <p:spPr>
           <a:xfrm>
-            <a:off x="1490472" y="2103120"/>
-            <a:ext cx="8534370" cy="365760"/>
+            <a:off x="1490472" y="1847088"/>
+            <a:ext cx="8019288" cy="365760"/>
           </a:xfrm>
           <a:prstGeom prst="rect">
             <a:avLst/>
@@ -26823,7 +29272,7 @@
         </p:nvSpPr>
         <p:spPr>
           <a:xfrm>
-            <a:off x="10317450" y="1901952"/>
+            <a:off x="10317450" y="1645920"/>
             <a:ext cx="384048" cy="384048"/>
           </a:xfrm>
           <a:prstGeom prst="ellipse">
@@ -26852,7 +29301,7 @@
         </p:nvSpPr>
         <p:spPr>
           <a:xfrm>
-            <a:off x="10421142" y="2005645"/>
+            <a:off x="10421142" y="1749613"/>
             <a:ext cx="176662" cy="176662"/>
           </a:xfrm>
           <a:custGeom>
@@ -26926,8 +29375,8 @@
         </p:nvSpPr>
         <p:spPr>
           <a:xfrm>
-            <a:off x="1490472" y="2688336"/>
-            <a:ext cx="9211026" cy="429768"/>
+            <a:off x="1490472" y="2432304"/>
+            <a:ext cx="9208008" cy="429768"/>
           </a:xfrm>
           <a:prstGeom prst="rect">
             <a:avLst/>
@@ -27433,6 +29882,84 @@
                 </a:solidFill>
               </a:rPr>
               <a:t>  Tiada baris sumber baharu dicipta.</a:t>
+            </a:r>
+          </a:p>
+          <a:p>
+            <a:r>
+              <a:rPr lang="en-MY" sz="900" b="1" dirty="0">
+                <a:solidFill>
+                  <a:schemeClr val="tx1">
+                    <a:lumMod val="85000"/>
+                    <a:lumOff val="15000"/>
+                  </a:schemeClr>
+                </a:solidFill>
+              </a:rPr>
+              <a:t>VISUAL:</a:t>
+            </a:r>
+          </a:p>
+          <a:p>
+            <a:r>
+              <a:rPr lang="en-MY" sz="900" dirty="0">
+                <a:solidFill>
+                  <a:schemeClr val="tx1">
+                    <a:lumMod val="85000"/>
+                    <a:lumOff val="15000"/>
+                  </a:schemeClr>
+                </a:solidFill>
+              </a:rPr>
+              <a:t>  subjenis skrin: SPECIFICATION_POPUP</a:t>
+            </a:r>
+          </a:p>
+          <a:p>
+            <a:r>
+              <a:rPr lang="en-MY" sz="900" dirty="0">
+                <a:solidFill>
+                  <a:schemeClr val="tx1">
+                    <a:lumMod val="85000"/>
+                    <a:lumOff val="15000"/>
+                  </a:schemeClr>
+                </a:solidFill>
+              </a:rPr>
+              <a:t>  subjenis popup: SPECIFICATION_POPUP</a:t>
+            </a:r>
+          </a:p>
+          <a:p>
+            <a:r>
+              <a:rPr lang="en-MY" sz="900" dirty="0">
+                <a:solidFill>
+                  <a:schemeClr val="tx1">
+                    <a:lumMod val="85000"/>
+                    <a:lumOff val="15000"/>
+                  </a:schemeClr>
+                </a:solidFill>
+              </a:rPr>
+              <a:t>  keperluan visual: NOT_REQUIRED</a:t>
+            </a:r>
+          </a:p>
+          <a:p>
+            <a:r>
+              <a:rPr lang="en-MY" sz="900" dirty="0">
+                <a:solidFill>
+                  <a:schemeClr val="tx1">
+                    <a:lumMod val="85000"/>
+                    <a:lumOff val="15000"/>
+                  </a:schemeClr>
+                </a:solidFill>
+              </a:rPr>
+              <a:t>  status: NOT_REQUIRED_BY_BARIAH_RULING</a:t>
+            </a:r>
+          </a:p>
+          <a:p>
+            <a:r>
+              <a:rPr lang="en-MY" sz="900" dirty="0">
+                <a:solidFill>
+                  <a:schemeClr val="tx1">
+                    <a:lumMod val="85000"/>
+                    <a:lumOff val="15000"/>
+                  </a:schemeClr>
+                </a:solidFill>
+              </a:rPr>
+              <a:t>  kuasa: —</a:t>
             </a:r>
           </a:p>
           <a:p>
@@ -27654,7 +30181,7 @@
                   </a:schemeClr>
                 </a:solidFill>
               </a:rPr>
-              <a:t>Klik pada setiap spesifikasi untuk penjelasan lanjut.</a:t>
+              <a:t>Klik pada setiap kategori untuk penjelasan lanjut.</a:t>
             </a:r>
           </a:p>
         </p:txBody>
@@ -28076,8 +30603,8 @@
         </p:nvSpPr>
         <p:spPr>
           <a:xfrm>
-            <a:off x="1234440" y="1737360"/>
-            <a:ext cx="9723090" cy="1920240"/>
+            <a:off x="1234440" y="1481328"/>
+            <a:ext cx="9723090" cy="2788920"/>
           </a:xfrm>
           <a:prstGeom prst="rect">
             <a:avLst/>
@@ -28106,8 +30633,8 @@
         </p:nvSpPr>
         <p:spPr>
           <a:xfrm>
-            <a:off x="1490472" y="1883664"/>
-            <a:ext cx="8534370" cy="201168"/>
+            <a:off x="1490472" y="1627632"/>
+            <a:ext cx="8019288" cy="201168"/>
           </a:xfrm>
           <a:prstGeom prst="rect">
             <a:avLst/>
@@ -28140,8 +30667,8 @@
         </p:nvSpPr>
         <p:spPr>
           <a:xfrm>
-            <a:off x="1490472" y="2103120"/>
-            <a:ext cx="8534370" cy="365760"/>
+            <a:off x="1490472" y="1847088"/>
+            <a:ext cx="8019288" cy="365760"/>
           </a:xfrm>
           <a:prstGeom prst="rect">
             <a:avLst/>
@@ -28177,7 +30704,7 @@
         </p:nvSpPr>
         <p:spPr>
           <a:xfrm>
-            <a:off x="10317450" y="1901952"/>
+            <a:off x="10317450" y="1645920"/>
             <a:ext cx="384048" cy="384048"/>
           </a:xfrm>
           <a:prstGeom prst="ellipse">
@@ -28206,7 +30733,7 @@
         </p:nvSpPr>
         <p:spPr>
           <a:xfrm>
-            <a:off x="10421142" y="2005645"/>
+            <a:off x="10421142" y="1749613"/>
             <a:ext cx="176662" cy="176662"/>
           </a:xfrm>
           <a:custGeom>
@@ -28280,8 +30807,8 @@
         </p:nvSpPr>
         <p:spPr>
           <a:xfrm>
-            <a:off x="1490472" y="2688336"/>
-            <a:ext cx="9211026" cy="219456"/>
+            <a:off x="1490472" y="2432304"/>
+            <a:ext cx="9208008" cy="429768"/>
           </a:xfrm>
           <a:prstGeom prst="rect">
             <a:avLst/>
@@ -28304,7 +30831,21 @@
                   </a:schemeClr>
                 </a:solidFill>
               </a:rPr>
-              <a:t>Cetakan UV langsung, cetakan digital pada vinil gred luar, atau ukiran laser. Mesti tahan pudar.</a:t>
+              <a:t>Cetakan UV langsung, cetakan digital pada vinil gred luar, atau ukiran laser. Mesti tahan</a:t>
+            </a:r>
+          </a:p>
+          <a:p>
+            <a:pPr/>
+            <a:r>
+              <a:rPr lang="en-MY" sz="1250" dirty="0">
+                <a:solidFill>
+                  <a:schemeClr val="tx1">
+                    <a:lumMod val="85000"/>
+                    <a:lumOff val="15000"/>
+                  </a:schemeClr>
+                </a:solidFill>
+              </a:rPr>
+              <a:t>pudar.</a:t>
             </a:r>
           </a:p>
         </p:txBody>
@@ -28773,6 +31314,84 @@
                 </a:solidFill>
               </a:rPr>
               <a:t>  Tiada baris sumber baharu dicipta.</a:t>
+            </a:r>
+          </a:p>
+          <a:p>
+            <a:r>
+              <a:rPr lang="en-MY" sz="900" b="1" dirty="0">
+                <a:solidFill>
+                  <a:schemeClr val="tx1">
+                    <a:lumMod val="85000"/>
+                    <a:lumOff val="15000"/>
+                  </a:schemeClr>
+                </a:solidFill>
+              </a:rPr>
+              <a:t>VISUAL:</a:t>
+            </a:r>
+          </a:p>
+          <a:p>
+            <a:r>
+              <a:rPr lang="en-MY" sz="900" dirty="0">
+                <a:solidFill>
+                  <a:schemeClr val="tx1">
+                    <a:lumMod val="85000"/>
+                    <a:lumOff val="15000"/>
+                  </a:schemeClr>
+                </a:solidFill>
+              </a:rPr>
+              <a:t>  subjenis skrin: SPECIFICATION_POPUP</a:t>
+            </a:r>
+          </a:p>
+          <a:p>
+            <a:r>
+              <a:rPr lang="en-MY" sz="900" dirty="0">
+                <a:solidFill>
+                  <a:schemeClr val="tx1">
+                    <a:lumMod val="85000"/>
+                    <a:lumOff val="15000"/>
+                  </a:schemeClr>
+                </a:solidFill>
+              </a:rPr>
+              <a:t>  subjenis popup: SPECIFICATION_POPUP</a:t>
+            </a:r>
+          </a:p>
+          <a:p>
+            <a:r>
+              <a:rPr lang="en-MY" sz="900" dirty="0">
+                <a:solidFill>
+                  <a:schemeClr val="tx1">
+                    <a:lumMod val="85000"/>
+                    <a:lumOff val="15000"/>
+                  </a:schemeClr>
+                </a:solidFill>
+              </a:rPr>
+              <a:t>  keperluan visual: NOT_REQUIRED</a:t>
+            </a:r>
+          </a:p>
+          <a:p>
+            <a:r>
+              <a:rPr lang="en-MY" sz="900" dirty="0">
+                <a:solidFill>
+                  <a:schemeClr val="tx1">
+                    <a:lumMod val="85000"/>
+                    <a:lumOff val="15000"/>
+                  </a:schemeClr>
+                </a:solidFill>
+              </a:rPr>
+              <a:t>  status: NOT_REQUIRED_BY_BARIAH_RULING</a:t>
+            </a:r>
+          </a:p>
+          <a:p>
+            <a:r>
+              <a:rPr lang="en-MY" sz="900" dirty="0">
+                <a:solidFill>
+                  <a:schemeClr val="tx1">
+                    <a:lumMod val="85000"/>
+                    <a:lumOff val="15000"/>
+                  </a:schemeClr>
+                </a:solidFill>
+              </a:rPr>
+              <a:t>  kuasa: —</a:t>
             </a:r>
           </a:p>
           <a:p>
@@ -28994,7 +31613,7 @@
                   </a:schemeClr>
                 </a:solidFill>
               </a:rPr>
-              <a:t>Klik pada setiap spesifikasi untuk penjelasan lanjut.</a:t>
+              <a:t>Klik pada setiap kategori untuk penjelasan lanjut.</a:t>
             </a:r>
           </a:p>
         </p:txBody>
@@ -29475,8 +32094,8 @@
         </p:nvSpPr>
         <p:spPr>
           <a:xfrm>
-            <a:off x="1234440" y="1737360"/>
-            <a:ext cx="9723090" cy="1920240"/>
+            <a:off x="1234440" y="1481328"/>
+            <a:ext cx="9723090" cy="2788920"/>
           </a:xfrm>
           <a:prstGeom prst="rect">
             <a:avLst/>
@@ -29505,8 +32124,8 @@
         </p:nvSpPr>
         <p:spPr>
           <a:xfrm>
-            <a:off x="1490472" y="1883664"/>
-            <a:ext cx="8534370" cy="201168"/>
+            <a:off x="1490472" y="1627632"/>
+            <a:ext cx="8019288" cy="201168"/>
           </a:xfrm>
           <a:prstGeom prst="rect">
             <a:avLst/>
@@ -29539,8 +32158,8 @@
         </p:nvSpPr>
         <p:spPr>
           <a:xfrm>
-            <a:off x="1490472" y="2103120"/>
-            <a:ext cx="8534370" cy="365760"/>
+            <a:off x="1490472" y="1847088"/>
+            <a:ext cx="8019288" cy="365760"/>
           </a:xfrm>
           <a:prstGeom prst="rect">
             <a:avLst/>
@@ -29576,7 +32195,7 @@
         </p:nvSpPr>
         <p:spPr>
           <a:xfrm>
-            <a:off x="10317450" y="1901952"/>
+            <a:off x="10317450" y="1645920"/>
             <a:ext cx="384048" cy="384048"/>
           </a:xfrm>
           <a:prstGeom prst="ellipse">
@@ -29605,7 +32224,7 @@
         </p:nvSpPr>
         <p:spPr>
           <a:xfrm>
-            <a:off x="10421142" y="2005645"/>
+            <a:off x="10421142" y="1749613"/>
             <a:ext cx="176662" cy="176662"/>
           </a:xfrm>
           <a:custGeom>
@@ -29679,8 +32298,8 @@
         </p:nvSpPr>
         <p:spPr>
           <a:xfrm>
-            <a:off x="1490472" y="2688336"/>
-            <a:ext cx="9211026" cy="219456"/>
+            <a:off x="1490472" y="2432304"/>
+            <a:ext cx="9208008" cy="219456"/>
           </a:xfrm>
           <a:prstGeom prst="rect">
             <a:avLst/>
@@ -30172,6 +32791,84 @@
                 </a:solidFill>
               </a:rPr>
               <a:t>  Tiada baris sumber baharu dicipta.</a:t>
+            </a:r>
+          </a:p>
+          <a:p>
+            <a:r>
+              <a:rPr lang="en-MY" sz="900" b="1" dirty="0">
+                <a:solidFill>
+                  <a:schemeClr val="tx1">
+                    <a:lumMod val="85000"/>
+                    <a:lumOff val="15000"/>
+                  </a:schemeClr>
+                </a:solidFill>
+              </a:rPr>
+              <a:t>VISUAL:</a:t>
+            </a:r>
+          </a:p>
+          <a:p>
+            <a:r>
+              <a:rPr lang="en-MY" sz="900" dirty="0">
+                <a:solidFill>
+                  <a:schemeClr val="tx1">
+                    <a:lumMod val="85000"/>
+                    <a:lumOff val="15000"/>
+                  </a:schemeClr>
+                </a:solidFill>
+              </a:rPr>
+              <a:t>  subjenis skrin: SPECIFICATION_POPUP</a:t>
+            </a:r>
+          </a:p>
+          <a:p>
+            <a:r>
+              <a:rPr lang="en-MY" sz="900" dirty="0">
+                <a:solidFill>
+                  <a:schemeClr val="tx1">
+                    <a:lumMod val="85000"/>
+                    <a:lumOff val="15000"/>
+                  </a:schemeClr>
+                </a:solidFill>
+              </a:rPr>
+              <a:t>  subjenis popup: SPECIFICATION_POPUP</a:t>
+            </a:r>
+          </a:p>
+          <a:p>
+            <a:r>
+              <a:rPr lang="en-MY" sz="900" dirty="0">
+                <a:solidFill>
+                  <a:schemeClr val="tx1">
+                    <a:lumMod val="85000"/>
+                    <a:lumOff val="15000"/>
+                  </a:schemeClr>
+                </a:solidFill>
+              </a:rPr>
+              <a:t>  keperluan visual: NOT_REQUIRED</a:t>
+            </a:r>
+          </a:p>
+          <a:p>
+            <a:r>
+              <a:rPr lang="en-MY" sz="900" dirty="0">
+                <a:solidFill>
+                  <a:schemeClr val="tx1">
+                    <a:lumMod val="85000"/>
+                    <a:lumOff val="15000"/>
+                  </a:schemeClr>
+                </a:solidFill>
+              </a:rPr>
+              <a:t>  status: NOT_REQUIRED_BY_BARIAH_RULING</a:t>
+            </a:r>
+          </a:p>
+          <a:p>
+            <a:r>
+              <a:rPr lang="en-MY" sz="900" dirty="0">
+                <a:solidFill>
+                  <a:schemeClr val="tx1">
+                    <a:lumMod val="85000"/>
+                    <a:lumOff val="15000"/>
+                  </a:schemeClr>
+                </a:solidFill>
+              </a:rPr>
+              <a:t>  kuasa: —</a:t>
             </a:r>
           </a:p>
           <a:p>
@@ -30393,7 +33090,7 @@
                   </a:schemeClr>
                 </a:solidFill>
               </a:rPr>
-              <a:t>Klik pada setiap spesifikasi untuk penjelasan lanjut.</a:t>
+              <a:t>Klik pada setiap kategori untuk penjelasan lanjut.</a:t>
             </a:r>
           </a:p>
         </p:txBody>
@@ -31373,6 +34070,84 @@
           </a:p>
           <a:p>
             <a:r>
+              <a:rPr lang="en-MY" sz="900" b="1" dirty="0">
+                <a:solidFill>
+                  <a:schemeClr val="tx1">
+                    <a:lumMod val="85000"/>
+                    <a:lumOff val="15000"/>
+                  </a:schemeClr>
+                </a:solidFill>
+              </a:rPr>
+              <a:t>VISUAL:</a:t>
+            </a:r>
+          </a:p>
+          <a:p>
+            <a:r>
+              <a:rPr lang="en-MY" sz="900" dirty="0">
+                <a:solidFill>
+                  <a:schemeClr val="tx1">
+                    <a:lumMod val="85000"/>
+                    <a:lumOff val="15000"/>
+                  </a:schemeClr>
+                </a:solidFill>
+              </a:rPr>
+              <a:t>  subjenis skrin: COMPLETION_STATE</a:t>
+            </a:r>
+          </a:p>
+          <a:p>
+            <a:r>
+              <a:rPr lang="en-MY" sz="900" dirty="0">
+                <a:solidFill>
+                  <a:schemeClr val="tx1">
+                    <a:lumMod val="85000"/>
+                    <a:lumOff val="15000"/>
+                  </a:schemeClr>
+                </a:solidFill>
+              </a:rPr>
+              <a:t>  subjenis popup: —</a:t>
+            </a:r>
+          </a:p>
+          <a:p>
+            <a:r>
+              <a:rPr lang="en-MY" sz="900" dirty="0">
+                <a:solidFill>
+                  <a:schemeClr val="tx1">
+                    <a:lumMod val="85000"/>
+                    <a:lumOff val="15000"/>
+                  </a:schemeClr>
+                </a:solidFill>
+              </a:rPr>
+              <a:t>  keperluan visual: NOT_REQUIRED</a:t>
+            </a:r>
+          </a:p>
+          <a:p>
+            <a:r>
+              <a:rPr lang="en-MY" sz="900" dirty="0">
+                <a:solidFill>
+                  <a:schemeClr val="tx1">
+                    <a:lumMod val="85000"/>
+                    <a:lumOff val="15000"/>
+                  </a:schemeClr>
+                </a:solidFill>
+              </a:rPr>
+              <a:t>  status: NOT_REQUIRED</a:t>
+            </a:r>
+          </a:p>
+          <a:p>
+            <a:r>
+              <a:rPr lang="en-MY" sz="900" dirty="0">
+                <a:solidFill>
+                  <a:schemeClr val="tx1">
+                    <a:lumMod val="85000"/>
+                    <a:lumOff val="15000"/>
+                  </a:schemeClr>
+                </a:solidFill>
+              </a:rPr>
+              <a:t>  kuasa: —</a:t>
+            </a:r>
+          </a:p>
+          <a:p>
+            <a:r>
               <a:rPr lang="en-MY" sz="900" dirty="0">
                 <a:solidFill>
                   <a:schemeClr val="tx1">
@@ -32140,6 +34915,84 @@
           </a:p>
           <a:p>
             <a:r>
+              <a:rPr lang="en-MY" sz="900" b="1" dirty="0">
+                <a:solidFill>
+                  <a:schemeClr val="tx1">
+                    <a:lumMod val="85000"/>
+                    <a:lumOff val="15000"/>
+                  </a:schemeClr>
+                </a:solidFill>
+              </a:rPr>
+              <a:t>VISUAL:</a:t>
+            </a:r>
+          </a:p>
+          <a:p>
+            <a:r>
+              <a:rPr lang="en-MY" sz="900" dirty="0">
+                <a:solidFill>
+                  <a:schemeClr val="tx1">
+                    <a:lumMod val="85000"/>
+                    <a:lumOff val="15000"/>
+                  </a:schemeClr>
+                </a:solidFill>
+              </a:rPr>
+              <a:t>  subjenis skrin: FRAME_SCREEN</a:t>
+            </a:r>
+          </a:p>
+          <a:p>
+            <a:r>
+              <a:rPr lang="en-MY" sz="900" dirty="0">
+                <a:solidFill>
+                  <a:schemeClr val="tx1">
+                    <a:lumMod val="85000"/>
+                    <a:lumOff val="15000"/>
+                  </a:schemeClr>
+                </a:solidFill>
+              </a:rPr>
+              <a:t>  subjenis popup: —</a:t>
+            </a:r>
+          </a:p>
+          <a:p>
+            <a:r>
+              <a:rPr lang="en-MY" sz="900" dirty="0">
+                <a:solidFill>
+                  <a:schemeClr val="tx1">
+                    <a:lumMod val="85000"/>
+                    <a:lumOff val="15000"/>
+                  </a:schemeClr>
+                </a:solidFill>
+              </a:rPr>
+              <a:t>  keperluan visual: NOT_REQUIRED</a:t>
+            </a:r>
+          </a:p>
+          <a:p>
+            <a:r>
+              <a:rPr lang="en-MY" sz="900" dirty="0">
+                <a:solidFill>
+                  <a:schemeClr val="tx1">
+                    <a:lumMod val="85000"/>
+                    <a:lumOff val="15000"/>
+                  </a:schemeClr>
+                </a:solidFill>
+              </a:rPr>
+              <a:t>  status: NOT_REQUIRED</a:t>
+            </a:r>
+          </a:p>
+          <a:p>
+            <a:r>
+              <a:rPr lang="en-MY" sz="900" dirty="0">
+                <a:solidFill>
+                  <a:schemeClr val="tx1">
+                    <a:lumMod val="85000"/>
+                    <a:lumOff val="15000"/>
+                  </a:schemeClr>
+                </a:solidFill>
+              </a:rPr>
+              <a:t>  kuasa: —</a:t>
+            </a:r>
+          </a:p>
+          <a:p>
+            <a:r>
               <a:rPr lang="en-MY" sz="900" dirty="0">
                 <a:solidFill>
                   <a:schemeClr val="tx1">
@@ -33077,6 +35930,84 @@
           </a:p>
           <a:p>
             <a:r>
+              <a:rPr lang="en-MY" sz="900" b="1" dirty="0">
+                <a:solidFill>
+                  <a:schemeClr val="tx1">
+                    <a:lumMod val="85000"/>
+                    <a:lumOff val="15000"/>
+                  </a:schemeClr>
+                </a:solidFill>
+              </a:rPr>
+              <a:t>VISUAL:</a:t>
+            </a:r>
+          </a:p>
+          <a:p>
+            <a:r>
+              <a:rPr lang="en-MY" sz="900" dirty="0">
+                <a:solidFill>
+                  <a:schemeClr val="tx1">
+                    <a:lumMod val="85000"/>
+                    <a:lumOff val="15000"/>
+                  </a:schemeClr>
+                </a:solidFill>
+              </a:rPr>
+              <a:t>  subjenis skrin: FRAME_SCREEN</a:t>
+            </a:r>
+          </a:p>
+          <a:p>
+            <a:r>
+              <a:rPr lang="en-MY" sz="900" dirty="0">
+                <a:solidFill>
+                  <a:schemeClr val="tx1">
+                    <a:lumMod val="85000"/>
+                    <a:lumOff val="15000"/>
+                  </a:schemeClr>
+                </a:solidFill>
+              </a:rPr>
+              <a:t>  subjenis popup: —</a:t>
+            </a:r>
+          </a:p>
+          <a:p>
+            <a:r>
+              <a:rPr lang="en-MY" sz="900" dirty="0">
+                <a:solidFill>
+                  <a:schemeClr val="tx1">
+                    <a:lumMod val="85000"/>
+                    <a:lumOff val="15000"/>
+                  </a:schemeClr>
+                </a:solidFill>
+              </a:rPr>
+              <a:t>  keperluan visual: NOT_REQUIRED</a:t>
+            </a:r>
+          </a:p>
+          <a:p>
+            <a:r>
+              <a:rPr lang="en-MY" sz="900" dirty="0">
+                <a:solidFill>
+                  <a:schemeClr val="tx1">
+                    <a:lumMod val="85000"/>
+                    <a:lumOff val="15000"/>
+                  </a:schemeClr>
+                </a:solidFill>
+              </a:rPr>
+              <a:t>  status: NOT_REQUIRED</a:t>
+            </a:r>
+          </a:p>
+          <a:p>
+            <a:r>
+              <a:rPr lang="en-MY" sz="900" dirty="0">
+                <a:solidFill>
+                  <a:schemeClr val="tx1">
+                    <a:lumMod val="85000"/>
+                    <a:lumOff val="15000"/>
+                  </a:schemeClr>
+                </a:solidFill>
+              </a:rPr>
+              <a:t>  kuasa: —</a:t>
+            </a:r>
+          </a:p>
+          <a:p>
+            <a:r>
               <a:rPr lang="en-MY" sz="900" dirty="0">
                 <a:solidFill>
                   <a:schemeClr val="tx1">
@@ -33382,7 +36313,7 @@
                   </a:schemeClr>
                 </a:solidFill>
               </a:rPr>
-              <a:t>Klik butang “MULA KUIZ” untuk mula.</a:t>
+              <a:t>Klik Mula Kuiz untuk memulakan kuiz.</a:t>
             </a:r>
           </a:p>
         </p:txBody>
@@ -33856,6 +36787,110 @@
                 </a:solidFill>
               </a:rPr>
               <a:t>  Semakan pengetahuan sahaja, bukan gred peperiksaan akhir kursus.</a:t>
+            </a:r>
+          </a:p>
+          <a:p>
+            <a:r>
+              <a:rPr lang="en-MY" sz="900" b="1" dirty="0">
+                <a:solidFill>
+                  <a:schemeClr val="tx1">
+                    <a:lumMod val="85000"/>
+                    <a:lumOff val="15000"/>
+                  </a:schemeClr>
+                </a:solidFill>
+              </a:rPr>
+              <a:t>ARAHAN INTERAKSI (kanvas = VO):</a:t>
+            </a:r>
+          </a:p>
+          <a:p>
+            <a:r>
+              <a:rPr lang="en-MY" sz="900" dirty="0">
+                <a:solidFill>
+                  <a:schemeClr val="tx1">
+                    <a:lumMod val="85000"/>
+                    <a:lumOff val="15000"/>
+                  </a:schemeClr>
+                </a:solidFill>
+              </a:rPr>
+              <a:t>  Klik Mula Kuiz untuk memulakan kuiz.</a:t>
+            </a:r>
+          </a:p>
+          <a:p>
+            <a:r>
+              <a:rPr lang="en-MY" sz="900" b="1" dirty="0">
+                <a:solidFill>
+                  <a:schemeClr val="tx1">
+                    <a:lumMod val="85000"/>
+                    <a:lumOff val="15000"/>
+                  </a:schemeClr>
+                </a:solidFill>
+              </a:rPr>
+              <a:t>VISUAL:</a:t>
+            </a:r>
+          </a:p>
+          <a:p>
+            <a:r>
+              <a:rPr lang="en-MY" sz="900" dirty="0">
+                <a:solidFill>
+                  <a:schemeClr val="tx1">
+                    <a:lumMod val="85000"/>
+                    <a:lumOff val="15000"/>
+                  </a:schemeClr>
+                </a:solidFill>
+              </a:rPr>
+              <a:t>  subjenis skrin: QUIZ_INTRO</a:t>
+            </a:r>
+          </a:p>
+          <a:p>
+            <a:r>
+              <a:rPr lang="en-MY" sz="900" dirty="0">
+                <a:solidFill>
+                  <a:schemeClr val="tx1">
+                    <a:lumMod val="85000"/>
+                    <a:lumOff val="15000"/>
+                  </a:schemeClr>
+                </a:solidFill>
+              </a:rPr>
+              <a:t>  subjenis popup: —</a:t>
+            </a:r>
+          </a:p>
+          <a:p>
+            <a:r>
+              <a:rPr lang="en-MY" sz="900" dirty="0">
+                <a:solidFill>
+                  <a:schemeClr val="tx1">
+                    <a:lumMod val="85000"/>
+                    <a:lumOff val="15000"/>
+                  </a:schemeClr>
+                </a:solidFill>
+              </a:rPr>
+              <a:t>  keperluan visual: NOT_REQUIRED</a:t>
+            </a:r>
+          </a:p>
+          <a:p>
+            <a:r>
+              <a:rPr lang="en-MY" sz="900" dirty="0">
+                <a:solidFill>
+                  <a:schemeClr val="tx1">
+                    <a:lumMod val="85000"/>
+                    <a:lumOff val="15000"/>
+                  </a:schemeClr>
+                </a:solidFill>
+              </a:rPr>
+              <a:t>  status: NOT_REQUIRED</a:t>
+            </a:r>
+          </a:p>
+          <a:p>
+            <a:r>
+              <a:rPr lang="en-MY" sz="900" dirty="0">
+                <a:solidFill>
+                  <a:schemeClr val="tx1">
+                    <a:lumMod val="85000"/>
+                    <a:lumOff val="15000"/>
+                  </a:schemeClr>
+                </a:solidFill>
+              </a:rPr>
+              <a:t>  kuasa: —</a:t>
             </a:r>
           </a:p>
           <a:p>
@@ -34016,7 +37051,7 @@
         </p:nvSpPr>
         <p:spPr>
           <a:xfrm>
-            <a:off x="723930" y="1517904"/>
+            <a:off x="723930" y="1481328"/>
             <a:ext cx="10744200" cy="713232"/>
           </a:xfrm>
           <a:prstGeom prst="rect">
@@ -34061,14 +37096,14 @@
       </p:sp>
       <p:sp>
         <p:nvSpPr>
-          <p:cNvPr id="40" name="Opt"/>
+          <p:cNvPr id="23" name="Instr"/>
           <p:cNvSpPr txBox="1"/>
           <p:nvPr/>
         </p:nvSpPr>
         <p:spPr>
           <a:xfrm>
-            <a:off x="998250" y="2468880"/>
-            <a:ext cx="10195560" cy="365760"/>
+            <a:off x="723930" y="2249424"/>
+            <a:ext cx="10744200" cy="310896"/>
           </a:xfrm>
           <a:prstGeom prst="rect">
             <a:avLst/>
@@ -34083,29 +37118,29 @@
           <a:p>
             <a:pPr/>
             <a:r>
-              <a:rPr lang="en-MY" sz="1500" dirty="0">
-                <a:solidFill>
-                  <a:schemeClr val="tx1">
-                    <a:lumMod val="85000"/>
-                    <a:lumOff val="15000"/>
-                  </a:schemeClr>
-                </a:solidFill>
-              </a:rPr>
-              <a:t>A.  Warna permukaan yang menarik</a:t>
-            </a:r>
-          </a:p>
-        </p:txBody>
-      </p:sp>
-      <p:sp>
-        <p:nvSpPr>
-          <p:cNvPr id="41" name="Opt"/>
+              <a:rPr lang="en-MY" sz="1400" b="1" dirty="0">
+                <a:solidFill>
+                  <a:schemeClr val="tx1">
+                    <a:lumMod val="85000"/>
+                    <a:lumOff val="15000"/>
+                  </a:schemeClr>
+                </a:solidFill>
+              </a:rPr>
+              <a:t>Pilih satu jawapan.</a:t>
+            </a:r>
+          </a:p>
+        </p:txBody>
+      </p:sp>
+      <p:sp>
+        <p:nvSpPr>
+          <p:cNvPr id="40" name="Opt"/>
           <p:cNvSpPr txBox="1"/>
           <p:nvPr/>
         </p:nvSpPr>
         <p:spPr>
           <a:xfrm>
-            <a:off x="998250" y="2889504"/>
-            <a:ext cx="10195560" cy="365760"/>
+            <a:off x="998250" y="2651760"/>
+            <a:ext cx="10195560" cy="347472"/>
           </a:xfrm>
           <a:prstGeom prst="rect">
             <a:avLst/>
@@ -34120,29 +37155,29 @@
           <a:p>
             <a:pPr/>
             <a:r>
-              <a:rPr lang="en-MY" sz="1500" dirty="0">
-                <a:solidFill>
-                  <a:schemeClr val="tx1">
-                    <a:lumMod val="85000"/>
-                    <a:lumOff val="15000"/>
-                  </a:schemeClr>
-                </a:solidFill>
-              </a:rPr>
-              <a:t>B.  Asas yang stabil dan rata dengan saliran permukaan yang berkesan</a:t>
-            </a:r>
-          </a:p>
-        </p:txBody>
-      </p:sp>
-      <p:sp>
-        <p:nvSpPr>
-          <p:cNvPr id="42" name="Opt"/>
+              <a:rPr lang="en-MY" sz="1450" dirty="0">
+                <a:solidFill>
+                  <a:schemeClr val="tx1">
+                    <a:lumMod val="85000"/>
+                    <a:lumOff val="15000"/>
+                  </a:schemeClr>
+                </a:solidFill>
+              </a:rPr>
+              <a:t>A.  Warna permukaan yang menarik</a:t>
+            </a:r>
+          </a:p>
+        </p:txBody>
+      </p:sp>
+      <p:sp>
+        <p:nvSpPr>
+          <p:cNvPr id="41" name="Opt"/>
           <p:cNvSpPr txBox="1"/>
           <p:nvPr/>
         </p:nvSpPr>
         <p:spPr>
           <a:xfrm>
-            <a:off x="998250" y="3310128"/>
-            <a:ext cx="10195560" cy="365760"/>
+            <a:off x="998250" y="3035808"/>
+            <a:ext cx="10195560" cy="347472"/>
           </a:xfrm>
           <a:prstGeom prst="rect">
             <a:avLst/>
@@ -34157,29 +37192,29 @@
           <a:p>
             <a:pPr/>
             <a:r>
-              <a:rPr lang="en-MY" sz="1500" dirty="0">
-                <a:solidFill>
-                  <a:schemeClr val="tx1">
-                    <a:lumMod val="85000"/>
-                    <a:lumOff val="15000"/>
-                  </a:schemeClr>
-                </a:solidFill>
-              </a:rPr>
-              <a:t>C.  Ketinggian struktur melebihi dua meter</a:t>
-            </a:r>
-          </a:p>
-        </p:txBody>
-      </p:sp>
-      <p:sp>
-        <p:nvSpPr>
-          <p:cNvPr id="43" name="Opt"/>
+              <a:rPr lang="en-MY" sz="1450" dirty="0">
+                <a:solidFill>
+                  <a:schemeClr val="tx1">
+                    <a:lumMod val="85000"/>
+                    <a:lumOff val="15000"/>
+                  </a:schemeClr>
+                </a:solidFill>
+              </a:rPr>
+              <a:t>B.  Asas yang stabil dan rata dengan saliran permukaan yang berkesan</a:t>
+            </a:r>
+          </a:p>
+        </p:txBody>
+      </p:sp>
+      <p:sp>
+        <p:nvSpPr>
+          <p:cNvPr id="42" name="Opt"/>
           <p:cNvSpPr txBox="1"/>
           <p:nvPr/>
         </p:nvSpPr>
         <p:spPr>
           <a:xfrm>
-            <a:off x="998250" y="3730752"/>
-            <a:ext cx="10195560" cy="365760"/>
+            <a:off x="998250" y="3419856"/>
+            <a:ext cx="10195560" cy="347472"/>
           </a:xfrm>
           <a:prstGeom prst="rect">
             <a:avLst/>
@@ -34194,29 +37229,29 @@
           <a:p>
             <a:pPr/>
             <a:r>
-              <a:rPr lang="en-MY" sz="1500" dirty="0">
-                <a:solidFill>
-                  <a:schemeClr val="tx1">
-                    <a:lumMod val="85000"/>
-                    <a:lumOff val="15000"/>
-                  </a:schemeClr>
-                </a:solidFill>
-              </a:rPr>
-              <a:t>D.  Penggunaan bahan import</a:t>
-            </a:r>
-          </a:p>
-        </p:txBody>
-      </p:sp>
-      <p:sp>
-        <p:nvSpPr>
-          <p:cNvPr id="70" name="FbC"/>
+              <a:rPr lang="en-MY" sz="1450" dirty="0">
+                <a:solidFill>
+                  <a:schemeClr val="tx1">
+                    <a:lumMod val="85000"/>
+                    <a:lumOff val="15000"/>
+                  </a:schemeClr>
+                </a:solidFill>
+              </a:rPr>
+              <a:t>C.  Ketinggian struktur melebihi dua meter</a:t>
+            </a:r>
+          </a:p>
+        </p:txBody>
+      </p:sp>
+      <p:sp>
+        <p:nvSpPr>
+          <p:cNvPr id="43" name="Opt"/>
           <p:cNvSpPr txBox="1"/>
           <p:nvPr/>
         </p:nvSpPr>
         <p:spPr>
           <a:xfrm>
-            <a:off x="723930" y="5760720"/>
-            <a:ext cx="5120640" cy="292608"/>
+            <a:off x="998250" y="3803904"/>
+            <a:ext cx="10195560" cy="347472"/>
           </a:xfrm>
           <a:prstGeom prst="rect">
             <a:avLst/>
@@ -34231,41 +37266,193 @@
           <a:p>
             <a:pPr/>
             <a:r>
-              <a:rPr lang="en-MY" sz="1300" dirty="0">
-                <a:solidFill>
-                  <a:srgbClr val="2E7D32"/>
-                </a:solidFill>
-              </a:rPr>
-              <a:t>Pilihan jawapan tepat.</a:t>
-            </a:r>
-          </a:p>
-        </p:txBody>
-      </p:sp>
-      <p:sp>
-        <p:nvSpPr>
-          <p:cNvPr id="71" name="FbW"/>
+              <a:rPr lang="en-MY" sz="1450" dirty="0">
+                <a:solidFill>
+                  <a:schemeClr val="tx1">
+                    <a:lumMod val="85000"/>
+                    <a:lumOff val="15000"/>
+                  </a:schemeClr>
+                </a:solidFill>
+              </a:rPr>
+              <a:t>D.  Penggunaan bahan import</a:t>
+            </a:r>
+          </a:p>
+        </p:txBody>
+      </p:sp>
+      <p:sp>
+        <p:nvSpPr>
+          <p:cNvPr id="70" name="AnswerKeyBox"/>
           <p:cNvSpPr txBox="1"/>
           <p:nvPr/>
         </p:nvSpPr>
         <p:spPr>
           <a:xfrm>
-            <a:off x="6210330" y="5760720"/>
-            <a:ext cx="5120640" cy="292608"/>
+            <a:off x="723930" y="4334256"/>
+            <a:ext cx="10744200" cy="822960"/>
           </a:xfrm>
           <a:prstGeom prst="rect">
             <a:avLst/>
           </a:prstGeom>
-          <a:noFill/>
+          <a:solidFill>
+            <a:srgbClr val="FFF7E6"/>
+          </a:solidFill>
+          <a:ln w="12700">
+            <a:solidFill>
+              <a:srgbClr val="7F6000"/>
+            </a:solidFill>
+          </a:ln>
         </p:spPr>
         <p:txBody>
           <a:bodyPr wrap="square">
             <a:noAutofit/>
           </a:bodyPr>
           <a:lstStyle/>
+        </p:txBody>
+      </p:sp>
+      <p:sp>
+        <p:nvSpPr>
+          <p:cNvPr id="71" name="AnswerKeyHead"/>
+          <p:cNvSpPr txBox="1"/>
+          <p:nvPr/>
+        </p:nvSpPr>
+        <p:spPr>
+          <a:xfrm>
+            <a:off x="906810" y="4389120"/>
+            <a:ext cx="10378440" cy="219456"/>
+          </a:xfrm>
+          <a:prstGeom prst="rect">
+            <a:avLst/>
+          </a:prstGeom>
+          <a:noFill/>
+        </p:spPr>
+        <p:txBody>
+          <a:bodyPr wrap="square">
+            <a:noAutofit/>
+          </a:bodyPr>
+          <a:lstStyle/>
           <a:p>
             <a:pPr/>
             <a:r>
-              <a:rPr lang="en-MY" sz="1300" dirty="0">
+              <a:rPr lang="en-MY" sz="850" b="1" dirty="0">
+                <a:solidFill>
+                  <a:srgbClr val="7F6000"/>
+                </a:solidFill>
+              </a:rPr>
+              <a:t>SEMAKAN CIDB — MAKLUMAT PENYEMAK, BUKAN PAPARAN PELAJAR</a:t>
+            </a:r>
+          </a:p>
+        </p:txBody>
+      </p:sp>
+      <p:sp>
+        <p:nvSpPr>
+          <p:cNvPr id="72" name="AnswerKeyBody"/>
+          <p:cNvSpPr txBox="1"/>
+          <p:nvPr/>
+        </p:nvSpPr>
+        <p:spPr>
+          <a:xfrm>
+            <a:off x="906810" y="4626864"/>
+            <a:ext cx="10378440" cy="512064"/>
+          </a:xfrm>
+          <a:prstGeom prst="rect">
+            <a:avLst/>
+          </a:prstGeom>
+          <a:noFill/>
+        </p:spPr>
+        <p:txBody>
+          <a:bodyPr wrap="square">
+            <a:noAutofit/>
+          </a:bodyPr>
+          <a:lstStyle/>
+          <a:p>
+            <a:pPr/>
+            <a:r>
+              <a:rPr lang="en-MY" sz="1250" b="1" dirty="0">
+                <a:solidFill>
+                  <a:schemeClr val="tx1">
+                    <a:lumMod val="85000"/>
+                    <a:lumOff val="15000"/>
+                  </a:schemeClr>
+                </a:solidFill>
+              </a:rPr>
+              <a:t>Jawapan: B</a:t>
+            </a:r>
+          </a:p>
+          <a:p>
+            <a:pPr/>
+            <a:r>
+              <a:rPr lang="en-MY" sz="1250" b="1" dirty="0">
+                <a:solidFill>
+                  <a:schemeClr val="tx1">
+                    <a:lumMod val="85000"/>
+                    <a:lumOff val="15000"/>
+                  </a:schemeClr>
+                </a:solidFill>
+              </a:rPr>
+              <a:t>Asas yang stabil dan rata dengan saliran permukaan yang berkesan</a:t>
+            </a:r>
+          </a:p>
+        </p:txBody>
+      </p:sp>
+      <p:sp>
+        <p:nvSpPr>
+          <p:cNvPr id="75" name="FbC"/>
+          <p:cNvSpPr txBox="1"/>
+          <p:nvPr/>
+        </p:nvSpPr>
+        <p:spPr>
+          <a:xfrm>
+            <a:off x="723930" y="5303520"/>
+            <a:ext cx="5120640" cy="274320"/>
+          </a:xfrm>
+          <a:prstGeom prst="rect">
+            <a:avLst/>
+          </a:prstGeom>
+          <a:noFill/>
+        </p:spPr>
+        <p:txBody>
+          <a:bodyPr wrap="square">
+            <a:noAutofit/>
+          </a:bodyPr>
+          <a:lstStyle/>
+          <a:p>
+            <a:pPr/>
+            <a:r>
+              <a:rPr lang="en-MY" sz="1250" dirty="0">
+                <a:solidFill>
+                  <a:srgbClr val="2E7D32"/>
+                </a:solidFill>
+              </a:rPr>
+              <a:t>Pilihan jawapan tepat.</a:t>
+            </a:r>
+          </a:p>
+        </p:txBody>
+      </p:sp>
+      <p:sp>
+        <p:nvSpPr>
+          <p:cNvPr id="76" name="FbW"/>
+          <p:cNvSpPr txBox="1"/>
+          <p:nvPr/>
+        </p:nvSpPr>
+        <p:spPr>
+          <a:xfrm>
+            <a:off x="6210330" y="5303520"/>
+            <a:ext cx="5120640" cy="274320"/>
+          </a:xfrm>
+          <a:prstGeom prst="rect">
+            <a:avLst/>
+          </a:prstGeom>
+          <a:noFill/>
+        </p:spPr>
+        <p:txBody>
+          <a:bodyPr wrap="square">
+            <a:noAutofit/>
+          </a:bodyPr>
+          <a:lstStyle/>
+          <a:p>
+            <a:pPr/>
+            <a:r>
+              <a:rPr lang="en-MY" sz="1250" dirty="0">
                 <a:solidFill>
                   <a:srgbClr val="C0392B"/>
                 </a:solidFill>
@@ -34621,7 +37808,7 @@
                   </a:schemeClr>
                 </a:solidFill>
               </a:rPr>
-              <a:t>JAWAPAN (metadata sahaja, tidak dilihat pelajar):</a:t>
+              <a:t>KUNCI JAWAPAN (blok semakan CIDB pada halaman semakan):</a:t>
             </a:r>
           </a:p>
           <a:p>
@@ -34639,6 +37826,32 @@
           </a:p>
           <a:p>
             <a:r>
+              <a:rPr lang="en-MY" sz="900" dirty="0">
+                <a:solidFill>
+                  <a:schemeClr val="tx1">
+                    <a:lumMod val="85000"/>
+                    <a:lumOff val="15000"/>
+                  </a:schemeClr>
+                </a:solidFill>
+              </a:rPr>
+              <a:t>  Dijana daripada data jawapan berstruktur yang sama dengan logik kuiz.</a:t>
+            </a:r>
+          </a:p>
+          <a:p>
+            <a:r>
+              <a:rPr lang="en-MY" sz="900" dirty="0">
+                <a:solidFill>
+                  <a:schemeClr val="tx1">
+                    <a:lumMod val="85000"/>
+                    <a:lumOff val="15000"/>
+                  </a:schemeClr>
+                </a:solidFill>
+              </a:rPr>
+              <a:t>  BUKAN kandungan masa jalan pra-hantar; tidak dibaca dalam VO.</a:t>
+            </a:r>
+          </a:p>
+          <a:p>
+            <a:r>
               <a:rPr lang="en-MY" sz="900" b="1" dirty="0">
                 <a:solidFill>
                   <a:schemeClr val="tx1">
@@ -34687,6 +37900,110 @@
                 </a:solidFill>
               </a:rPr>
               <a:t>  air.</a:t>
+            </a:r>
+          </a:p>
+          <a:p>
+            <a:r>
+              <a:rPr lang="en-MY" sz="900" b="1" dirty="0">
+                <a:solidFill>
+                  <a:schemeClr val="tx1">
+                    <a:lumMod val="85000"/>
+                    <a:lumOff val="15000"/>
+                  </a:schemeClr>
+                </a:solidFill>
+              </a:rPr>
+              <a:t>ARAHAN INTERAKSI (kanvas = VO):</a:t>
+            </a:r>
+          </a:p>
+          <a:p>
+            <a:r>
+              <a:rPr lang="en-MY" sz="900" dirty="0">
+                <a:solidFill>
+                  <a:schemeClr val="tx1">
+                    <a:lumMod val="85000"/>
+                    <a:lumOff val="15000"/>
+                  </a:schemeClr>
+                </a:solidFill>
+              </a:rPr>
+              <a:t>  Pilih satu jawapan.</a:t>
+            </a:r>
+          </a:p>
+          <a:p>
+            <a:r>
+              <a:rPr lang="en-MY" sz="900" b="1" dirty="0">
+                <a:solidFill>
+                  <a:schemeClr val="tx1">
+                    <a:lumMod val="85000"/>
+                    <a:lumOff val="15000"/>
+                  </a:schemeClr>
+                </a:solidFill>
+              </a:rPr>
+              <a:t>VISUAL:</a:t>
+            </a:r>
+          </a:p>
+          <a:p>
+            <a:r>
+              <a:rPr lang="en-MY" sz="900" dirty="0">
+                <a:solidFill>
+                  <a:schemeClr val="tx1">
+                    <a:lumMod val="85000"/>
+                    <a:lumOff val="15000"/>
+                  </a:schemeClr>
+                </a:solidFill>
+              </a:rPr>
+              <a:t>  subjenis skrin: QUIZ_QUESTION</a:t>
+            </a:r>
+          </a:p>
+          <a:p>
+            <a:r>
+              <a:rPr lang="en-MY" sz="900" dirty="0">
+                <a:solidFill>
+                  <a:schemeClr val="tx1">
+                    <a:lumMod val="85000"/>
+                    <a:lumOff val="15000"/>
+                  </a:schemeClr>
+                </a:solidFill>
+              </a:rPr>
+              <a:t>  subjenis popup: —</a:t>
+            </a:r>
+          </a:p>
+          <a:p>
+            <a:r>
+              <a:rPr lang="en-MY" sz="900" dirty="0">
+                <a:solidFill>
+                  <a:schemeClr val="tx1">
+                    <a:lumMod val="85000"/>
+                    <a:lumOff val="15000"/>
+                  </a:schemeClr>
+                </a:solidFill>
+              </a:rPr>
+              <a:t>  keperluan visual: NOT_REQUIRED</a:t>
+            </a:r>
+          </a:p>
+          <a:p>
+            <a:r>
+              <a:rPr lang="en-MY" sz="900" dirty="0">
+                <a:solidFill>
+                  <a:schemeClr val="tx1">
+                    <a:lumMod val="85000"/>
+                    <a:lumOff val="15000"/>
+                  </a:schemeClr>
+                </a:solidFill>
+              </a:rPr>
+              <a:t>  status: NOT_REQUIRED</a:t>
+            </a:r>
+          </a:p>
+          <a:p>
+            <a:r>
+              <a:rPr lang="en-MY" sz="900" dirty="0">
+                <a:solidFill>
+                  <a:schemeClr val="tx1">
+                    <a:lumMod val="85000"/>
+                    <a:lumOff val="15000"/>
+                  </a:schemeClr>
+                </a:solidFill>
+              </a:rPr>
+              <a:t>  kuasa: —</a:t>
             </a:r>
           </a:p>
           <a:p>
@@ -34829,12 +38146,20 @@
           <a:p>
             <a:pPr/>
             <a:r>
+              <a:rPr lang="en-MY" sz="1150" i="1" dirty="0">
+                <a:solidFill>
+                  <a:srgbClr val="808080"/>
+                </a:solidFill>
+              </a:rPr>
+              <a:t>Multiple Response</a:t>
+            </a:r>
+            <a:r>
               <a:rPr lang="en-MY" sz="1150" dirty="0">
                 <a:solidFill>
                   <a:srgbClr val="808080"/>
                 </a:solidFill>
               </a:rPr>
-              <a:t>MULTIPLE RESPONSE   ·   sumber: modul ms 242-249 (3.4.1-3.4.3)</a:t>
+              <a:t>   ·   sumber: modul ms 242-249 (3.4.1-3.4.3)</a:t>
             </a:r>
           </a:p>
         </p:txBody>
@@ -34847,7 +38172,7 @@
         </p:nvSpPr>
         <p:spPr>
           <a:xfrm>
-            <a:off x="723930" y="1517904"/>
+            <a:off x="723930" y="1481328"/>
             <a:ext cx="10744200" cy="402336"/>
           </a:xfrm>
           <a:prstGeom prst="rect">
@@ -34878,14 +38203,14 @@
       </p:sp>
       <p:sp>
         <p:nvSpPr>
-          <p:cNvPr id="40" name="Opt"/>
+          <p:cNvPr id="23" name="Instr"/>
           <p:cNvSpPr txBox="1"/>
           <p:nvPr/>
         </p:nvSpPr>
         <p:spPr>
           <a:xfrm>
-            <a:off x="998250" y="2157984"/>
-            <a:ext cx="10195560" cy="329184"/>
+            <a:off x="723930" y="1938528"/>
+            <a:ext cx="10744200" cy="310896"/>
           </a:xfrm>
           <a:prstGeom prst="rect">
             <a:avLst/>
@@ -34900,29 +38225,29 @@
           <a:p>
             <a:pPr/>
             <a:r>
-              <a:rPr lang="en-MY" sz="1450" dirty="0">
-                <a:solidFill>
-                  <a:schemeClr val="tx1">
-                    <a:lumMod val="85000"/>
-                    <a:lumOff val="15000"/>
-                  </a:schemeClr>
-                </a:solidFill>
-              </a:rPr>
-              <a:t>Kerusi Taman</a:t>
-            </a:r>
-          </a:p>
-        </p:txBody>
-      </p:sp>
-      <p:sp>
-        <p:nvSpPr>
-          <p:cNvPr id="41" name="Opt"/>
+              <a:rPr lang="en-MY" sz="1400" b="1" dirty="0">
+                <a:solidFill>
+                  <a:schemeClr val="tx1">
+                    <a:lumMod val="85000"/>
+                    <a:lumOff val="15000"/>
+                  </a:schemeClr>
+                </a:solidFill>
+              </a:rPr>
+              <a:t>Pilih semua jawapan yang tepat.</a:t>
+            </a:r>
+          </a:p>
+        </p:txBody>
+      </p:sp>
+      <p:sp>
+        <p:nvSpPr>
+          <p:cNvPr id="40" name="Opt"/>
           <p:cNvSpPr txBox="1"/>
           <p:nvPr/>
         </p:nvSpPr>
         <p:spPr>
           <a:xfrm>
-            <a:off x="998250" y="2523744"/>
-            <a:ext cx="10195560" cy="329184"/>
+            <a:off x="998250" y="2340864"/>
+            <a:ext cx="10195560" cy="228600"/>
           </a:xfrm>
           <a:prstGeom prst="rect">
             <a:avLst/>
@@ -34937,29 +38262,29 @@
           <a:p>
             <a:pPr/>
             <a:r>
-              <a:rPr lang="en-MY" sz="1450" dirty="0">
-                <a:solidFill>
-                  <a:schemeClr val="tx1">
-                    <a:lumMod val="85000"/>
-                    <a:lumOff val="15000"/>
-                  </a:schemeClr>
-                </a:solidFill>
-              </a:rPr>
-              <a:t>Papan Tanda</a:t>
-            </a:r>
-          </a:p>
-        </p:txBody>
-      </p:sp>
-      <p:sp>
-        <p:nvSpPr>
-          <p:cNvPr id="42" name="Opt"/>
+              <a:rPr lang="en-MY" sz="1150" dirty="0">
+                <a:solidFill>
+                  <a:schemeClr val="tx1">
+                    <a:lumMod val="85000"/>
+                    <a:lumOff val="15000"/>
+                  </a:schemeClr>
+                </a:solidFill>
+              </a:rPr>
+              <a:t>Kerusi Taman</a:t>
+            </a:r>
+          </a:p>
+        </p:txBody>
+      </p:sp>
+      <p:sp>
+        <p:nvSpPr>
+          <p:cNvPr id="41" name="Opt"/>
           <p:cNvSpPr txBox="1"/>
           <p:nvPr/>
         </p:nvSpPr>
         <p:spPr>
           <a:xfrm>
-            <a:off x="998250" y="2889504"/>
-            <a:ext cx="10195560" cy="329184"/>
+            <a:off x="998250" y="2606040"/>
+            <a:ext cx="10195560" cy="228600"/>
           </a:xfrm>
           <a:prstGeom prst="rect">
             <a:avLst/>
@@ -34974,29 +38299,29 @@
           <a:p>
             <a:pPr/>
             <a:r>
-              <a:rPr lang="en-MY" sz="1450" dirty="0">
-                <a:solidFill>
-                  <a:schemeClr val="tx1">
-                    <a:lumMod val="85000"/>
-                    <a:lumOff val="15000"/>
-                  </a:schemeClr>
-                </a:solidFill>
-              </a:rPr>
-              <a:t>Boardwalk</a:t>
-            </a:r>
-          </a:p>
-        </p:txBody>
-      </p:sp>
-      <p:sp>
-        <p:nvSpPr>
-          <p:cNvPr id="43" name="Opt"/>
+              <a:rPr lang="en-MY" sz="1150" dirty="0">
+                <a:solidFill>
+                  <a:schemeClr val="tx1">
+                    <a:lumMod val="85000"/>
+                    <a:lumOff val="15000"/>
+                  </a:schemeClr>
+                </a:solidFill>
+              </a:rPr>
+              <a:t>Papan Tanda</a:t>
+            </a:r>
+          </a:p>
+        </p:txBody>
+      </p:sp>
+      <p:sp>
+        <p:nvSpPr>
+          <p:cNvPr id="42" name="Opt"/>
           <p:cNvSpPr txBox="1"/>
           <p:nvPr/>
         </p:nvSpPr>
         <p:spPr>
           <a:xfrm>
-            <a:off x="998250" y="3255264"/>
-            <a:ext cx="10195560" cy="329184"/>
+            <a:off x="998250" y="2871216"/>
+            <a:ext cx="10195560" cy="228600"/>
           </a:xfrm>
           <a:prstGeom prst="rect">
             <a:avLst/>
@@ -35011,29 +38336,29 @@
           <a:p>
             <a:pPr/>
             <a:r>
-              <a:rPr lang="en-MY" sz="1450" dirty="0">
-                <a:solidFill>
-                  <a:schemeClr val="tx1">
-                    <a:lumMod val="85000"/>
-                    <a:lumOff val="15000"/>
-                  </a:schemeClr>
-                </a:solidFill>
-              </a:rPr>
-              <a:t>Tong Sampah</a:t>
-            </a:r>
-          </a:p>
-        </p:txBody>
-      </p:sp>
-      <p:sp>
-        <p:nvSpPr>
-          <p:cNvPr id="44" name="Opt"/>
+              <a:rPr lang="en-MY" sz="1150" i="1" dirty="0">
+                <a:solidFill>
+                  <a:schemeClr val="tx1">
+                    <a:lumMod val="85000"/>
+                    <a:lumOff val="15000"/>
+                  </a:schemeClr>
+                </a:solidFill>
+              </a:rPr>
+              <a:t>Boardwalk</a:t>
+            </a:r>
+          </a:p>
+        </p:txBody>
+      </p:sp>
+      <p:sp>
+        <p:nvSpPr>
+          <p:cNvPr id="43" name="Opt"/>
           <p:cNvSpPr txBox="1"/>
           <p:nvPr/>
         </p:nvSpPr>
         <p:spPr>
           <a:xfrm>
-            <a:off x="998250" y="3621024"/>
-            <a:ext cx="10195560" cy="329184"/>
+            <a:off x="998250" y="3136392"/>
+            <a:ext cx="10195560" cy="228600"/>
           </a:xfrm>
           <a:prstGeom prst="rect">
             <a:avLst/>
@@ -35048,29 +38373,29 @@
           <a:p>
             <a:pPr/>
             <a:r>
-              <a:rPr lang="en-MY" sz="1450" i="1" dirty="0">
-                <a:solidFill>
-                  <a:schemeClr val="tx1">
-                    <a:lumMod val="85000"/>
-                    <a:lumOff val="15000"/>
-                  </a:schemeClr>
-                </a:solidFill>
-              </a:rPr>
-              <a:t>Drinking Fountain</a:t>
-            </a:r>
-          </a:p>
-        </p:txBody>
-      </p:sp>
-      <p:sp>
-        <p:nvSpPr>
-          <p:cNvPr id="45" name="Opt"/>
+              <a:rPr lang="en-MY" sz="1150" dirty="0">
+                <a:solidFill>
+                  <a:schemeClr val="tx1">
+                    <a:lumMod val="85000"/>
+                    <a:lumOff val="15000"/>
+                  </a:schemeClr>
+                </a:solidFill>
+              </a:rPr>
+              <a:t>Tong Sampah</a:t>
+            </a:r>
+          </a:p>
+        </p:txBody>
+      </p:sp>
+      <p:sp>
+        <p:nvSpPr>
+          <p:cNvPr id="44" name="Opt"/>
           <p:cNvSpPr txBox="1"/>
           <p:nvPr/>
         </p:nvSpPr>
         <p:spPr>
           <a:xfrm>
-            <a:off x="998250" y="3986784"/>
-            <a:ext cx="10195560" cy="329184"/>
+            <a:off x="998250" y="3401568"/>
+            <a:ext cx="10195560" cy="228600"/>
           </a:xfrm>
           <a:prstGeom prst="rect">
             <a:avLst/>
@@ -35085,29 +38410,29 @@
           <a:p>
             <a:pPr/>
             <a:r>
-              <a:rPr lang="en-MY" sz="1450" i="1" dirty="0">
-                <a:solidFill>
-                  <a:schemeClr val="tx1">
-                    <a:lumMod val="85000"/>
-                    <a:lumOff val="15000"/>
-                  </a:schemeClr>
-                </a:solidFill>
-              </a:rPr>
-              <a:t>BBQ Pit</a:t>
-            </a:r>
-          </a:p>
-        </p:txBody>
-      </p:sp>
-      <p:sp>
-        <p:nvSpPr>
-          <p:cNvPr id="46" name="Opt"/>
+              <a:rPr lang="en-MY" sz="1150" i="1" dirty="0">
+                <a:solidFill>
+                  <a:schemeClr val="tx1">
+                    <a:lumMod val="85000"/>
+                    <a:lumOff val="15000"/>
+                  </a:schemeClr>
+                </a:solidFill>
+              </a:rPr>
+              <a:t>Drinking Fountain</a:t>
+            </a:r>
+          </a:p>
+        </p:txBody>
+      </p:sp>
+      <p:sp>
+        <p:nvSpPr>
+          <p:cNvPr id="45" name="Opt"/>
           <p:cNvSpPr txBox="1"/>
           <p:nvPr/>
         </p:nvSpPr>
         <p:spPr>
           <a:xfrm>
-            <a:off x="998250" y="4352544"/>
-            <a:ext cx="10195560" cy="329184"/>
+            <a:off x="998250" y="3666744"/>
+            <a:ext cx="10195560" cy="228600"/>
           </a:xfrm>
           <a:prstGeom prst="rect">
             <a:avLst/>
@@ -35122,29 +38447,29 @@
           <a:p>
             <a:pPr/>
             <a:r>
-              <a:rPr lang="en-MY" sz="1450" dirty="0">
-                <a:solidFill>
-                  <a:schemeClr val="tx1">
-                    <a:lumMod val="85000"/>
-                    <a:lumOff val="15000"/>
-                  </a:schemeClr>
-                </a:solidFill>
-              </a:rPr>
-              <a:t>Gazebo</a:t>
-            </a:r>
-          </a:p>
-        </p:txBody>
-      </p:sp>
-      <p:sp>
-        <p:nvSpPr>
-          <p:cNvPr id="70" name="FbC"/>
+              <a:rPr lang="en-MY" sz="1150" i="1" dirty="0">
+                <a:solidFill>
+                  <a:schemeClr val="tx1">
+                    <a:lumMod val="85000"/>
+                    <a:lumOff val="15000"/>
+                  </a:schemeClr>
+                </a:solidFill>
+              </a:rPr>
+              <a:t>BBQ Pit</a:t>
+            </a:r>
+          </a:p>
+        </p:txBody>
+      </p:sp>
+      <p:sp>
+        <p:nvSpPr>
+          <p:cNvPr id="46" name="Opt"/>
           <p:cNvSpPr txBox="1"/>
           <p:nvPr/>
         </p:nvSpPr>
         <p:spPr>
           <a:xfrm>
-            <a:off x="723930" y="5760720"/>
-            <a:ext cx="5120640" cy="292608"/>
+            <a:off x="998250" y="3931920"/>
+            <a:ext cx="10195560" cy="228600"/>
           </a:xfrm>
           <a:prstGeom prst="rect">
             <a:avLst/>
@@ -35159,41 +38484,271 @@
           <a:p>
             <a:pPr/>
             <a:r>
-              <a:rPr lang="en-MY" sz="1300" dirty="0">
-                <a:solidFill>
-                  <a:srgbClr val="2E7D32"/>
-                </a:solidFill>
-              </a:rPr>
-              <a:t>Pilihan jawapan tepat.</a:t>
-            </a:r>
-          </a:p>
-        </p:txBody>
-      </p:sp>
-      <p:sp>
-        <p:nvSpPr>
-          <p:cNvPr id="71" name="FbW"/>
+              <a:rPr lang="en-MY" sz="1150" dirty="0">
+                <a:solidFill>
+                  <a:schemeClr val="tx1">
+                    <a:lumMod val="85000"/>
+                    <a:lumOff val="15000"/>
+                  </a:schemeClr>
+                </a:solidFill>
+              </a:rPr>
+              <a:t>Gazebo</a:t>
+            </a:r>
+          </a:p>
+        </p:txBody>
+      </p:sp>
+      <p:sp>
+        <p:nvSpPr>
+          <p:cNvPr id="70" name="AnswerKeyBox"/>
           <p:cNvSpPr txBox="1"/>
           <p:nvPr/>
         </p:nvSpPr>
         <p:spPr>
           <a:xfrm>
-            <a:off x="6210330" y="5760720"/>
-            <a:ext cx="5120640" cy="292608"/>
+            <a:off x="723930" y="4343400"/>
+            <a:ext cx="10744200" cy="1408176"/>
           </a:xfrm>
           <a:prstGeom prst="rect">
             <a:avLst/>
           </a:prstGeom>
-          <a:noFill/>
+          <a:solidFill>
+            <a:srgbClr val="FFF7E6"/>
+          </a:solidFill>
+          <a:ln w="12700">
+            <a:solidFill>
+              <a:srgbClr val="7F6000"/>
+            </a:solidFill>
+          </a:ln>
         </p:spPr>
         <p:txBody>
           <a:bodyPr wrap="square">
             <a:noAutofit/>
           </a:bodyPr>
           <a:lstStyle/>
+        </p:txBody>
+      </p:sp>
+      <p:sp>
+        <p:nvSpPr>
+          <p:cNvPr id="71" name="AnswerKeyHead"/>
+          <p:cNvSpPr txBox="1"/>
+          <p:nvPr/>
+        </p:nvSpPr>
+        <p:spPr>
+          <a:xfrm>
+            <a:off x="906810" y="4398264"/>
+            <a:ext cx="10378440" cy="219456"/>
+          </a:xfrm>
+          <a:prstGeom prst="rect">
+            <a:avLst/>
+          </a:prstGeom>
+          <a:noFill/>
+        </p:spPr>
+        <p:txBody>
+          <a:bodyPr wrap="square">
+            <a:noAutofit/>
+          </a:bodyPr>
+          <a:lstStyle/>
           <a:p>
             <a:pPr/>
             <a:r>
-              <a:rPr lang="en-MY" sz="1300" dirty="0">
+              <a:rPr lang="en-MY" sz="850" b="1" dirty="0">
+                <a:solidFill>
+                  <a:srgbClr val="7F6000"/>
+                </a:solidFill>
+              </a:rPr>
+              <a:t>SEMAKAN CIDB — MAKLUMAT PENYEMAK, BUKAN PAPARAN PELAJAR</a:t>
+            </a:r>
+          </a:p>
+        </p:txBody>
+      </p:sp>
+      <p:sp>
+        <p:nvSpPr>
+          <p:cNvPr id="72" name="AnswerKeyBody"/>
+          <p:cNvSpPr txBox="1"/>
+          <p:nvPr/>
+        </p:nvSpPr>
+        <p:spPr>
+          <a:xfrm>
+            <a:off x="906810" y="4636008"/>
+            <a:ext cx="10378440" cy="1097280"/>
+          </a:xfrm>
+          <a:prstGeom prst="rect">
+            <a:avLst/>
+          </a:prstGeom>
+          <a:noFill/>
+        </p:spPr>
+        <p:txBody>
+          <a:bodyPr wrap="square">
+            <a:noAutofit/>
+          </a:bodyPr>
+          <a:lstStyle/>
+          <a:p>
+            <a:pPr/>
+            <a:r>
+              <a:rPr lang="en-MY" sz="950" b="1" dirty="0">
+                <a:solidFill>
+                  <a:schemeClr val="tx1">
+                    <a:lumMod val="85000"/>
+                    <a:lumOff val="15000"/>
+                  </a:schemeClr>
+                </a:solidFill>
+              </a:rPr>
+              <a:t>Jawapan betul:</a:t>
+            </a:r>
+          </a:p>
+          <a:p>
+            <a:pPr/>
+            <a:r>
+              <a:rPr lang="en-MY" sz="950" b="1" dirty="0">
+                <a:solidFill>
+                  <a:schemeClr val="tx1">
+                    <a:lumMod val="85000"/>
+                    <a:lumOff val="15000"/>
+                  </a:schemeClr>
+                </a:solidFill>
+              </a:rPr>
+              <a:t>•  Kerusi Taman</a:t>
+            </a:r>
+          </a:p>
+          <a:p>
+            <a:pPr/>
+            <a:r>
+              <a:rPr lang="en-MY" sz="950" b="1" dirty="0">
+                <a:solidFill>
+                  <a:schemeClr val="tx1">
+                    <a:lumMod val="85000"/>
+                    <a:lumOff val="15000"/>
+                  </a:schemeClr>
+                </a:solidFill>
+              </a:rPr>
+              <a:t>•  Papan Tanda</a:t>
+            </a:r>
+          </a:p>
+          <a:p>
+            <a:pPr/>
+            <a:r>
+              <a:rPr lang="en-MY" sz="950" b="1" dirty="0">
+                <a:solidFill>
+                  <a:schemeClr val="tx1">
+                    <a:lumMod val="85000"/>
+                    <a:lumOff val="15000"/>
+                  </a:schemeClr>
+                </a:solidFill>
+              </a:rPr>
+              <a:t>•  Tong Sampah</a:t>
+            </a:r>
+          </a:p>
+          <a:p>
+            <a:pPr/>
+            <a:r>
+              <a:rPr lang="en-MY" sz="950" b="1" dirty="0">
+                <a:solidFill>
+                  <a:schemeClr val="tx1">
+                    <a:lumMod val="85000"/>
+                    <a:lumOff val="15000"/>
+                  </a:schemeClr>
+                </a:solidFill>
+              </a:rPr>
+              <a:t>•  </a:t>
+            </a:r>
+            <a:r>
+              <a:rPr lang="en-MY" sz="950" b="1" i="1" dirty="0">
+                <a:solidFill>
+                  <a:schemeClr val="tx1">
+                    <a:lumMod val="85000"/>
+                    <a:lumOff val="15000"/>
+                  </a:schemeClr>
+                </a:solidFill>
+              </a:rPr>
+              <a:t>Drinking Fountain</a:t>
+            </a:r>
+          </a:p>
+          <a:p>
+            <a:pPr/>
+            <a:r>
+              <a:rPr lang="en-MY" sz="950" b="1" dirty="0">
+                <a:solidFill>
+                  <a:schemeClr val="tx1">
+                    <a:lumMod val="85000"/>
+                    <a:lumOff val="15000"/>
+                  </a:schemeClr>
+                </a:solidFill>
+              </a:rPr>
+              <a:t>•  </a:t>
+            </a:r>
+            <a:r>
+              <a:rPr lang="en-MY" sz="950" b="1" i="1" dirty="0">
+                <a:solidFill>
+                  <a:schemeClr val="tx1">
+                    <a:lumMod val="85000"/>
+                    <a:lumOff val="15000"/>
+                  </a:schemeClr>
+                </a:solidFill>
+              </a:rPr>
+              <a:t>BBQ Pit</a:t>
+            </a:r>
+          </a:p>
+        </p:txBody>
+      </p:sp>
+      <p:sp>
+        <p:nvSpPr>
+          <p:cNvPr id="75" name="FbC"/>
+          <p:cNvSpPr txBox="1"/>
+          <p:nvPr/>
+        </p:nvSpPr>
+        <p:spPr>
+          <a:xfrm>
+            <a:off x="723930" y="5897880"/>
+            <a:ext cx="5120640" cy="274320"/>
+          </a:xfrm>
+          <a:prstGeom prst="rect">
+            <a:avLst/>
+          </a:prstGeom>
+          <a:noFill/>
+        </p:spPr>
+        <p:txBody>
+          <a:bodyPr wrap="square">
+            <a:noAutofit/>
+          </a:bodyPr>
+          <a:lstStyle/>
+          <a:p>
+            <a:pPr/>
+            <a:r>
+              <a:rPr lang="en-MY" sz="1250" dirty="0">
+                <a:solidFill>
+                  <a:srgbClr val="2E7D32"/>
+                </a:solidFill>
+              </a:rPr>
+              <a:t>Pilihan jawapan tepat.</a:t>
+            </a:r>
+          </a:p>
+        </p:txBody>
+      </p:sp>
+      <p:sp>
+        <p:nvSpPr>
+          <p:cNvPr id="76" name="FbW"/>
+          <p:cNvSpPr txBox="1"/>
+          <p:nvPr/>
+        </p:nvSpPr>
+        <p:spPr>
+          <a:xfrm>
+            <a:off x="6210330" y="5897880"/>
+            <a:ext cx="5120640" cy="274320"/>
+          </a:xfrm>
+          <a:prstGeom prst="rect">
+            <a:avLst/>
+          </a:prstGeom>
+          <a:noFill/>
+        </p:spPr>
+        <p:txBody>
+          <a:bodyPr wrap="square">
+            <a:noAutofit/>
+          </a:bodyPr>
+          <a:lstStyle/>
+          <a:p>
+            <a:pPr/>
+            <a:r>
+              <a:rPr lang="en-MY" sz="1250" dirty="0">
                 <a:solidFill>
                   <a:srgbClr val="C0392B"/>
                 </a:solidFill>
@@ -35549,7 +39104,7 @@
                   </a:schemeClr>
                 </a:solidFill>
               </a:rPr>
-              <a:t>JAWAPAN (metadata sahaja, tidak dilihat pelajar):</a:t>
+              <a:t>KUNCI JAWAPAN (blok semakan CIDB pada halaman semakan):</a:t>
             </a:r>
           </a:p>
           <a:p>
@@ -35567,6 +39122,32 @@
           </a:p>
           <a:p>
             <a:r>
+              <a:rPr lang="en-MY" sz="900" dirty="0">
+                <a:solidFill>
+                  <a:schemeClr val="tx1">
+                    <a:lumMod val="85000"/>
+                    <a:lumOff val="15000"/>
+                  </a:schemeClr>
+                </a:solidFill>
+              </a:rPr>
+              <a:t>  Dijana daripada data jawapan berstruktur yang sama dengan logik kuiz.</a:t>
+            </a:r>
+          </a:p>
+          <a:p>
+            <a:r>
+              <a:rPr lang="en-MY" sz="900" dirty="0">
+                <a:solidFill>
+                  <a:schemeClr val="tx1">
+                    <a:lumMod val="85000"/>
+                    <a:lumOff val="15000"/>
+                  </a:schemeClr>
+                </a:solidFill>
+              </a:rPr>
+              <a:t>  BUKAN kandungan masa jalan pra-hantar; tidak dibaca dalam VO.</a:t>
+            </a:r>
+          </a:p>
+          <a:p>
+            <a:r>
               <a:rPr lang="en-MY" sz="900" b="1" dirty="0">
                 <a:solidFill>
                   <a:schemeClr val="tx1">
@@ -35619,19 +39200,6 @@
           </a:p>
           <a:p>
             <a:r>
-              <a:rPr lang="en-MY" sz="900" dirty="0">
-                <a:solidFill>
-                  <a:schemeClr val="tx1">
-                    <a:lumMod val="85000"/>
-                    <a:lumOff val="15000"/>
-                  </a:schemeClr>
-                </a:solidFill>
-              </a:rPr>
-              <a:t>  status: U-05</a:t>
-            </a:r>
-          </a:p>
-          <a:p>
-            <a:r>
               <a:rPr lang="en-MY" sz="900" b="1" dirty="0">
                 <a:solidFill>
                   <a:schemeClr val="tx1">
@@ -35653,7 +39221,111 @@
                   </a:schemeClr>
                 </a:solidFill>
               </a:rPr>
-              <a:t>  TIADA label A/B/C. Teks pilihan dipaparkan terus.</a:t>
+              <a:t>  TIADA label A/B/C pada pilihan pelajar.</a:t>
+            </a:r>
+          </a:p>
+          <a:p>
+            <a:r>
+              <a:rPr lang="en-MY" sz="900" b="1" dirty="0">
+                <a:solidFill>
+                  <a:schemeClr val="tx1">
+                    <a:lumMod val="85000"/>
+                    <a:lumOff val="15000"/>
+                  </a:schemeClr>
+                </a:solidFill>
+              </a:rPr>
+              <a:t>ARAHAN INTERAKSI (kanvas = VO):</a:t>
+            </a:r>
+          </a:p>
+          <a:p>
+            <a:r>
+              <a:rPr lang="en-MY" sz="900" dirty="0">
+                <a:solidFill>
+                  <a:schemeClr val="tx1">
+                    <a:lumMod val="85000"/>
+                    <a:lumOff val="15000"/>
+                  </a:schemeClr>
+                </a:solidFill>
+              </a:rPr>
+              <a:t>  Pilih semua jawapan yang tepat.</a:t>
+            </a:r>
+          </a:p>
+          <a:p>
+            <a:r>
+              <a:rPr lang="en-MY" sz="900" b="1" dirty="0">
+                <a:solidFill>
+                  <a:schemeClr val="tx1">
+                    <a:lumMod val="85000"/>
+                    <a:lumOff val="15000"/>
+                  </a:schemeClr>
+                </a:solidFill>
+              </a:rPr>
+              <a:t>VISUAL:</a:t>
+            </a:r>
+          </a:p>
+          <a:p>
+            <a:r>
+              <a:rPr lang="en-MY" sz="900" dirty="0">
+                <a:solidFill>
+                  <a:schemeClr val="tx1">
+                    <a:lumMod val="85000"/>
+                    <a:lumOff val="15000"/>
+                  </a:schemeClr>
+                </a:solidFill>
+              </a:rPr>
+              <a:t>  subjenis skrin: QUIZ_QUESTION</a:t>
+            </a:r>
+          </a:p>
+          <a:p>
+            <a:r>
+              <a:rPr lang="en-MY" sz="900" dirty="0">
+                <a:solidFill>
+                  <a:schemeClr val="tx1">
+                    <a:lumMod val="85000"/>
+                    <a:lumOff val="15000"/>
+                  </a:schemeClr>
+                </a:solidFill>
+              </a:rPr>
+              <a:t>  subjenis popup: —</a:t>
+            </a:r>
+          </a:p>
+          <a:p>
+            <a:r>
+              <a:rPr lang="en-MY" sz="900" dirty="0">
+                <a:solidFill>
+                  <a:schemeClr val="tx1">
+                    <a:lumMod val="85000"/>
+                    <a:lumOff val="15000"/>
+                  </a:schemeClr>
+                </a:solidFill>
+              </a:rPr>
+              <a:t>  keperluan visual: NOT_REQUIRED</a:t>
+            </a:r>
+          </a:p>
+          <a:p>
+            <a:r>
+              <a:rPr lang="en-MY" sz="900" dirty="0">
+                <a:solidFill>
+                  <a:schemeClr val="tx1">
+                    <a:lumMod val="85000"/>
+                    <a:lumOff val="15000"/>
+                  </a:schemeClr>
+                </a:solidFill>
+              </a:rPr>
+              <a:t>  status: NOT_REQUIRED</a:t>
+            </a:r>
+          </a:p>
+          <a:p>
+            <a:r>
+              <a:rPr lang="en-MY" sz="900" dirty="0">
+                <a:solidFill>
+                  <a:schemeClr val="tx1">
+                    <a:lumMod val="85000"/>
+                    <a:lumOff val="15000"/>
+                  </a:schemeClr>
+                </a:solidFill>
+              </a:rPr>
+              <a:t>  kuasa: —</a:t>
             </a:r>
           </a:p>
           <a:p>
@@ -35879,13 +39551,50 @@
       </p:sp>
       <p:sp>
         <p:nvSpPr>
+          <p:cNvPr id="30" name="Instr"/>
+          <p:cNvSpPr txBox="1"/>
+          <p:nvPr/>
+        </p:nvSpPr>
+        <p:spPr>
+          <a:xfrm>
+            <a:off x="723930" y="3273552"/>
+            <a:ext cx="10744200" cy="329184"/>
+          </a:xfrm>
+          <a:prstGeom prst="rect">
+            <a:avLst/>
+          </a:prstGeom>
+          <a:noFill/>
+        </p:spPr>
+        <p:txBody>
+          <a:bodyPr wrap="square">
+            <a:noAutofit/>
+          </a:bodyPr>
+          <a:lstStyle/>
+          <a:p>
+            <a:pPr/>
+            <a:r>
+              <a:rPr lang="en-MY" sz="1400" b="1" dirty="0">
+                <a:solidFill>
+                  <a:schemeClr val="tx1">
+                    <a:lumMod val="85000"/>
+                    <a:lumOff val="15000"/>
+                  </a:schemeClr>
+                </a:solidFill>
+              </a:rPr>
+              <a:t>Klik Semak Jawapan untuk menyemak, atau Ulang Kuiz untuk mencuba semula.</a:t>
+            </a:r>
+          </a:p>
+        </p:txBody>
+      </p:sp>
+      <p:sp>
+        <p:nvSpPr>
           <p:cNvPr id="60" name="Btn"/>
           <p:cNvSpPr txBox="1"/>
           <p:nvPr/>
         </p:nvSpPr>
         <p:spPr>
           <a:xfrm>
-            <a:off x="723930" y="3749040"/>
+            <a:off x="723930" y="3803904"/>
             <a:ext cx="2103120" cy="420624"/>
           </a:xfrm>
           <a:prstGeom prst="rect">
@@ -35926,7 +39635,7 @@
         </p:nvSpPr>
         <p:spPr>
           <a:xfrm>
-            <a:off x="3101370" y="3749040"/>
+            <a:off x="3101370" y="3803904"/>
             <a:ext cx="2103120" cy="420624"/>
           </a:xfrm>
           <a:prstGeom prst="rect">
@@ -36345,6 +40054,110 @@
                 </a:solidFill>
               </a:rPr>
               <a:t>  penempatan akhirnya (U-05).</a:t>
+            </a:r>
+          </a:p>
+          <a:p>
+            <a:r>
+              <a:rPr lang="en-MY" sz="900" b="1" dirty="0">
+                <a:solidFill>
+                  <a:schemeClr val="tx1">
+                    <a:lumMod val="85000"/>
+                    <a:lumOff val="15000"/>
+                  </a:schemeClr>
+                </a:solidFill>
+              </a:rPr>
+              <a:t>ARAHAN INTERAKSI (kanvas = VO):</a:t>
+            </a:r>
+          </a:p>
+          <a:p>
+            <a:r>
+              <a:rPr lang="en-MY" sz="900" dirty="0">
+                <a:solidFill>
+                  <a:schemeClr val="tx1">
+                    <a:lumMod val="85000"/>
+                    <a:lumOff val="15000"/>
+                  </a:schemeClr>
+                </a:solidFill>
+              </a:rPr>
+              <a:t>  Klik Semak Jawapan untuk menyemak, atau Ulang Kuiz untuk mencuba semula.</a:t>
+            </a:r>
+          </a:p>
+          <a:p>
+            <a:r>
+              <a:rPr lang="en-MY" sz="900" b="1" dirty="0">
+                <a:solidFill>
+                  <a:schemeClr val="tx1">
+                    <a:lumMod val="85000"/>
+                    <a:lumOff val="15000"/>
+                  </a:schemeClr>
+                </a:solidFill>
+              </a:rPr>
+              <a:t>VISUAL:</a:t>
+            </a:r>
+          </a:p>
+          <a:p>
+            <a:r>
+              <a:rPr lang="en-MY" sz="900" dirty="0">
+                <a:solidFill>
+                  <a:schemeClr val="tx1">
+                    <a:lumMod val="85000"/>
+                    <a:lumOff val="15000"/>
+                  </a:schemeClr>
+                </a:solidFill>
+              </a:rPr>
+              <a:t>  subjenis skrin: QUIZ_RESULT</a:t>
+            </a:r>
+          </a:p>
+          <a:p>
+            <a:r>
+              <a:rPr lang="en-MY" sz="900" dirty="0">
+                <a:solidFill>
+                  <a:schemeClr val="tx1">
+                    <a:lumMod val="85000"/>
+                    <a:lumOff val="15000"/>
+                  </a:schemeClr>
+                </a:solidFill>
+              </a:rPr>
+              <a:t>  subjenis popup: —</a:t>
+            </a:r>
+          </a:p>
+          <a:p>
+            <a:r>
+              <a:rPr lang="en-MY" sz="900" dirty="0">
+                <a:solidFill>
+                  <a:schemeClr val="tx1">
+                    <a:lumMod val="85000"/>
+                    <a:lumOff val="15000"/>
+                  </a:schemeClr>
+                </a:solidFill>
+              </a:rPr>
+              <a:t>  keperluan visual: NOT_REQUIRED</a:t>
+            </a:r>
+          </a:p>
+          <a:p>
+            <a:r>
+              <a:rPr lang="en-MY" sz="900" dirty="0">
+                <a:solidFill>
+                  <a:schemeClr val="tx1">
+                    <a:lumMod val="85000"/>
+                    <a:lumOff val="15000"/>
+                  </a:schemeClr>
+                </a:solidFill>
+              </a:rPr>
+              <a:t>  status: NOT_REQUIRED</a:t>
+            </a:r>
+          </a:p>
+          <a:p>
+            <a:r>
+              <a:rPr lang="en-MY" sz="900" dirty="0">
+                <a:solidFill>
+                  <a:schemeClr val="tx1">
+                    <a:lumMod val="85000"/>
+                    <a:lumOff val="15000"/>
+                  </a:schemeClr>
+                </a:solidFill>
+              </a:rPr>
+              <a:t>  kuasa: —</a:t>
             </a:r>
           </a:p>
           <a:p>
@@ -36465,14 +40278,14 @@
       </p:sp>
       <p:sp>
         <p:nvSpPr>
-          <p:cNvPr id="20" name="Course"/>
+          <p:cNvPr id="20" name="TamatLine"/>
           <p:cNvSpPr txBox="1"/>
           <p:nvPr/>
         </p:nvSpPr>
         <p:spPr>
           <a:xfrm>
             <a:off x="723930" y="1243584"/>
-            <a:ext cx="10744200" cy="347472"/>
+            <a:ext cx="10744200" cy="420624"/>
           </a:xfrm>
           <a:prstGeom prst="rect">
             <a:avLst/>
@@ -36487,26 +40300,26 @@
           <a:p>
             <a:pPr/>
             <a:r>
-              <a:rPr lang="en-MY" sz="1400" b="1" dirty="0">
+              <a:rPr lang="en-MY" sz="1500" b="1" dirty="0">
                 <a:solidFill>
                   <a:srgbClr val="7F6000"/>
                 </a:solidFill>
               </a:rPr>
-              <a:t>KURSUS KERJA BANGUNAN – PEMBINAAN LANDSKAP LUAR</a:t>
-            </a:r>
-          </a:p>
-        </p:txBody>
-      </p:sp>
-      <p:sp>
-        <p:nvSpPr>
-          <p:cNvPr id="21" name="PL"/>
+              <a:t>KURSUS KERJA BANGUNAN –</a:t>
+            </a:r>
+          </a:p>
+        </p:txBody>
+      </p:sp>
+      <p:sp>
+        <p:nvSpPr>
+          <p:cNvPr id="21" name="TamatLine"/>
           <p:cNvSpPr txBox="1"/>
           <p:nvPr/>
         </p:nvSpPr>
         <p:spPr>
           <a:xfrm>
-            <a:off x="723930" y="1682496"/>
-            <a:ext cx="10744200" cy="384048"/>
+            <a:off x="723930" y="1645920"/>
+            <a:ext cx="10744200" cy="420624"/>
           </a:xfrm>
           <a:prstGeom prst="rect">
             <a:avLst/>
@@ -36521,29 +40334,26 @@
           <a:p>
             <a:pPr/>
             <a:r>
-              <a:rPr lang="en-MY" sz="1600" b="1" dirty="0">
-                <a:solidFill>
-                  <a:schemeClr val="tx1">
-                    <a:lumMod val="85000"/>
-                    <a:lumOff val="15000"/>
-                  </a:schemeClr>
-                </a:solidFill>
-              </a:rPr>
-              <a:t>PL06: Pengurusan Operasi Pembinaan Landskap</a:t>
-            </a:r>
-          </a:p>
-        </p:txBody>
-      </p:sp>
-      <p:sp>
-        <p:nvSpPr>
-          <p:cNvPr id="22" name="Head"/>
+              <a:rPr lang="en-MY" sz="1500" b="1" dirty="0">
+                <a:solidFill>
+                  <a:srgbClr val="7F6000"/>
+                </a:solidFill>
+              </a:rPr>
+              <a:t>PEMBINAAN LANDSKAP LUAR</a:t>
+            </a:r>
+          </a:p>
+        </p:txBody>
+      </p:sp>
+      <p:sp>
+        <p:nvSpPr>
+          <p:cNvPr id="24" name="TamatLine"/>
           <p:cNvSpPr txBox="1"/>
           <p:nvPr/>
         </p:nvSpPr>
         <p:spPr>
           <a:xfrm>
-            <a:off x="723930" y="2304288"/>
-            <a:ext cx="10744200" cy="548640"/>
+            <a:off x="723930" y="2322576"/>
+            <a:ext cx="10744200" cy="420624"/>
           </a:xfrm>
           <a:prstGeom prst="rect">
             <a:avLst/>
@@ -36558,29 +40368,26 @@
           <a:p>
             <a:pPr/>
             <a:r>
-              <a:rPr lang="en-MY" sz="2400" b="1" dirty="0">
-                <a:solidFill>
-                  <a:schemeClr val="tx1">
-                    <a:lumMod val="85000"/>
-                    <a:lumOff val="15000"/>
-                  </a:schemeClr>
-                </a:solidFill>
-              </a:rPr>
-              <a:t>Tamat Topik 3 Bahagian 2: Komponen Landskap</a:t>
-            </a:r>
-          </a:p>
-        </p:txBody>
-      </p:sp>
-      <p:sp>
-        <p:nvSpPr>
-          <p:cNvPr id="23" name="Status"/>
+              <a:rPr lang="en-MY" sz="1500" b="1" dirty="0">
+                <a:solidFill>
+                  <a:srgbClr val="7F6000"/>
+                </a:solidFill>
+              </a:rPr>
+              <a:t>PL06:</a:t>
+            </a:r>
+          </a:p>
+        </p:txBody>
+      </p:sp>
+      <p:sp>
+        <p:nvSpPr>
+          <p:cNvPr id="25" name="TamatLine"/>
           <p:cNvSpPr txBox="1"/>
           <p:nvPr/>
         </p:nvSpPr>
         <p:spPr>
           <a:xfrm>
-            <a:off x="723930" y="3200400"/>
-            <a:ext cx="10744200" cy="384048"/>
+            <a:off x="723930" y="2724912"/>
+            <a:ext cx="10744200" cy="420624"/>
           </a:xfrm>
           <a:prstGeom prst="rect">
             <a:avLst/>
@@ -36595,29 +40402,26 @@
           <a:p>
             <a:pPr/>
             <a:r>
-              <a:rPr lang="en-MY" sz="1600" dirty="0">
-                <a:solidFill>
-                  <a:schemeClr val="tx1">
-                    <a:lumMod val="85000"/>
-                    <a:lumOff val="15000"/>
-                  </a:schemeClr>
-                </a:solidFill>
-              </a:rPr>
-              <a:t>Bahagian ini telah selesai.</a:t>
-            </a:r>
-          </a:p>
-        </p:txBody>
-      </p:sp>
-      <p:sp>
-        <p:nvSpPr>
-          <p:cNvPr id="24" name="Instr"/>
+              <a:rPr lang="en-MY" sz="1500" b="1" dirty="0">
+                <a:solidFill>
+                  <a:srgbClr val="7F6000"/>
+                </a:solidFill>
+              </a:rPr>
+              <a:t>PENGURUSAN OPERASI PEMBINAAN LANDSKAP</a:t>
+            </a:r>
+          </a:p>
+        </p:txBody>
+      </p:sp>
+      <p:sp>
+        <p:nvSpPr>
+          <p:cNvPr id="28" name="TamatLine"/>
           <p:cNvSpPr txBox="1"/>
           <p:nvPr/>
         </p:nvSpPr>
         <p:spPr>
           <a:xfrm>
-            <a:off x="723930" y="3749040"/>
-            <a:ext cx="10744200" cy="384048"/>
+            <a:off x="723930" y="3401568"/>
+            <a:ext cx="10744200" cy="420624"/>
           </a:xfrm>
           <a:prstGeom prst="rect">
             <a:avLst/>
@@ -36632,15 +40436,89 @@
           <a:p>
             <a:pPr/>
             <a:r>
-              <a:rPr lang="en-MY" sz="1600" b="1" dirty="0">
-                <a:solidFill>
-                  <a:schemeClr val="tx1">
-                    <a:lumMod val="85000"/>
-                    <a:lumOff val="15000"/>
-                  </a:schemeClr>
-                </a:solidFill>
-              </a:rPr>
-              <a:t>Tutup tetingkap pelajaran untuk keluar.</a:t>
+              <a:rPr lang="en-MY" sz="2000" b="1" dirty="0">
+                <a:solidFill>
+                  <a:schemeClr val="tx1">
+                    <a:lumMod val="85000"/>
+                    <a:lumOff val="15000"/>
+                  </a:schemeClr>
+                </a:solidFill>
+              </a:rPr>
+              <a:t>Tamat Topik 3 Bahagian 2:</a:t>
+            </a:r>
+          </a:p>
+        </p:txBody>
+      </p:sp>
+      <p:sp>
+        <p:nvSpPr>
+          <p:cNvPr id="29" name="TamatLine"/>
+          <p:cNvSpPr txBox="1"/>
+          <p:nvPr/>
+        </p:nvSpPr>
+        <p:spPr>
+          <a:xfrm>
+            <a:off x="723930" y="3803904"/>
+            <a:ext cx="10744200" cy="420624"/>
+          </a:xfrm>
+          <a:prstGeom prst="rect">
+            <a:avLst/>
+          </a:prstGeom>
+          <a:noFill/>
+        </p:spPr>
+        <p:txBody>
+          <a:bodyPr wrap="square">
+            <a:noAutofit/>
+          </a:bodyPr>
+          <a:lstStyle/>
+          <a:p>
+            <a:pPr/>
+            <a:r>
+              <a:rPr lang="en-MY" sz="2000" b="1" dirty="0">
+                <a:solidFill>
+                  <a:schemeClr val="tx1">
+                    <a:lumMod val="85000"/>
+                    <a:lumOff val="15000"/>
+                  </a:schemeClr>
+                </a:solidFill>
+              </a:rPr>
+              <a:t>Komponen Landskap</a:t>
+            </a:r>
+          </a:p>
+        </p:txBody>
+      </p:sp>
+      <p:sp>
+        <p:nvSpPr>
+          <p:cNvPr id="60" name="TamatInstr"/>
+          <p:cNvSpPr txBox="1"/>
+          <p:nvPr/>
+        </p:nvSpPr>
+        <p:spPr>
+          <a:xfrm>
+            <a:off x="723930" y="4754880"/>
+            <a:ext cx="10744200" cy="420624"/>
+          </a:xfrm>
+          <a:prstGeom prst="rect">
+            <a:avLst/>
+          </a:prstGeom>
+          <a:noFill/>
+        </p:spPr>
+        <p:txBody>
+          <a:bodyPr wrap="square">
+            <a:noAutofit/>
+          </a:bodyPr>
+          <a:lstStyle/>
+          <a:p>
+            <a:pPr/>
+            <a:r>
+              <a:rPr lang="en-MY" sz="1700" b="1" dirty="0">
+                <a:solidFill>
+                  <a:schemeClr val="tx1">
+                    <a:lumMod val="85000"/>
+                    <a:lumOff val="15000"/>
+                  </a:schemeClr>
+                </a:solidFill>
+              </a:rPr>
+              <a:t>Teruskan pembelajaran ke bahagian seterusnya.</a:t>
             </a:r>
           </a:p>
         </p:txBody>
@@ -36848,7 +40726,7 @@
                   </a:schemeClr>
                 </a:solidFill>
               </a:rPr>
-              <a:t>  next  = LMS_SHELL_NEXT  [DISABLED on this screen]</a:t>
+              <a:t>  next  = LMS_SHELL_NEXT  [PENDING_FIRDAUS_OR_LMS_CONFIRMATION — no claim made about the shell control]</a:t>
             </a:r>
           </a:p>
           <a:p>
@@ -36952,72 +40830,176 @@
                   </a:schemeClr>
                 </a:solidFill>
               </a:rPr>
-              <a:t>KELUAR LMS:</a:t>
-            </a:r>
-          </a:p>
-          <a:p>
-            <a:r>
-              <a:rPr lang="en-MY" sz="900" dirty="0">
-                <a:solidFill>
-                  <a:schemeClr val="tx1">
-                    <a:lumMod val="85000"/>
-                    <a:lumOff val="15000"/>
-                  </a:schemeClr>
-                </a:solidFill>
-              </a:rPr>
-              <a:t>  destinasi logik: next Bahagian in Topik 3</a:t>
-            </a:r>
-          </a:p>
-          <a:p>
-            <a:r>
-              <a:rPr lang="en-MY" sz="900" dirty="0">
-                <a:solidFill>
-                  <a:schemeClr val="tx1">
-                    <a:lumMod val="85000"/>
-                    <a:lumOff val="15000"/>
-                  </a:schemeClr>
-                </a:solidFill>
-              </a:rPr>
-              <a:t>  kelakuan keluar fizikal: learner closes the lesson / window</a:t>
-            </a:r>
-          </a:p>
-          <a:p>
-            <a:r>
-              <a:rPr lang="en-MY" sz="900" dirty="0">
-                <a:solidFill>
-                  <a:schemeClr val="tx1">
-                    <a:lumMod val="85000"/>
-                    <a:lumOff val="15000"/>
-                  </a:schemeClr>
-                </a:solidFill>
-              </a:rPr>
-              <a:t>  keadaan Seterusnya shell: disabled on Tamat</a:t>
-            </a:r>
-          </a:p>
-          <a:p>
-            <a:r>
-              <a:rPr lang="en-MY" sz="900" dirty="0">
-                <a:solidFill>
-                  <a:schemeClr val="tx1">
-                    <a:lumMod val="85000"/>
-                    <a:lumOff val="15000"/>
-                  </a:schemeClr>
-                </a:solidFill>
-              </a:rPr>
-              <a:t>  status: PENDING_FIRDAUS_CONFIRMATION</a:t>
-            </a:r>
-          </a:p>
-          <a:p>
-            <a:r>
-              <a:rPr lang="en-MY" sz="900" dirty="0">
-                <a:solidFill>
-                  <a:schemeClr val="tx1">
-                    <a:lumMod val="85000"/>
-                    <a:lumOff val="15000"/>
-                  </a:schemeClr>
-                </a:solidFill>
-              </a:rPr>
-              <a:t>  logical destination is NOT displayed on the learner canvas; it is retained in production metadata only</a:t>
+              <a:t>KELUAR / NAVIGASI:</a:t>
+            </a:r>
+          </a:p>
+          <a:p>
+            <a:r>
+              <a:rPr lang="en-MY" sz="900" dirty="0">
+                <a:solidFill>
+                  <a:schemeClr val="tx1">
+                    <a:lumMod val="85000"/>
+                    <a:lumOff val="15000"/>
+                  </a:schemeClr>
+                </a:solidFill>
+              </a:rPr>
+              <a:t>  salinan Tamat: CONFIRMED_BARIAH</a:t>
+            </a:r>
+          </a:p>
+          <a:p>
+            <a:r>
+              <a:rPr lang="en-MY" sz="900" dirty="0">
+                <a:solidFill>
+                  <a:schemeClr val="tx1">
+                    <a:lumMod val="85000"/>
+                    <a:lumOff val="15000"/>
+                  </a:schemeClr>
+                </a:solidFill>
+              </a:rPr>
+              <a:t>  destinasi logik: NEXT_BAHAGIAN</a:t>
+            </a:r>
+          </a:p>
+          <a:p>
+            <a:r>
+              <a:rPr lang="en-MY" sz="900" dirty="0">
+                <a:solidFill>
+                  <a:schemeClr val="tx1">
+                    <a:lumMod val="85000"/>
+                    <a:lumOff val="15000"/>
+                  </a:schemeClr>
+                </a:solidFill>
+              </a:rPr>
+              <a:t>  kelakuan navigasi fizikal: PENDING_FIRDAUS_OR_LMS_CONFIRMATION</a:t>
+            </a:r>
+          </a:p>
+          <a:p>
+            <a:r>
+              <a:rPr lang="en-MY" sz="900" dirty="0">
+                <a:solidFill>
+                  <a:schemeClr val="tx1">
+                    <a:lumMod val="85000"/>
+                    <a:lumOff val="15000"/>
+                  </a:schemeClr>
+                </a:solidFill>
+              </a:rPr>
+              <a:t>  Tiada dakwaan dibuat tentang keadaan Seterusnya shell LMS.</a:t>
+            </a:r>
+          </a:p>
+          <a:p>
+            <a:r>
+              <a:rPr lang="en-MY" sz="900" dirty="0">
+                <a:solidFill>
+                  <a:schemeClr val="tx1">
+                    <a:lumMod val="85000"/>
+                    <a:lumOff val="15000"/>
+                  </a:schemeClr>
+                </a:solidFill>
+              </a:rPr>
+              <a:t>  Tiada butang navigasi kanvas tersuai dicipta.</a:t>
+            </a:r>
+          </a:p>
+          <a:p>
+            <a:r>
+              <a:rPr lang="en-MY" sz="900" dirty="0">
+                <a:solidFill>
+                  <a:schemeClr val="tx1">
+                    <a:lumMod val="85000"/>
+                    <a:lumOff val="15000"/>
+                  </a:schemeClr>
+                </a:solidFill>
+              </a:rPr>
+              <a:t>  Segitiga merah dalam contoh Bariah dianggap ISYARAT VISUAL,</a:t>
+            </a:r>
+          </a:p>
+          <a:p>
+            <a:r>
+              <a:rPr lang="en-MY" sz="900" dirty="0">
+                <a:solidFill>
+                  <a:schemeClr val="tx1">
+                    <a:lumMod val="85000"/>
+                    <a:lumOff val="15000"/>
+                  </a:schemeClr>
+                </a:solidFill>
+              </a:rPr>
+              <a:t>  bukan butang interaktif, sehingga ada bukti sebaliknya.</a:t>
+            </a:r>
+          </a:p>
+          <a:p>
+            <a:r>
+              <a:rPr lang="en-MY" sz="900" b="1" dirty="0">
+                <a:solidFill>
+                  <a:schemeClr val="tx1">
+                    <a:lumMod val="85000"/>
+                    <a:lumOff val="15000"/>
+                  </a:schemeClr>
+                </a:solidFill>
+              </a:rPr>
+              <a:t>VISUAL:</a:t>
+            </a:r>
+          </a:p>
+          <a:p>
+            <a:r>
+              <a:rPr lang="en-MY" sz="900" dirty="0">
+                <a:solidFill>
+                  <a:schemeClr val="tx1">
+                    <a:lumMod val="85000"/>
+                    <a:lumOff val="15000"/>
+                  </a:schemeClr>
+                </a:solidFill>
+              </a:rPr>
+              <a:t>  subjenis skrin: FRAME_SCREEN</a:t>
+            </a:r>
+          </a:p>
+          <a:p>
+            <a:r>
+              <a:rPr lang="en-MY" sz="900" dirty="0">
+                <a:solidFill>
+                  <a:schemeClr val="tx1">
+                    <a:lumMod val="85000"/>
+                    <a:lumOff val="15000"/>
+                  </a:schemeClr>
+                </a:solidFill>
+              </a:rPr>
+              <a:t>  subjenis popup: —</a:t>
+            </a:r>
+          </a:p>
+          <a:p>
+            <a:r>
+              <a:rPr lang="en-MY" sz="900" dirty="0">
+                <a:solidFill>
+                  <a:schemeClr val="tx1">
+                    <a:lumMod val="85000"/>
+                    <a:lumOff val="15000"/>
+                  </a:schemeClr>
+                </a:solidFill>
+              </a:rPr>
+              <a:t>  keperluan visual: NOT_REQUIRED</a:t>
+            </a:r>
+          </a:p>
+          <a:p>
+            <a:r>
+              <a:rPr lang="en-MY" sz="900" dirty="0">
+                <a:solidFill>
+                  <a:schemeClr val="tx1">
+                    <a:lumMod val="85000"/>
+                    <a:lumOff val="15000"/>
+                  </a:schemeClr>
+                </a:solidFill>
+              </a:rPr>
+              <a:t>  status: NOT_REQUIRED</a:t>
+            </a:r>
+          </a:p>
+          <a:p>
+            <a:r>
+              <a:rPr lang="en-MY" sz="900" dirty="0">
+                <a:solidFill>
+                  <a:schemeClr val="tx1">
+                    <a:lumMod val="85000"/>
+                    <a:lumOff val="15000"/>
+                  </a:schemeClr>
+                </a:solidFill>
+              </a:rPr>
+              <a:t>  kuasa: —</a:t>
             </a:r>
           </a:p>
           <a:p>
@@ -37043,7 +41025,7 @@
                   </a:schemeClr>
                 </a:solidFill>
               </a:rPr>
-              <a:t>STATUS BELUM SELESAI: U-03</a:t>
+              <a:t>STATUS BELUM SELESAI: U-03 — Tamat COPY is CONFIRMED_BARIAH; the physical LMS navigation mechanism is PENDING_FIRDAUS_OR_LMS_CONFIRMATION</a:t>
             </a:r>
           </a:p>
         </p:txBody>
@@ -37739,6 +41721,110 @@
           </a:p>
           <a:p>
             <a:r>
+              <a:rPr lang="en-MY" sz="900" b="1" dirty="0">
+                <a:solidFill>
+                  <a:schemeClr val="tx1">
+                    <a:lumMod val="85000"/>
+                    <a:lumOff val="15000"/>
+                  </a:schemeClr>
+                </a:solidFill>
+              </a:rPr>
+              <a:t>ARAHAN INTERAKSI (kanvas = VO):</a:t>
+            </a:r>
+          </a:p>
+          <a:p>
+            <a:r>
+              <a:rPr lang="en-MY" sz="900" dirty="0">
+                <a:solidFill>
+                  <a:schemeClr val="tx1">
+                    <a:lumMod val="85000"/>
+                    <a:lumOff val="15000"/>
+                  </a:schemeClr>
+                </a:solidFill>
+              </a:rPr>
+              <a:t>  Klik pada setiap struktur untuk penjelasan lanjut.</a:t>
+            </a:r>
+          </a:p>
+          <a:p>
+            <a:r>
+              <a:rPr lang="en-MY" sz="900" b="1" dirty="0">
+                <a:solidFill>
+                  <a:schemeClr val="tx1">
+                    <a:lumMod val="85000"/>
+                    <a:lumOff val="15000"/>
+                  </a:schemeClr>
+                </a:solidFill>
+              </a:rPr>
+              <a:t>VISUAL:</a:t>
+            </a:r>
+          </a:p>
+          <a:p>
+            <a:r>
+              <a:rPr lang="en-MY" sz="900" dirty="0">
+                <a:solidFill>
+                  <a:schemeClr val="tx1">
+                    <a:lumMod val="85000"/>
+                    <a:lumOff val="15000"/>
+                  </a:schemeClr>
+                </a:solidFill>
+              </a:rPr>
+              <a:t>  subjenis skrin: GROUP_MASTER</a:t>
+            </a:r>
+          </a:p>
+          <a:p>
+            <a:r>
+              <a:rPr lang="en-MY" sz="900" dirty="0">
+                <a:solidFill>
+                  <a:schemeClr val="tx1">
+                    <a:lumMod val="85000"/>
+                    <a:lumOff val="15000"/>
+                  </a:schemeClr>
+                </a:solidFill>
+              </a:rPr>
+              <a:t>  subjenis popup: —</a:t>
+            </a:r>
+          </a:p>
+          <a:p>
+            <a:r>
+              <a:rPr lang="en-MY" sz="900" dirty="0">
+                <a:solidFill>
+                  <a:schemeClr val="tx1">
+                    <a:lumMod val="85000"/>
+                    <a:lumOff val="15000"/>
+                  </a:schemeClr>
+                </a:solidFill>
+              </a:rPr>
+              <a:t>  keperluan visual: NOT_REQUIRED</a:t>
+            </a:r>
+          </a:p>
+          <a:p>
+            <a:r>
+              <a:rPr lang="en-MY" sz="900" dirty="0">
+                <a:solidFill>
+                  <a:schemeClr val="tx1">
+                    <a:lumMod val="85000"/>
+                    <a:lumOff val="15000"/>
+                  </a:schemeClr>
+                </a:solidFill>
+              </a:rPr>
+              <a:t>  status: NOT_REQUIRED</a:t>
+            </a:r>
+          </a:p>
+          <a:p>
+            <a:r>
+              <a:rPr lang="en-MY" sz="900" dirty="0">
+                <a:solidFill>
+                  <a:schemeClr val="tx1">
+                    <a:lumMod val="85000"/>
+                    <a:lumOff val="15000"/>
+                  </a:schemeClr>
+                </a:solidFill>
+              </a:rPr>
+              <a:t>  kuasa: —</a:t>
+            </a:r>
+          </a:p>
+          <a:p>
+            <a:r>
               <a:rPr lang="en-MY" sz="900" dirty="0">
                 <a:solidFill>
                   <a:schemeClr val="tx1">
@@ -38022,7 +42108,7 @@
                   <a:srgbClr val="808080"/>
                 </a:solidFill>
               </a:rPr>
-              <a:t>[Visual: Rajah 23 — Contoh Boardwalk dalam Taman Paya Bakau, modul ms 239. Tidak dibenamkan.]</a:t>
+              <a:t>[Visual: Pelbagai Struktur Persisir Air. Tidak dibenamkan.]</a:t>
             </a:r>
           </a:p>
         </p:txBody>
@@ -38348,6 +42434,84 @@
                 </a:solidFill>
               </a:rPr>
               <a:t>  Tiada interaksi kandungan. Kemajuan melalui shell LMS.</a:t>
+            </a:r>
+          </a:p>
+          <a:p>
+            <a:r>
+              <a:rPr lang="en-MY" sz="900" b="1" dirty="0">
+                <a:solidFill>
+                  <a:schemeClr val="tx1">
+                    <a:lumMod val="85000"/>
+                    <a:lumOff val="15000"/>
+                  </a:schemeClr>
+                </a:solidFill>
+              </a:rPr>
+              <a:t>VISUAL:</a:t>
+            </a:r>
+          </a:p>
+          <a:p>
+            <a:r>
+              <a:rPr lang="en-MY" sz="900" dirty="0">
+                <a:solidFill>
+                  <a:schemeClr val="tx1">
+                    <a:lumMod val="85000"/>
+                    <a:lumOff val="15000"/>
+                  </a:schemeClr>
+                </a:solidFill>
+              </a:rPr>
+              <a:t>  subjenis skrin: COMPONENT_MAIN_SCREEN</a:t>
+            </a:r>
+          </a:p>
+          <a:p>
+            <a:r>
+              <a:rPr lang="en-MY" sz="900" dirty="0">
+                <a:solidFill>
+                  <a:schemeClr val="tx1">
+                    <a:lumMod val="85000"/>
+                    <a:lumOff val="15000"/>
+                  </a:schemeClr>
+                </a:solidFill>
+              </a:rPr>
+              <a:t>  subjenis popup: —</a:t>
+            </a:r>
+          </a:p>
+          <a:p>
+            <a:r>
+              <a:rPr lang="en-MY" sz="900" dirty="0">
+                <a:solidFill>
+                  <a:schemeClr val="tx1">
+                    <a:lumMod val="85000"/>
+                    <a:lumOff val="15000"/>
+                  </a:schemeClr>
+                </a:solidFill>
+              </a:rPr>
+              <a:t>  keperluan visual: CONDITIONAL</a:t>
+            </a:r>
+          </a:p>
+          <a:p>
+            <a:r>
+              <a:rPr lang="en-MY" sz="900" dirty="0">
+                <a:solidFill>
+                  <a:schemeClr val="tx1">
+                    <a:lumMod val="85000"/>
+                    <a:lumOff val="15000"/>
+                  </a:schemeClr>
+                </a:solidFill>
+              </a:rPr>
+              <a:t>  status: RESOLVED</a:t>
+            </a:r>
+          </a:p>
+          <a:p>
+            <a:r>
+              <a:rPr lang="en-MY" sz="900" dirty="0">
+                <a:solidFill>
+                  <a:schemeClr val="tx1">
+                    <a:lumMod val="85000"/>
+                    <a:lumOff val="15000"/>
+                  </a:schemeClr>
+                </a:solidFill>
+              </a:rPr>
+              <a:t>  kuasa: BARIAH_APPROVED_COMPONENT_MAIN</a:t>
             </a:r>
           </a:p>
           <a:p>
@@ -38534,7 +42698,7 @@
           <a:p>
             <a:pPr algn="ctr"/>
             <a:r>
-              <a:rPr lang="en-MY" sz="1500" b="1" dirty="0">
+              <a:rPr lang="en-MY" sz="1500" b="1" i="1" dirty="0">
                 <a:solidFill>
                   <a:schemeClr val="tx1">
                     <a:lumMod val="85000"/>
@@ -38666,7 +42830,7 @@
           <a:p>
             <a:pPr algn="ctr"/>
             <a:r>
-              <a:rPr lang="en-MY" sz="1500" b="1" dirty="0">
+              <a:rPr lang="en-MY" sz="1500" b="1" i="1" dirty="0">
                 <a:solidFill>
                   <a:schemeClr val="tx1">
                     <a:lumMod val="85000"/>
@@ -38710,7 +42874,7 @@
           <a:p>
             <a:pPr algn="ctr"/>
             <a:r>
-              <a:rPr lang="en-MY" sz="1500" b="1" dirty="0">
+              <a:rPr lang="en-MY" sz="1500" b="1" i="1" dirty="0">
                 <a:solidFill>
                   <a:schemeClr val="tx1">
                     <a:lumMod val="85000"/>
@@ -38719,6 +42883,40 @@
                 </a:solidFill>
               </a:rPr>
               <a:t>Footbridge</a:t>
+            </a:r>
+          </a:p>
+        </p:txBody>
+      </p:sp>
+      <p:sp>
+        <p:nvSpPr>
+          <p:cNvPr id="30" name="VisualDir"/>
+          <p:cNvSpPr txBox="1"/>
+          <p:nvPr/>
+        </p:nvSpPr>
+        <p:spPr>
+          <a:xfrm>
+            <a:off x="723930" y="5358384"/>
+            <a:ext cx="10744200" cy="365760"/>
+          </a:xfrm>
+          <a:prstGeom prst="rect">
+            <a:avLst/>
+          </a:prstGeom>
+          <a:noFill/>
+        </p:spPr>
+        <p:txBody>
+          <a:bodyPr wrap="square">
+            <a:noAutofit/>
+          </a:bodyPr>
+          <a:lstStyle/>
+          <a:p>
+            <a:pPr/>
+            <a:r>
+              <a:rPr lang="en-MY" sz="1100" dirty="0">
+                <a:solidFill>
+                  <a:srgbClr val="808080"/>
+                </a:solidFill>
+              </a:rPr>
+              <a:t>[Visual: Pelbagai Struktur Persisir Air. Tidak dibenamkan.]</a:t>
             </a:r>
           </a:p>
         </p:txBody>
@@ -39345,6 +43543,110 @@
                 </a:solidFill>
               </a:rPr>
               <a:t>  0/5 contoh dilihat.</a:t>
+            </a:r>
+          </a:p>
+          <a:p>
+            <a:r>
+              <a:rPr lang="en-MY" sz="900" b="1" dirty="0">
+                <a:solidFill>
+                  <a:schemeClr val="tx1">
+                    <a:lumMod val="85000"/>
+                    <a:lumOff val="15000"/>
+                  </a:schemeClr>
+                </a:solidFill>
+              </a:rPr>
+              <a:t>ARAHAN INTERAKSI (kanvas = VO):</a:t>
+            </a:r>
+          </a:p>
+          <a:p>
+            <a:r>
+              <a:rPr lang="en-MY" sz="900" dirty="0">
+                <a:solidFill>
+                  <a:schemeClr val="tx1">
+                    <a:lumMod val="85000"/>
+                    <a:lumOff val="15000"/>
+                  </a:schemeClr>
+                </a:solidFill>
+              </a:rPr>
+              <a:t>  Klik pada setiap contoh untuk penjelasan lanjut.</a:t>
+            </a:r>
+          </a:p>
+          <a:p>
+            <a:r>
+              <a:rPr lang="en-MY" sz="900" b="1" dirty="0">
+                <a:solidFill>
+                  <a:schemeClr val="tx1">
+                    <a:lumMod val="85000"/>
+                    <a:lumOff val="15000"/>
+                  </a:schemeClr>
+                </a:solidFill>
+              </a:rPr>
+              <a:t>VISUAL:</a:t>
+            </a:r>
+          </a:p>
+          <a:p>
+            <a:r>
+              <a:rPr lang="en-MY" sz="900" dirty="0">
+                <a:solidFill>
+                  <a:schemeClr val="tx1">
+                    <a:lumMod val="85000"/>
+                    <a:lumOff val="15000"/>
+                  </a:schemeClr>
+                </a:solidFill>
+              </a:rPr>
+              <a:t>  subjenis skrin: EXAMPLE_SCREEN</a:t>
+            </a:r>
+          </a:p>
+          <a:p>
+            <a:r>
+              <a:rPr lang="en-MY" sz="900" dirty="0">
+                <a:solidFill>
+                  <a:schemeClr val="tx1">
+                    <a:lumMod val="85000"/>
+                    <a:lumOff val="15000"/>
+                  </a:schemeClr>
+                </a:solidFill>
+              </a:rPr>
+              <a:t>  subjenis popup: —</a:t>
+            </a:r>
+          </a:p>
+          <a:p>
+            <a:r>
+              <a:rPr lang="en-MY" sz="900" dirty="0">
+                <a:solidFill>
+                  <a:schemeClr val="tx1">
+                    <a:lumMod val="85000"/>
+                    <a:lumOff val="15000"/>
+                  </a:schemeClr>
+                </a:solidFill>
+              </a:rPr>
+              <a:t>  keperluan visual: REQUIRED</a:t>
+            </a:r>
+          </a:p>
+          <a:p>
+            <a:r>
+              <a:rPr lang="en-MY" sz="900" dirty="0">
+                <a:solidFill>
+                  <a:schemeClr val="tx1">
+                    <a:lumMod val="85000"/>
+                    <a:lumOff val="15000"/>
+                  </a:schemeClr>
+                </a:solidFill>
+              </a:rPr>
+              <a:t>  status: RESOLVED</a:t>
+            </a:r>
+          </a:p>
+          <a:p>
+            <a:r>
+              <a:rPr lang="en-MY" sz="900" dirty="0">
+                <a:solidFill>
+                  <a:schemeClr val="tx1">
+                    <a:lumMod val="85000"/>
+                    <a:lumOff val="15000"/>
+                  </a:schemeClr>
+                </a:solidFill>
+              </a:rPr>
+              <a:t>  kuasa: BARIAH_APPROVED_COMPONENT_MAIN</a:t>
             </a:r>
           </a:p>
           <a:p>
@@ -39531,7 +43833,7 @@
           <a:p>
             <a:pPr algn="ctr"/>
             <a:r>
-              <a:rPr lang="en-MY" sz="1500" b="1" dirty="0">
+              <a:rPr lang="en-MY" sz="1500" b="1" i="1" dirty="0">
                 <a:solidFill>
                   <a:schemeClr val="tx1">
                     <a:lumMod val="85000"/>
@@ -39722,7 +44024,7 @@
           <a:p>
             <a:pPr algn="ctr"/>
             <a:r>
-              <a:rPr lang="en-MY" sz="1500" b="1" dirty="0">
+              <a:rPr lang="en-MY" sz="1500" b="1" i="1" dirty="0">
                 <a:solidFill>
                   <a:schemeClr val="tx1">
                     <a:lumMod val="85000"/>
@@ -39766,7 +44068,7 @@
           <a:p>
             <a:pPr algn="ctr"/>
             <a:r>
-              <a:rPr lang="en-MY" sz="1500" b="1" dirty="0">
+              <a:rPr lang="en-MY" sz="1500" b="1" i="1" dirty="0">
                 <a:solidFill>
                   <a:schemeClr val="tx1">
                     <a:lumMod val="85000"/>
@@ -39775,6 +44077,40 @@
                 </a:solidFill>
               </a:rPr>
               <a:t>Footbridge</a:t>
+            </a:r>
+          </a:p>
+        </p:txBody>
+      </p:sp>
+      <p:sp>
+        <p:nvSpPr>
+          <p:cNvPr id="30" name="VisualDir"/>
+          <p:cNvSpPr txBox="1"/>
+          <p:nvPr/>
+        </p:nvSpPr>
+        <p:spPr>
+          <a:xfrm>
+            <a:off x="723930" y="5358384"/>
+            <a:ext cx="10744200" cy="365760"/>
+          </a:xfrm>
+          <a:prstGeom prst="rect">
+            <a:avLst/>
+          </a:prstGeom>
+          <a:noFill/>
+        </p:spPr>
+        <p:txBody>
+          <a:bodyPr wrap="square">
+            <a:noAutofit/>
+          </a:bodyPr>
+          <a:lstStyle/>
+          <a:p>
+            <a:pPr/>
+            <a:r>
+              <a:rPr lang="en-MY" sz="1100" dirty="0">
+                <a:solidFill>
+                  <a:srgbClr val="808080"/>
+                </a:solidFill>
+              </a:rPr>
+              <a:t>[Visual: Promenade Tasik Titiwangsa, KL]</a:t>
             </a:r>
           </a:p>
         </p:txBody>
@@ -39787,8 +44123,8 @@
         </p:nvSpPr>
         <p:spPr>
           <a:xfrm>
-            <a:off x="1234440" y="1737360"/>
-            <a:ext cx="9723090" cy="3017520"/>
+            <a:off x="1234440" y="1481328"/>
+            <a:ext cx="9723090" cy="2788920"/>
           </a:xfrm>
           <a:prstGeom prst="rect">
             <a:avLst/>
@@ -39817,8 +44153,8 @@
         </p:nvSpPr>
         <p:spPr>
           <a:xfrm>
-            <a:off x="1490472" y="1883664"/>
-            <a:ext cx="8534370" cy="365760"/>
+            <a:off x="1490472" y="1627632"/>
+            <a:ext cx="5532120" cy="365760"/>
           </a:xfrm>
           <a:prstGeom prst="rect">
             <a:avLst/>
@@ -39833,7 +44169,7 @@
           <a:p>
             <a:pPr/>
             <a:r>
-              <a:rPr lang="en-MY" sz="2000" b="1" dirty="0">
+              <a:rPr lang="en-MY" sz="2000" b="1" i="1" dirty="0">
                 <a:solidFill>
                   <a:schemeClr val="tx1">
                     <a:lumMod val="85000"/>
@@ -39854,7 +44190,7 @@
         </p:nvSpPr>
         <p:spPr>
           <a:xfrm>
-            <a:off x="10317450" y="1901952"/>
+            <a:off x="10317450" y="1645920"/>
             <a:ext cx="384048" cy="384048"/>
           </a:xfrm>
           <a:prstGeom prst="ellipse">
@@ -39883,7 +44219,7 @@
         </p:nvSpPr>
         <p:spPr>
           <a:xfrm>
-            <a:off x="10421142" y="2005645"/>
+            <a:off x="10421142" y="1749613"/>
             <a:ext cx="176662" cy="176662"/>
           </a:xfrm>
           <a:custGeom>
@@ -39957,8 +44293,8 @@
         </p:nvSpPr>
         <p:spPr>
           <a:xfrm>
-            <a:off x="1490472" y="2468880"/>
-            <a:ext cx="9211026" cy="219456"/>
+            <a:off x="1490472" y="2212848"/>
+            <a:ext cx="5532120" cy="219456"/>
           </a:xfrm>
           <a:prstGeom prst="rect">
             <a:avLst/>
@@ -39991,8 +44327,8 @@
         </p:nvSpPr>
         <p:spPr>
           <a:xfrm>
-            <a:off x="1490472" y="2706624"/>
-            <a:ext cx="9211026" cy="219456"/>
+            <a:off x="1490472" y="2450592"/>
+            <a:ext cx="5532120" cy="429768"/>
           </a:xfrm>
           <a:prstGeom prst="rect">
             <a:avLst/>
@@ -40015,7 +44351,21 @@
                   </a:schemeClr>
                 </a:solidFill>
               </a:rPr>
-              <a:t>Laluan lebar di sepanjang pinggir air, selesa untuk berjalan dan bersantai.</a:t>
+              <a:t>Laluan lebar di sepanjang pinggir air, selesa untuk</a:t>
+            </a:r>
+          </a:p>
+          <a:p>
+            <a:pPr/>
+            <a:r>
+              <a:rPr lang="en-MY" sz="1250" dirty="0">
+                <a:solidFill>
+                  <a:schemeClr val="tx1">
+                    <a:lumMod val="85000"/>
+                    <a:lumOff val="15000"/>
+                  </a:schemeClr>
+                </a:solidFill>
+              </a:rPr>
+              <a:t>berjalan dan bersantai.</a:t>
             </a:r>
           </a:p>
         </p:txBody>
@@ -40028,8 +44378,8 @@
         </p:nvSpPr>
         <p:spPr>
           <a:xfrm>
-            <a:off x="1490472" y="3086100"/>
-            <a:ext cx="9211026" cy="219456"/>
+            <a:off x="1490472" y="3044952"/>
+            <a:ext cx="5532120" cy="219456"/>
           </a:xfrm>
           <a:prstGeom prst="rect">
             <a:avLst/>
@@ -40062,8 +44412,8 @@
         </p:nvSpPr>
         <p:spPr>
           <a:xfrm>
-            <a:off x="1490472" y="3323844"/>
-            <a:ext cx="9211026" cy="219456"/>
+            <a:off x="1490472" y="3282696"/>
+            <a:ext cx="5532120" cy="219456"/>
           </a:xfrm>
           <a:prstGeom prst="rect">
             <a:avLst/>
@@ -40078,6 +44428,17 @@
           <a:p>
             <a:pPr/>
             <a:r>
+              <a:rPr lang="en-MY" sz="1250" i="1" dirty="0">
+                <a:solidFill>
+                  <a:schemeClr val="tx1">
+                    <a:lumMod val="85000"/>
+                    <a:lumOff val="15000"/>
+                  </a:schemeClr>
+                </a:solidFill>
+              </a:rPr>
+              <a:t>Promenade</a:t>
+            </a:r>
+            <a:r>
               <a:rPr lang="en-MY" sz="1250" dirty="0">
                 <a:solidFill>
                   <a:schemeClr val="tx1">
@@ -40086,55 +44447,51 @@
                   </a:schemeClr>
                 </a:solidFill>
               </a:rPr>
-              <a:t>Promenade Tasik Titiwangsa, KL</a:t>
-            </a:r>
-          </a:p>
-        </p:txBody>
-      </p:sp>
-      <p:sp>
-        <p:nvSpPr>
-          <p:cNvPr id="214" name="FHead"/>
+              <a:t> Tasik Titiwangsa, KL</a:t>
+            </a:r>
+          </a:p>
+        </p:txBody>
+      </p:sp>
+      <p:sp>
+        <p:nvSpPr>
+          <p:cNvPr id="230" name="VisualPanel"/>
           <p:cNvSpPr txBox="1"/>
           <p:nvPr/>
         </p:nvSpPr>
         <p:spPr>
           <a:xfrm>
-            <a:off x="1490472" y="3703320"/>
-            <a:ext cx="9211026" cy="219456"/>
+            <a:off x="7287768" y="2157984"/>
+            <a:ext cx="3401568" cy="1874520"/>
           </a:xfrm>
           <a:prstGeom prst="rect">
             <a:avLst/>
           </a:prstGeom>
-          <a:noFill/>
+          <a:solidFill>
+            <a:srgbClr val="F7F7F7"/>
+          </a:solidFill>
+          <a:ln w="12700">
+            <a:solidFill>
+              <a:srgbClr val="BFBFBF"/>
+            </a:solidFill>
+          </a:ln>
         </p:spPr>
         <p:txBody>
           <a:bodyPr wrap="square">
             <a:noAutofit/>
           </a:bodyPr>
           <a:lstStyle/>
-          <a:p>
-            <a:pPr/>
-            <a:r>
-              <a:rPr lang="en-MY" sz="950" b="1" dirty="0">
-                <a:solidFill>
-                  <a:srgbClr val="7F6000"/>
-                </a:solidFill>
-              </a:rPr>
-              <a:t>ARAHAN VISUAL — TIDAK DIBENAMKAN</a:t>
-            </a:r>
-          </a:p>
-        </p:txBody>
-      </p:sp>
-      <p:sp>
-        <p:nvSpPr>
-          <p:cNvPr id="215" name="FBody"/>
+        </p:txBody>
+      </p:sp>
+      <p:sp>
+        <p:nvSpPr>
+          <p:cNvPr id="231" name="VisualPanelHead"/>
           <p:cNvSpPr txBox="1"/>
           <p:nvPr/>
         </p:nvSpPr>
         <p:spPr>
           <a:xfrm>
-            <a:off x="1490472" y="3941064"/>
-            <a:ext cx="9211026" cy="429768"/>
+            <a:off x="7452360" y="2286000"/>
+            <a:ext cx="3072384" cy="219456"/>
           </a:xfrm>
           <a:prstGeom prst="rect">
             <a:avLst/>
@@ -40149,29 +44506,105 @@
           <a:p>
             <a:pPr/>
             <a:r>
-              <a:rPr lang="en-MY" sz="1250" dirty="0">
-                <a:solidFill>
-                  <a:schemeClr val="tx1">
-                    <a:lumMod val="85000"/>
-                    <a:lumOff val="15000"/>
-                  </a:schemeClr>
-                </a:solidFill>
-              </a:rPr>
-              <a:t>[Visual: Arahan visual untuk Promenade — spesifikasi teks sahaja, modul ms 238. Tidak</a:t>
-            </a:r>
-          </a:p>
+              <a:rPr lang="en-MY" sz="900" b="1" dirty="0">
+                <a:solidFill>
+                  <a:srgbClr val="7F6000"/>
+                </a:solidFill>
+              </a:rPr>
+              <a:t>ARAHAN VISUAL — TIDAK DIBENAMKAN</a:t>
+            </a:r>
+          </a:p>
+        </p:txBody>
+      </p:sp>
+      <p:sp>
+        <p:nvSpPr>
+          <p:cNvPr id="232" name="VisualPanelBody"/>
+          <p:cNvSpPr txBox="1"/>
+          <p:nvPr/>
+        </p:nvSpPr>
+        <p:spPr>
+          <a:xfrm>
+            <a:off x="7452360" y="2542032"/>
+            <a:ext cx="3072384" cy="274320"/>
+          </a:xfrm>
+          <a:prstGeom prst="rect">
+            <a:avLst/>
+          </a:prstGeom>
+          <a:noFill/>
+        </p:spPr>
+        <p:txBody>
+          <a:bodyPr wrap="square">
+            <a:noAutofit/>
+          </a:bodyPr>
+          <a:lstStyle/>
           <a:p>
             <a:pPr/>
             <a:r>
-              <a:rPr lang="en-MY" sz="1250" dirty="0">
-                <a:solidFill>
-                  <a:schemeClr val="tx1">
-                    <a:lumMod val="85000"/>
-                    <a:lumOff val="15000"/>
-                  </a:schemeClr>
-                </a:solidFill>
-              </a:rPr>
-              <a:t>dibenamkan.]</a:t>
+              <a:rPr lang="en-MY" sz="1050" dirty="0">
+                <a:solidFill>
+                  <a:schemeClr val="tx1">
+                    <a:lumMod val="85000"/>
+                    <a:lumOff val="15000"/>
+                  </a:schemeClr>
+                </a:solidFill>
+              </a:rPr>
+              <a:t>[Visual: </a:t>
+            </a:r>
+            <a:r>
+              <a:rPr lang="en-MY" sz="1050" i="1" dirty="0">
+                <a:solidFill>
+                  <a:schemeClr val="tx1">
+                    <a:lumMod val="85000"/>
+                    <a:lumOff val="15000"/>
+                  </a:schemeClr>
+                </a:solidFill>
+              </a:rPr>
+              <a:t>Promenade</a:t>
+            </a:r>
+            <a:r>
+              <a:rPr lang="en-MY" sz="1050" dirty="0">
+                <a:solidFill>
+                  <a:schemeClr val="tx1">
+                    <a:lumMod val="85000"/>
+                    <a:lumOff val="15000"/>
+                  </a:schemeClr>
+                </a:solidFill>
+              </a:rPr>
+              <a:t> Tasik Titiwangsa, KL]</a:t>
+            </a:r>
+          </a:p>
+        </p:txBody>
+      </p:sp>
+      <p:sp>
+        <p:nvSpPr>
+          <p:cNvPr id="233" name="VisualPanelArea"/>
+          <p:cNvSpPr txBox="1"/>
+          <p:nvPr/>
+        </p:nvSpPr>
+        <p:spPr>
+          <a:xfrm>
+            <a:off x="7452360" y="3758184"/>
+            <a:ext cx="3072384" cy="201168"/>
+          </a:xfrm>
+          <a:prstGeom prst="rect">
+            <a:avLst/>
+          </a:prstGeom>
+          <a:noFill/>
+        </p:spPr>
+        <p:txBody>
+          <a:bodyPr wrap="square">
+            <a:noAutofit/>
+          </a:bodyPr>
+          <a:lstStyle/>
+          <a:p>
+            <a:pPr/>
+            <a:r>
+              <a:rPr lang="en-MY" sz="800" dirty="0">
+                <a:solidFill>
+                  <a:srgbClr val="808080"/>
+                </a:solidFill>
+              </a:rPr>
+              <a:t>Ruang visual produksi — aset tidak dibenamkan.</a:t>
             </a:r>
           </a:p>
         </p:txBody>
@@ -40601,6 +45034,84 @@
                 </a:solidFill>
               </a:rPr>
               <a:t>  1/5 contoh dilihat.</a:t>
+            </a:r>
+          </a:p>
+          <a:p>
+            <a:r>
+              <a:rPr lang="en-MY" sz="900" b="1" dirty="0">
+                <a:solidFill>
+                  <a:schemeClr val="tx1">
+                    <a:lumMod val="85000"/>
+                    <a:lumOff val="15000"/>
+                  </a:schemeClr>
+                </a:solidFill>
+              </a:rPr>
+              <a:t>VISUAL:</a:t>
+            </a:r>
+          </a:p>
+          <a:p>
+            <a:r>
+              <a:rPr lang="en-MY" sz="900" dirty="0">
+                <a:solidFill>
+                  <a:schemeClr val="tx1">
+                    <a:lumMod val="85000"/>
+                    <a:lumOff val="15000"/>
+                  </a:schemeClr>
+                </a:solidFill>
+              </a:rPr>
+              <a:t>  subjenis skrin: EXAMPLE_POPUP</a:t>
+            </a:r>
+          </a:p>
+          <a:p>
+            <a:r>
+              <a:rPr lang="en-MY" sz="900" dirty="0">
+                <a:solidFill>
+                  <a:schemeClr val="tx1">
+                    <a:lumMod val="85000"/>
+                    <a:lumOff val="15000"/>
+                  </a:schemeClr>
+                </a:solidFill>
+              </a:rPr>
+              <a:t>  subjenis popup: EXAMPLE_POPUP</a:t>
+            </a:r>
+          </a:p>
+          <a:p>
+            <a:r>
+              <a:rPr lang="en-MY" sz="900" dirty="0">
+                <a:solidFill>
+                  <a:schemeClr val="tx1">
+                    <a:lumMod val="85000"/>
+                    <a:lumOff val="15000"/>
+                  </a:schemeClr>
+                </a:solidFill>
+              </a:rPr>
+              <a:t>  keperluan visual: REQUIRED</a:t>
+            </a:r>
+          </a:p>
+          <a:p>
+            <a:r>
+              <a:rPr lang="en-MY" sz="900" dirty="0">
+                <a:solidFill>
+                  <a:schemeClr val="tx1">
+                    <a:lumMod val="85000"/>
+                    <a:lumOff val="15000"/>
+                  </a:schemeClr>
+                </a:solidFill>
+              </a:rPr>
+              <a:t>  status: RESOLVED</a:t>
+            </a:r>
+          </a:p>
+          <a:p>
+            <a:r>
+              <a:rPr lang="en-MY" sz="900" dirty="0">
+                <a:solidFill>
+                  <a:schemeClr val="tx1">
+                    <a:lumMod val="85000"/>
+                    <a:lumOff val="15000"/>
+                  </a:schemeClr>
+                </a:solidFill>
+              </a:rPr>
+              <a:t>  kuasa: BARIAH_EXEMPLAR_CONTOH</a:t>
             </a:r>
           </a:p>
           <a:p>
@@ -40787,7 +45298,7 @@
           <a:p>
             <a:pPr algn="ctr"/>
             <a:r>
-              <a:rPr lang="en-MY" sz="1500" b="1" dirty="0">
+              <a:rPr lang="en-MY" sz="1500" b="1" i="1" dirty="0">
                 <a:solidFill>
                   <a:schemeClr val="tx1">
                     <a:lumMod val="85000"/>
@@ -41037,7 +45548,7 @@
           <a:p>
             <a:pPr algn="ctr"/>
             <a:r>
-              <a:rPr lang="en-MY" sz="1500" b="1" dirty="0">
+              <a:rPr lang="en-MY" sz="1500" b="1" i="1" dirty="0">
                 <a:solidFill>
                   <a:schemeClr val="tx1">
                     <a:lumMod val="85000"/>
@@ -41081,7 +45592,7 @@
           <a:p>
             <a:pPr algn="ctr"/>
             <a:r>
-              <a:rPr lang="en-MY" sz="1500" b="1" dirty="0">
+              <a:rPr lang="en-MY" sz="1500" b="1" i="1" dirty="0">
                 <a:solidFill>
                   <a:schemeClr val="tx1">
                     <a:lumMod val="85000"/>
@@ -41090,6 +45601,40 @@
                 </a:solidFill>
               </a:rPr>
               <a:t>Footbridge</a:t>
+            </a:r>
+          </a:p>
+        </p:txBody>
+      </p:sp>
+      <p:sp>
+        <p:nvSpPr>
+          <p:cNvPr id="30" name="VisualDir"/>
+          <p:cNvSpPr txBox="1"/>
+          <p:nvPr/>
+        </p:nvSpPr>
+        <p:spPr>
+          <a:xfrm>
+            <a:off x="723930" y="5358384"/>
+            <a:ext cx="10744200" cy="365760"/>
+          </a:xfrm>
+          <a:prstGeom prst="rect">
+            <a:avLst/>
+          </a:prstGeom>
+          <a:noFill/>
+        </p:spPr>
+        <p:txBody>
+          <a:bodyPr wrap="square">
+            <a:noAutofit/>
+          </a:bodyPr>
+          <a:lstStyle/>
+          <a:p>
+            <a:pPr/>
+            <a:r>
+              <a:rPr lang="en-MY" sz="1100" dirty="0">
+                <a:solidFill>
+                  <a:srgbClr val="808080"/>
+                </a:solidFill>
+              </a:rPr>
+              <a:t>[Visual: Jeti Lumut, Perak]</a:t>
             </a:r>
           </a:p>
         </p:txBody>
@@ -41102,8 +45647,8 @@
         </p:nvSpPr>
         <p:spPr>
           <a:xfrm>
-            <a:off x="1234440" y="1737360"/>
-            <a:ext cx="9723090" cy="2802636"/>
+            <a:off x="1234440" y="1481328"/>
+            <a:ext cx="9723090" cy="2788920"/>
           </a:xfrm>
           <a:prstGeom prst="rect">
             <a:avLst/>
@@ -41132,8 +45677,8 @@
         </p:nvSpPr>
         <p:spPr>
           <a:xfrm>
-            <a:off x="1490472" y="1883664"/>
-            <a:ext cx="8534370" cy="365760"/>
+            <a:off x="1490472" y="1627632"/>
+            <a:ext cx="5532120" cy="365760"/>
           </a:xfrm>
           <a:prstGeom prst="rect">
             <a:avLst/>
@@ -41169,7 +45714,7 @@
         </p:nvSpPr>
         <p:spPr>
           <a:xfrm>
-            <a:off x="10317450" y="1901952"/>
+            <a:off x="10317450" y="1645920"/>
             <a:ext cx="384048" cy="384048"/>
           </a:xfrm>
           <a:prstGeom prst="ellipse">
@@ -41198,7 +45743,7 @@
         </p:nvSpPr>
         <p:spPr>
           <a:xfrm>
-            <a:off x="10421142" y="2005645"/>
+            <a:off x="10421142" y="1749613"/>
             <a:ext cx="176662" cy="176662"/>
           </a:xfrm>
           <a:custGeom>
@@ -41272,8 +45817,8 @@
         </p:nvSpPr>
         <p:spPr>
           <a:xfrm>
-            <a:off x="1490472" y="2468880"/>
-            <a:ext cx="9211026" cy="219456"/>
+            <a:off x="1490472" y="2212848"/>
+            <a:ext cx="5532120" cy="219456"/>
           </a:xfrm>
           <a:prstGeom prst="rect">
             <a:avLst/>
@@ -41306,8 +45851,8 @@
         </p:nvSpPr>
         <p:spPr>
           <a:xfrm>
-            <a:off x="1490472" y="2706624"/>
-            <a:ext cx="9211026" cy="219456"/>
+            <a:off x="1490472" y="2450592"/>
+            <a:ext cx="5532120" cy="429768"/>
           </a:xfrm>
           <a:prstGeom prst="rect">
             <a:avLst/>
@@ -41330,7 +45875,21 @@
                   </a:schemeClr>
                 </a:solidFill>
               </a:rPr>
-              <a:t>Platform atau pelantar panjang untuk akses ke air, sering digunakan untuk bot.</a:t>
+              <a:t>Platform atau pelantar panjang untuk akses ke air,</a:t>
+            </a:r>
+          </a:p>
+          <a:p>
+            <a:pPr/>
+            <a:r>
+              <a:rPr lang="en-MY" sz="1250" dirty="0">
+                <a:solidFill>
+                  <a:schemeClr val="tx1">
+                    <a:lumMod val="85000"/>
+                    <a:lumOff val="15000"/>
+                  </a:schemeClr>
+                </a:solidFill>
+              </a:rPr>
+              <a:t>sering digunakan untuk bot.</a:t>
             </a:r>
           </a:p>
         </p:txBody>
@@ -41343,8 +45902,8 @@
         </p:nvSpPr>
         <p:spPr>
           <a:xfrm>
-            <a:off x="1490472" y="3086100"/>
-            <a:ext cx="9211026" cy="219456"/>
+            <a:off x="1490472" y="3044952"/>
+            <a:ext cx="5532120" cy="219456"/>
           </a:xfrm>
           <a:prstGeom prst="rect">
             <a:avLst/>
@@ -41377,8 +45936,8 @@
         </p:nvSpPr>
         <p:spPr>
           <a:xfrm>
-            <a:off x="1490472" y="3323844"/>
-            <a:ext cx="9211026" cy="219456"/>
+            <a:off x="1490472" y="3282696"/>
+            <a:ext cx="5532120" cy="219456"/>
           </a:xfrm>
           <a:prstGeom prst="rect">
             <a:avLst/>
@@ -41408,48 +45967,44 @@
       </p:sp>
       <p:sp>
         <p:nvSpPr>
-          <p:cNvPr id="214" name="FHead"/>
+          <p:cNvPr id="230" name="VisualPanel"/>
           <p:cNvSpPr txBox="1"/>
           <p:nvPr/>
         </p:nvSpPr>
         <p:spPr>
           <a:xfrm>
-            <a:off x="1490472" y="3703320"/>
-            <a:ext cx="9211026" cy="219456"/>
+            <a:off x="7287768" y="2157984"/>
+            <a:ext cx="3401568" cy="1874520"/>
           </a:xfrm>
           <a:prstGeom prst="rect">
             <a:avLst/>
           </a:prstGeom>
-          <a:noFill/>
+          <a:solidFill>
+            <a:srgbClr val="F7F7F7"/>
+          </a:solidFill>
+          <a:ln w="12700">
+            <a:solidFill>
+              <a:srgbClr val="BFBFBF"/>
+            </a:solidFill>
+          </a:ln>
         </p:spPr>
         <p:txBody>
           <a:bodyPr wrap="square">
             <a:noAutofit/>
           </a:bodyPr>
           <a:lstStyle/>
-          <a:p>
-            <a:pPr/>
-            <a:r>
-              <a:rPr lang="en-MY" sz="950" b="1" dirty="0">
-                <a:solidFill>
-                  <a:srgbClr val="7F6000"/>
-                </a:solidFill>
-              </a:rPr>
-              <a:t>ARAHAN VISUAL — TIDAK DIBENAMKAN</a:t>
-            </a:r>
-          </a:p>
-        </p:txBody>
-      </p:sp>
-      <p:sp>
-        <p:nvSpPr>
-          <p:cNvPr id="215" name="FBody"/>
+        </p:txBody>
+      </p:sp>
+      <p:sp>
+        <p:nvSpPr>
+          <p:cNvPr id="231" name="VisualPanelHead"/>
           <p:cNvSpPr txBox="1"/>
           <p:nvPr/>
         </p:nvSpPr>
         <p:spPr>
           <a:xfrm>
-            <a:off x="1490472" y="3941064"/>
-            <a:ext cx="9211026" cy="219456"/>
+            <a:off x="7452360" y="2286000"/>
+            <a:ext cx="3072384" cy="219456"/>
           </a:xfrm>
           <a:prstGeom prst="rect">
             <a:avLst/>
@@ -41464,15 +46019,83 @@
           <a:p>
             <a:pPr/>
             <a:r>
-              <a:rPr lang="en-MY" sz="1250" dirty="0">
-                <a:solidFill>
-                  <a:schemeClr val="tx1">
-                    <a:lumMod val="85000"/>
-                    <a:lumOff val="15000"/>
-                  </a:schemeClr>
-                </a:solidFill>
-              </a:rPr>
-              <a:t>[Visual: Arahan visual untuk Jeti — spesifikasi teks sahaja, modul ms 238. Tidak dibenamkan.]</a:t>
+              <a:rPr lang="en-MY" sz="900" b="1" dirty="0">
+                <a:solidFill>
+                  <a:srgbClr val="7F6000"/>
+                </a:solidFill>
+              </a:rPr>
+              <a:t>ARAHAN VISUAL — TIDAK DIBENAMKAN</a:t>
+            </a:r>
+          </a:p>
+        </p:txBody>
+      </p:sp>
+      <p:sp>
+        <p:nvSpPr>
+          <p:cNvPr id="232" name="VisualPanelBody"/>
+          <p:cNvSpPr txBox="1"/>
+          <p:nvPr/>
+        </p:nvSpPr>
+        <p:spPr>
+          <a:xfrm>
+            <a:off x="7452360" y="2542032"/>
+            <a:ext cx="3072384" cy="274320"/>
+          </a:xfrm>
+          <a:prstGeom prst="rect">
+            <a:avLst/>
+          </a:prstGeom>
+          <a:noFill/>
+        </p:spPr>
+        <p:txBody>
+          <a:bodyPr wrap="square">
+            <a:noAutofit/>
+          </a:bodyPr>
+          <a:lstStyle/>
+          <a:p>
+            <a:pPr/>
+            <a:r>
+              <a:rPr lang="en-MY" sz="1050" dirty="0">
+                <a:solidFill>
+                  <a:schemeClr val="tx1">
+                    <a:lumMod val="85000"/>
+                    <a:lumOff val="15000"/>
+                  </a:schemeClr>
+                </a:solidFill>
+              </a:rPr>
+              <a:t>[Visual: Jeti Lumut, Perak]</a:t>
+            </a:r>
+          </a:p>
+        </p:txBody>
+      </p:sp>
+      <p:sp>
+        <p:nvSpPr>
+          <p:cNvPr id="233" name="VisualPanelArea"/>
+          <p:cNvSpPr txBox="1"/>
+          <p:nvPr/>
+        </p:nvSpPr>
+        <p:spPr>
+          <a:xfrm>
+            <a:off x="7452360" y="3758184"/>
+            <a:ext cx="3072384" cy="201168"/>
+          </a:xfrm>
+          <a:prstGeom prst="rect">
+            <a:avLst/>
+          </a:prstGeom>
+          <a:noFill/>
+        </p:spPr>
+        <p:txBody>
+          <a:bodyPr wrap="square">
+            <a:noAutofit/>
+          </a:bodyPr>
+          <a:lstStyle/>
+          <a:p>
+            <a:pPr/>
+            <a:r>
+              <a:rPr lang="en-MY" sz="800" dirty="0">
+                <a:solidFill>
+                  <a:srgbClr val="808080"/>
+                </a:solidFill>
+              </a:rPr>
+              <a:t>Ruang visual produksi — aset tidak dibenamkan.</a:t>
             </a:r>
           </a:p>
         </p:txBody>
@@ -41902,6 +46525,84 @@
                 </a:solidFill>
               </a:rPr>
               <a:t>  2/5 contoh dilihat.</a:t>
+            </a:r>
+          </a:p>
+          <a:p>
+            <a:r>
+              <a:rPr lang="en-MY" sz="900" b="1" dirty="0">
+                <a:solidFill>
+                  <a:schemeClr val="tx1">
+                    <a:lumMod val="85000"/>
+                    <a:lumOff val="15000"/>
+                  </a:schemeClr>
+                </a:solidFill>
+              </a:rPr>
+              <a:t>VISUAL:</a:t>
+            </a:r>
+          </a:p>
+          <a:p>
+            <a:r>
+              <a:rPr lang="en-MY" sz="900" dirty="0">
+                <a:solidFill>
+                  <a:schemeClr val="tx1">
+                    <a:lumMod val="85000"/>
+                    <a:lumOff val="15000"/>
+                  </a:schemeClr>
+                </a:solidFill>
+              </a:rPr>
+              <a:t>  subjenis skrin: EXAMPLE_POPUP</a:t>
+            </a:r>
+          </a:p>
+          <a:p>
+            <a:r>
+              <a:rPr lang="en-MY" sz="900" dirty="0">
+                <a:solidFill>
+                  <a:schemeClr val="tx1">
+                    <a:lumMod val="85000"/>
+                    <a:lumOff val="15000"/>
+                  </a:schemeClr>
+                </a:solidFill>
+              </a:rPr>
+              <a:t>  subjenis popup: EXAMPLE_POPUP</a:t>
+            </a:r>
+          </a:p>
+          <a:p>
+            <a:r>
+              <a:rPr lang="en-MY" sz="900" dirty="0">
+                <a:solidFill>
+                  <a:schemeClr val="tx1">
+                    <a:lumMod val="85000"/>
+                    <a:lumOff val="15000"/>
+                  </a:schemeClr>
+                </a:solidFill>
+              </a:rPr>
+              <a:t>  keperluan visual: REQUIRED</a:t>
+            </a:r>
+          </a:p>
+          <a:p>
+            <a:r>
+              <a:rPr lang="en-MY" sz="900" dirty="0">
+                <a:solidFill>
+                  <a:schemeClr val="tx1">
+                    <a:lumMod val="85000"/>
+                    <a:lumOff val="15000"/>
+                  </a:schemeClr>
+                </a:solidFill>
+              </a:rPr>
+              <a:t>  status: RESOLVED</a:t>
+            </a:r>
+          </a:p>
+          <a:p>
+            <a:r>
+              <a:rPr lang="en-MY" sz="900" dirty="0">
+                <a:solidFill>
+                  <a:schemeClr val="tx1">
+                    <a:lumMod val="85000"/>
+                    <a:lumOff val="15000"/>
+                  </a:schemeClr>
+                </a:solidFill>
+              </a:rPr>
+              <a:t>  kuasa: BARIAH_EXEMPLAR_CONTOH</a:t>
             </a:r>
           </a:p>
           <a:p>
@@ -42088,7 +46789,7 @@
           <a:p>
             <a:pPr algn="ctr"/>
             <a:r>
-              <a:rPr lang="en-MY" sz="1500" b="1" dirty="0">
+              <a:rPr lang="en-MY" sz="1500" b="1" i="1" dirty="0">
                 <a:solidFill>
                   <a:schemeClr val="tx1">
                     <a:lumMod val="85000"/>
@@ -42397,7 +47098,7 @@
           <a:p>
             <a:pPr algn="ctr"/>
             <a:r>
-              <a:rPr lang="en-MY" sz="1500" b="1" dirty="0">
+              <a:rPr lang="en-MY" sz="1500" b="1" i="1" dirty="0">
                 <a:solidFill>
                   <a:schemeClr val="tx1">
                     <a:lumMod val="85000"/>
@@ -42441,7 +47142,7 @@
           <a:p>
             <a:pPr algn="ctr"/>
             <a:r>
-              <a:rPr lang="en-MY" sz="1500" b="1" dirty="0">
+              <a:rPr lang="en-MY" sz="1500" b="1" i="1" dirty="0">
                 <a:solidFill>
                   <a:schemeClr val="tx1">
                     <a:lumMod val="85000"/>
@@ -42450,6 +47151,40 @@
                 </a:solidFill>
               </a:rPr>
               <a:t>Footbridge</a:t>
+            </a:r>
+          </a:p>
+        </p:txBody>
+      </p:sp>
+      <p:sp>
+        <p:nvSpPr>
+          <p:cNvPr id="30" name="VisualDir"/>
+          <p:cNvSpPr txBox="1"/>
+          <p:nvPr/>
+        </p:nvSpPr>
+        <p:spPr>
+          <a:xfrm>
+            <a:off x="723930" y="5358384"/>
+            <a:ext cx="10744200" cy="365760"/>
+          </a:xfrm>
+          <a:prstGeom prst="rect">
+            <a:avLst/>
+          </a:prstGeom>
+          <a:noFill/>
+        </p:spPr>
+        <p:txBody>
+          <a:bodyPr wrap="square">
+            <a:noAutofit/>
+          </a:bodyPr>
+          <a:lstStyle/>
+          <a:p>
+            <a:pPr/>
+            <a:r>
+              <a:rPr lang="en-MY" sz="1100" dirty="0">
+                <a:solidFill>
+                  <a:srgbClr val="808080"/>
+                </a:solidFill>
+              </a:rPr>
+              <a:t>[Visual: Wetland Park Putrajaya]</a:t>
             </a:r>
           </a:p>
         </p:txBody>
@@ -42462,8 +47197,8 @@
         </p:nvSpPr>
         <p:spPr>
           <a:xfrm>
-            <a:off x="1234440" y="1737360"/>
-            <a:ext cx="9723090" cy="3017520"/>
+            <a:off x="1234440" y="1481328"/>
+            <a:ext cx="9723090" cy="2788920"/>
           </a:xfrm>
           <a:prstGeom prst="rect">
             <a:avLst/>
@@ -42492,8 +47227,8 @@
         </p:nvSpPr>
         <p:spPr>
           <a:xfrm>
-            <a:off x="1490472" y="1883664"/>
-            <a:ext cx="8534370" cy="365760"/>
+            <a:off x="1490472" y="1627632"/>
+            <a:ext cx="5532120" cy="365760"/>
           </a:xfrm>
           <a:prstGeom prst="rect">
             <a:avLst/>
@@ -42529,7 +47264,7 @@
         </p:nvSpPr>
         <p:spPr>
           <a:xfrm>
-            <a:off x="10317450" y="1901952"/>
+            <a:off x="10317450" y="1645920"/>
             <a:ext cx="384048" cy="384048"/>
           </a:xfrm>
           <a:prstGeom prst="ellipse">
@@ -42558,7 +47293,7 @@
         </p:nvSpPr>
         <p:spPr>
           <a:xfrm>
-            <a:off x="10421142" y="2005645"/>
+            <a:off x="10421142" y="1749613"/>
             <a:ext cx="176662" cy="176662"/>
           </a:xfrm>
           <a:custGeom>
@@ -42632,8 +47367,8 @@
         </p:nvSpPr>
         <p:spPr>
           <a:xfrm>
-            <a:off x="1490472" y="2468880"/>
-            <a:ext cx="9211026" cy="219456"/>
+            <a:off x="1490472" y="2212848"/>
+            <a:ext cx="5532120" cy="219456"/>
           </a:xfrm>
           <a:prstGeom prst="rect">
             <a:avLst/>
@@ -42666,8 +47401,8 @@
         </p:nvSpPr>
         <p:spPr>
           <a:xfrm>
-            <a:off x="1490472" y="2706624"/>
-            <a:ext cx="9211026" cy="219456"/>
+            <a:off x="1490472" y="2450592"/>
+            <a:ext cx="5532120" cy="429768"/>
           </a:xfrm>
           <a:prstGeom prst="rect">
             <a:avLst/>
@@ -42690,7 +47425,21 @@
                   </a:schemeClr>
                 </a:solidFill>
               </a:rPr>
-              <a:t>Ruang kayu terbuka di atas atau berhampiran air untuk rehat &amp; pemandangan.</a:t>
+              <a:t>Ruang kayu terbuka di atas atau berhampiran air untuk</a:t>
+            </a:r>
+          </a:p>
+          <a:p>
+            <a:pPr/>
+            <a:r>
+              <a:rPr lang="en-MY" sz="1250" dirty="0">
+                <a:solidFill>
+                  <a:schemeClr val="tx1">
+                    <a:lumMod val="85000"/>
+                    <a:lumOff val="15000"/>
+                  </a:schemeClr>
+                </a:solidFill>
+              </a:rPr>
+              <a:t>rehat &amp; pemandangan.</a:t>
             </a:r>
           </a:p>
         </p:txBody>
@@ -42703,8 +47452,8 @@
         </p:nvSpPr>
         <p:spPr>
           <a:xfrm>
-            <a:off x="1490472" y="3086100"/>
-            <a:ext cx="9211026" cy="219456"/>
+            <a:off x="1490472" y="3044952"/>
+            <a:ext cx="5532120" cy="219456"/>
           </a:xfrm>
           <a:prstGeom prst="rect">
             <a:avLst/>
@@ -42737,8 +47486,8 @@
         </p:nvSpPr>
         <p:spPr>
           <a:xfrm>
-            <a:off x="1490472" y="3323844"/>
-            <a:ext cx="9211026" cy="219456"/>
+            <a:off x="1490472" y="3282696"/>
+            <a:ext cx="5532120" cy="219456"/>
           </a:xfrm>
           <a:prstGeom prst="rect">
             <a:avLst/>
@@ -42768,48 +47517,44 @@
       </p:sp>
       <p:sp>
         <p:nvSpPr>
-          <p:cNvPr id="214" name="FHead"/>
+          <p:cNvPr id="230" name="VisualPanel"/>
           <p:cNvSpPr txBox="1"/>
           <p:nvPr/>
         </p:nvSpPr>
         <p:spPr>
           <a:xfrm>
-            <a:off x="1490472" y="3703320"/>
-            <a:ext cx="9211026" cy="219456"/>
+            <a:off x="7287768" y="2157984"/>
+            <a:ext cx="3401568" cy="1874520"/>
           </a:xfrm>
           <a:prstGeom prst="rect">
             <a:avLst/>
           </a:prstGeom>
-          <a:noFill/>
+          <a:solidFill>
+            <a:srgbClr val="F7F7F7"/>
+          </a:solidFill>
+          <a:ln w="12700">
+            <a:solidFill>
+              <a:srgbClr val="BFBFBF"/>
+            </a:solidFill>
+          </a:ln>
         </p:spPr>
         <p:txBody>
           <a:bodyPr wrap="square">
             <a:noAutofit/>
           </a:bodyPr>
           <a:lstStyle/>
-          <a:p>
-            <a:pPr/>
-            <a:r>
-              <a:rPr lang="en-MY" sz="950" b="1" dirty="0">
-                <a:solidFill>
-                  <a:srgbClr val="7F6000"/>
-                </a:solidFill>
-              </a:rPr>
-              <a:t>ARAHAN VISUAL — TIDAK DIBENAMKAN</a:t>
-            </a:r>
-          </a:p>
-        </p:txBody>
-      </p:sp>
-      <p:sp>
-        <p:nvSpPr>
-          <p:cNvPr id="215" name="FBody"/>
+        </p:txBody>
+      </p:sp>
+      <p:sp>
+        <p:nvSpPr>
+          <p:cNvPr id="231" name="VisualPanelHead"/>
           <p:cNvSpPr txBox="1"/>
           <p:nvPr/>
         </p:nvSpPr>
         <p:spPr>
           <a:xfrm>
-            <a:off x="1490472" y="3941064"/>
-            <a:ext cx="9211026" cy="429768"/>
+            <a:off x="7452360" y="2286000"/>
+            <a:ext cx="3072384" cy="219456"/>
           </a:xfrm>
           <a:prstGeom prst="rect">
             <a:avLst/>
@@ -42824,29 +47569,83 @@
           <a:p>
             <a:pPr/>
             <a:r>
-              <a:rPr lang="en-MY" sz="1250" dirty="0">
-                <a:solidFill>
-                  <a:schemeClr val="tx1">
-                    <a:lumMod val="85000"/>
-                    <a:lumOff val="15000"/>
-                  </a:schemeClr>
-                </a:solidFill>
-              </a:rPr>
-              <a:t>[Visual: Arahan visual untuk Dek Kayu — spesifikasi teks sahaja, modul ms 238. Tidak</a:t>
-            </a:r>
-          </a:p>
+              <a:rPr lang="en-MY" sz="900" b="1" dirty="0">
+                <a:solidFill>
+                  <a:srgbClr val="7F6000"/>
+                </a:solidFill>
+              </a:rPr>
+              <a:t>ARAHAN VISUAL — TIDAK DIBENAMKAN</a:t>
+            </a:r>
+          </a:p>
+        </p:txBody>
+      </p:sp>
+      <p:sp>
+        <p:nvSpPr>
+          <p:cNvPr id="232" name="VisualPanelBody"/>
+          <p:cNvSpPr txBox="1"/>
+          <p:nvPr/>
+        </p:nvSpPr>
+        <p:spPr>
+          <a:xfrm>
+            <a:off x="7452360" y="2542032"/>
+            <a:ext cx="3072384" cy="274320"/>
+          </a:xfrm>
+          <a:prstGeom prst="rect">
+            <a:avLst/>
+          </a:prstGeom>
+          <a:noFill/>
+        </p:spPr>
+        <p:txBody>
+          <a:bodyPr wrap="square">
+            <a:noAutofit/>
+          </a:bodyPr>
+          <a:lstStyle/>
           <a:p>
             <a:pPr/>
             <a:r>
-              <a:rPr lang="en-MY" sz="1250" dirty="0">
-                <a:solidFill>
-                  <a:schemeClr val="tx1">
-                    <a:lumMod val="85000"/>
-                    <a:lumOff val="15000"/>
-                  </a:schemeClr>
-                </a:solidFill>
-              </a:rPr>
-              <a:t>dibenamkan.]</a:t>
+              <a:rPr lang="en-MY" sz="1050" dirty="0">
+                <a:solidFill>
+                  <a:schemeClr val="tx1">
+                    <a:lumMod val="85000"/>
+                    <a:lumOff val="15000"/>
+                  </a:schemeClr>
+                </a:solidFill>
+              </a:rPr>
+              <a:t>[Visual: Wetland Park Putrajaya]</a:t>
+            </a:r>
+          </a:p>
+        </p:txBody>
+      </p:sp>
+      <p:sp>
+        <p:nvSpPr>
+          <p:cNvPr id="233" name="VisualPanelArea"/>
+          <p:cNvSpPr txBox="1"/>
+          <p:nvPr/>
+        </p:nvSpPr>
+        <p:spPr>
+          <a:xfrm>
+            <a:off x="7452360" y="3758184"/>
+            <a:ext cx="3072384" cy="201168"/>
+          </a:xfrm>
+          <a:prstGeom prst="rect">
+            <a:avLst/>
+          </a:prstGeom>
+          <a:noFill/>
+        </p:spPr>
+        <p:txBody>
+          <a:bodyPr wrap="square">
+            <a:noAutofit/>
+          </a:bodyPr>
+          <a:lstStyle/>
+          <a:p>
+            <a:pPr/>
+            <a:r>
+              <a:rPr lang="en-MY" sz="800" dirty="0">
+                <a:solidFill>
+                  <a:srgbClr val="808080"/>
+                </a:solidFill>
+              </a:rPr>
+              <a:t>Ruang visual produksi — aset tidak dibenamkan.</a:t>
             </a:r>
           </a:p>
         </p:txBody>
@@ -43276,6 +48075,84 @@
                 </a:solidFill>
               </a:rPr>
               <a:t>  3/5 contoh dilihat.</a:t>
+            </a:r>
+          </a:p>
+          <a:p>
+            <a:r>
+              <a:rPr lang="en-MY" sz="900" b="1" dirty="0">
+                <a:solidFill>
+                  <a:schemeClr val="tx1">
+                    <a:lumMod val="85000"/>
+                    <a:lumOff val="15000"/>
+                  </a:schemeClr>
+                </a:solidFill>
+              </a:rPr>
+              <a:t>VISUAL:</a:t>
+            </a:r>
+          </a:p>
+          <a:p>
+            <a:r>
+              <a:rPr lang="en-MY" sz="900" dirty="0">
+                <a:solidFill>
+                  <a:schemeClr val="tx1">
+                    <a:lumMod val="85000"/>
+                    <a:lumOff val="15000"/>
+                  </a:schemeClr>
+                </a:solidFill>
+              </a:rPr>
+              <a:t>  subjenis skrin: EXAMPLE_POPUP</a:t>
+            </a:r>
+          </a:p>
+          <a:p>
+            <a:r>
+              <a:rPr lang="en-MY" sz="900" dirty="0">
+                <a:solidFill>
+                  <a:schemeClr val="tx1">
+                    <a:lumMod val="85000"/>
+                    <a:lumOff val="15000"/>
+                  </a:schemeClr>
+                </a:solidFill>
+              </a:rPr>
+              <a:t>  subjenis popup: EXAMPLE_POPUP</a:t>
+            </a:r>
+          </a:p>
+          <a:p>
+            <a:r>
+              <a:rPr lang="en-MY" sz="900" dirty="0">
+                <a:solidFill>
+                  <a:schemeClr val="tx1">
+                    <a:lumMod val="85000"/>
+                    <a:lumOff val="15000"/>
+                  </a:schemeClr>
+                </a:solidFill>
+              </a:rPr>
+              <a:t>  keperluan visual: REQUIRED</a:t>
+            </a:r>
+          </a:p>
+          <a:p>
+            <a:r>
+              <a:rPr lang="en-MY" sz="900" dirty="0">
+                <a:solidFill>
+                  <a:schemeClr val="tx1">
+                    <a:lumMod val="85000"/>
+                    <a:lumOff val="15000"/>
+                  </a:schemeClr>
+                </a:solidFill>
+              </a:rPr>
+              <a:t>  status: RESOLVED</a:t>
+            </a:r>
+          </a:p>
+          <a:p>
+            <a:r>
+              <a:rPr lang="en-MY" sz="900" dirty="0">
+                <a:solidFill>
+                  <a:schemeClr val="tx1">
+                    <a:lumMod val="85000"/>
+                    <a:lumOff val="15000"/>
+                  </a:schemeClr>
+                </a:solidFill>
+              </a:rPr>
+              <a:t>  kuasa: BARIAH_EXEMPLAR_CONTOH</a:t>
             </a:r>
           </a:p>
           <a:p>
